--- a/slides/00-DailyAnnouncements.pptx
+++ b/slides/00-DailyAnnouncements.pptx
@@ -5,7 +5,7 @@
     <p:sldMasterId id="2147484006" r:id="rId1"/>
   </p:sldMasterIdLst>
   <p:notesMasterIdLst>
-    <p:notesMasterId r:id="rId11"/>
+    <p:notesMasterId r:id="rId12"/>
   </p:notesMasterIdLst>
   <p:sldIdLst>
     <p:sldId id="256" r:id="rId2"/>
@@ -17,6 +17,7 @@
     <p:sldId id="510" r:id="rId8"/>
     <p:sldId id="511" r:id="rId9"/>
     <p:sldId id="512" r:id="rId10"/>
+    <p:sldId id="513" r:id="rId11"/>
   </p:sldIdLst>
   <p:sldSz cx="12192000" cy="6858000"/>
   <p:notesSz cx="6858000" cy="9144000"/>
@@ -205,7 +206,7 @@
           <a:p>
             <a:fld id="{C5B45307-6ED4-B142-BD64-10F739779302}" type="datetimeFigureOut">
               <a:rPr lang="en-US" smtClean="0"/>
-              <a:t>2/26/26</a:t>
+              <a:t>3/10/26</a:t>
             </a:fld>
             <a:endParaRPr lang="en-US"/>
           </a:p>
@@ -613,7 +614,7 @@
           <a:noFill/>
           <a:extLst>
             <a:ext uri="{909E8E84-426E-40dd-AFC4-6F175D3DCCD1}">
-              <a14:hiddenFill xmlns="" xmlns:a14="http://schemas.microsoft.com/office/drawing/2010/main">
+              <a14:hiddenFill xmlns:a14="http://schemas.microsoft.com/office/drawing/2010/main" xmlns="">
                 <a:solidFill>
                   <a:srgbClr val="FFFFFF"/>
                 </a:solidFill>
@@ -672,7 +673,7 @@
             </a:ln>
             <a:extLst>
               <a:ext uri="{91240B29-F687-4f45-9708-019B960494DF}">
-                <a14:hiddenLine xmlns="" xmlns:a14="http://schemas.microsoft.com/office/drawing/2010/main" w="9525">
+                <a14:hiddenLine xmlns:a14="http://schemas.microsoft.com/office/drawing/2010/main" xmlns="" w="9525">
                   <a:solidFill>
                     <a:srgbClr val="000000"/>
                   </a:solidFill>
@@ -762,7 +763,7 @@
             </a:ln>
             <a:extLst>
               <a:ext uri="{91240B29-F687-4f45-9708-019B960494DF}">
-                <a14:hiddenLine xmlns="" xmlns:a14="http://schemas.microsoft.com/office/drawing/2010/main" w="9525">
+                <a14:hiddenLine xmlns:a14="http://schemas.microsoft.com/office/drawing/2010/main" xmlns="" w="9525">
                   <a:solidFill>
                     <a:srgbClr val="000000"/>
                   </a:solidFill>
@@ -852,7 +853,7 @@
             </a:ln>
             <a:extLst>
               <a:ext uri="{91240B29-F687-4f45-9708-019B960494DF}">
-                <a14:hiddenLine xmlns="" xmlns:a14="http://schemas.microsoft.com/office/drawing/2010/main" w="9525">
+                <a14:hiddenLine xmlns:a14="http://schemas.microsoft.com/office/drawing/2010/main" xmlns="" w="9525">
                   <a:solidFill>
                     <a:srgbClr val="000000"/>
                   </a:solidFill>
@@ -886,7 +887,7 @@
             </a:ln>
             <a:extLst>
               <a:ext uri="{91240B29-F687-4f45-9708-019B960494DF}">
-                <a14:hiddenLine xmlns="" xmlns:a14="http://schemas.microsoft.com/office/drawing/2010/main" w="9525">
+                <a14:hiddenLine xmlns:a14="http://schemas.microsoft.com/office/drawing/2010/main" xmlns="" w="9525">
                   <a:solidFill>
                     <a:srgbClr val="000000"/>
                   </a:solidFill>
@@ -976,7 +977,7 @@
             </a:ln>
             <a:extLst>
               <a:ext uri="{91240B29-F687-4f45-9708-019B960494DF}">
-                <a14:hiddenLine xmlns="" xmlns:a14="http://schemas.microsoft.com/office/drawing/2010/main" w="9525">
+                <a14:hiddenLine xmlns:a14="http://schemas.microsoft.com/office/drawing/2010/main" xmlns="" w="9525">
                   <a:solidFill>
                     <a:srgbClr val="000000"/>
                   </a:solidFill>
@@ -1038,7 +1039,7 @@
             </a:ln>
             <a:extLst>
               <a:ext uri="{91240B29-F687-4f45-9708-019B960494DF}">
-                <a14:hiddenLine xmlns="" xmlns:a14="http://schemas.microsoft.com/office/drawing/2010/main" w="9525">
+                <a14:hiddenLine xmlns:a14="http://schemas.microsoft.com/office/drawing/2010/main" xmlns="" w="9525">
                   <a:solidFill>
                     <a:srgbClr val="000000"/>
                   </a:solidFill>
@@ -1100,7 +1101,7 @@
             </a:ln>
             <a:extLst>
               <a:ext uri="{91240B29-F687-4f45-9708-019B960494DF}">
-                <a14:hiddenLine xmlns="" xmlns:a14="http://schemas.microsoft.com/office/drawing/2010/main" w="9525">
+                <a14:hiddenLine xmlns:a14="http://schemas.microsoft.com/office/drawing/2010/main" xmlns="" w="9525">
                   <a:solidFill>
                     <a:srgbClr val="000000"/>
                   </a:solidFill>
@@ -1190,7 +1191,7 @@
             </a:ln>
             <a:extLst>
               <a:ext uri="{91240B29-F687-4f45-9708-019B960494DF}">
-                <a14:hiddenLine xmlns="" xmlns:a14="http://schemas.microsoft.com/office/drawing/2010/main" w="9525">
+                <a14:hiddenLine xmlns:a14="http://schemas.microsoft.com/office/drawing/2010/main" xmlns="" w="9525">
                   <a:solidFill>
                     <a:srgbClr val="000000"/>
                   </a:solidFill>
@@ -1252,7 +1253,7 @@
             </a:ln>
             <a:extLst>
               <a:ext uri="{91240B29-F687-4f45-9708-019B960494DF}">
-                <a14:hiddenLine xmlns="" xmlns:a14="http://schemas.microsoft.com/office/drawing/2010/main" w="9525">
+                <a14:hiddenLine xmlns:a14="http://schemas.microsoft.com/office/drawing/2010/main" xmlns="" w="9525">
                   <a:solidFill>
                     <a:srgbClr val="000000"/>
                   </a:solidFill>
@@ -1314,7 +1315,7 @@
             </a:ln>
             <a:extLst>
               <a:ext uri="{91240B29-F687-4f45-9708-019B960494DF}">
-                <a14:hiddenLine xmlns="" xmlns:a14="http://schemas.microsoft.com/office/drawing/2010/main" w="9525">
+                <a14:hiddenLine xmlns:a14="http://schemas.microsoft.com/office/drawing/2010/main" xmlns="" w="9525">
                   <a:solidFill>
                     <a:srgbClr val="000000"/>
                   </a:solidFill>
@@ -1404,7 +1405,7 @@
             </a:ln>
             <a:extLst>
               <a:ext uri="{91240B29-F687-4f45-9708-019B960494DF}">
-                <a14:hiddenLine xmlns="" xmlns:a14="http://schemas.microsoft.com/office/drawing/2010/main" w="9525">
+                <a14:hiddenLine xmlns:a14="http://schemas.microsoft.com/office/drawing/2010/main" xmlns="" w="9525">
                   <a:solidFill>
                     <a:srgbClr val="000000"/>
                   </a:solidFill>
@@ -1494,7 +1495,7 @@
             </a:ln>
             <a:extLst>
               <a:ext uri="{91240B29-F687-4f45-9708-019B960494DF}">
-                <a14:hiddenLine xmlns="" xmlns:a14="http://schemas.microsoft.com/office/drawing/2010/main" w="9525">
+                <a14:hiddenLine xmlns:a14="http://schemas.microsoft.com/office/drawing/2010/main" xmlns="" w="9525">
                   <a:solidFill>
                     <a:srgbClr val="000000"/>
                   </a:solidFill>
@@ -1556,7 +1557,7 @@
             </a:ln>
             <a:extLst>
               <a:ext uri="{91240B29-F687-4f45-9708-019B960494DF}">
-                <a14:hiddenLine xmlns="" xmlns:a14="http://schemas.microsoft.com/office/drawing/2010/main" w="9525">
+                <a14:hiddenLine xmlns:a14="http://schemas.microsoft.com/office/drawing/2010/main" xmlns="" w="9525">
                   <a:solidFill>
                     <a:srgbClr val="000000"/>
                   </a:solidFill>
@@ -1666,7 +1667,7 @@
             </a:ln>
             <a:extLst>
               <a:ext uri="{91240B29-F687-4f45-9708-019B960494DF}">
-                <a14:hiddenLine xmlns="" xmlns:a14="http://schemas.microsoft.com/office/drawing/2010/main" w="9525">
+                <a14:hiddenLine xmlns:a14="http://schemas.microsoft.com/office/drawing/2010/main" xmlns="" w="9525">
                   <a:solidFill>
                     <a:srgbClr val="000000"/>
                   </a:solidFill>
@@ -1728,7 +1729,7 @@
             </a:ln>
             <a:extLst>
               <a:ext uri="{91240B29-F687-4f45-9708-019B960494DF}">
-                <a14:hiddenLine xmlns="" xmlns:a14="http://schemas.microsoft.com/office/drawing/2010/main" w="9525">
+                <a14:hiddenLine xmlns:a14="http://schemas.microsoft.com/office/drawing/2010/main" xmlns="" w="9525">
                   <a:solidFill>
                     <a:srgbClr val="000000"/>
                   </a:solidFill>
@@ -1818,7 +1819,7 @@
             </a:ln>
             <a:extLst>
               <a:ext uri="{91240B29-F687-4f45-9708-019B960494DF}">
-                <a14:hiddenLine xmlns="" xmlns:a14="http://schemas.microsoft.com/office/drawing/2010/main" w="9525">
+                <a14:hiddenLine xmlns:a14="http://schemas.microsoft.com/office/drawing/2010/main" xmlns="" w="9525">
                   <a:solidFill>
                     <a:srgbClr val="000000"/>
                   </a:solidFill>
@@ -1908,7 +1909,7 @@
             </a:ln>
             <a:extLst>
               <a:ext uri="{91240B29-F687-4f45-9708-019B960494DF}">
-                <a14:hiddenLine xmlns="" xmlns:a14="http://schemas.microsoft.com/office/drawing/2010/main" w="9525">
+                <a14:hiddenLine xmlns:a14="http://schemas.microsoft.com/office/drawing/2010/main" xmlns="" w="9525">
                   <a:solidFill>
                     <a:srgbClr val="000000"/>
                   </a:solidFill>
@@ -1970,7 +1971,7 @@
             </a:ln>
             <a:extLst>
               <a:ext uri="{91240B29-F687-4f45-9708-019B960494DF}">
-                <a14:hiddenLine xmlns="" xmlns:a14="http://schemas.microsoft.com/office/drawing/2010/main" w="9525">
+                <a14:hiddenLine xmlns:a14="http://schemas.microsoft.com/office/drawing/2010/main" xmlns="" w="9525">
                   <a:solidFill>
                     <a:srgbClr val="000000"/>
                   </a:solidFill>
@@ -2060,7 +2061,7 @@
             </a:ln>
             <a:extLst>
               <a:ext uri="{91240B29-F687-4f45-9708-019B960494DF}">
-                <a14:hiddenLine xmlns="" xmlns:a14="http://schemas.microsoft.com/office/drawing/2010/main" w="9525">
+                <a14:hiddenLine xmlns:a14="http://schemas.microsoft.com/office/drawing/2010/main" xmlns="" w="9525">
                   <a:solidFill>
                     <a:srgbClr val="000000"/>
                   </a:solidFill>
@@ -2150,7 +2151,7 @@
             </a:ln>
             <a:extLst>
               <a:ext uri="{91240B29-F687-4f45-9708-019B960494DF}">
-                <a14:hiddenLine xmlns="" xmlns:a14="http://schemas.microsoft.com/office/drawing/2010/main" w="9525">
+                <a14:hiddenLine xmlns:a14="http://schemas.microsoft.com/office/drawing/2010/main" xmlns="" w="9525">
                   <a:solidFill>
                     <a:srgbClr val="000000"/>
                   </a:solidFill>
@@ -2206,7 +2207,7 @@
             </a:ln>
             <a:extLst>
               <a:ext uri="{91240B29-F687-4f45-9708-019B960494DF}">
-                <a14:hiddenLine xmlns="" xmlns:a14="http://schemas.microsoft.com/office/drawing/2010/main" w="9525">
+                <a14:hiddenLine xmlns:a14="http://schemas.microsoft.com/office/drawing/2010/main" xmlns="" w="9525">
                   <a:solidFill>
                     <a:srgbClr val="000000"/>
                   </a:solidFill>
@@ -2296,7 +2297,7 @@
             </a:ln>
             <a:extLst>
               <a:ext uri="{91240B29-F687-4f45-9708-019B960494DF}">
-                <a14:hiddenLine xmlns="" xmlns:a14="http://schemas.microsoft.com/office/drawing/2010/main" w="9525">
+                <a14:hiddenLine xmlns:a14="http://schemas.microsoft.com/office/drawing/2010/main" xmlns="" w="9525">
                   <a:solidFill>
                     <a:srgbClr val="000000"/>
                   </a:solidFill>
@@ -2352,7 +2353,7 @@
             </a:ln>
             <a:extLst>
               <a:ext uri="{91240B29-F687-4f45-9708-019B960494DF}">
-                <a14:hiddenLine xmlns="" xmlns:a14="http://schemas.microsoft.com/office/drawing/2010/main" w="9525">
+                <a14:hiddenLine xmlns:a14="http://schemas.microsoft.com/office/drawing/2010/main" xmlns="" w="9525">
                   <a:solidFill>
                     <a:srgbClr val="000000"/>
                   </a:solidFill>
@@ -2442,7 +2443,7 @@
             </a:ln>
             <a:extLst>
               <a:ext uri="{91240B29-F687-4f45-9708-019B960494DF}">
-                <a14:hiddenLine xmlns="" xmlns:a14="http://schemas.microsoft.com/office/drawing/2010/main" w="9525">
+                <a14:hiddenLine xmlns:a14="http://schemas.microsoft.com/office/drawing/2010/main" xmlns="" w="9525">
                   <a:solidFill>
                     <a:srgbClr val="000000"/>
                   </a:solidFill>
@@ -2510,7 +2511,7 @@
             </a:ln>
             <a:extLst>
               <a:ext uri="{91240B29-F687-4f45-9708-019B960494DF}">
-                <a14:hiddenLine xmlns="" xmlns:a14="http://schemas.microsoft.com/office/drawing/2010/main" w="9525">
+                <a14:hiddenLine xmlns:a14="http://schemas.microsoft.com/office/drawing/2010/main" xmlns="" w="9525">
                   <a:solidFill>
                     <a:srgbClr val="000000"/>
                   </a:solidFill>
@@ -2600,7 +2601,7 @@
             </a:ln>
             <a:extLst>
               <a:ext uri="{91240B29-F687-4f45-9708-019B960494DF}">
-                <a14:hiddenLine xmlns="" xmlns:a14="http://schemas.microsoft.com/office/drawing/2010/main" w="9525">
+                <a14:hiddenLine xmlns:a14="http://schemas.microsoft.com/office/drawing/2010/main" xmlns="" w="9525">
                   <a:solidFill>
                     <a:srgbClr val="000000"/>
                   </a:solidFill>
@@ -2668,7 +2669,7 @@
             </a:ln>
             <a:extLst>
               <a:ext uri="{91240B29-F687-4f45-9708-019B960494DF}">
-                <a14:hiddenLine xmlns="" xmlns:a14="http://schemas.microsoft.com/office/drawing/2010/main" w="9525">
+                <a14:hiddenLine xmlns:a14="http://schemas.microsoft.com/office/drawing/2010/main" xmlns="" w="9525">
                   <a:solidFill>
                     <a:srgbClr val="000000"/>
                   </a:solidFill>
@@ -2758,7 +2759,7 @@
             </a:ln>
             <a:extLst>
               <a:ext uri="{91240B29-F687-4f45-9708-019B960494DF}">
-                <a14:hiddenLine xmlns="" xmlns:a14="http://schemas.microsoft.com/office/drawing/2010/main" w="9525">
+                <a14:hiddenLine xmlns:a14="http://schemas.microsoft.com/office/drawing/2010/main" xmlns="" w="9525">
                   <a:solidFill>
                     <a:srgbClr val="000000"/>
                   </a:solidFill>
@@ -2792,7 +2793,7 @@
             </a:ln>
             <a:extLst>
               <a:ext uri="{91240B29-F687-4f45-9708-019B960494DF}">
-                <a14:hiddenLine xmlns="" xmlns:a14="http://schemas.microsoft.com/office/drawing/2010/main" w="9525">
+                <a14:hiddenLine xmlns:a14="http://schemas.microsoft.com/office/drawing/2010/main" xmlns="" w="9525">
                   <a:solidFill>
                     <a:srgbClr val="000000"/>
                   </a:solidFill>
@@ -2882,7 +2883,7 @@
             </a:ln>
             <a:extLst>
               <a:ext uri="{91240B29-F687-4f45-9708-019B960494DF}">
-                <a14:hiddenLine xmlns="" xmlns:a14="http://schemas.microsoft.com/office/drawing/2010/main" w="9525">
+                <a14:hiddenLine xmlns:a14="http://schemas.microsoft.com/office/drawing/2010/main" xmlns="" w="9525">
                   <a:solidFill>
                     <a:srgbClr val="000000"/>
                   </a:solidFill>
@@ -2944,7 +2945,7 @@
             </a:ln>
             <a:extLst>
               <a:ext uri="{91240B29-F687-4f45-9708-019B960494DF}">
-                <a14:hiddenLine xmlns="" xmlns:a14="http://schemas.microsoft.com/office/drawing/2010/main" w="9525">
+                <a14:hiddenLine xmlns:a14="http://schemas.microsoft.com/office/drawing/2010/main" xmlns="" w="9525">
                   <a:solidFill>
                     <a:srgbClr val="000000"/>
                   </a:solidFill>
@@ -3006,7 +3007,7 @@
             </a:ln>
             <a:extLst>
               <a:ext uri="{91240B29-F687-4f45-9708-019B960494DF}">
-                <a14:hiddenLine xmlns="" xmlns:a14="http://schemas.microsoft.com/office/drawing/2010/main" w="9525">
+                <a14:hiddenLine xmlns:a14="http://schemas.microsoft.com/office/drawing/2010/main" xmlns="" w="9525">
                   <a:solidFill>
                     <a:srgbClr val="000000"/>
                   </a:solidFill>
@@ -3096,7 +3097,7 @@
             </a:ln>
             <a:extLst>
               <a:ext uri="{91240B29-F687-4f45-9708-019B960494DF}">
-                <a14:hiddenLine xmlns="" xmlns:a14="http://schemas.microsoft.com/office/drawing/2010/main" w="9525">
+                <a14:hiddenLine xmlns:a14="http://schemas.microsoft.com/office/drawing/2010/main" xmlns="" w="9525">
                   <a:solidFill>
                     <a:srgbClr val="000000"/>
                   </a:solidFill>
@@ -3164,7 +3165,7 @@
             </a:ln>
             <a:extLst>
               <a:ext uri="{91240B29-F687-4f45-9708-019B960494DF}">
-                <a14:hiddenLine xmlns="" xmlns:a14="http://schemas.microsoft.com/office/drawing/2010/main" w="9525">
+                <a14:hiddenLine xmlns:a14="http://schemas.microsoft.com/office/drawing/2010/main" xmlns="" w="9525">
                   <a:solidFill>
                     <a:srgbClr val="000000"/>
                   </a:solidFill>
@@ -3226,7 +3227,7 @@
             </a:ln>
             <a:extLst>
               <a:ext uri="{91240B29-F687-4f45-9708-019B960494DF}">
-                <a14:hiddenLine xmlns="" xmlns:a14="http://schemas.microsoft.com/office/drawing/2010/main" w="9525">
+                <a14:hiddenLine xmlns:a14="http://schemas.microsoft.com/office/drawing/2010/main" xmlns="" w="9525">
                   <a:solidFill>
                     <a:srgbClr val="000000"/>
                   </a:solidFill>
@@ -3316,7 +3317,7 @@
             </a:ln>
             <a:extLst>
               <a:ext uri="{91240B29-F687-4f45-9708-019B960494DF}">
-                <a14:hiddenLine xmlns="" xmlns:a14="http://schemas.microsoft.com/office/drawing/2010/main" w="9525">
+                <a14:hiddenLine xmlns:a14="http://schemas.microsoft.com/office/drawing/2010/main" xmlns="" w="9525">
                   <a:solidFill>
                     <a:srgbClr val="000000"/>
                   </a:solidFill>
@@ -3378,7 +3379,7 @@
             </a:ln>
             <a:extLst>
               <a:ext uri="{91240B29-F687-4f45-9708-019B960494DF}">
-                <a14:hiddenLine xmlns="" xmlns:a14="http://schemas.microsoft.com/office/drawing/2010/main" w="9525">
+                <a14:hiddenLine xmlns:a14="http://schemas.microsoft.com/office/drawing/2010/main" xmlns="" w="9525">
                   <a:solidFill>
                     <a:srgbClr val="000000"/>
                   </a:solidFill>
@@ -3468,7 +3469,7 @@
             </a:ln>
             <a:extLst>
               <a:ext uri="{91240B29-F687-4f45-9708-019B960494DF}">
-                <a14:hiddenLine xmlns="" xmlns:a14="http://schemas.microsoft.com/office/drawing/2010/main" w="9525">
+                <a14:hiddenLine xmlns:a14="http://schemas.microsoft.com/office/drawing/2010/main" xmlns="" w="9525">
                   <a:solidFill>
                     <a:srgbClr val="000000"/>
                   </a:solidFill>
@@ -3530,7 +3531,7 @@
             </a:ln>
             <a:extLst>
               <a:ext uri="{91240B29-F687-4f45-9708-019B960494DF}">
-                <a14:hiddenLine xmlns="" xmlns:a14="http://schemas.microsoft.com/office/drawing/2010/main" w="9525">
+                <a14:hiddenLine xmlns:a14="http://schemas.microsoft.com/office/drawing/2010/main" xmlns="" w="9525">
                   <a:solidFill>
                     <a:srgbClr val="000000"/>
                   </a:solidFill>
@@ -3620,7 +3621,7 @@
             </a:ln>
             <a:extLst>
               <a:ext uri="{91240B29-F687-4f45-9708-019B960494DF}">
-                <a14:hiddenLine xmlns="" xmlns:a14="http://schemas.microsoft.com/office/drawing/2010/main" w="9525">
+                <a14:hiddenLine xmlns:a14="http://schemas.microsoft.com/office/drawing/2010/main" xmlns="" w="9525">
                   <a:solidFill>
                     <a:srgbClr val="000000"/>
                   </a:solidFill>
@@ -3654,7 +3655,7 @@
             </a:ln>
             <a:extLst>
               <a:ext uri="{91240B29-F687-4f45-9708-019B960494DF}">
-                <a14:hiddenLine xmlns="" xmlns:a14="http://schemas.microsoft.com/office/drawing/2010/main" w="9525">
+                <a14:hiddenLine xmlns:a14="http://schemas.microsoft.com/office/drawing/2010/main" xmlns="" w="9525">
                   <a:solidFill>
                     <a:srgbClr val="000000"/>
                   </a:solidFill>
@@ -3719,7 +3720,7 @@
             </a:ln>
             <a:extLst>
               <a:ext uri="{91240B29-F687-4f45-9708-019B960494DF}">
-                <a14:hiddenLine xmlns="" xmlns:a14="http://schemas.microsoft.com/office/drawing/2010/main" w="9525">
+                <a14:hiddenLine xmlns:a14="http://schemas.microsoft.com/office/drawing/2010/main" xmlns="" w="9525">
                   <a:solidFill>
                     <a:srgbClr val="000000"/>
                   </a:solidFill>
@@ -3809,7 +3810,7 @@
             </a:ln>
             <a:extLst>
               <a:ext uri="{91240B29-F687-4f45-9708-019B960494DF}">
-                <a14:hiddenLine xmlns="" xmlns:a14="http://schemas.microsoft.com/office/drawing/2010/main" w="9525">
+                <a14:hiddenLine xmlns:a14="http://schemas.microsoft.com/office/drawing/2010/main" xmlns="" w="9525">
                   <a:solidFill>
                     <a:srgbClr val="000000"/>
                   </a:solidFill>
@@ -3871,7 +3872,7 @@
             </a:ln>
             <a:extLst>
               <a:ext uri="{91240B29-F687-4f45-9708-019B960494DF}">
-                <a14:hiddenLine xmlns="" xmlns:a14="http://schemas.microsoft.com/office/drawing/2010/main" w="9525">
+                <a14:hiddenLine xmlns:a14="http://schemas.microsoft.com/office/drawing/2010/main" xmlns="" w="9525">
                   <a:solidFill>
                     <a:srgbClr val="000000"/>
                   </a:solidFill>
@@ -3961,7 +3962,7 @@
             </a:ln>
             <a:extLst>
               <a:ext uri="{91240B29-F687-4f45-9708-019B960494DF}">
-                <a14:hiddenLine xmlns="" xmlns:a14="http://schemas.microsoft.com/office/drawing/2010/main" w="9525">
+                <a14:hiddenLine xmlns:a14="http://schemas.microsoft.com/office/drawing/2010/main" xmlns="" w="9525">
                   <a:solidFill>
                     <a:srgbClr val="000000"/>
                   </a:solidFill>
@@ -4051,7 +4052,7 @@
             </a:ln>
             <a:extLst>
               <a:ext uri="{91240B29-F687-4f45-9708-019B960494DF}">
-                <a14:hiddenLine xmlns="" xmlns:a14="http://schemas.microsoft.com/office/drawing/2010/main" w="9525">
+                <a14:hiddenLine xmlns:a14="http://schemas.microsoft.com/office/drawing/2010/main" xmlns="" w="9525">
                   <a:solidFill>
                     <a:srgbClr val="000000"/>
                   </a:solidFill>
@@ -4116,7 +4117,7 @@
             </a:ln>
             <a:extLst>
               <a:ext uri="{91240B29-F687-4f45-9708-019B960494DF}">
-                <a14:hiddenLine xmlns="" xmlns:a14="http://schemas.microsoft.com/office/drawing/2010/main" w="9525">
+                <a14:hiddenLine xmlns:a14="http://schemas.microsoft.com/office/drawing/2010/main" xmlns="" w="9525">
                   <a:solidFill>
                     <a:srgbClr val="000000"/>
                   </a:solidFill>
@@ -4178,7 +4179,7 @@
             </a:ln>
             <a:extLst>
               <a:ext uri="{91240B29-F687-4f45-9708-019B960494DF}">
-                <a14:hiddenLine xmlns="" xmlns:a14="http://schemas.microsoft.com/office/drawing/2010/main" w="9525">
+                <a14:hiddenLine xmlns:a14="http://schemas.microsoft.com/office/drawing/2010/main" xmlns="" w="9525">
                   <a:solidFill>
                     <a:srgbClr val="000000"/>
                   </a:solidFill>
@@ -4268,7 +4269,7 @@
             </a:ln>
             <a:extLst>
               <a:ext uri="{91240B29-F687-4f45-9708-019B960494DF}">
-                <a14:hiddenLine xmlns="" xmlns:a14="http://schemas.microsoft.com/office/drawing/2010/main" w="9525">
+                <a14:hiddenLine xmlns:a14="http://schemas.microsoft.com/office/drawing/2010/main" xmlns="" w="9525">
                   <a:solidFill>
                     <a:srgbClr val="000000"/>
                   </a:solidFill>
@@ -4358,7 +4359,7 @@
             </a:ln>
             <a:extLst>
               <a:ext uri="{91240B29-F687-4f45-9708-019B960494DF}">
-                <a14:hiddenLine xmlns="" xmlns:a14="http://schemas.microsoft.com/office/drawing/2010/main" w="9525">
+                <a14:hiddenLine xmlns:a14="http://schemas.microsoft.com/office/drawing/2010/main" xmlns="" w="9525">
                   <a:solidFill>
                     <a:srgbClr val="000000"/>
                   </a:solidFill>
@@ -4420,7 +4421,7 @@
             </a:ln>
             <a:extLst>
               <a:ext uri="{91240B29-F687-4f45-9708-019B960494DF}">
-                <a14:hiddenLine xmlns="" xmlns:a14="http://schemas.microsoft.com/office/drawing/2010/main" w="9525">
+                <a14:hiddenLine xmlns:a14="http://schemas.microsoft.com/office/drawing/2010/main" xmlns="" w="9525">
                   <a:solidFill>
                     <a:srgbClr val="000000"/>
                   </a:solidFill>
@@ -4540,7 +4541,7 @@
             </a:ln>
             <a:extLst>
               <a:ext uri="{91240B29-F687-4f45-9708-019B960494DF}">
-                <a14:hiddenLine xmlns="" xmlns:a14="http://schemas.microsoft.com/office/drawing/2010/main" w="9525">
+                <a14:hiddenLine xmlns:a14="http://schemas.microsoft.com/office/drawing/2010/main" xmlns="" w="9525">
                   <a:solidFill>
                     <a:srgbClr val="000000"/>
                   </a:solidFill>
@@ -4608,7 +4609,7 @@
             </a:ln>
             <a:extLst>
               <a:ext uri="{91240B29-F687-4f45-9708-019B960494DF}">
-                <a14:hiddenLine xmlns="" xmlns:a14="http://schemas.microsoft.com/office/drawing/2010/main" w="9525">
+                <a14:hiddenLine xmlns:a14="http://schemas.microsoft.com/office/drawing/2010/main" xmlns="" w="9525">
                   <a:solidFill>
                     <a:srgbClr val="000000"/>
                   </a:solidFill>
@@ -4698,7 +4699,7 @@
             </a:ln>
             <a:extLst>
               <a:ext uri="{91240B29-F687-4f45-9708-019B960494DF}">
-                <a14:hiddenLine xmlns="" xmlns:a14="http://schemas.microsoft.com/office/drawing/2010/main" w="9525">
+                <a14:hiddenLine xmlns:a14="http://schemas.microsoft.com/office/drawing/2010/main" xmlns="" w="9525">
                   <a:solidFill>
                     <a:srgbClr val="000000"/>
                   </a:solidFill>
@@ -4838,7 +4839,7 @@
           <a:p>
             <a:fld id="{EC4347D3-4C9A-C240-8F14-750059DFEEB0}" type="datetimeFigureOut">
               <a:rPr lang="en-US" smtClean="0"/>
-              <a:t>2/26/26</a:t>
+              <a:t>3/10/26</a:t>
             </a:fld>
             <a:endParaRPr lang="en-US"/>
           </a:p>
@@ -5105,7 +5106,7 @@
           <a:p>
             <a:fld id="{EC4347D3-4C9A-C240-8F14-750059DFEEB0}" type="datetimeFigureOut">
               <a:rPr lang="en-US" smtClean="0"/>
-              <a:t>2/26/26</a:t>
+              <a:t>3/10/26</a:t>
             </a:fld>
             <a:endParaRPr lang="en-US"/>
           </a:p>
@@ -5301,7 +5302,7 @@
           <a:p>
             <a:fld id="{EC4347D3-4C9A-C240-8F14-750059DFEEB0}" type="datetimeFigureOut">
               <a:rPr lang="en-US" smtClean="0"/>
-              <a:t>2/26/26</a:t>
+              <a:t>3/10/26</a:t>
             </a:fld>
             <a:endParaRPr lang="en-US"/>
           </a:p>
@@ -5564,7 +5565,7 @@
           <a:p>
             <a:fld id="{EC4347D3-4C9A-C240-8F14-750059DFEEB0}" type="datetimeFigureOut">
               <a:rPr lang="en-US" smtClean="0"/>
-              <a:t>2/26/26</a:t>
+              <a:t>3/10/26</a:t>
             </a:fld>
             <a:endParaRPr lang="en-US"/>
           </a:p>
@@ -5998,7 +5999,7 @@
           <a:p>
             <a:fld id="{EC4347D3-4C9A-C240-8F14-750059DFEEB0}" type="datetimeFigureOut">
               <a:rPr lang="en-US" smtClean="0"/>
-              <a:t>2/26/26</a:t>
+              <a:t>3/10/26</a:t>
             </a:fld>
             <a:endParaRPr lang="en-US"/>
           </a:p>
@@ -6544,7 +6545,7 @@
           <a:p>
             <a:fld id="{EC4347D3-4C9A-C240-8F14-750059DFEEB0}" type="datetimeFigureOut">
               <a:rPr lang="en-US" smtClean="0"/>
-              <a:t>2/26/26</a:t>
+              <a:t>3/10/26</a:t>
             </a:fld>
             <a:endParaRPr lang="en-US"/>
           </a:p>
@@ -7264,7 +7265,7 @@
           <a:p>
             <a:fld id="{EC4347D3-4C9A-C240-8F14-750059DFEEB0}" type="datetimeFigureOut">
               <a:rPr lang="en-US" smtClean="0"/>
-              <a:t>2/26/26</a:t>
+              <a:t>3/10/26</a:t>
             </a:fld>
             <a:endParaRPr lang="en-US"/>
           </a:p>
@@ -7434,7 +7435,7 @@
           <a:p>
             <a:fld id="{EC4347D3-4C9A-C240-8F14-750059DFEEB0}" type="datetimeFigureOut">
               <a:rPr lang="en-US" smtClean="0"/>
-              <a:t>2/26/26</a:t>
+              <a:t>3/10/26</a:t>
             </a:fld>
             <a:endParaRPr lang="en-US"/>
           </a:p>
@@ -7614,7 +7615,7 @@
           <a:p>
             <a:fld id="{EC4347D3-4C9A-C240-8F14-750059DFEEB0}" type="datetimeFigureOut">
               <a:rPr lang="en-US" smtClean="0"/>
-              <a:t>2/26/26</a:t>
+              <a:t>3/10/26</a:t>
             </a:fld>
             <a:endParaRPr lang="en-US"/>
           </a:p>
@@ -7784,7 +7785,7 @@
           <a:p>
             <a:fld id="{EC4347D3-4C9A-C240-8F14-750059DFEEB0}" type="datetimeFigureOut">
               <a:rPr lang="en-US" smtClean="0"/>
-              <a:t>2/26/26</a:t>
+              <a:t>3/10/26</a:t>
             </a:fld>
             <a:endParaRPr lang="en-US"/>
           </a:p>
@@ -8034,7 +8035,7 @@
           <a:p>
             <a:fld id="{EC4347D3-4C9A-C240-8F14-750059DFEEB0}" type="datetimeFigureOut">
               <a:rPr lang="en-US" smtClean="0"/>
-              <a:t>2/26/26</a:t>
+              <a:t>3/10/26</a:t>
             </a:fld>
             <a:endParaRPr lang="en-US"/>
           </a:p>
@@ -8266,7 +8267,7 @@
           <a:p>
             <a:fld id="{EC4347D3-4C9A-C240-8F14-750059DFEEB0}" type="datetimeFigureOut">
               <a:rPr lang="en-US" smtClean="0"/>
-              <a:t>2/26/26</a:t>
+              <a:t>3/10/26</a:t>
             </a:fld>
             <a:endParaRPr lang="en-US"/>
           </a:p>
@@ -8652,7 +8653,7 @@
           <a:p>
             <a:fld id="{EC4347D3-4C9A-C240-8F14-750059DFEEB0}" type="datetimeFigureOut">
               <a:rPr lang="en-US" smtClean="0"/>
-              <a:t>2/26/26</a:t>
+              <a:t>3/10/26</a:t>
             </a:fld>
             <a:endParaRPr lang="en-US"/>
           </a:p>
@@ -8775,7 +8776,7 @@
           <a:p>
             <a:fld id="{EC4347D3-4C9A-C240-8F14-750059DFEEB0}" type="datetimeFigureOut">
               <a:rPr lang="en-US" smtClean="0"/>
-              <a:t>2/26/26</a:t>
+              <a:t>3/10/26</a:t>
             </a:fld>
             <a:endParaRPr lang="en-US"/>
           </a:p>
@@ -8870,7 +8871,7 @@
           <a:p>
             <a:fld id="{EC4347D3-4C9A-C240-8F14-750059DFEEB0}" type="datetimeFigureOut">
               <a:rPr lang="en-US" smtClean="0"/>
-              <a:t>2/26/26</a:t>
+              <a:t>3/10/26</a:t>
             </a:fld>
             <a:endParaRPr lang="en-US"/>
           </a:p>
@@ -9119,7 +9120,7 @@
           <a:p>
             <a:fld id="{EC4347D3-4C9A-C240-8F14-750059DFEEB0}" type="datetimeFigureOut">
               <a:rPr lang="en-US" smtClean="0"/>
-              <a:t>2/26/26</a:t>
+              <a:t>3/10/26</a:t>
             </a:fld>
             <a:endParaRPr lang="en-US"/>
           </a:p>
@@ -9404,7 +9405,7 @@
           <a:p>
             <a:fld id="{EC4347D3-4C9A-C240-8F14-750059DFEEB0}" type="datetimeFigureOut">
               <a:rPr lang="en-US" smtClean="0"/>
-              <a:t>2/26/26</a:t>
+              <a:t>3/10/26</a:t>
             </a:fld>
             <a:endParaRPr lang="en-US"/>
           </a:p>
@@ -9527,7 +9528,7 @@
           <a:noFill/>
           <a:extLst>
             <a:ext uri="{909E8E84-426E-40dd-AFC4-6F175D3DCCD1}">
-              <a14:hiddenFill xmlns="" xmlns:a14="http://schemas.microsoft.com/office/drawing/2010/main">
+              <a14:hiddenFill xmlns:a14="http://schemas.microsoft.com/office/drawing/2010/main" xmlns="">
                 <a:solidFill>
                   <a:srgbClr val="FFFFFF"/>
                 </a:solidFill>
@@ -9601,7 +9602,7 @@
               </a:ln>
               <a:extLst>
                 <a:ext uri="{91240B29-F687-4f45-9708-019B960494DF}">
-                  <a14:hiddenLine xmlns="" xmlns:a14="http://schemas.microsoft.com/office/drawing/2010/main" w="9525">
+                  <a14:hiddenLine xmlns:a14="http://schemas.microsoft.com/office/drawing/2010/main" xmlns="" w="9525">
                     <a:solidFill>
                       <a:srgbClr val="000000"/>
                     </a:solidFill>
@@ -9691,7 +9692,7 @@
               </a:ln>
               <a:extLst>
                 <a:ext uri="{91240B29-F687-4f45-9708-019B960494DF}">
-                  <a14:hiddenLine xmlns="" xmlns:a14="http://schemas.microsoft.com/office/drawing/2010/main" w="9525">
+                  <a14:hiddenLine xmlns:a14="http://schemas.microsoft.com/office/drawing/2010/main" xmlns="" w="9525">
                     <a:solidFill>
                       <a:srgbClr val="000000"/>
                     </a:solidFill>
@@ -9781,7 +9782,7 @@
               </a:ln>
               <a:extLst>
                 <a:ext uri="{91240B29-F687-4f45-9708-019B960494DF}">
-                  <a14:hiddenLine xmlns="" xmlns:a14="http://schemas.microsoft.com/office/drawing/2010/main" w="9525">
+                  <a14:hiddenLine xmlns:a14="http://schemas.microsoft.com/office/drawing/2010/main" xmlns="" w="9525">
                     <a:solidFill>
                       <a:srgbClr val="000000"/>
                     </a:solidFill>
@@ -9843,7 +9844,7 @@
               </a:ln>
               <a:extLst>
                 <a:ext uri="{91240B29-F687-4f45-9708-019B960494DF}">
-                  <a14:hiddenLine xmlns="" xmlns:a14="http://schemas.microsoft.com/office/drawing/2010/main" w="9525">
+                  <a14:hiddenLine xmlns:a14="http://schemas.microsoft.com/office/drawing/2010/main" xmlns="" w="9525">
                     <a:solidFill>
                       <a:srgbClr val="000000"/>
                     </a:solidFill>
@@ -9933,7 +9934,7 @@
               </a:ln>
               <a:extLst>
                 <a:ext uri="{91240B29-F687-4f45-9708-019B960494DF}">
-                  <a14:hiddenLine xmlns="" xmlns:a14="http://schemas.microsoft.com/office/drawing/2010/main" w="9525">
+                  <a14:hiddenLine xmlns:a14="http://schemas.microsoft.com/office/drawing/2010/main" xmlns="" w="9525">
                     <a:solidFill>
                       <a:srgbClr val="000000"/>
                     </a:solidFill>
@@ -9995,7 +9996,7 @@
               </a:ln>
               <a:extLst>
                 <a:ext uri="{91240B29-F687-4f45-9708-019B960494DF}">
-                  <a14:hiddenLine xmlns="" xmlns:a14="http://schemas.microsoft.com/office/drawing/2010/main" w="9525">
+                  <a14:hiddenLine xmlns:a14="http://schemas.microsoft.com/office/drawing/2010/main" xmlns="" w="9525">
                     <a:solidFill>
                       <a:srgbClr val="000000"/>
                     </a:solidFill>
@@ -10057,7 +10058,7 @@
               </a:ln>
               <a:extLst>
                 <a:ext uri="{91240B29-F687-4f45-9708-019B960494DF}">
-                  <a14:hiddenLine xmlns="" xmlns:a14="http://schemas.microsoft.com/office/drawing/2010/main" w="9525">
+                  <a14:hiddenLine xmlns:a14="http://schemas.microsoft.com/office/drawing/2010/main" xmlns="" w="9525">
                     <a:solidFill>
                       <a:srgbClr val="000000"/>
                     </a:solidFill>
@@ -10147,7 +10148,7 @@
               </a:ln>
               <a:extLst>
                 <a:ext uri="{91240B29-F687-4f45-9708-019B960494DF}">
-                  <a14:hiddenLine xmlns="" xmlns:a14="http://schemas.microsoft.com/office/drawing/2010/main" w="9525">
+                  <a14:hiddenLine xmlns:a14="http://schemas.microsoft.com/office/drawing/2010/main" xmlns="" w="9525">
                     <a:solidFill>
                       <a:srgbClr val="000000"/>
                     </a:solidFill>
@@ -10237,7 +10238,7 @@
               </a:ln>
               <a:extLst>
                 <a:ext uri="{91240B29-F687-4f45-9708-019B960494DF}">
-                  <a14:hiddenLine xmlns="" xmlns:a14="http://schemas.microsoft.com/office/drawing/2010/main" w="9525">
+                  <a14:hiddenLine xmlns:a14="http://schemas.microsoft.com/office/drawing/2010/main" xmlns="" w="9525">
                     <a:solidFill>
                       <a:srgbClr val="000000"/>
                     </a:solidFill>
@@ -10299,7 +10300,7 @@
               </a:ln>
               <a:extLst>
                 <a:ext uri="{91240B29-F687-4f45-9708-019B960494DF}">
-                  <a14:hiddenLine xmlns="" xmlns:a14="http://schemas.microsoft.com/office/drawing/2010/main" w="9525">
+                  <a14:hiddenLine xmlns:a14="http://schemas.microsoft.com/office/drawing/2010/main" xmlns="" w="9525">
                     <a:solidFill>
                       <a:srgbClr val="000000"/>
                     </a:solidFill>
@@ -10409,7 +10410,7 @@
               </a:ln>
               <a:extLst>
                 <a:ext uri="{91240B29-F687-4f45-9708-019B960494DF}">
-                  <a14:hiddenLine xmlns="" xmlns:a14="http://schemas.microsoft.com/office/drawing/2010/main" w="9525">
+                  <a14:hiddenLine xmlns:a14="http://schemas.microsoft.com/office/drawing/2010/main" xmlns="" w="9525">
                     <a:solidFill>
                       <a:srgbClr val="000000"/>
                     </a:solidFill>
@@ -10493,7 +10494,7 @@
               </a:ln>
               <a:extLst>
                 <a:ext uri="{91240B29-F687-4f45-9708-019B960494DF}">
-                  <a14:hiddenLine xmlns="" xmlns:a14="http://schemas.microsoft.com/office/drawing/2010/main" w="9525">
+                  <a14:hiddenLine xmlns:a14="http://schemas.microsoft.com/office/drawing/2010/main" xmlns="" w="9525">
                     <a:solidFill>
                       <a:srgbClr val="000000"/>
                     </a:solidFill>
@@ -10555,7 +10556,7 @@
               </a:ln>
               <a:extLst>
                 <a:ext uri="{91240B29-F687-4f45-9708-019B960494DF}">
-                  <a14:hiddenLine xmlns="" xmlns:a14="http://schemas.microsoft.com/office/drawing/2010/main" w="9525">
+                  <a14:hiddenLine xmlns:a14="http://schemas.microsoft.com/office/drawing/2010/main" xmlns="" w="9525">
                     <a:solidFill>
                       <a:srgbClr val="000000"/>
                     </a:solidFill>
@@ -10617,7 +10618,7 @@
               </a:ln>
               <a:extLst>
                 <a:ext uri="{91240B29-F687-4f45-9708-019B960494DF}">
-                  <a14:hiddenLine xmlns="" xmlns:a14="http://schemas.microsoft.com/office/drawing/2010/main" w="9525">
+                  <a14:hiddenLine xmlns:a14="http://schemas.microsoft.com/office/drawing/2010/main" xmlns="" w="9525">
                     <a:solidFill>
                       <a:srgbClr val="000000"/>
                     </a:solidFill>
@@ -10707,7 +10708,7 @@
               </a:ln>
               <a:extLst>
                 <a:ext uri="{91240B29-F687-4f45-9708-019B960494DF}">
-                  <a14:hiddenLine xmlns="" xmlns:a14="http://schemas.microsoft.com/office/drawing/2010/main" w="9525">
+                  <a14:hiddenLine xmlns:a14="http://schemas.microsoft.com/office/drawing/2010/main" xmlns="" w="9525">
                     <a:solidFill>
                       <a:srgbClr val="000000"/>
                     </a:solidFill>
@@ -10741,7 +10742,7 @@
               </a:ln>
               <a:extLst>
                 <a:ext uri="{91240B29-F687-4f45-9708-019B960494DF}">
-                  <a14:hiddenLine xmlns="" xmlns:a14="http://schemas.microsoft.com/office/drawing/2010/main" w="9525">
+                  <a14:hiddenLine xmlns:a14="http://schemas.microsoft.com/office/drawing/2010/main" xmlns="" w="9525">
                     <a:solidFill>
                       <a:srgbClr val="000000"/>
                     </a:solidFill>
@@ -10806,7 +10807,7 @@
               </a:ln>
               <a:extLst>
                 <a:ext uri="{91240B29-F687-4f45-9708-019B960494DF}">
-                  <a14:hiddenLine xmlns="" xmlns:a14="http://schemas.microsoft.com/office/drawing/2010/main" w="9525">
+                  <a14:hiddenLine xmlns:a14="http://schemas.microsoft.com/office/drawing/2010/main" xmlns="" w="9525">
                     <a:solidFill>
                       <a:srgbClr val="000000"/>
                     </a:solidFill>
@@ -10896,7 +10897,7 @@
               </a:ln>
               <a:extLst>
                 <a:ext uri="{91240B29-F687-4f45-9708-019B960494DF}">
-                  <a14:hiddenLine xmlns="" xmlns:a14="http://schemas.microsoft.com/office/drawing/2010/main" w="9525">
+                  <a14:hiddenLine xmlns:a14="http://schemas.microsoft.com/office/drawing/2010/main" xmlns="" w="9525">
                     <a:solidFill>
                       <a:srgbClr val="000000"/>
                     </a:solidFill>
@@ -10958,7 +10959,7 @@
               </a:ln>
               <a:extLst>
                 <a:ext uri="{91240B29-F687-4f45-9708-019B960494DF}">
-                  <a14:hiddenLine xmlns="" xmlns:a14="http://schemas.microsoft.com/office/drawing/2010/main" w="9525">
+                  <a14:hiddenLine xmlns:a14="http://schemas.microsoft.com/office/drawing/2010/main" xmlns="" w="9525">
                     <a:solidFill>
                       <a:srgbClr val="000000"/>
                     </a:solidFill>
@@ -11048,7 +11049,7 @@
               </a:ln>
               <a:extLst>
                 <a:ext uri="{91240B29-F687-4f45-9708-019B960494DF}">
-                  <a14:hiddenLine xmlns="" xmlns:a14="http://schemas.microsoft.com/office/drawing/2010/main" w="9525">
+                  <a14:hiddenLine xmlns:a14="http://schemas.microsoft.com/office/drawing/2010/main" xmlns="" w="9525">
                     <a:solidFill>
                       <a:srgbClr val="000000"/>
                     </a:solidFill>
@@ -11113,7 +11114,7 @@
               </a:ln>
               <a:extLst>
                 <a:ext uri="{91240B29-F687-4f45-9708-019B960494DF}">
-                  <a14:hiddenLine xmlns="" xmlns:a14="http://schemas.microsoft.com/office/drawing/2010/main" w="9525">
+                  <a14:hiddenLine xmlns:a14="http://schemas.microsoft.com/office/drawing/2010/main" xmlns="" w="9525">
                     <a:solidFill>
                       <a:srgbClr val="000000"/>
                     </a:solidFill>
@@ -11175,7 +11176,7 @@
               </a:ln>
               <a:extLst>
                 <a:ext uri="{91240B29-F687-4f45-9708-019B960494DF}">
-                  <a14:hiddenLine xmlns="" xmlns:a14="http://schemas.microsoft.com/office/drawing/2010/main" w="9525">
+                  <a14:hiddenLine xmlns:a14="http://schemas.microsoft.com/office/drawing/2010/main" xmlns="" w="9525">
                     <a:solidFill>
                       <a:srgbClr val="000000"/>
                     </a:solidFill>
@@ -11265,7 +11266,7 @@
               </a:ln>
               <a:extLst>
                 <a:ext uri="{91240B29-F687-4f45-9708-019B960494DF}">
-                  <a14:hiddenLine xmlns="" xmlns:a14="http://schemas.microsoft.com/office/drawing/2010/main" w="9525">
+                  <a14:hiddenLine xmlns:a14="http://schemas.microsoft.com/office/drawing/2010/main" xmlns="" w="9525">
                     <a:solidFill>
                       <a:srgbClr val="000000"/>
                     </a:solidFill>
@@ -11355,7 +11356,7 @@
               </a:ln>
               <a:extLst>
                 <a:ext uri="{91240B29-F687-4f45-9708-019B960494DF}">
-                  <a14:hiddenLine xmlns="" xmlns:a14="http://schemas.microsoft.com/office/drawing/2010/main" w="9525">
+                  <a14:hiddenLine xmlns:a14="http://schemas.microsoft.com/office/drawing/2010/main" xmlns="" w="9525">
                     <a:solidFill>
                       <a:srgbClr val="000000"/>
                     </a:solidFill>
@@ -11420,7 +11421,7 @@
               </a:ln>
               <a:extLst>
                 <a:ext uri="{91240B29-F687-4f45-9708-019B960494DF}">
-                  <a14:hiddenLine xmlns="" xmlns:a14="http://schemas.microsoft.com/office/drawing/2010/main" w="9525">
+                  <a14:hiddenLine xmlns:a14="http://schemas.microsoft.com/office/drawing/2010/main" xmlns="" w="9525">
                     <a:solidFill>
                       <a:srgbClr val="000000"/>
                     </a:solidFill>
@@ -11540,7 +11541,7 @@
               </a:ln>
               <a:extLst>
                 <a:ext uri="{91240B29-F687-4f45-9708-019B960494DF}">
-                  <a14:hiddenLine xmlns="" xmlns:a14="http://schemas.microsoft.com/office/drawing/2010/main" w="9525">
+                  <a14:hiddenLine xmlns:a14="http://schemas.microsoft.com/office/drawing/2010/main" xmlns="" w="9525">
                     <a:solidFill>
                       <a:srgbClr val="000000"/>
                     </a:solidFill>
@@ -11621,7 +11622,7 @@
               </a:ln>
               <a:extLst>
                 <a:ext uri="{91240B29-F687-4f45-9708-019B960494DF}">
-                  <a14:hiddenLine xmlns="" xmlns:a14="http://schemas.microsoft.com/office/drawing/2010/main" w="9525">
+                  <a14:hiddenLine xmlns:a14="http://schemas.microsoft.com/office/drawing/2010/main" xmlns="" w="9525">
                     <a:solidFill>
                       <a:srgbClr val="000000"/>
                     </a:solidFill>
@@ -11736,7 +11737,7 @@
               </a:ln>
               <a:extLst>
                 <a:ext uri="{91240B29-F687-4f45-9708-019B960494DF}">
-                  <a14:hiddenLine xmlns="" xmlns:a14="http://schemas.microsoft.com/office/drawing/2010/main" w="9525">
+                  <a14:hiddenLine xmlns:a14="http://schemas.microsoft.com/office/drawing/2010/main" xmlns="" w="9525">
                     <a:solidFill>
                       <a:srgbClr val="000000"/>
                     </a:solidFill>
@@ -11826,7 +11827,7 @@
               </a:ln>
               <a:extLst>
                 <a:ext uri="{91240B29-F687-4f45-9708-019B960494DF}">
-                  <a14:hiddenLine xmlns="" xmlns:a14="http://schemas.microsoft.com/office/drawing/2010/main" w="9525">
+                  <a14:hiddenLine xmlns:a14="http://schemas.microsoft.com/office/drawing/2010/main" xmlns="" w="9525">
                     <a:solidFill>
                       <a:srgbClr val="000000"/>
                     </a:solidFill>
@@ -11891,7 +11892,7 @@
               </a:ln>
               <a:extLst>
                 <a:ext uri="{91240B29-F687-4f45-9708-019B960494DF}">
-                  <a14:hiddenLine xmlns="" xmlns:a14="http://schemas.microsoft.com/office/drawing/2010/main" w="9525">
+                  <a14:hiddenLine xmlns:a14="http://schemas.microsoft.com/office/drawing/2010/main" xmlns="" w="9525">
                     <a:solidFill>
                       <a:srgbClr val="000000"/>
                     </a:solidFill>
@@ -11981,7 +11982,7 @@
               </a:ln>
               <a:extLst>
                 <a:ext uri="{91240B29-F687-4f45-9708-019B960494DF}">
-                  <a14:hiddenLine xmlns="" xmlns:a14="http://schemas.microsoft.com/office/drawing/2010/main" w="9525">
+                  <a14:hiddenLine xmlns:a14="http://schemas.microsoft.com/office/drawing/2010/main" xmlns="" w="9525">
                     <a:solidFill>
                       <a:srgbClr val="000000"/>
                     </a:solidFill>
@@ -12049,7 +12050,7 @@
               </a:ln>
               <a:extLst>
                 <a:ext uri="{91240B29-F687-4f45-9708-019B960494DF}">
-                  <a14:hiddenLine xmlns="" xmlns:a14="http://schemas.microsoft.com/office/drawing/2010/main" w="9525">
+                  <a14:hiddenLine xmlns:a14="http://schemas.microsoft.com/office/drawing/2010/main" xmlns="" w="9525">
                     <a:solidFill>
                       <a:srgbClr val="000000"/>
                     </a:solidFill>
@@ -12139,7 +12140,7 @@
               </a:ln>
               <a:extLst>
                 <a:ext uri="{91240B29-F687-4f45-9708-019B960494DF}">
-                  <a14:hiddenLine xmlns="" xmlns:a14="http://schemas.microsoft.com/office/drawing/2010/main" w="9525">
+                  <a14:hiddenLine xmlns:a14="http://schemas.microsoft.com/office/drawing/2010/main" xmlns="" w="9525">
                     <a:solidFill>
                       <a:srgbClr val="000000"/>
                     </a:solidFill>
@@ -12207,7 +12208,7 @@
               </a:ln>
               <a:extLst>
                 <a:ext uri="{91240B29-F687-4f45-9708-019B960494DF}">
-                  <a14:hiddenLine xmlns="" xmlns:a14="http://schemas.microsoft.com/office/drawing/2010/main" w="9525">
+                  <a14:hiddenLine xmlns:a14="http://schemas.microsoft.com/office/drawing/2010/main" xmlns="" w="9525">
                     <a:solidFill>
                       <a:srgbClr val="000000"/>
                     </a:solidFill>
@@ -12297,7 +12298,7 @@
               </a:ln>
               <a:extLst>
                 <a:ext uri="{91240B29-F687-4f45-9708-019B960494DF}">
-                  <a14:hiddenLine xmlns="" xmlns:a14="http://schemas.microsoft.com/office/drawing/2010/main" w="9525">
+                  <a14:hiddenLine xmlns:a14="http://schemas.microsoft.com/office/drawing/2010/main" xmlns="" w="9525">
                     <a:solidFill>
                       <a:srgbClr val="000000"/>
                     </a:solidFill>
@@ -12331,7 +12332,7 @@
               </a:ln>
               <a:extLst>
                 <a:ext uri="{91240B29-F687-4f45-9708-019B960494DF}">
-                  <a14:hiddenLine xmlns="" xmlns:a14="http://schemas.microsoft.com/office/drawing/2010/main" w="9525">
+                  <a14:hiddenLine xmlns:a14="http://schemas.microsoft.com/office/drawing/2010/main" xmlns="" w="9525">
                     <a:solidFill>
                       <a:srgbClr val="000000"/>
                     </a:solidFill>
@@ -12471,7 +12472,7 @@
           <a:p>
             <a:fld id="{EC4347D3-4C9A-C240-8F14-750059DFEEB0}" type="datetimeFigureOut">
               <a:rPr lang="en-US" smtClean="0"/>
-              <a:t>2/26/26</a:t>
+              <a:t>3/10/26</a:t>
             </a:fld>
             <a:endParaRPr lang="en-US"/>
           </a:p>
@@ -12988,6 +12989,177 @@
 </p:sld>
 </file>
 
+<file path=ppt/slides/slide10.xml><?xml version="1.0" encoding="utf-8"?>
+<p:sld xmlns:a="http://schemas.openxmlformats.org/drawingml/2006/main" xmlns:r="http://schemas.openxmlformats.org/officeDocument/2006/relationships" xmlns:p="http://schemas.openxmlformats.org/presentationml/2006/main">
+  <p:cSld>
+    <p:spTree>
+      <p:nvGrpSpPr>
+        <p:cNvPr id="1" name="">
+          <a:extLst>
+            <a:ext uri="{FF2B5EF4-FFF2-40B4-BE49-F238E27FC236}">
+              <a16:creationId xmlns:a16="http://schemas.microsoft.com/office/drawing/2014/main" id="{BBCD5DF4-EBAA-DE66-9025-145CB8DAB7D0}"/>
+            </a:ext>
+          </a:extLst>
+        </p:cNvPr>
+        <p:cNvGrpSpPr/>
+        <p:nvPr/>
+      </p:nvGrpSpPr>
+      <p:grpSpPr>
+        <a:xfrm>
+          <a:off x="0" y="0"/>
+          <a:ext cx="0" cy="0"/>
+          <a:chOff x="0" y="0"/>
+          <a:chExt cx="0" cy="0"/>
+        </a:xfrm>
+      </p:grpSpPr>
+      <p:sp>
+        <p:nvSpPr>
+          <p:cNvPr id="6146" name="Rectangle 2">
+            <a:extLst>
+              <a:ext uri="{FF2B5EF4-FFF2-40B4-BE49-F238E27FC236}">
+                <a16:creationId xmlns:a16="http://schemas.microsoft.com/office/drawing/2014/main" id="{4A9E9846-F2D3-7EF2-486E-05347EC8B4E7}"/>
+              </a:ext>
+            </a:extLst>
+          </p:cNvPr>
+          <p:cNvSpPr>
+            <a:spLocks noGrp="1" noChangeArrowheads="1"/>
+          </p:cNvSpPr>
+          <p:nvPr>
+            <p:ph type="title"/>
+            <p:custDataLst>
+              <p:tags r:id="rId1"/>
+            </p:custDataLst>
+          </p:nvPr>
+        </p:nvSpPr>
+        <p:spPr>
+          <a:xfrm>
+            <a:off x="1141413" y="284084"/>
+            <a:ext cx="9905998" cy="620791"/>
+          </a:xfrm>
+        </p:spPr>
+        <p:txBody>
+          <a:bodyPr/>
+          <a:lstStyle/>
+          <a:p>
+            <a:pPr algn="ctr"/>
+            <a:r>
+              <a:rPr lang="en-US" dirty="0"/>
+              <a:t>Lecture 10: 3/10/26</a:t>
+            </a:r>
+          </a:p>
+        </p:txBody>
+      </p:sp>
+      <p:sp>
+        <p:nvSpPr>
+          <p:cNvPr id="6147" name="Rectangle 3">
+            <a:extLst>
+              <a:ext uri="{FF2B5EF4-FFF2-40B4-BE49-F238E27FC236}">
+                <a16:creationId xmlns:a16="http://schemas.microsoft.com/office/drawing/2014/main" id="{68E33523-82C8-7C1F-D833-046445BA6C87}"/>
+              </a:ext>
+            </a:extLst>
+          </p:cNvPr>
+          <p:cNvSpPr>
+            <a:spLocks noGrp="1" noChangeArrowheads="1"/>
+          </p:cNvSpPr>
+          <p:nvPr>
+            <p:ph idx="1"/>
+            <p:custDataLst>
+              <p:tags r:id="rId2"/>
+            </p:custDataLst>
+          </p:nvPr>
+        </p:nvSpPr>
+        <p:spPr>
+          <a:xfrm>
+            <a:off x="1021404" y="1123950"/>
+            <a:ext cx="10204315" cy="5149850"/>
+          </a:xfrm>
+        </p:spPr>
+        <p:txBody>
+          <a:bodyPr>
+            <a:normAutofit fontScale="85000" lnSpcReduction="20000"/>
+          </a:bodyPr>
+          <a:lstStyle/>
+          <a:p>
+            <a:r>
+              <a:rPr lang="en-US" dirty="0"/>
+              <a:t>Happy March!</a:t>
+            </a:r>
+          </a:p>
+          <a:p>
+            <a:r>
+              <a:rPr lang="en-US" dirty="0"/>
+              <a:t>Attendance checks are back in full force today…</a:t>
+            </a:r>
+          </a:p>
+          <a:p>
+            <a:r>
+              <a:rPr lang="en-US" dirty="0"/>
+              <a:t>Linear Programming homework is over.</a:t>
+            </a:r>
+          </a:p>
+          <a:p>
+            <a:pPr lvl="1"/>
+            <a:r>
+              <a:rPr lang="en-US" dirty="0"/>
+              <a:t>How did it go? Any issues / problems?</a:t>
+            </a:r>
+          </a:p>
+          <a:p>
+            <a:r>
+              <a:rPr lang="en-US" dirty="0"/>
+              <a:t>Some of you are on your phone in lecture a lot and I can clearly see it. I’ve learned your names (great way to get me to learn that!) and will start deducting from your attendance score if it keeps happening.</a:t>
+            </a:r>
+          </a:p>
+          <a:p>
+            <a:r>
+              <a:rPr lang="en-US" dirty="0"/>
+              <a:t>Today we will discuss the project and start getting into teams, etc. </a:t>
+            </a:r>
+          </a:p>
+          <a:p>
+            <a:pPr lvl="1"/>
+            <a:r>
+              <a:rPr lang="en-US" dirty="0"/>
+              <a:t>You can have your laptops out for this first part if you want to go ahead and sign up for groups</a:t>
+            </a:r>
+          </a:p>
+          <a:p>
+            <a:r>
+              <a:rPr lang="en-US" dirty="0"/>
+              <a:t>You first quiz (exam) is on Thursday</a:t>
+            </a:r>
+          </a:p>
+          <a:p>
+            <a:pPr lvl="1"/>
+            <a:r>
+              <a:rPr lang="en-US" dirty="0"/>
+              <a:t>Example has been posted to Canvas files</a:t>
+            </a:r>
+          </a:p>
+          <a:p>
+            <a:r>
+              <a:rPr lang="en-US" dirty="0"/>
+              <a:t>Today we will discuss the project then continue discussing some computational geometry algorithms.</a:t>
+            </a:r>
+          </a:p>
+          <a:p>
+            <a:endParaRPr lang="en-US" dirty="0"/>
+          </a:p>
+        </p:txBody>
+      </p:sp>
+    </p:spTree>
+    <p:extLst>
+      <p:ext uri="{BB962C8B-B14F-4D97-AF65-F5344CB8AC3E}">
+        <p14:creationId xmlns:p14="http://schemas.microsoft.com/office/powerpoint/2010/main" val="1119477373"/>
+      </p:ext>
+    </p:extLst>
+  </p:cSld>
+  <p:clrMapOvr>
+    <a:masterClrMapping/>
+  </p:clrMapOvr>
+</p:sld>
+</file>
+
 <file path=ppt/slides/slide2.xml><?xml version="1.0" encoding="utf-8"?>
 <p:sld xmlns:a="http://schemas.openxmlformats.org/drawingml/2006/main" xmlns:r="http://schemas.openxmlformats.org/officeDocument/2006/relationships" xmlns:p="http://schemas.openxmlformats.org/presentationml/2006/main">
   <p:cSld>
@@ -14377,6 +14549,18 @@
 </file>
 
 <file path=ppt/tags/tag16.xml><?xml version="1.0" encoding="utf-8"?>
+<p:tagLst xmlns:a="http://schemas.openxmlformats.org/drawingml/2006/main" xmlns:r="http://schemas.openxmlformats.org/officeDocument/2006/relationships" xmlns:p="http://schemas.openxmlformats.org/presentationml/2006/main">
+  <p:tag name="_INSTRUCTOR VIEW19C14C36-AC8E-43BC-9DB6-C2AAF774C7DC|PANE__TAG" val="_"/>
+</p:tagLst>
+</file>
+
+<file path=ppt/tags/tag17.xml><?xml version="1.0" encoding="utf-8"?>
+<p:tagLst xmlns:a="http://schemas.openxmlformats.org/drawingml/2006/main" xmlns:r="http://schemas.openxmlformats.org/officeDocument/2006/relationships" xmlns:p="http://schemas.openxmlformats.org/presentationml/2006/main">
+  <p:tag name="_INSTRUCTOR VIEW19C14C36-AC8E-43BC-9DB6-C2AAF774C7DC|PANE__TAG" val="_"/>
+</p:tagLst>
+</file>
+
+<file path=ppt/tags/tag18.xml><?xml version="1.0" encoding="utf-8"?>
 <p:tagLst xmlns:a="http://schemas.openxmlformats.org/drawingml/2006/main" xmlns:r="http://schemas.openxmlformats.org/officeDocument/2006/relationships" xmlns:p="http://schemas.openxmlformats.org/presentationml/2006/main">
   <p:tag name="_INSTRUCTOR VIEW19C14C36-AC8E-43BC-9DB6-C2AAF774C7DC|PANE__TAG" val="_"/>
 </p:tagLst>

--- a/slides/00-DailyAnnouncements.pptx
+++ b/slides/00-DailyAnnouncements.pptx
@@ -5,7 +5,7 @@
     <p:sldMasterId id="2147484006" r:id="rId1"/>
   </p:sldMasterIdLst>
   <p:notesMasterIdLst>
-    <p:notesMasterId r:id="rId12"/>
+    <p:notesMasterId r:id="rId13"/>
   </p:notesMasterIdLst>
   <p:sldIdLst>
     <p:sldId id="256" r:id="rId2"/>
@@ -18,6 +18,7 @@
     <p:sldId id="511" r:id="rId9"/>
     <p:sldId id="512" r:id="rId10"/>
     <p:sldId id="513" r:id="rId11"/>
+    <p:sldId id="514" r:id="rId12"/>
   </p:sldIdLst>
   <p:sldSz cx="12192000" cy="6858000"/>
   <p:notesSz cx="6858000" cy="9144000"/>
@@ -206,7 +207,7 @@
           <a:p>
             <a:fld id="{C5B45307-6ED4-B142-BD64-10F739779302}" type="datetimeFigureOut">
               <a:rPr lang="en-US" smtClean="0"/>
-              <a:t>3/10/26</a:t>
+              <a:t>3/17/26</a:t>
             </a:fld>
             <a:endParaRPr lang="en-US"/>
           </a:p>
@@ -614,7 +615,7 @@
           <a:noFill/>
           <a:extLst>
             <a:ext uri="{909E8E84-426E-40dd-AFC4-6F175D3DCCD1}">
-              <a14:hiddenFill xmlns:a14="http://schemas.microsoft.com/office/drawing/2010/main" xmlns="">
+              <a14:hiddenFill xmlns="" xmlns:a14="http://schemas.microsoft.com/office/drawing/2010/main">
                 <a:solidFill>
                   <a:srgbClr val="FFFFFF"/>
                 </a:solidFill>
@@ -673,7 +674,7 @@
             </a:ln>
             <a:extLst>
               <a:ext uri="{91240B29-F687-4f45-9708-019B960494DF}">
-                <a14:hiddenLine xmlns:a14="http://schemas.microsoft.com/office/drawing/2010/main" xmlns="" w="9525">
+                <a14:hiddenLine xmlns="" xmlns:a14="http://schemas.microsoft.com/office/drawing/2010/main" w="9525">
                   <a:solidFill>
                     <a:srgbClr val="000000"/>
                   </a:solidFill>
@@ -763,7 +764,7 @@
             </a:ln>
             <a:extLst>
               <a:ext uri="{91240B29-F687-4f45-9708-019B960494DF}">
-                <a14:hiddenLine xmlns:a14="http://schemas.microsoft.com/office/drawing/2010/main" xmlns="" w="9525">
+                <a14:hiddenLine xmlns="" xmlns:a14="http://schemas.microsoft.com/office/drawing/2010/main" w="9525">
                   <a:solidFill>
                     <a:srgbClr val="000000"/>
                   </a:solidFill>
@@ -853,7 +854,7 @@
             </a:ln>
             <a:extLst>
               <a:ext uri="{91240B29-F687-4f45-9708-019B960494DF}">
-                <a14:hiddenLine xmlns:a14="http://schemas.microsoft.com/office/drawing/2010/main" xmlns="" w="9525">
+                <a14:hiddenLine xmlns="" xmlns:a14="http://schemas.microsoft.com/office/drawing/2010/main" w="9525">
                   <a:solidFill>
                     <a:srgbClr val="000000"/>
                   </a:solidFill>
@@ -887,7 +888,7 @@
             </a:ln>
             <a:extLst>
               <a:ext uri="{91240B29-F687-4f45-9708-019B960494DF}">
-                <a14:hiddenLine xmlns:a14="http://schemas.microsoft.com/office/drawing/2010/main" xmlns="" w="9525">
+                <a14:hiddenLine xmlns="" xmlns:a14="http://schemas.microsoft.com/office/drawing/2010/main" w="9525">
                   <a:solidFill>
                     <a:srgbClr val="000000"/>
                   </a:solidFill>
@@ -977,7 +978,7 @@
             </a:ln>
             <a:extLst>
               <a:ext uri="{91240B29-F687-4f45-9708-019B960494DF}">
-                <a14:hiddenLine xmlns:a14="http://schemas.microsoft.com/office/drawing/2010/main" xmlns="" w="9525">
+                <a14:hiddenLine xmlns="" xmlns:a14="http://schemas.microsoft.com/office/drawing/2010/main" w="9525">
                   <a:solidFill>
                     <a:srgbClr val="000000"/>
                   </a:solidFill>
@@ -1039,7 +1040,7 @@
             </a:ln>
             <a:extLst>
               <a:ext uri="{91240B29-F687-4f45-9708-019B960494DF}">
-                <a14:hiddenLine xmlns:a14="http://schemas.microsoft.com/office/drawing/2010/main" xmlns="" w="9525">
+                <a14:hiddenLine xmlns="" xmlns:a14="http://schemas.microsoft.com/office/drawing/2010/main" w="9525">
                   <a:solidFill>
                     <a:srgbClr val="000000"/>
                   </a:solidFill>
@@ -1101,7 +1102,7 @@
             </a:ln>
             <a:extLst>
               <a:ext uri="{91240B29-F687-4f45-9708-019B960494DF}">
-                <a14:hiddenLine xmlns:a14="http://schemas.microsoft.com/office/drawing/2010/main" xmlns="" w="9525">
+                <a14:hiddenLine xmlns="" xmlns:a14="http://schemas.microsoft.com/office/drawing/2010/main" w="9525">
                   <a:solidFill>
                     <a:srgbClr val="000000"/>
                   </a:solidFill>
@@ -1191,7 +1192,7 @@
             </a:ln>
             <a:extLst>
               <a:ext uri="{91240B29-F687-4f45-9708-019B960494DF}">
-                <a14:hiddenLine xmlns:a14="http://schemas.microsoft.com/office/drawing/2010/main" xmlns="" w="9525">
+                <a14:hiddenLine xmlns="" xmlns:a14="http://schemas.microsoft.com/office/drawing/2010/main" w="9525">
                   <a:solidFill>
                     <a:srgbClr val="000000"/>
                   </a:solidFill>
@@ -1253,7 +1254,7 @@
             </a:ln>
             <a:extLst>
               <a:ext uri="{91240B29-F687-4f45-9708-019B960494DF}">
-                <a14:hiddenLine xmlns:a14="http://schemas.microsoft.com/office/drawing/2010/main" xmlns="" w="9525">
+                <a14:hiddenLine xmlns="" xmlns:a14="http://schemas.microsoft.com/office/drawing/2010/main" w="9525">
                   <a:solidFill>
                     <a:srgbClr val="000000"/>
                   </a:solidFill>
@@ -1315,7 +1316,7 @@
             </a:ln>
             <a:extLst>
               <a:ext uri="{91240B29-F687-4f45-9708-019B960494DF}">
-                <a14:hiddenLine xmlns:a14="http://schemas.microsoft.com/office/drawing/2010/main" xmlns="" w="9525">
+                <a14:hiddenLine xmlns="" xmlns:a14="http://schemas.microsoft.com/office/drawing/2010/main" w="9525">
                   <a:solidFill>
                     <a:srgbClr val="000000"/>
                   </a:solidFill>
@@ -1405,7 +1406,7 @@
             </a:ln>
             <a:extLst>
               <a:ext uri="{91240B29-F687-4f45-9708-019B960494DF}">
-                <a14:hiddenLine xmlns:a14="http://schemas.microsoft.com/office/drawing/2010/main" xmlns="" w="9525">
+                <a14:hiddenLine xmlns="" xmlns:a14="http://schemas.microsoft.com/office/drawing/2010/main" w="9525">
                   <a:solidFill>
                     <a:srgbClr val="000000"/>
                   </a:solidFill>
@@ -1495,7 +1496,7 @@
             </a:ln>
             <a:extLst>
               <a:ext uri="{91240B29-F687-4f45-9708-019B960494DF}">
-                <a14:hiddenLine xmlns:a14="http://schemas.microsoft.com/office/drawing/2010/main" xmlns="" w="9525">
+                <a14:hiddenLine xmlns="" xmlns:a14="http://schemas.microsoft.com/office/drawing/2010/main" w="9525">
                   <a:solidFill>
                     <a:srgbClr val="000000"/>
                   </a:solidFill>
@@ -1557,7 +1558,7 @@
             </a:ln>
             <a:extLst>
               <a:ext uri="{91240B29-F687-4f45-9708-019B960494DF}">
-                <a14:hiddenLine xmlns:a14="http://schemas.microsoft.com/office/drawing/2010/main" xmlns="" w="9525">
+                <a14:hiddenLine xmlns="" xmlns:a14="http://schemas.microsoft.com/office/drawing/2010/main" w="9525">
                   <a:solidFill>
                     <a:srgbClr val="000000"/>
                   </a:solidFill>
@@ -1667,7 +1668,7 @@
             </a:ln>
             <a:extLst>
               <a:ext uri="{91240B29-F687-4f45-9708-019B960494DF}">
-                <a14:hiddenLine xmlns:a14="http://schemas.microsoft.com/office/drawing/2010/main" xmlns="" w="9525">
+                <a14:hiddenLine xmlns="" xmlns:a14="http://schemas.microsoft.com/office/drawing/2010/main" w="9525">
                   <a:solidFill>
                     <a:srgbClr val="000000"/>
                   </a:solidFill>
@@ -1729,7 +1730,7 @@
             </a:ln>
             <a:extLst>
               <a:ext uri="{91240B29-F687-4f45-9708-019B960494DF}">
-                <a14:hiddenLine xmlns:a14="http://schemas.microsoft.com/office/drawing/2010/main" xmlns="" w="9525">
+                <a14:hiddenLine xmlns="" xmlns:a14="http://schemas.microsoft.com/office/drawing/2010/main" w="9525">
                   <a:solidFill>
                     <a:srgbClr val="000000"/>
                   </a:solidFill>
@@ -1819,7 +1820,7 @@
             </a:ln>
             <a:extLst>
               <a:ext uri="{91240B29-F687-4f45-9708-019B960494DF}">
-                <a14:hiddenLine xmlns:a14="http://schemas.microsoft.com/office/drawing/2010/main" xmlns="" w="9525">
+                <a14:hiddenLine xmlns="" xmlns:a14="http://schemas.microsoft.com/office/drawing/2010/main" w="9525">
                   <a:solidFill>
                     <a:srgbClr val="000000"/>
                   </a:solidFill>
@@ -1909,7 +1910,7 @@
             </a:ln>
             <a:extLst>
               <a:ext uri="{91240B29-F687-4f45-9708-019B960494DF}">
-                <a14:hiddenLine xmlns:a14="http://schemas.microsoft.com/office/drawing/2010/main" xmlns="" w="9525">
+                <a14:hiddenLine xmlns="" xmlns:a14="http://schemas.microsoft.com/office/drawing/2010/main" w="9525">
                   <a:solidFill>
                     <a:srgbClr val="000000"/>
                   </a:solidFill>
@@ -1971,7 +1972,7 @@
             </a:ln>
             <a:extLst>
               <a:ext uri="{91240B29-F687-4f45-9708-019B960494DF}">
-                <a14:hiddenLine xmlns:a14="http://schemas.microsoft.com/office/drawing/2010/main" xmlns="" w="9525">
+                <a14:hiddenLine xmlns="" xmlns:a14="http://schemas.microsoft.com/office/drawing/2010/main" w="9525">
                   <a:solidFill>
                     <a:srgbClr val="000000"/>
                   </a:solidFill>
@@ -2061,7 +2062,7 @@
             </a:ln>
             <a:extLst>
               <a:ext uri="{91240B29-F687-4f45-9708-019B960494DF}">
-                <a14:hiddenLine xmlns:a14="http://schemas.microsoft.com/office/drawing/2010/main" xmlns="" w="9525">
+                <a14:hiddenLine xmlns="" xmlns:a14="http://schemas.microsoft.com/office/drawing/2010/main" w="9525">
                   <a:solidFill>
                     <a:srgbClr val="000000"/>
                   </a:solidFill>
@@ -2151,7 +2152,7 @@
             </a:ln>
             <a:extLst>
               <a:ext uri="{91240B29-F687-4f45-9708-019B960494DF}">
-                <a14:hiddenLine xmlns:a14="http://schemas.microsoft.com/office/drawing/2010/main" xmlns="" w="9525">
+                <a14:hiddenLine xmlns="" xmlns:a14="http://schemas.microsoft.com/office/drawing/2010/main" w="9525">
                   <a:solidFill>
                     <a:srgbClr val="000000"/>
                   </a:solidFill>
@@ -2207,7 +2208,7 @@
             </a:ln>
             <a:extLst>
               <a:ext uri="{91240B29-F687-4f45-9708-019B960494DF}">
-                <a14:hiddenLine xmlns:a14="http://schemas.microsoft.com/office/drawing/2010/main" xmlns="" w="9525">
+                <a14:hiddenLine xmlns="" xmlns:a14="http://schemas.microsoft.com/office/drawing/2010/main" w="9525">
                   <a:solidFill>
                     <a:srgbClr val="000000"/>
                   </a:solidFill>
@@ -2297,7 +2298,7 @@
             </a:ln>
             <a:extLst>
               <a:ext uri="{91240B29-F687-4f45-9708-019B960494DF}">
-                <a14:hiddenLine xmlns:a14="http://schemas.microsoft.com/office/drawing/2010/main" xmlns="" w="9525">
+                <a14:hiddenLine xmlns="" xmlns:a14="http://schemas.microsoft.com/office/drawing/2010/main" w="9525">
                   <a:solidFill>
                     <a:srgbClr val="000000"/>
                   </a:solidFill>
@@ -2353,7 +2354,7 @@
             </a:ln>
             <a:extLst>
               <a:ext uri="{91240B29-F687-4f45-9708-019B960494DF}">
-                <a14:hiddenLine xmlns:a14="http://schemas.microsoft.com/office/drawing/2010/main" xmlns="" w="9525">
+                <a14:hiddenLine xmlns="" xmlns:a14="http://schemas.microsoft.com/office/drawing/2010/main" w="9525">
                   <a:solidFill>
                     <a:srgbClr val="000000"/>
                   </a:solidFill>
@@ -2443,7 +2444,7 @@
             </a:ln>
             <a:extLst>
               <a:ext uri="{91240B29-F687-4f45-9708-019B960494DF}">
-                <a14:hiddenLine xmlns:a14="http://schemas.microsoft.com/office/drawing/2010/main" xmlns="" w="9525">
+                <a14:hiddenLine xmlns="" xmlns:a14="http://schemas.microsoft.com/office/drawing/2010/main" w="9525">
                   <a:solidFill>
                     <a:srgbClr val="000000"/>
                   </a:solidFill>
@@ -2511,7 +2512,7 @@
             </a:ln>
             <a:extLst>
               <a:ext uri="{91240B29-F687-4f45-9708-019B960494DF}">
-                <a14:hiddenLine xmlns:a14="http://schemas.microsoft.com/office/drawing/2010/main" xmlns="" w="9525">
+                <a14:hiddenLine xmlns="" xmlns:a14="http://schemas.microsoft.com/office/drawing/2010/main" w="9525">
                   <a:solidFill>
                     <a:srgbClr val="000000"/>
                   </a:solidFill>
@@ -2601,7 +2602,7 @@
             </a:ln>
             <a:extLst>
               <a:ext uri="{91240B29-F687-4f45-9708-019B960494DF}">
-                <a14:hiddenLine xmlns:a14="http://schemas.microsoft.com/office/drawing/2010/main" xmlns="" w="9525">
+                <a14:hiddenLine xmlns="" xmlns:a14="http://schemas.microsoft.com/office/drawing/2010/main" w="9525">
                   <a:solidFill>
                     <a:srgbClr val="000000"/>
                   </a:solidFill>
@@ -2669,7 +2670,7 @@
             </a:ln>
             <a:extLst>
               <a:ext uri="{91240B29-F687-4f45-9708-019B960494DF}">
-                <a14:hiddenLine xmlns:a14="http://schemas.microsoft.com/office/drawing/2010/main" xmlns="" w="9525">
+                <a14:hiddenLine xmlns="" xmlns:a14="http://schemas.microsoft.com/office/drawing/2010/main" w="9525">
                   <a:solidFill>
                     <a:srgbClr val="000000"/>
                   </a:solidFill>
@@ -2759,7 +2760,7 @@
             </a:ln>
             <a:extLst>
               <a:ext uri="{91240B29-F687-4f45-9708-019B960494DF}">
-                <a14:hiddenLine xmlns:a14="http://schemas.microsoft.com/office/drawing/2010/main" xmlns="" w="9525">
+                <a14:hiddenLine xmlns="" xmlns:a14="http://schemas.microsoft.com/office/drawing/2010/main" w="9525">
                   <a:solidFill>
                     <a:srgbClr val="000000"/>
                   </a:solidFill>
@@ -2793,7 +2794,7 @@
             </a:ln>
             <a:extLst>
               <a:ext uri="{91240B29-F687-4f45-9708-019B960494DF}">
-                <a14:hiddenLine xmlns:a14="http://schemas.microsoft.com/office/drawing/2010/main" xmlns="" w="9525">
+                <a14:hiddenLine xmlns="" xmlns:a14="http://schemas.microsoft.com/office/drawing/2010/main" w="9525">
                   <a:solidFill>
                     <a:srgbClr val="000000"/>
                   </a:solidFill>
@@ -2883,7 +2884,7 @@
             </a:ln>
             <a:extLst>
               <a:ext uri="{91240B29-F687-4f45-9708-019B960494DF}">
-                <a14:hiddenLine xmlns:a14="http://schemas.microsoft.com/office/drawing/2010/main" xmlns="" w="9525">
+                <a14:hiddenLine xmlns="" xmlns:a14="http://schemas.microsoft.com/office/drawing/2010/main" w="9525">
                   <a:solidFill>
                     <a:srgbClr val="000000"/>
                   </a:solidFill>
@@ -2945,7 +2946,7 @@
             </a:ln>
             <a:extLst>
               <a:ext uri="{91240B29-F687-4f45-9708-019B960494DF}">
-                <a14:hiddenLine xmlns:a14="http://schemas.microsoft.com/office/drawing/2010/main" xmlns="" w="9525">
+                <a14:hiddenLine xmlns="" xmlns:a14="http://schemas.microsoft.com/office/drawing/2010/main" w="9525">
                   <a:solidFill>
                     <a:srgbClr val="000000"/>
                   </a:solidFill>
@@ -3007,7 +3008,7 @@
             </a:ln>
             <a:extLst>
               <a:ext uri="{91240B29-F687-4f45-9708-019B960494DF}">
-                <a14:hiddenLine xmlns:a14="http://schemas.microsoft.com/office/drawing/2010/main" xmlns="" w="9525">
+                <a14:hiddenLine xmlns="" xmlns:a14="http://schemas.microsoft.com/office/drawing/2010/main" w="9525">
                   <a:solidFill>
                     <a:srgbClr val="000000"/>
                   </a:solidFill>
@@ -3097,7 +3098,7 @@
             </a:ln>
             <a:extLst>
               <a:ext uri="{91240B29-F687-4f45-9708-019B960494DF}">
-                <a14:hiddenLine xmlns:a14="http://schemas.microsoft.com/office/drawing/2010/main" xmlns="" w="9525">
+                <a14:hiddenLine xmlns="" xmlns:a14="http://schemas.microsoft.com/office/drawing/2010/main" w="9525">
                   <a:solidFill>
                     <a:srgbClr val="000000"/>
                   </a:solidFill>
@@ -3165,7 +3166,7 @@
             </a:ln>
             <a:extLst>
               <a:ext uri="{91240B29-F687-4f45-9708-019B960494DF}">
-                <a14:hiddenLine xmlns:a14="http://schemas.microsoft.com/office/drawing/2010/main" xmlns="" w="9525">
+                <a14:hiddenLine xmlns="" xmlns:a14="http://schemas.microsoft.com/office/drawing/2010/main" w="9525">
                   <a:solidFill>
                     <a:srgbClr val="000000"/>
                   </a:solidFill>
@@ -3227,7 +3228,7 @@
             </a:ln>
             <a:extLst>
               <a:ext uri="{91240B29-F687-4f45-9708-019B960494DF}">
-                <a14:hiddenLine xmlns:a14="http://schemas.microsoft.com/office/drawing/2010/main" xmlns="" w="9525">
+                <a14:hiddenLine xmlns="" xmlns:a14="http://schemas.microsoft.com/office/drawing/2010/main" w="9525">
                   <a:solidFill>
                     <a:srgbClr val="000000"/>
                   </a:solidFill>
@@ -3317,7 +3318,7 @@
             </a:ln>
             <a:extLst>
               <a:ext uri="{91240B29-F687-4f45-9708-019B960494DF}">
-                <a14:hiddenLine xmlns:a14="http://schemas.microsoft.com/office/drawing/2010/main" xmlns="" w="9525">
+                <a14:hiddenLine xmlns="" xmlns:a14="http://schemas.microsoft.com/office/drawing/2010/main" w="9525">
                   <a:solidFill>
                     <a:srgbClr val="000000"/>
                   </a:solidFill>
@@ -3379,7 +3380,7 @@
             </a:ln>
             <a:extLst>
               <a:ext uri="{91240B29-F687-4f45-9708-019B960494DF}">
-                <a14:hiddenLine xmlns:a14="http://schemas.microsoft.com/office/drawing/2010/main" xmlns="" w="9525">
+                <a14:hiddenLine xmlns="" xmlns:a14="http://schemas.microsoft.com/office/drawing/2010/main" w="9525">
                   <a:solidFill>
                     <a:srgbClr val="000000"/>
                   </a:solidFill>
@@ -3469,7 +3470,7 @@
             </a:ln>
             <a:extLst>
               <a:ext uri="{91240B29-F687-4f45-9708-019B960494DF}">
-                <a14:hiddenLine xmlns:a14="http://schemas.microsoft.com/office/drawing/2010/main" xmlns="" w="9525">
+                <a14:hiddenLine xmlns="" xmlns:a14="http://schemas.microsoft.com/office/drawing/2010/main" w="9525">
                   <a:solidFill>
                     <a:srgbClr val="000000"/>
                   </a:solidFill>
@@ -3531,7 +3532,7 @@
             </a:ln>
             <a:extLst>
               <a:ext uri="{91240B29-F687-4f45-9708-019B960494DF}">
-                <a14:hiddenLine xmlns:a14="http://schemas.microsoft.com/office/drawing/2010/main" xmlns="" w="9525">
+                <a14:hiddenLine xmlns="" xmlns:a14="http://schemas.microsoft.com/office/drawing/2010/main" w="9525">
                   <a:solidFill>
                     <a:srgbClr val="000000"/>
                   </a:solidFill>
@@ -3621,7 +3622,7 @@
             </a:ln>
             <a:extLst>
               <a:ext uri="{91240B29-F687-4f45-9708-019B960494DF}">
-                <a14:hiddenLine xmlns:a14="http://schemas.microsoft.com/office/drawing/2010/main" xmlns="" w="9525">
+                <a14:hiddenLine xmlns="" xmlns:a14="http://schemas.microsoft.com/office/drawing/2010/main" w="9525">
                   <a:solidFill>
                     <a:srgbClr val="000000"/>
                   </a:solidFill>
@@ -3655,7 +3656,7 @@
             </a:ln>
             <a:extLst>
               <a:ext uri="{91240B29-F687-4f45-9708-019B960494DF}">
-                <a14:hiddenLine xmlns:a14="http://schemas.microsoft.com/office/drawing/2010/main" xmlns="" w="9525">
+                <a14:hiddenLine xmlns="" xmlns:a14="http://schemas.microsoft.com/office/drawing/2010/main" w="9525">
                   <a:solidFill>
                     <a:srgbClr val="000000"/>
                   </a:solidFill>
@@ -3720,7 +3721,7 @@
             </a:ln>
             <a:extLst>
               <a:ext uri="{91240B29-F687-4f45-9708-019B960494DF}">
-                <a14:hiddenLine xmlns:a14="http://schemas.microsoft.com/office/drawing/2010/main" xmlns="" w="9525">
+                <a14:hiddenLine xmlns="" xmlns:a14="http://schemas.microsoft.com/office/drawing/2010/main" w="9525">
                   <a:solidFill>
                     <a:srgbClr val="000000"/>
                   </a:solidFill>
@@ -3810,7 +3811,7 @@
             </a:ln>
             <a:extLst>
               <a:ext uri="{91240B29-F687-4f45-9708-019B960494DF}">
-                <a14:hiddenLine xmlns:a14="http://schemas.microsoft.com/office/drawing/2010/main" xmlns="" w="9525">
+                <a14:hiddenLine xmlns="" xmlns:a14="http://schemas.microsoft.com/office/drawing/2010/main" w="9525">
                   <a:solidFill>
                     <a:srgbClr val="000000"/>
                   </a:solidFill>
@@ -3872,7 +3873,7 @@
             </a:ln>
             <a:extLst>
               <a:ext uri="{91240B29-F687-4f45-9708-019B960494DF}">
-                <a14:hiddenLine xmlns:a14="http://schemas.microsoft.com/office/drawing/2010/main" xmlns="" w="9525">
+                <a14:hiddenLine xmlns="" xmlns:a14="http://schemas.microsoft.com/office/drawing/2010/main" w="9525">
                   <a:solidFill>
                     <a:srgbClr val="000000"/>
                   </a:solidFill>
@@ -3962,7 +3963,7 @@
             </a:ln>
             <a:extLst>
               <a:ext uri="{91240B29-F687-4f45-9708-019B960494DF}">
-                <a14:hiddenLine xmlns:a14="http://schemas.microsoft.com/office/drawing/2010/main" xmlns="" w="9525">
+                <a14:hiddenLine xmlns="" xmlns:a14="http://schemas.microsoft.com/office/drawing/2010/main" w="9525">
                   <a:solidFill>
                     <a:srgbClr val="000000"/>
                   </a:solidFill>
@@ -4052,7 +4053,7 @@
             </a:ln>
             <a:extLst>
               <a:ext uri="{91240B29-F687-4f45-9708-019B960494DF}">
-                <a14:hiddenLine xmlns:a14="http://schemas.microsoft.com/office/drawing/2010/main" xmlns="" w="9525">
+                <a14:hiddenLine xmlns="" xmlns:a14="http://schemas.microsoft.com/office/drawing/2010/main" w="9525">
                   <a:solidFill>
                     <a:srgbClr val="000000"/>
                   </a:solidFill>
@@ -4117,7 +4118,7 @@
             </a:ln>
             <a:extLst>
               <a:ext uri="{91240B29-F687-4f45-9708-019B960494DF}">
-                <a14:hiddenLine xmlns:a14="http://schemas.microsoft.com/office/drawing/2010/main" xmlns="" w="9525">
+                <a14:hiddenLine xmlns="" xmlns:a14="http://schemas.microsoft.com/office/drawing/2010/main" w="9525">
                   <a:solidFill>
                     <a:srgbClr val="000000"/>
                   </a:solidFill>
@@ -4179,7 +4180,7 @@
             </a:ln>
             <a:extLst>
               <a:ext uri="{91240B29-F687-4f45-9708-019B960494DF}">
-                <a14:hiddenLine xmlns:a14="http://schemas.microsoft.com/office/drawing/2010/main" xmlns="" w="9525">
+                <a14:hiddenLine xmlns="" xmlns:a14="http://schemas.microsoft.com/office/drawing/2010/main" w="9525">
                   <a:solidFill>
                     <a:srgbClr val="000000"/>
                   </a:solidFill>
@@ -4269,7 +4270,7 @@
             </a:ln>
             <a:extLst>
               <a:ext uri="{91240B29-F687-4f45-9708-019B960494DF}">
-                <a14:hiddenLine xmlns:a14="http://schemas.microsoft.com/office/drawing/2010/main" xmlns="" w="9525">
+                <a14:hiddenLine xmlns="" xmlns:a14="http://schemas.microsoft.com/office/drawing/2010/main" w="9525">
                   <a:solidFill>
                     <a:srgbClr val="000000"/>
                   </a:solidFill>
@@ -4359,7 +4360,7 @@
             </a:ln>
             <a:extLst>
               <a:ext uri="{91240B29-F687-4f45-9708-019B960494DF}">
-                <a14:hiddenLine xmlns:a14="http://schemas.microsoft.com/office/drawing/2010/main" xmlns="" w="9525">
+                <a14:hiddenLine xmlns="" xmlns:a14="http://schemas.microsoft.com/office/drawing/2010/main" w="9525">
                   <a:solidFill>
                     <a:srgbClr val="000000"/>
                   </a:solidFill>
@@ -4421,7 +4422,7 @@
             </a:ln>
             <a:extLst>
               <a:ext uri="{91240B29-F687-4f45-9708-019B960494DF}">
-                <a14:hiddenLine xmlns:a14="http://schemas.microsoft.com/office/drawing/2010/main" xmlns="" w="9525">
+                <a14:hiddenLine xmlns="" xmlns:a14="http://schemas.microsoft.com/office/drawing/2010/main" w="9525">
                   <a:solidFill>
                     <a:srgbClr val="000000"/>
                   </a:solidFill>
@@ -4541,7 +4542,7 @@
             </a:ln>
             <a:extLst>
               <a:ext uri="{91240B29-F687-4f45-9708-019B960494DF}">
-                <a14:hiddenLine xmlns:a14="http://schemas.microsoft.com/office/drawing/2010/main" xmlns="" w="9525">
+                <a14:hiddenLine xmlns="" xmlns:a14="http://schemas.microsoft.com/office/drawing/2010/main" w="9525">
                   <a:solidFill>
                     <a:srgbClr val="000000"/>
                   </a:solidFill>
@@ -4609,7 +4610,7 @@
             </a:ln>
             <a:extLst>
               <a:ext uri="{91240B29-F687-4f45-9708-019B960494DF}">
-                <a14:hiddenLine xmlns:a14="http://schemas.microsoft.com/office/drawing/2010/main" xmlns="" w="9525">
+                <a14:hiddenLine xmlns="" xmlns:a14="http://schemas.microsoft.com/office/drawing/2010/main" w="9525">
                   <a:solidFill>
                     <a:srgbClr val="000000"/>
                   </a:solidFill>
@@ -4699,7 +4700,7 @@
             </a:ln>
             <a:extLst>
               <a:ext uri="{91240B29-F687-4f45-9708-019B960494DF}">
-                <a14:hiddenLine xmlns:a14="http://schemas.microsoft.com/office/drawing/2010/main" xmlns="" w="9525">
+                <a14:hiddenLine xmlns="" xmlns:a14="http://schemas.microsoft.com/office/drawing/2010/main" w="9525">
                   <a:solidFill>
                     <a:srgbClr val="000000"/>
                   </a:solidFill>
@@ -4839,7 +4840,7 @@
           <a:p>
             <a:fld id="{EC4347D3-4C9A-C240-8F14-750059DFEEB0}" type="datetimeFigureOut">
               <a:rPr lang="en-US" smtClean="0"/>
-              <a:t>3/10/26</a:t>
+              <a:t>3/17/26</a:t>
             </a:fld>
             <a:endParaRPr lang="en-US"/>
           </a:p>
@@ -5106,7 +5107,7 @@
           <a:p>
             <a:fld id="{EC4347D3-4C9A-C240-8F14-750059DFEEB0}" type="datetimeFigureOut">
               <a:rPr lang="en-US" smtClean="0"/>
-              <a:t>3/10/26</a:t>
+              <a:t>3/17/26</a:t>
             </a:fld>
             <a:endParaRPr lang="en-US"/>
           </a:p>
@@ -5302,7 +5303,7 @@
           <a:p>
             <a:fld id="{EC4347D3-4C9A-C240-8F14-750059DFEEB0}" type="datetimeFigureOut">
               <a:rPr lang="en-US" smtClean="0"/>
-              <a:t>3/10/26</a:t>
+              <a:t>3/17/26</a:t>
             </a:fld>
             <a:endParaRPr lang="en-US"/>
           </a:p>
@@ -5565,7 +5566,7 @@
           <a:p>
             <a:fld id="{EC4347D3-4C9A-C240-8F14-750059DFEEB0}" type="datetimeFigureOut">
               <a:rPr lang="en-US" smtClean="0"/>
-              <a:t>3/10/26</a:t>
+              <a:t>3/17/26</a:t>
             </a:fld>
             <a:endParaRPr lang="en-US"/>
           </a:p>
@@ -5999,7 +6000,7 @@
           <a:p>
             <a:fld id="{EC4347D3-4C9A-C240-8F14-750059DFEEB0}" type="datetimeFigureOut">
               <a:rPr lang="en-US" smtClean="0"/>
-              <a:t>3/10/26</a:t>
+              <a:t>3/17/26</a:t>
             </a:fld>
             <a:endParaRPr lang="en-US"/>
           </a:p>
@@ -6545,7 +6546,7 @@
           <a:p>
             <a:fld id="{EC4347D3-4C9A-C240-8F14-750059DFEEB0}" type="datetimeFigureOut">
               <a:rPr lang="en-US" smtClean="0"/>
-              <a:t>3/10/26</a:t>
+              <a:t>3/17/26</a:t>
             </a:fld>
             <a:endParaRPr lang="en-US"/>
           </a:p>
@@ -7265,7 +7266,7 @@
           <a:p>
             <a:fld id="{EC4347D3-4C9A-C240-8F14-750059DFEEB0}" type="datetimeFigureOut">
               <a:rPr lang="en-US" smtClean="0"/>
-              <a:t>3/10/26</a:t>
+              <a:t>3/17/26</a:t>
             </a:fld>
             <a:endParaRPr lang="en-US"/>
           </a:p>
@@ -7435,7 +7436,7 @@
           <a:p>
             <a:fld id="{EC4347D3-4C9A-C240-8F14-750059DFEEB0}" type="datetimeFigureOut">
               <a:rPr lang="en-US" smtClean="0"/>
-              <a:t>3/10/26</a:t>
+              <a:t>3/17/26</a:t>
             </a:fld>
             <a:endParaRPr lang="en-US"/>
           </a:p>
@@ -7615,7 +7616,7 @@
           <a:p>
             <a:fld id="{EC4347D3-4C9A-C240-8F14-750059DFEEB0}" type="datetimeFigureOut">
               <a:rPr lang="en-US" smtClean="0"/>
-              <a:t>3/10/26</a:t>
+              <a:t>3/17/26</a:t>
             </a:fld>
             <a:endParaRPr lang="en-US"/>
           </a:p>
@@ -7785,7 +7786,7 @@
           <a:p>
             <a:fld id="{EC4347D3-4C9A-C240-8F14-750059DFEEB0}" type="datetimeFigureOut">
               <a:rPr lang="en-US" smtClean="0"/>
-              <a:t>3/10/26</a:t>
+              <a:t>3/17/26</a:t>
             </a:fld>
             <a:endParaRPr lang="en-US"/>
           </a:p>
@@ -8035,7 +8036,7 @@
           <a:p>
             <a:fld id="{EC4347D3-4C9A-C240-8F14-750059DFEEB0}" type="datetimeFigureOut">
               <a:rPr lang="en-US" smtClean="0"/>
-              <a:t>3/10/26</a:t>
+              <a:t>3/17/26</a:t>
             </a:fld>
             <a:endParaRPr lang="en-US"/>
           </a:p>
@@ -8267,7 +8268,7 @@
           <a:p>
             <a:fld id="{EC4347D3-4C9A-C240-8F14-750059DFEEB0}" type="datetimeFigureOut">
               <a:rPr lang="en-US" smtClean="0"/>
-              <a:t>3/10/26</a:t>
+              <a:t>3/17/26</a:t>
             </a:fld>
             <a:endParaRPr lang="en-US"/>
           </a:p>
@@ -8653,7 +8654,7 @@
           <a:p>
             <a:fld id="{EC4347D3-4C9A-C240-8F14-750059DFEEB0}" type="datetimeFigureOut">
               <a:rPr lang="en-US" smtClean="0"/>
-              <a:t>3/10/26</a:t>
+              <a:t>3/17/26</a:t>
             </a:fld>
             <a:endParaRPr lang="en-US"/>
           </a:p>
@@ -8776,7 +8777,7 @@
           <a:p>
             <a:fld id="{EC4347D3-4C9A-C240-8F14-750059DFEEB0}" type="datetimeFigureOut">
               <a:rPr lang="en-US" smtClean="0"/>
-              <a:t>3/10/26</a:t>
+              <a:t>3/17/26</a:t>
             </a:fld>
             <a:endParaRPr lang="en-US"/>
           </a:p>
@@ -8871,7 +8872,7 @@
           <a:p>
             <a:fld id="{EC4347D3-4C9A-C240-8F14-750059DFEEB0}" type="datetimeFigureOut">
               <a:rPr lang="en-US" smtClean="0"/>
-              <a:t>3/10/26</a:t>
+              <a:t>3/17/26</a:t>
             </a:fld>
             <a:endParaRPr lang="en-US"/>
           </a:p>
@@ -9120,7 +9121,7 @@
           <a:p>
             <a:fld id="{EC4347D3-4C9A-C240-8F14-750059DFEEB0}" type="datetimeFigureOut">
               <a:rPr lang="en-US" smtClean="0"/>
-              <a:t>3/10/26</a:t>
+              <a:t>3/17/26</a:t>
             </a:fld>
             <a:endParaRPr lang="en-US"/>
           </a:p>
@@ -9405,7 +9406,7 @@
           <a:p>
             <a:fld id="{EC4347D3-4C9A-C240-8F14-750059DFEEB0}" type="datetimeFigureOut">
               <a:rPr lang="en-US" smtClean="0"/>
-              <a:t>3/10/26</a:t>
+              <a:t>3/17/26</a:t>
             </a:fld>
             <a:endParaRPr lang="en-US"/>
           </a:p>
@@ -9528,7 +9529,7 @@
           <a:noFill/>
           <a:extLst>
             <a:ext uri="{909E8E84-426E-40dd-AFC4-6F175D3DCCD1}">
-              <a14:hiddenFill xmlns:a14="http://schemas.microsoft.com/office/drawing/2010/main" xmlns="">
+              <a14:hiddenFill xmlns="" xmlns:a14="http://schemas.microsoft.com/office/drawing/2010/main">
                 <a:solidFill>
                   <a:srgbClr val="FFFFFF"/>
                 </a:solidFill>
@@ -9602,7 +9603,7 @@
               </a:ln>
               <a:extLst>
                 <a:ext uri="{91240B29-F687-4f45-9708-019B960494DF}">
-                  <a14:hiddenLine xmlns:a14="http://schemas.microsoft.com/office/drawing/2010/main" xmlns="" w="9525">
+                  <a14:hiddenLine xmlns="" xmlns:a14="http://schemas.microsoft.com/office/drawing/2010/main" w="9525">
                     <a:solidFill>
                       <a:srgbClr val="000000"/>
                     </a:solidFill>
@@ -9692,7 +9693,7 @@
               </a:ln>
               <a:extLst>
                 <a:ext uri="{91240B29-F687-4f45-9708-019B960494DF}">
-                  <a14:hiddenLine xmlns:a14="http://schemas.microsoft.com/office/drawing/2010/main" xmlns="" w="9525">
+                  <a14:hiddenLine xmlns="" xmlns:a14="http://schemas.microsoft.com/office/drawing/2010/main" w="9525">
                     <a:solidFill>
                       <a:srgbClr val="000000"/>
                     </a:solidFill>
@@ -9782,7 +9783,7 @@
               </a:ln>
               <a:extLst>
                 <a:ext uri="{91240B29-F687-4f45-9708-019B960494DF}">
-                  <a14:hiddenLine xmlns:a14="http://schemas.microsoft.com/office/drawing/2010/main" xmlns="" w="9525">
+                  <a14:hiddenLine xmlns="" xmlns:a14="http://schemas.microsoft.com/office/drawing/2010/main" w="9525">
                     <a:solidFill>
                       <a:srgbClr val="000000"/>
                     </a:solidFill>
@@ -9844,7 +9845,7 @@
               </a:ln>
               <a:extLst>
                 <a:ext uri="{91240B29-F687-4f45-9708-019B960494DF}">
-                  <a14:hiddenLine xmlns:a14="http://schemas.microsoft.com/office/drawing/2010/main" xmlns="" w="9525">
+                  <a14:hiddenLine xmlns="" xmlns:a14="http://schemas.microsoft.com/office/drawing/2010/main" w="9525">
                     <a:solidFill>
                       <a:srgbClr val="000000"/>
                     </a:solidFill>
@@ -9934,7 +9935,7 @@
               </a:ln>
               <a:extLst>
                 <a:ext uri="{91240B29-F687-4f45-9708-019B960494DF}">
-                  <a14:hiddenLine xmlns:a14="http://schemas.microsoft.com/office/drawing/2010/main" xmlns="" w="9525">
+                  <a14:hiddenLine xmlns="" xmlns:a14="http://schemas.microsoft.com/office/drawing/2010/main" w="9525">
                     <a:solidFill>
                       <a:srgbClr val="000000"/>
                     </a:solidFill>
@@ -9996,7 +9997,7 @@
               </a:ln>
               <a:extLst>
                 <a:ext uri="{91240B29-F687-4f45-9708-019B960494DF}">
-                  <a14:hiddenLine xmlns:a14="http://schemas.microsoft.com/office/drawing/2010/main" xmlns="" w="9525">
+                  <a14:hiddenLine xmlns="" xmlns:a14="http://schemas.microsoft.com/office/drawing/2010/main" w="9525">
                     <a:solidFill>
                       <a:srgbClr val="000000"/>
                     </a:solidFill>
@@ -10058,7 +10059,7 @@
               </a:ln>
               <a:extLst>
                 <a:ext uri="{91240B29-F687-4f45-9708-019B960494DF}">
-                  <a14:hiddenLine xmlns:a14="http://schemas.microsoft.com/office/drawing/2010/main" xmlns="" w="9525">
+                  <a14:hiddenLine xmlns="" xmlns:a14="http://schemas.microsoft.com/office/drawing/2010/main" w="9525">
                     <a:solidFill>
                       <a:srgbClr val="000000"/>
                     </a:solidFill>
@@ -10148,7 +10149,7 @@
               </a:ln>
               <a:extLst>
                 <a:ext uri="{91240B29-F687-4f45-9708-019B960494DF}">
-                  <a14:hiddenLine xmlns:a14="http://schemas.microsoft.com/office/drawing/2010/main" xmlns="" w="9525">
+                  <a14:hiddenLine xmlns="" xmlns:a14="http://schemas.microsoft.com/office/drawing/2010/main" w="9525">
                     <a:solidFill>
                       <a:srgbClr val="000000"/>
                     </a:solidFill>
@@ -10238,7 +10239,7 @@
               </a:ln>
               <a:extLst>
                 <a:ext uri="{91240B29-F687-4f45-9708-019B960494DF}">
-                  <a14:hiddenLine xmlns:a14="http://schemas.microsoft.com/office/drawing/2010/main" xmlns="" w="9525">
+                  <a14:hiddenLine xmlns="" xmlns:a14="http://schemas.microsoft.com/office/drawing/2010/main" w="9525">
                     <a:solidFill>
                       <a:srgbClr val="000000"/>
                     </a:solidFill>
@@ -10300,7 +10301,7 @@
               </a:ln>
               <a:extLst>
                 <a:ext uri="{91240B29-F687-4f45-9708-019B960494DF}">
-                  <a14:hiddenLine xmlns:a14="http://schemas.microsoft.com/office/drawing/2010/main" xmlns="" w="9525">
+                  <a14:hiddenLine xmlns="" xmlns:a14="http://schemas.microsoft.com/office/drawing/2010/main" w="9525">
                     <a:solidFill>
                       <a:srgbClr val="000000"/>
                     </a:solidFill>
@@ -10410,7 +10411,7 @@
               </a:ln>
               <a:extLst>
                 <a:ext uri="{91240B29-F687-4f45-9708-019B960494DF}">
-                  <a14:hiddenLine xmlns:a14="http://schemas.microsoft.com/office/drawing/2010/main" xmlns="" w="9525">
+                  <a14:hiddenLine xmlns="" xmlns:a14="http://schemas.microsoft.com/office/drawing/2010/main" w="9525">
                     <a:solidFill>
                       <a:srgbClr val="000000"/>
                     </a:solidFill>
@@ -10494,7 +10495,7 @@
               </a:ln>
               <a:extLst>
                 <a:ext uri="{91240B29-F687-4f45-9708-019B960494DF}">
-                  <a14:hiddenLine xmlns:a14="http://schemas.microsoft.com/office/drawing/2010/main" xmlns="" w="9525">
+                  <a14:hiddenLine xmlns="" xmlns:a14="http://schemas.microsoft.com/office/drawing/2010/main" w="9525">
                     <a:solidFill>
                       <a:srgbClr val="000000"/>
                     </a:solidFill>
@@ -10556,7 +10557,7 @@
               </a:ln>
               <a:extLst>
                 <a:ext uri="{91240B29-F687-4f45-9708-019B960494DF}">
-                  <a14:hiddenLine xmlns:a14="http://schemas.microsoft.com/office/drawing/2010/main" xmlns="" w="9525">
+                  <a14:hiddenLine xmlns="" xmlns:a14="http://schemas.microsoft.com/office/drawing/2010/main" w="9525">
                     <a:solidFill>
                       <a:srgbClr val="000000"/>
                     </a:solidFill>
@@ -10618,7 +10619,7 @@
               </a:ln>
               <a:extLst>
                 <a:ext uri="{91240B29-F687-4f45-9708-019B960494DF}">
-                  <a14:hiddenLine xmlns:a14="http://schemas.microsoft.com/office/drawing/2010/main" xmlns="" w="9525">
+                  <a14:hiddenLine xmlns="" xmlns:a14="http://schemas.microsoft.com/office/drawing/2010/main" w="9525">
                     <a:solidFill>
                       <a:srgbClr val="000000"/>
                     </a:solidFill>
@@ -10708,7 +10709,7 @@
               </a:ln>
               <a:extLst>
                 <a:ext uri="{91240B29-F687-4f45-9708-019B960494DF}">
-                  <a14:hiddenLine xmlns:a14="http://schemas.microsoft.com/office/drawing/2010/main" xmlns="" w="9525">
+                  <a14:hiddenLine xmlns="" xmlns:a14="http://schemas.microsoft.com/office/drawing/2010/main" w="9525">
                     <a:solidFill>
                       <a:srgbClr val="000000"/>
                     </a:solidFill>
@@ -10742,7 +10743,7 @@
               </a:ln>
               <a:extLst>
                 <a:ext uri="{91240B29-F687-4f45-9708-019B960494DF}">
-                  <a14:hiddenLine xmlns:a14="http://schemas.microsoft.com/office/drawing/2010/main" xmlns="" w="9525">
+                  <a14:hiddenLine xmlns="" xmlns:a14="http://schemas.microsoft.com/office/drawing/2010/main" w="9525">
                     <a:solidFill>
                       <a:srgbClr val="000000"/>
                     </a:solidFill>
@@ -10807,7 +10808,7 @@
               </a:ln>
               <a:extLst>
                 <a:ext uri="{91240B29-F687-4f45-9708-019B960494DF}">
-                  <a14:hiddenLine xmlns:a14="http://schemas.microsoft.com/office/drawing/2010/main" xmlns="" w="9525">
+                  <a14:hiddenLine xmlns="" xmlns:a14="http://schemas.microsoft.com/office/drawing/2010/main" w="9525">
                     <a:solidFill>
                       <a:srgbClr val="000000"/>
                     </a:solidFill>
@@ -10897,7 +10898,7 @@
               </a:ln>
               <a:extLst>
                 <a:ext uri="{91240B29-F687-4f45-9708-019B960494DF}">
-                  <a14:hiddenLine xmlns:a14="http://schemas.microsoft.com/office/drawing/2010/main" xmlns="" w="9525">
+                  <a14:hiddenLine xmlns="" xmlns:a14="http://schemas.microsoft.com/office/drawing/2010/main" w="9525">
                     <a:solidFill>
                       <a:srgbClr val="000000"/>
                     </a:solidFill>
@@ -10959,7 +10960,7 @@
               </a:ln>
               <a:extLst>
                 <a:ext uri="{91240B29-F687-4f45-9708-019B960494DF}">
-                  <a14:hiddenLine xmlns:a14="http://schemas.microsoft.com/office/drawing/2010/main" xmlns="" w="9525">
+                  <a14:hiddenLine xmlns="" xmlns:a14="http://schemas.microsoft.com/office/drawing/2010/main" w="9525">
                     <a:solidFill>
                       <a:srgbClr val="000000"/>
                     </a:solidFill>
@@ -11049,7 +11050,7 @@
               </a:ln>
               <a:extLst>
                 <a:ext uri="{91240B29-F687-4f45-9708-019B960494DF}">
-                  <a14:hiddenLine xmlns:a14="http://schemas.microsoft.com/office/drawing/2010/main" xmlns="" w="9525">
+                  <a14:hiddenLine xmlns="" xmlns:a14="http://schemas.microsoft.com/office/drawing/2010/main" w="9525">
                     <a:solidFill>
                       <a:srgbClr val="000000"/>
                     </a:solidFill>
@@ -11114,7 +11115,7 @@
               </a:ln>
               <a:extLst>
                 <a:ext uri="{91240B29-F687-4f45-9708-019B960494DF}">
-                  <a14:hiddenLine xmlns:a14="http://schemas.microsoft.com/office/drawing/2010/main" xmlns="" w="9525">
+                  <a14:hiddenLine xmlns="" xmlns:a14="http://schemas.microsoft.com/office/drawing/2010/main" w="9525">
                     <a:solidFill>
                       <a:srgbClr val="000000"/>
                     </a:solidFill>
@@ -11176,7 +11177,7 @@
               </a:ln>
               <a:extLst>
                 <a:ext uri="{91240B29-F687-4f45-9708-019B960494DF}">
-                  <a14:hiddenLine xmlns:a14="http://schemas.microsoft.com/office/drawing/2010/main" xmlns="" w="9525">
+                  <a14:hiddenLine xmlns="" xmlns:a14="http://schemas.microsoft.com/office/drawing/2010/main" w="9525">
                     <a:solidFill>
                       <a:srgbClr val="000000"/>
                     </a:solidFill>
@@ -11266,7 +11267,7 @@
               </a:ln>
               <a:extLst>
                 <a:ext uri="{91240B29-F687-4f45-9708-019B960494DF}">
-                  <a14:hiddenLine xmlns:a14="http://schemas.microsoft.com/office/drawing/2010/main" xmlns="" w="9525">
+                  <a14:hiddenLine xmlns="" xmlns:a14="http://schemas.microsoft.com/office/drawing/2010/main" w="9525">
                     <a:solidFill>
                       <a:srgbClr val="000000"/>
                     </a:solidFill>
@@ -11356,7 +11357,7 @@
               </a:ln>
               <a:extLst>
                 <a:ext uri="{91240B29-F687-4f45-9708-019B960494DF}">
-                  <a14:hiddenLine xmlns:a14="http://schemas.microsoft.com/office/drawing/2010/main" xmlns="" w="9525">
+                  <a14:hiddenLine xmlns="" xmlns:a14="http://schemas.microsoft.com/office/drawing/2010/main" w="9525">
                     <a:solidFill>
                       <a:srgbClr val="000000"/>
                     </a:solidFill>
@@ -11421,7 +11422,7 @@
               </a:ln>
               <a:extLst>
                 <a:ext uri="{91240B29-F687-4f45-9708-019B960494DF}">
-                  <a14:hiddenLine xmlns:a14="http://schemas.microsoft.com/office/drawing/2010/main" xmlns="" w="9525">
+                  <a14:hiddenLine xmlns="" xmlns:a14="http://schemas.microsoft.com/office/drawing/2010/main" w="9525">
                     <a:solidFill>
                       <a:srgbClr val="000000"/>
                     </a:solidFill>
@@ -11541,7 +11542,7 @@
               </a:ln>
               <a:extLst>
                 <a:ext uri="{91240B29-F687-4f45-9708-019B960494DF}">
-                  <a14:hiddenLine xmlns:a14="http://schemas.microsoft.com/office/drawing/2010/main" xmlns="" w="9525">
+                  <a14:hiddenLine xmlns="" xmlns:a14="http://schemas.microsoft.com/office/drawing/2010/main" w="9525">
                     <a:solidFill>
                       <a:srgbClr val="000000"/>
                     </a:solidFill>
@@ -11622,7 +11623,7 @@
               </a:ln>
               <a:extLst>
                 <a:ext uri="{91240B29-F687-4f45-9708-019B960494DF}">
-                  <a14:hiddenLine xmlns:a14="http://schemas.microsoft.com/office/drawing/2010/main" xmlns="" w="9525">
+                  <a14:hiddenLine xmlns="" xmlns:a14="http://schemas.microsoft.com/office/drawing/2010/main" w="9525">
                     <a:solidFill>
                       <a:srgbClr val="000000"/>
                     </a:solidFill>
@@ -11737,7 +11738,7 @@
               </a:ln>
               <a:extLst>
                 <a:ext uri="{91240B29-F687-4f45-9708-019B960494DF}">
-                  <a14:hiddenLine xmlns:a14="http://schemas.microsoft.com/office/drawing/2010/main" xmlns="" w="9525">
+                  <a14:hiddenLine xmlns="" xmlns:a14="http://schemas.microsoft.com/office/drawing/2010/main" w="9525">
                     <a:solidFill>
                       <a:srgbClr val="000000"/>
                     </a:solidFill>
@@ -11827,7 +11828,7 @@
               </a:ln>
               <a:extLst>
                 <a:ext uri="{91240B29-F687-4f45-9708-019B960494DF}">
-                  <a14:hiddenLine xmlns:a14="http://schemas.microsoft.com/office/drawing/2010/main" xmlns="" w="9525">
+                  <a14:hiddenLine xmlns="" xmlns:a14="http://schemas.microsoft.com/office/drawing/2010/main" w="9525">
                     <a:solidFill>
                       <a:srgbClr val="000000"/>
                     </a:solidFill>
@@ -11892,7 +11893,7 @@
               </a:ln>
               <a:extLst>
                 <a:ext uri="{91240B29-F687-4f45-9708-019B960494DF}">
-                  <a14:hiddenLine xmlns:a14="http://schemas.microsoft.com/office/drawing/2010/main" xmlns="" w="9525">
+                  <a14:hiddenLine xmlns="" xmlns:a14="http://schemas.microsoft.com/office/drawing/2010/main" w="9525">
                     <a:solidFill>
                       <a:srgbClr val="000000"/>
                     </a:solidFill>
@@ -11982,7 +11983,7 @@
               </a:ln>
               <a:extLst>
                 <a:ext uri="{91240B29-F687-4f45-9708-019B960494DF}">
-                  <a14:hiddenLine xmlns:a14="http://schemas.microsoft.com/office/drawing/2010/main" xmlns="" w="9525">
+                  <a14:hiddenLine xmlns="" xmlns:a14="http://schemas.microsoft.com/office/drawing/2010/main" w="9525">
                     <a:solidFill>
                       <a:srgbClr val="000000"/>
                     </a:solidFill>
@@ -12050,7 +12051,7 @@
               </a:ln>
               <a:extLst>
                 <a:ext uri="{91240B29-F687-4f45-9708-019B960494DF}">
-                  <a14:hiddenLine xmlns:a14="http://schemas.microsoft.com/office/drawing/2010/main" xmlns="" w="9525">
+                  <a14:hiddenLine xmlns="" xmlns:a14="http://schemas.microsoft.com/office/drawing/2010/main" w="9525">
                     <a:solidFill>
                       <a:srgbClr val="000000"/>
                     </a:solidFill>
@@ -12140,7 +12141,7 @@
               </a:ln>
               <a:extLst>
                 <a:ext uri="{91240B29-F687-4f45-9708-019B960494DF}">
-                  <a14:hiddenLine xmlns:a14="http://schemas.microsoft.com/office/drawing/2010/main" xmlns="" w="9525">
+                  <a14:hiddenLine xmlns="" xmlns:a14="http://schemas.microsoft.com/office/drawing/2010/main" w="9525">
                     <a:solidFill>
                       <a:srgbClr val="000000"/>
                     </a:solidFill>
@@ -12208,7 +12209,7 @@
               </a:ln>
               <a:extLst>
                 <a:ext uri="{91240B29-F687-4f45-9708-019B960494DF}">
-                  <a14:hiddenLine xmlns:a14="http://schemas.microsoft.com/office/drawing/2010/main" xmlns="" w="9525">
+                  <a14:hiddenLine xmlns="" xmlns:a14="http://schemas.microsoft.com/office/drawing/2010/main" w="9525">
                     <a:solidFill>
                       <a:srgbClr val="000000"/>
                     </a:solidFill>
@@ -12298,7 +12299,7 @@
               </a:ln>
               <a:extLst>
                 <a:ext uri="{91240B29-F687-4f45-9708-019B960494DF}">
-                  <a14:hiddenLine xmlns:a14="http://schemas.microsoft.com/office/drawing/2010/main" xmlns="" w="9525">
+                  <a14:hiddenLine xmlns="" xmlns:a14="http://schemas.microsoft.com/office/drawing/2010/main" w="9525">
                     <a:solidFill>
                       <a:srgbClr val="000000"/>
                     </a:solidFill>
@@ -12332,7 +12333,7 @@
               </a:ln>
               <a:extLst>
                 <a:ext uri="{91240B29-F687-4f45-9708-019B960494DF}">
-                  <a14:hiddenLine xmlns:a14="http://schemas.microsoft.com/office/drawing/2010/main" xmlns="" w="9525">
+                  <a14:hiddenLine xmlns="" xmlns:a14="http://schemas.microsoft.com/office/drawing/2010/main" w="9525">
                     <a:solidFill>
                       <a:srgbClr val="000000"/>
                     </a:solidFill>
@@ -12472,7 +12473,7 @@
           <a:p>
             <a:fld id="{EC4347D3-4C9A-C240-8F14-750059DFEEB0}" type="datetimeFigureOut">
               <a:rPr lang="en-US" smtClean="0"/>
-              <a:t>3/10/26</a:t>
+              <a:t>3/17/26</a:t>
             </a:fld>
             <a:endParaRPr lang="en-US"/>
           </a:p>
@@ -13160,6 +13161,178 @@
 </p:sld>
 </file>
 
+<file path=ppt/slides/slide11.xml><?xml version="1.0" encoding="utf-8"?>
+<p:sld xmlns:a="http://schemas.openxmlformats.org/drawingml/2006/main" xmlns:r="http://schemas.openxmlformats.org/officeDocument/2006/relationships" xmlns:p="http://schemas.openxmlformats.org/presentationml/2006/main">
+  <p:cSld>
+    <p:spTree>
+      <p:nvGrpSpPr>
+        <p:cNvPr id="1" name="">
+          <a:extLst>
+            <a:ext uri="{FF2B5EF4-FFF2-40B4-BE49-F238E27FC236}">
+              <a16:creationId xmlns:a16="http://schemas.microsoft.com/office/drawing/2014/main" id="{59D908CB-6E9A-7433-4B0D-6E68FE22349C}"/>
+            </a:ext>
+          </a:extLst>
+        </p:cNvPr>
+        <p:cNvGrpSpPr/>
+        <p:nvPr/>
+      </p:nvGrpSpPr>
+      <p:grpSpPr>
+        <a:xfrm>
+          <a:off x="0" y="0"/>
+          <a:ext cx="0" cy="0"/>
+          <a:chOff x="0" y="0"/>
+          <a:chExt cx="0" cy="0"/>
+        </a:xfrm>
+      </p:grpSpPr>
+      <p:sp>
+        <p:nvSpPr>
+          <p:cNvPr id="6146" name="Rectangle 2">
+            <a:extLst>
+              <a:ext uri="{FF2B5EF4-FFF2-40B4-BE49-F238E27FC236}">
+                <a16:creationId xmlns:a16="http://schemas.microsoft.com/office/drawing/2014/main" id="{CF1FF0CC-62B2-3FA0-22DF-D47ABC8FFF8A}"/>
+              </a:ext>
+            </a:extLst>
+          </p:cNvPr>
+          <p:cNvSpPr>
+            <a:spLocks noGrp="1" noChangeArrowheads="1"/>
+          </p:cNvSpPr>
+          <p:nvPr>
+            <p:ph type="title"/>
+            <p:custDataLst>
+              <p:tags r:id="rId1"/>
+            </p:custDataLst>
+          </p:nvPr>
+        </p:nvSpPr>
+        <p:spPr>
+          <a:xfrm>
+            <a:off x="1141413" y="284084"/>
+            <a:ext cx="9905998" cy="620791"/>
+          </a:xfrm>
+        </p:spPr>
+        <p:txBody>
+          <a:bodyPr/>
+          <a:lstStyle/>
+          <a:p>
+            <a:pPr algn="ctr"/>
+            <a:r>
+              <a:rPr lang="en-US" dirty="0"/>
+              <a:t>Lecture 11: 3/17/26</a:t>
+            </a:r>
+          </a:p>
+        </p:txBody>
+      </p:sp>
+      <p:sp>
+        <p:nvSpPr>
+          <p:cNvPr id="6147" name="Rectangle 3">
+            <a:extLst>
+              <a:ext uri="{FF2B5EF4-FFF2-40B4-BE49-F238E27FC236}">
+                <a16:creationId xmlns:a16="http://schemas.microsoft.com/office/drawing/2014/main" id="{2AF66F60-D8E3-400A-76FA-92CD5C53E4C6}"/>
+              </a:ext>
+            </a:extLst>
+          </p:cNvPr>
+          <p:cNvSpPr>
+            <a:spLocks noGrp="1" noChangeArrowheads="1"/>
+          </p:cNvSpPr>
+          <p:nvPr>
+            <p:ph idx="1"/>
+            <p:custDataLst>
+              <p:tags r:id="rId2"/>
+            </p:custDataLst>
+          </p:nvPr>
+        </p:nvSpPr>
+        <p:spPr>
+          <a:xfrm>
+            <a:off x="1021404" y="1123950"/>
+            <a:ext cx="10204315" cy="5149850"/>
+          </a:xfrm>
+        </p:spPr>
+        <p:txBody>
+          <a:bodyPr>
+            <a:normAutofit lnSpcReduction="10000"/>
+          </a:bodyPr>
+          <a:lstStyle/>
+          <a:p>
+            <a:r>
+              <a:rPr lang="en-US" dirty="0"/>
+              <a:t>Happy March!</a:t>
+            </a:r>
+          </a:p>
+          <a:p>
+            <a:r>
+              <a:rPr lang="en-US" dirty="0"/>
+              <a:t>Attendance checks are back in full force today…</a:t>
+            </a:r>
+          </a:p>
+          <a:p>
+            <a:r>
+              <a:rPr lang="en-US" dirty="0"/>
+              <a:t>This week will be a normal week of full lectures (yay!)</a:t>
+            </a:r>
+          </a:p>
+          <a:p>
+            <a:r>
+              <a:rPr lang="en-US" dirty="0"/>
+              <a:t>You should have a project group now. If you don’t sign up immediately</a:t>
+            </a:r>
+          </a:p>
+          <a:p>
+            <a:pPr lvl="1"/>
+            <a:r>
+              <a:rPr lang="en-US" dirty="0"/>
+              <a:t>Start learning your algorithm and implementing in the three languages</a:t>
+            </a:r>
+          </a:p>
+          <a:p>
+            <a:pPr lvl="1"/>
+            <a:r>
+              <a:rPr lang="en-US" dirty="0"/>
+              <a:t>Three implementations are due early (4/7/26)</a:t>
+            </a:r>
+          </a:p>
+          <a:p>
+            <a:r>
+              <a:rPr lang="en-US" dirty="0"/>
+              <a:t>You took your quiz on Thursday!</a:t>
+            </a:r>
+          </a:p>
+          <a:p>
+            <a:pPr lvl="1"/>
+            <a:r>
+              <a:rPr lang="en-US" dirty="0"/>
+              <a:t>We were going to grade it yesterday but…</a:t>
+            </a:r>
+          </a:p>
+          <a:p>
+            <a:pPr lvl="1"/>
+            <a:r>
+              <a:rPr lang="en-US" dirty="0"/>
+              <a:t>Should be graded Wednesday evening</a:t>
+            </a:r>
+          </a:p>
+          <a:p>
+            <a:r>
+              <a:rPr lang="en-US" dirty="0"/>
+              <a:t>Today we will continue discussing Computational Geometry (small chance we finish)</a:t>
+            </a:r>
+          </a:p>
+          <a:p>
+            <a:endParaRPr lang="en-US" dirty="0"/>
+          </a:p>
+        </p:txBody>
+      </p:sp>
+    </p:spTree>
+    <p:extLst>
+      <p:ext uri="{BB962C8B-B14F-4D97-AF65-F5344CB8AC3E}">
+        <p14:creationId xmlns:p14="http://schemas.microsoft.com/office/powerpoint/2010/main" val="728990647"/>
+      </p:ext>
+    </p:extLst>
+  </p:cSld>
+  <p:clrMapOvr>
+    <a:masterClrMapping/>
+  </p:clrMapOvr>
+</p:sld>
+</file>
+
 <file path=ppt/slides/slide2.xml><?xml version="1.0" encoding="utf-8"?>
 <p:sld xmlns:a="http://schemas.openxmlformats.org/drawingml/2006/main" xmlns:r="http://schemas.openxmlformats.org/officeDocument/2006/relationships" xmlns:p="http://schemas.openxmlformats.org/presentationml/2006/main">
   <p:cSld>
@@ -14566,7 +14739,19 @@
 </p:tagLst>
 </file>
 
+<file path=ppt/tags/tag19.xml><?xml version="1.0" encoding="utf-8"?>
+<p:tagLst xmlns:a="http://schemas.openxmlformats.org/drawingml/2006/main" xmlns:r="http://schemas.openxmlformats.org/officeDocument/2006/relationships" xmlns:p="http://schemas.openxmlformats.org/presentationml/2006/main">
+  <p:tag name="_INSTRUCTOR VIEW19C14C36-AC8E-43BC-9DB6-C2AAF774C7DC|PANE__TAG" val="_"/>
+</p:tagLst>
+</file>
+
 <file path=ppt/tags/tag2.xml><?xml version="1.0" encoding="utf-8"?>
+<p:tagLst xmlns:a="http://schemas.openxmlformats.org/drawingml/2006/main" xmlns:r="http://schemas.openxmlformats.org/officeDocument/2006/relationships" xmlns:p="http://schemas.openxmlformats.org/presentationml/2006/main">
+  <p:tag name="_INSTRUCTOR VIEW19C14C36-AC8E-43BC-9DB6-C2AAF774C7DC|PANE__TAG" val="_"/>
+</p:tagLst>
+</file>
+
+<file path=ppt/tags/tag20.xml><?xml version="1.0" encoding="utf-8"?>
 <p:tagLst xmlns:a="http://schemas.openxmlformats.org/drawingml/2006/main" xmlns:r="http://schemas.openxmlformats.org/officeDocument/2006/relationships" xmlns:p="http://schemas.openxmlformats.org/presentationml/2006/main">
   <p:tag name="_INSTRUCTOR VIEW19C14C36-AC8E-43BC-9DB6-C2AAF774C7DC|PANE__TAG" val="_"/>
 </p:tagLst>

--- a/slides/00-DailyAnnouncements.pptx
+++ b/slides/00-DailyAnnouncements.pptx
@@ -5,7 +5,7 @@
     <p:sldMasterId id="2147484006" r:id="rId1"/>
   </p:sldMasterIdLst>
   <p:notesMasterIdLst>
-    <p:notesMasterId r:id="rId13"/>
+    <p:notesMasterId r:id="rId14"/>
   </p:notesMasterIdLst>
   <p:sldIdLst>
     <p:sldId id="256" r:id="rId2"/>
@@ -19,6 +19,7 @@
     <p:sldId id="512" r:id="rId10"/>
     <p:sldId id="513" r:id="rId11"/>
     <p:sldId id="514" r:id="rId12"/>
+    <p:sldId id="515" r:id="rId13"/>
   </p:sldIdLst>
   <p:sldSz cx="12192000" cy="6858000"/>
   <p:notesSz cx="6858000" cy="9144000"/>
@@ -207,7 +208,7 @@
           <a:p>
             <a:fld id="{C5B45307-6ED4-B142-BD64-10F739779302}" type="datetimeFigureOut">
               <a:rPr lang="en-US" smtClean="0"/>
-              <a:t>3/17/26</a:t>
+              <a:t>3/19/26</a:t>
             </a:fld>
             <a:endParaRPr lang="en-US"/>
           </a:p>
@@ -615,7 +616,7 @@
           <a:noFill/>
           <a:extLst>
             <a:ext uri="{909E8E84-426E-40dd-AFC4-6F175D3DCCD1}">
-              <a14:hiddenFill xmlns="" xmlns:a14="http://schemas.microsoft.com/office/drawing/2010/main">
+              <a14:hiddenFill xmlns:a14="http://schemas.microsoft.com/office/drawing/2010/main" xmlns="">
                 <a:solidFill>
                   <a:srgbClr val="FFFFFF"/>
                 </a:solidFill>
@@ -674,7 +675,7 @@
             </a:ln>
             <a:extLst>
               <a:ext uri="{91240B29-F687-4f45-9708-019B960494DF}">
-                <a14:hiddenLine xmlns="" xmlns:a14="http://schemas.microsoft.com/office/drawing/2010/main" w="9525">
+                <a14:hiddenLine xmlns:a14="http://schemas.microsoft.com/office/drawing/2010/main" xmlns="" w="9525">
                   <a:solidFill>
                     <a:srgbClr val="000000"/>
                   </a:solidFill>
@@ -764,7 +765,7 @@
             </a:ln>
             <a:extLst>
               <a:ext uri="{91240B29-F687-4f45-9708-019B960494DF}">
-                <a14:hiddenLine xmlns="" xmlns:a14="http://schemas.microsoft.com/office/drawing/2010/main" w="9525">
+                <a14:hiddenLine xmlns:a14="http://schemas.microsoft.com/office/drawing/2010/main" xmlns="" w="9525">
                   <a:solidFill>
                     <a:srgbClr val="000000"/>
                   </a:solidFill>
@@ -854,7 +855,7 @@
             </a:ln>
             <a:extLst>
               <a:ext uri="{91240B29-F687-4f45-9708-019B960494DF}">
-                <a14:hiddenLine xmlns="" xmlns:a14="http://schemas.microsoft.com/office/drawing/2010/main" w="9525">
+                <a14:hiddenLine xmlns:a14="http://schemas.microsoft.com/office/drawing/2010/main" xmlns="" w="9525">
                   <a:solidFill>
                     <a:srgbClr val="000000"/>
                   </a:solidFill>
@@ -888,7 +889,7 @@
             </a:ln>
             <a:extLst>
               <a:ext uri="{91240B29-F687-4f45-9708-019B960494DF}">
-                <a14:hiddenLine xmlns="" xmlns:a14="http://schemas.microsoft.com/office/drawing/2010/main" w="9525">
+                <a14:hiddenLine xmlns:a14="http://schemas.microsoft.com/office/drawing/2010/main" xmlns="" w="9525">
                   <a:solidFill>
                     <a:srgbClr val="000000"/>
                   </a:solidFill>
@@ -978,7 +979,7 @@
             </a:ln>
             <a:extLst>
               <a:ext uri="{91240B29-F687-4f45-9708-019B960494DF}">
-                <a14:hiddenLine xmlns="" xmlns:a14="http://schemas.microsoft.com/office/drawing/2010/main" w="9525">
+                <a14:hiddenLine xmlns:a14="http://schemas.microsoft.com/office/drawing/2010/main" xmlns="" w="9525">
                   <a:solidFill>
                     <a:srgbClr val="000000"/>
                   </a:solidFill>
@@ -1040,7 +1041,7 @@
             </a:ln>
             <a:extLst>
               <a:ext uri="{91240B29-F687-4f45-9708-019B960494DF}">
-                <a14:hiddenLine xmlns="" xmlns:a14="http://schemas.microsoft.com/office/drawing/2010/main" w="9525">
+                <a14:hiddenLine xmlns:a14="http://schemas.microsoft.com/office/drawing/2010/main" xmlns="" w="9525">
                   <a:solidFill>
                     <a:srgbClr val="000000"/>
                   </a:solidFill>
@@ -1102,7 +1103,7 @@
             </a:ln>
             <a:extLst>
               <a:ext uri="{91240B29-F687-4f45-9708-019B960494DF}">
-                <a14:hiddenLine xmlns="" xmlns:a14="http://schemas.microsoft.com/office/drawing/2010/main" w="9525">
+                <a14:hiddenLine xmlns:a14="http://schemas.microsoft.com/office/drawing/2010/main" xmlns="" w="9525">
                   <a:solidFill>
                     <a:srgbClr val="000000"/>
                   </a:solidFill>
@@ -1192,7 +1193,7 @@
             </a:ln>
             <a:extLst>
               <a:ext uri="{91240B29-F687-4f45-9708-019B960494DF}">
-                <a14:hiddenLine xmlns="" xmlns:a14="http://schemas.microsoft.com/office/drawing/2010/main" w="9525">
+                <a14:hiddenLine xmlns:a14="http://schemas.microsoft.com/office/drawing/2010/main" xmlns="" w="9525">
                   <a:solidFill>
                     <a:srgbClr val="000000"/>
                   </a:solidFill>
@@ -1254,7 +1255,7 @@
             </a:ln>
             <a:extLst>
               <a:ext uri="{91240B29-F687-4f45-9708-019B960494DF}">
-                <a14:hiddenLine xmlns="" xmlns:a14="http://schemas.microsoft.com/office/drawing/2010/main" w="9525">
+                <a14:hiddenLine xmlns:a14="http://schemas.microsoft.com/office/drawing/2010/main" xmlns="" w="9525">
                   <a:solidFill>
                     <a:srgbClr val="000000"/>
                   </a:solidFill>
@@ -1316,7 +1317,7 @@
             </a:ln>
             <a:extLst>
               <a:ext uri="{91240B29-F687-4f45-9708-019B960494DF}">
-                <a14:hiddenLine xmlns="" xmlns:a14="http://schemas.microsoft.com/office/drawing/2010/main" w="9525">
+                <a14:hiddenLine xmlns:a14="http://schemas.microsoft.com/office/drawing/2010/main" xmlns="" w="9525">
                   <a:solidFill>
                     <a:srgbClr val="000000"/>
                   </a:solidFill>
@@ -1406,7 +1407,7 @@
             </a:ln>
             <a:extLst>
               <a:ext uri="{91240B29-F687-4f45-9708-019B960494DF}">
-                <a14:hiddenLine xmlns="" xmlns:a14="http://schemas.microsoft.com/office/drawing/2010/main" w="9525">
+                <a14:hiddenLine xmlns:a14="http://schemas.microsoft.com/office/drawing/2010/main" xmlns="" w="9525">
                   <a:solidFill>
                     <a:srgbClr val="000000"/>
                   </a:solidFill>
@@ -1496,7 +1497,7 @@
             </a:ln>
             <a:extLst>
               <a:ext uri="{91240B29-F687-4f45-9708-019B960494DF}">
-                <a14:hiddenLine xmlns="" xmlns:a14="http://schemas.microsoft.com/office/drawing/2010/main" w="9525">
+                <a14:hiddenLine xmlns:a14="http://schemas.microsoft.com/office/drawing/2010/main" xmlns="" w="9525">
                   <a:solidFill>
                     <a:srgbClr val="000000"/>
                   </a:solidFill>
@@ -1558,7 +1559,7 @@
             </a:ln>
             <a:extLst>
               <a:ext uri="{91240B29-F687-4f45-9708-019B960494DF}">
-                <a14:hiddenLine xmlns="" xmlns:a14="http://schemas.microsoft.com/office/drawing/2010/main" w="9525">
+                <a14:hiddenLine xmlns:a14="http://schemas.microsoft.com/office/drawing/2010/main" xmlns="" w="9525">
                   <a:solidFill>
                     <a:srgbClr val="000000"/>
                   </a:solidFill>
@@ -1668,7 +1669,7 @@
             </a:ln>
             <a:extLst>
               <a:ext uri="{91240B29-F687-4f45-9708-019B960494DF}">
-                <a14:hiddenLine xmlns="" xmlns:a14="http://schemas.microsoft.com/office/drawing/2010/main" w="9525">
+                <a14:hiddenLine xmlns:a14="http://schemas.microsoft.com/office/drawing/2010/main" xmlns="" w="9525">
                   <a:solidFill>
                     <a:srgbClr val="000000"/>
                   </a:solidFill>
@@ -1730,7 +1731,7 @@
             </a:ln>
             <a:extLst>
               <a:ext uri="{91240B29-F687-4f45-9708-019B960494DF}">
-                <a14:hiddenLine xmlns="" xmlns:a14="http://schemas.microsoft.com/office/drawing/2010/main" w="9525">
+                <a14:hiddenLine xmlns:a14="http://schemas.microsoft.com/office/drawing/2010/main" xmlns="" w="9525">
                   <a:solidFill>
                     <a:srgbClr val="000000"/>
                   </a:solidFill>
@@ -1820,7 +1821,7 @@
             </a:ln>
             <a:extLst>
               <a:ext uri="{91240B29-F687-4f45-9708-019B960494DF}">
-                <a14:hiddenLine xmlns="" xmlns:a14="http://schemas.microsoft.com/office/drawing/2010/main" w="9525">
+                <a14:hiddenLine xmlns:a14="http://schemas.microsoft.com/office/drawing/2010/main" xmlns="" w="9525">
                   <a:solidFill>
                     <a:srgbClr val="000000"/>
                   </a:solidFill>
@@ -1910,7 +1911,7 @@
             </a:ln>
             <a:extLst>
               <a:ext uri="{91240B29-F687-4f45-9708-019B960494DF}">
-                <a14:hiddenLine xmlns="" xmlns:a14="http://schemas.microsoft.com/office/drawing/2010/main" w="9525">
+                <a14:hiddenLine xmlns:a14="http://schemas.microsoft.com/office/drawing/2010/main" xmlns="" w="9525">
                   <a:solidFill>
                     <a:srgbClr val="000000"/>
                   </a:solidFill>
@@ -1972,7 +1973,7 @@
             </a:ln>
             <a:extLst>
               <a:ext uri="{91240B29-F687-4f45-9708-019B960494DF}">
-                <a14:hiddenLine xmlns="" xmlns:a14="http://schemas.microsoft.com/office/drawing/2010/main" w="9525">
+                <a14:hiddenLine xmlns:a14="http://schemas.microsoft.com/office/drawing/2010/main" xmlns="" w="9525">
                   <a:solidFill>
                     <a:srgbClr val="000000"/>
                   </a:solidFill>
@@ -2062,7 +2063,7 @@
             </a:ln>
             <a:extLst>
               <a:ext uri="{91240B29-F687-4f45-9708-019B960494DF}">
-                <a14:hiddenLine xmlns="" xmlns:a14="http://schemas.microsoft.com/office/drawing/2010/main" w="9525">
+                <a14:hiddenLine xmlns:a14="http://schemas.microsoft.com/office/drawing/2010/main" xmlns="" w="9525">
                   <a:solidFill>
                     <a:srgbClr val="000000"/>
                   </a:solidFill>
@@ -2152,7 +2153,7 @@
             </a:ln>
             <a:extLst>
               <a:ext uri="{91240B29-F687-4f45-9708-019B960494DF}">
-                <a14:hiddenLine xmlns="" xmlns:a14="http://schemas.microsoft.com/office/drawing/2010/main" w="9525">
+                <a14:hiddenLine xmlns:a14="http://schemas.microsoft.com/office/drawing/2010/main" xmlns="" w="9525">
                   <a:solidFill>
                     <a:srgbClr val="000000"/>
                   </a:solidFill>
@@ -2208,7 +2209,7 @@
             </a:ln>
             <a:extLst>
               <a:ext uri="{91240B29-F687-4f45-9708-019B960494DF}">
-                <a14:hiddenLine xmlns="" xmlns:a14="http://schemas.microsoft.com/office/drawing/2010/main" w="9525">
+                <a14:hiddenLine xmlns:a14="http://schemas.microsoft.com/office/drawing/2010/main" xmlns="" w="9525">
                   <a:solidFill>
                     <a:srgbClr val="000000"/>
                   </a:solidFill>
@@ -2298,7 +2299,7 @@
             </a:ln>
             <a:extLst>
               <a:ext uri="{91240B29-F687-4f45-9708-019B960494DF}">
-                <a14:hiddenLine xmlns="" xmlns:a14="http://schemas.microsoft.com/office/drawing/2010/main" w="9525">
+                <a14:hiddenLine xmlns:a14="http://schemas.microsoft.com/office/drawing/2010/main" xmlns="" w="9525">
                   <a:solidFill>
                     <a:srgbClr val="000000"/>
                   </a:solidFill>
@@ -2354,7 +2355,7 @@
             </a:ln>
             <a:extLst>
               <a:ext uri="{91240B29-F687-4f45-9708-019B960494DF}">
-                <a14:hiddenLine xmlns="" xmlns:a14="http://schemas.microsoft.com/office/drawing/2010/main" w="9525">
+                <a14:hiddenLine xmlns:a14="http://schemas.microsoft.com/office/drawing/2010/main" xmlns="" w="9525">
                   <a:solidFill>
                     <a:srgbClr val="000000"/>
                   </a:solidFill>
@@ -2444,7 +2445,7 @@
             </a:ln>
             <a:extLst>
               <a:ext uri="{91240B29-F687-4f45-9708-019B960494DF}">
-                <a14:hiddenLine xmlns="" xmlns:a14="http://schemas.microsoft.com/office/drawing/2010/main" w="9525">
+                <a14:hiddenLine xmlns:a14="http://schemas.microsoft.com/office/drawing/2010/main" xmlns="" w="9525">
                   <a:solidFill>
                     <a:srgbClr val="000000"/>
                   </a:solidFill>
@@ -2512,7 +2513,7 @@
             </a:ln>
             <a:extLst>
               <a:ext uri="{91240B29-F687-4f45-9708-019B960494DF}">
-                <a14:hiddenLine xmlns="" xmlns:a14="http://schemas.microsoft.com/office/drawing/2010/main" w="9525">
+                <a14:hiddenLine xmlns:a14="http://schemas.microsoft.com/office/drawing/2010/main" xmlns="" w="9525">
                   <a:solidFill>
                     <a:srgbClr val="000000"/>
                   </a:solidFill>
@@ -2602,7 +2603,7 @@
             </a:ln>
             <a:extLst>
               <a:ext uri="{91240B29-F687-4f45-9708-019B960494DF}">
-                <a14:hiddenLine xmlns="" xmlns:a14="http://schemas.microsoft.com/office/drawing/2010/main" w="9525">
+                <a14:hiddenLine xmlns:a14="http://schemas.microsoft.com/office/drawing/2010/main" xmlns="" w="9525">
                   <a:solidFill>
                     <a:srgbClr val="000000"/>
                   </a:solidFill>
@@ -2670,7 +2671,7 @@
             </a:ln>
             <a:extLst>
               <a:ext uri="{91240B29-F687-4f45-9708-019B960494DF}">
-                <a14:hiddenLine xmlns="" xmlns:a14="http://schemas.microsoft.com/office/drawing/2010/main" w="9525">
+                <a14:hiddenLine xmlns:a14="http://schemas.microsoft.com/office/drawing/2010/main" xmlns="" w="9525">
                   <a:solidFill>
                     <a:srgbClr val="000000"/>
                   </a:solidFill>
@@ -2760,7 +2761,7 @@
             </a:ln>
             <a:extLst>
               <a:ext uri="{91240B29-F687-4f45-9708-019B960494DF}">
-                <a14:hiddenLine xmlns="" xmlns:a14="http://schemas.microsoft.com/office/drawing/2010/main" w="9525">
+                <a14:hiddenLine xmlns:a14="http://schemas.microsoft.com/office/drawing/2010/main" xmlns="" w="9525">
                   <a:solidFill>
                     <a:srgbClr val="000000"/>
                   </a:solidFill>
@@ -2794,7 +2795,7 @@
             </a:ln>
             <a:extLst>
               <a:ext uri="{91240B29-F687-4f45-9708-019B960494DF}">
-                <a14:hiddenLine xmlns="" xmlns:a14="http://schemas.microsoft.com/office/drawing/2010/main" w="9525">
+                <a14:hiddenLine xmlns:a14="http://schemas.microsoft.com/office/drawing/2010/main" xmlns="" w="9525">
                   <a:solidFill>
                     <a:srgbClr val="000000"/>
                   </a:solidFill>
@@ -2884,7 +2885,7 @@
             </a:ln>
             <a:extLst>
               <a:ext uri="{91240B29-F687-4f45-9708-019B960494DF}">
-                <a14:hiddenLine xmlns="" xmlns:a14="http://schemas.microsoft.com/office/drawing/2010/main" w="9525">
+                <a14:hiddenLine xmlns:a14="http://schemas.microsoft.com/office/drawing/2010/main" xmlns="" w="9525">
                   <a:solidFill>
                     <a:srgbClr val="000000"/>
                   </a:solidFill>
@@ -2946,7 +2947,7 @@
             </a:ln>
             <a:extLst>
               <a:ext uri="{91240B29-F687-4f45-9708-019B960494DF}">
-                <a14:hiddenLine xmlns="" xmlns:a14="http://schemas.microsoft.com/office/drawing/2010/main" w="9525">
+                <a14:hiddenLine xmlns:a14="http://schemas.microsoft.com/office/drawing/2010/main" xmlns="" w="9525">
                   <a:solidFill>
                     <a:srgbClr val="000000"/>
                   </a:solidFill>
@@ -3008,7 +3009,7 @@
             </a:ln>
             <a:extLst>
               <a:ext uri="{91240B29-F687-4f45-9708-019B960494DF}">
-                <a14:hiddenLine xmlns="" xmlns:a14="http://schemas.microsoft.com/office/drawing/2010/main" w="9525">
+                <a14:hiddenLine xmlns:a14="http://schemas.microsoft.com/office/drawing/2010/main" xmlns="" w="9525">
                   <a:solidFill>
                     <a:srgbClr val="000000"/>
                   </a:solidFill>
@@ -3098,7 +3099,7 @@
             </a:ln>
             <a:extLst>
               <a:ext uri="{91240B29-F687-4f45-9708-019B960494DF}">
-                <a14:hiddenLine xmlns="" xmlns:a14="http://schemas.microsoft.com/office/drawing/2010/main" w="9525">
+                <a14:hiddenLine xmlns:a14="http://schemas.microsoft.com/office/drawing/2010/main" xmlns="" w="9525">
                   <a:solidFill>
                     <a:srgbClr val="000000"/>
                   </a:solidFill>
@@ -3166,7 +3167,7 @@
             </a:ln>
             <a:extLst>
               <a:ext uri="{91240B29-F687-4f45-9708-019B960494DF}">
-                <a14:hiddenLine xmlns="" xmlns:a14="http://schemas.microsoft.com/office/drawing/2010/main" w="9525">
+                <a14:hiddenLine xmlns:a14="http://schemas.microsoft.com/office/drawing/2010/main" xmlns="" w="9525">
                   <a:solidFill>
                     <a:srgbClr val="000000"/>
                   </a:solidFill>
@@ -3228,7 +3229,7 @@
             </a:ln>
             <a:extLst>
               <a:ext uri="{91240B29-F687-4f45-9708-019B960494DF}">
-                <a14:hiddenLine xmlns="" xmlns:a14="http://schemas.microsoft.com/office/drawing/2010/main" w="9525">
+                <a14:hiddenLine xmlns:a14="http://schemas.microsoft.com/office/drawing/2010/main" xmlns="" w="9525">
                   <a:solidFill>
                     <a:srgbClr val="000000"/>
                   </a:solidFill>
@@ -3318,7 +3319,7 @@
             </a:ln>
             <a:extLst>
               <a:ext uri="{91240B29-F687-4f45-9708-019B960494DF}">
-                <a14:hiddenLine xmlns="" xmlns:a14="http://schemas.microsoft.com/office/drawing/2010/main" w="9525">
+                <a14:hiddenLine xmlns:a14="http://schemas.microsoft.com/office/drawing/2010/main" xmlns="" w="9525">
                   <a:solidFill>
                     <a:srgbClr val="000000"/>
                   </a:solidFill>
@@ -3380,7 +3381,7 @@
             </a:ln>
             <a:extLst>
               <a:ext uri="{91240B29-F687-4f45-9708-019B960494DF}">
-                <a14:hiddenLine xmlns="" xmlns:a14="http://schemas.microsoft.com/office/drawing/2010/main" w="9525">
+                <a14:hiddenLine xmlns:a14="http://schemas.microsoft.com/office/drawing/2010/main" xmlns="" w="9525">
                   <a:solidFill>
                     <a:srgbClr val="000000"/>
                   </a:solidFill>
@@ -3470,7 +3471,7 @@
             </a:ln>
             <a:extLst>
               <a:ext uri="{91240B29-F687-4f45-9708-019B960494DF}">
-                <a14:hiddenLine xmlns="" xmlns:a14="http://schemas.microsoft.com/office/drawing/2010/main" w="9525">
+                <a14:hiddenLine xmlns:a14="http://schemas.microsoft.com/office/drawing/2010/main" xmlns="" w="9525">
                   <a:solidFill>
                     <a:srgbClr val="000000"/>
                   </a:solidFill>
@@ -3532,7 +3533,7 @@
             </a:ln>
             <a:extLst>
               <a:ext uri="{91240B29-F687-4f45-9708-019B960494DF}">
-                <a14:hiddenLine xmlns="" xmlns:a14="http://schemas.microsoft.com/office/drawing/2010/main" w="9525">
+                <a14:hiddenLine xmlns:a14="http://schemas.microsoft.com/office/drawing/2010/main" xmlns="" w="9525">
                   <a:solidFill>
                     <a:srgbClr val="000000"/>
                   </a:solidFill>
@@ -3622,7 +3623,7 @@
             </a:ln>
             <a:extLst>
               <a:ext uri="{91240B29-F687-4f45-9708-019B960494DF}">
-                <a14:hiddenLine xmlns="" xmlns:a14="http://schemas.microsoft.com/office/drawing/2010/main" w="9525">
+                <a14:hiddenLine xmlns:a14="http://schemas.microsoft.com/office/drawing/2010/main" xmlns="" w="9525">
                   <a:solidFill>
                     <a:srgbClr val="000000"/>
                   </a:solidFill>
@@ -3656,7 +3657,7 @@
             </a:ln>
             <a:extLst>
               <a:ext uri="{91240B29-F687-4f45-9708-019B960494DF}">
-                <a14:hiddenLine xmlns="" xmlns:a14="http://schemas.microsoft.com/office/drawing/2010/main" w="9525">
+                <a14:hiddenLine xmlns:a14="http://schemas.microsoft.com/office/drawing/2010/main" xmlns="" w="9525">
                   <a:solidFill>
                     <a:srgbClr val="000000"/>
                   </a:solidFill>
@@ -3721,7 +3722,7 @@
             </a:ln>
             <a:extLst>
               <a:ext uri="{91240B29-F687-4f45-9708-019B960494DF}">
-                <a14:hiddenLine xmlns="" xmlns:a14="http://schemas.microsoft.com/office/drawing/2010/main" w="9525">
+                <a14:hiddenLine xmlns:a14="http://schemas.microsoft.com/office/drawing/2010/main" xmlns="" w="9525">
                   <a:solidFill>
                     <a:srgbClr val="000000"/>
                   </a:solidFill>
@@ -3811,7 +3812,7 @@
             </a:ln>
             <a:extLst>
               <a:ext uri="{91240B29-F687-4f45-9708-019B960494DF}">
-                <a14:hiddenLine xmlns="" xmlns:a14="http://schemas.microsoft.com/office/drawing/2010/main" w="9525">
+                <a14:hiddenLine xmlns:a14="http://schemas.microsoft.com/office/drawing/2010/main" xmlns="" w="9525">
                   <a:solidFill>
                     <a:srgbClr val="000000"/>
                   </a:solidFill>
@@ -3873,7 +3874,7 @@
             </a:ln>
             <a:extLst>
               <a:ext uri="{91240B29-F687-4f45-9708-019B960494DF}">
-                <a14:hiddenLine xmlns="" xmlns:a14="http://schemas.microsoft.com/office/drawing/2010/main" w="9525">
+                <a14:hiddenLine xmlns:a14="http://schemas.microsoft.com/office/drawing/2010/main" xmlns="" w="9525">
                   <a:solidFill>
                     <a:srgbClr val="000000"/>
                   </a:solidFill>
@@ -3963,7 +3964,7 @@
             </a:ln>
             <a:extLst>
               <a:ext uri="{91240B29-F687-4f45-9708-019B960494DF}">
-                <a14:hiddenLine xmlns="" xmlns:a14="http://schemas.microsoft.com/office/drawing/2010/main" w="9525">
+                <a14:hiddenLine xmlns:a14="http://schemas.microsoft.com/office/drawing/2010/main" xmlns="" w="9525">
                   <a:solidFill>
                     <a:srgbClr val="000000"/>
                   </a:solidFill>
@@ -4053,7 +4054,7 @@
             </a:ln>
             <a:extLst>
               <a:ext uri="{91240B29-F687-4f45-9708-019B960494DF}">
-                <a14:hiddenLine xmlns="" xmlns:a14="http://schemas.microsoft.com/office/drawing/2010/main" w="9525">
+                <a14:hiddenLine xmlns:a14="http://schemas.microsoft.com/office/drawing/2010/main" xmlns="" w="9525">
                   <a:solidFill>
                     <a:srgbClr val="000000"/>
                   </a:solidFill>
@@ -4118,7 +4119,7 @@
             </a:ln>
             <a:extLst>
               <a:ext uri="{91240B29-F687-4f45-9708-019B960494DF}">
-                <a14:hiddenLine xmlns="" xmlns:a14="http://schemas.microsoft.com/office/drawing/2010/main" w="9525">
+                <a14:hiddenLine xmlns:a14="http://schemas.microsoft.com/office/drawing/2010/main" xmlns="" w="9525">
                   <a:solidFill>
                     <a:srgbClr val="000000"/>
                   </a:solidFill>
@@ -4180,7 +4181,7 @@
             </a:ln>
             <a:extLst>
               <a:ext uri="{91240B29-F687-4f45-9708-019B960494DF}">
-                <a14:hiddenLine xmlns="" xmlns:a14="http://schemas.microsoft.com/office/drawing/2010/main" w="9525">
+                <a14:hiddenLine xmlns:a14="http://schemas.microsoft.com/office/drawing/2010/main" xmlns="" w="9525">
                   <a:solidFill>
                     <a:srgbClr val="000000"/>
                   </a:solidFill>
@@ -4270,7 +4271,7 @@
             </a:ln>
             <a:extLst>
               <a:ext uri="{91240B29-F687-4f45-9708-019B960494DF}">
-                <a14:hiddenLine xmlns="" xmlns:a14="http://schemas.microsoft.com/office/drawing/2010/main" w="9525">
+                <a14:hiddenLine xmlns:a14="http://schemas.microsoft.com/office/drawing/2010/main" xmlns="" w="9525">
                   <a:solidFill>
                     <a:srgbClr val="000000"/>
                   </a:solidFill>
@@ -4360,7 +4361,7 @@
             </a:ln>
             <a:extLst>
               <a:ext uri="{91240B29-F687-4f45-9708-019B960494DF}">
-                <a14:hiddenLine xmlns="" xmlns:a14="http://schemas.microsoft.com/office/drawing/2010/main" w="9525">
+                <a14:hiddenLine xmlns:a14="http://schemas.microsoft.com/office/drawing/2010/main" xmlns="" w="9525">
                   <a:solidFill>
                     <a:srgbClr val="000000"/>
                   </a:solidFill>
@@ -4422,7 +4423,7 @@
             </a:ln>
             <a:extLst>
               <a:ext uri="{91240B29-F687-4f45-9708-019B960494DF}">
-                <a14:hiddenLine xmlns="" xmlns:a14="http://schemas.microsoft.com/office/drawing/2010/main" w="9525">
+                <a14:hiddenLine xmlns:a14="http://schemas.microsoft.com/office/drawing/2010/main" xmlns="" w="9525">
                   <a:solidFill>
                     <a:srgbClr val="000000"/>
                   </a:solidFill>
@@ -4542,7 +4543,7 @@
             </a:ln>
             <a:extLst>
               <a:ext uri="{91240B29-F687-4f45-9708-019B960494DF}">
-                <a14:hiddenLine xmlns="" xmlns:a14="http://schemas.microsoft.com/office/drawing/2010/main" w="9525">
+                <a14:hiddenLine xmlns:a14="http://schemas.microsoft.com/office/drawing/2010/main" xmlns="" w="9525">
                   <a:solidFill>
                     <a:srgbClr val="000000"/>
                   </a:solidFill>
@@ -4610,7 +4611,7 @@
             </a:ln>
             <a:extLst>
               <a:ext uri="{91240B29-F687-4f45-9708-019B960494DF}">
-                <a14:hiddenLine xmlns="" xmlns:a14="http://schemas.microsoft.com/office/drawing/2010/main" w="9525">
+                <a14:hiddenLine xmlns:a14="http://schemas.microsoft.com/office/drawing/2010/main" xmlns="" w="9525">
                   <a:solidFill>
                     <a:srgbClr val="000000"/>
                   </a:solidFill>
@@ -4700,7 +4701,7 @@
             </a:ln>
             <a:extLst>
               <a:ext uri="{91240B29-F687-4f45-9708-019B960494DF}">
-                <a14:hiddenLine xmlns="" xmlns:a14="http://schemas.microsoft.com/office/drawing/2010/main" w="9525">
+                <a14:hiddenLine xmlns:a14="http://schemas.microsoft.com/office/drawing/2010/main" xmlns="" w="9525">
                   <a:solidFill>
                     <a:srgbClr val="000000"/>
                   </a:solidFill>
@@ -4840,7 +4841,7 @@
           <a:p>
             <a:fld id="{EC4347D3-4C9A-C240-8F14-750059DFEEB0}" type="datetimeFigureOut">
               <a:rPr lang="en-US" smtClean="0"/>
-              <a:t>3/17/26</a:t>
+              <a:t>3/19/26</a:t>
             </a:fld>
             <a:endParaRPr lang="en-US"/>
           </a:p>
@@ -5107,7 +5108,7 @@
           <a:p>
             <a:fld id="{EC4347D3-4C9A-C240-8F14-750059DFEEB0}" type="datetimeFigureOut">
               <a:rPr lang="en-US" smtClean="0"/>
-              <a:t>3/17/26</a:t>
+              <a:t>3/19/26</a:t>
             </a:fld>
             <a:endParaRPr lang="en-US"/>
           </a:p>
@@ -5303,7 +5304,7 @@
           <a:p>
             <a:fld id="{EC4347D3-4C9A-C240-8F14-750059DFEEB0}" type="datetimeFigureOut">
               <a:rPr lang="en-US" smtClean="0"/>
-              <a:t>3/17/26</a:t>
+              <a:t>3/19/26</a:t>
             </a:fld>
             <a:endParaRPr lang="en-US"/>
           </a:p>
@@ -5566,7 +5567,7 @@
           <a:p>
             <a:fld id="{EC4347D3-4C9A-C240-8F14-750059DFEEB0}" type="datetimeFigureOut">
               <a:rPr lang="en-US" smtClean="0"/>
-              <a:t>3/17/26</a:t>
+              <a:t>3/19/26</a:t>
             </a:fld>
             <a:endParaRPr lang="en-US"/>
           </a:p>
@@ -6000,7 +6001,7 @@
           <a:p>
             <a:fld id="{EC4347D3-4C9A-C240-8F14-750059DFEEB0}" type="datetimeFigureOut">
               <a:rPr lang="en-US" smtClean="0"/>
-              <a:t>3/17/26</a:t>
+              <a:t>3/19/26</a:t>
             </a:fld>
             <a:endParaRPr lang="en-US"/>
           </a:p>
@@ -6546,7 +6547,7 @@
           <a:p>
             <a:fld id="{EC4347D3-4C9A-C240-8F14-750059DFEEB0}" type="datetimeFigureOut">
               <a:rPr lang="en-US" smtClean="0"/>
-              <a:t>3/17/26</a:t>
+              <a:t>3/19/26</a:t>
             </a:fld>
             <a:endParaRPr lang="en-US"/>
           </a:p>
@@ -7266,7 +7267,7 @@
           <a:p>
             <a:fld id="{EC4347D3-4C9A-C240-8F14-750059DFEEB0}" type="datetimeFigureOut">
               <a:rPr lang="en-US" smtClean="0"/>
-              <a:t>3/17/26</a:t>
+              <a:t>3/19/26</a:t>
             </a:fld>
             <a:endParaRPr lang="en-US"/>
           </a:p>
@@ -7436,7 +7437,7 @@
           <a:p>
             <a:fld id="{EC4347D3-4C9A-C240-8F14-750059DFEEB0}" type="datetimeFigureOut">
               <a:rPr lang="en-US" smtClean="0"/>
-              <a:t>3/17/26</a:t>
+              <a:t>3/19/26</a:t>
             </a:fld>
             <a:endParaRPr lang="en-US"/>
           </a:p>
@@ -7616,7 +7617,7 @@
           <a:p>
             <a:fld id="{EC4347D3-4C9A-C240-8F14-750059DFEEB0}" type="datetimeFigureOut">
               <a:rPr lang="en-US" smtClean="0"/>
-              <a:t>3/17/26</a:t>
+              <a:t>3/19/26</a:t>
             </a:fld>
             <a:endParaRPr lang="en-US"/>
           </a:p>
@@ -7786,7 +7787,7 @@
           <a:p>
             <a:fld id="{EC4347D3-4C9A-C240-8F14-750059DFEEB0}" type="datetimeFigureOut">
               <a:rPr lang="en-US" smtClean="0"/>
-              <a:t>3/17/26</a:t>
+              <a:t>3/19/26</a:t>
             </a:fld>
             <a:endParaRPr lang="en-US"/>
           </a:p>
@@ -8036,7 +8037,7 @@
           <a:p>
             <a:fld id="{EC4347D3-4C9A-C240-8F14-750059DFEEB0}" type="datetimeFigureOut">
               <a:rPr lang="en-US" smtClean="0"/>
-              <a:t>3/17/26</a:t>
+              <a:t>3/19/26</a:t>
             </a:fld>
             <a:endParaRPr lang="en-US"/>
           </a:p>
@@ -8268,7 +8269,7 @@
           <a:p>
             <a:fld id="{EC4347D3-4C9A-C240-8F14-750059DFEEB0}" type="datetimeFigureOut">
               <a:rPr lang="en-US" smtClean="0"/>
-              <a:t>3/17/26</a:t>
+              <a:t>3/19/26</a:t>
             </a:fld>
             <a:endParaRPr lang="en-US"/>
           </a:p>
@@ -8654,7 +8655,7 @@
           <a:p>
             <a:fld id="{EC4347D3-4C9A-C240-8F14-750059DFEEB0}" type="datetimeFigureOut">
               <a:rPr lang="en-US" smtClean="0"/>
-              <a:t>3/17/26</a:t>
+              <a:t>3/19/26</a:t>
             </a:fld>
             <a:endParaRPr lang="en-US"/>
           </a:p>
@@ -8777,7 +8778,7 @@
           <a:p>
             <a:fld id="{EC4347D3-4C9A-C240-8F14-750059DFEEB0}" type="datetimeFigureOut">
               <a:rPr lang="en-US" smtClean="0"/>
-              <a:t>3/17/26</a:t>
+              <a:t>3/19/26</a:t>
             </a:fld>
             <a:endParaRPr lang="en-US"/>
           </a:p>
@@ -8872,7 +8873,7 @@
           <a:p>
             <a:fld id="{EC4347D3-4C9A-C240-8F14-750059DFEEB0}" type="datetimeFigureOut">
               <a:rPr lang="en-US" smtClean="0"/>
-              <a:t>3/17/26</a:t>
+              <a:t>3/19/26</a:t>
             </a:fld>
             <a:endParaRPr lang="en-US"/>
           </a:p>
@@ -9121,7 +9122,7 @@
           <a:p>
             <a:fld id="{EC4347D3-4C9A-C240-8F14-750059DFEEB0}" type="datetimeFigureOut">
               <a:rPr lang="en-US" smtClean="0"/>
-              <a:t>3/17/26</a:t>
+              <a:t>3/19/26</a:t>
             </a:fld>
             <a:endParaRPr lang="en-US"/>
           </a:p>
@@ -9406,7 +9407,7 @@
           <a:p>
             <a:fld id="{EC4347D3-4C9A-C240-8F14-750059DFEEB0}" type="datetimeFigureOut">
               <a:rPr lang="en-US" smtClean="0"/>
-              <a:t>3/17/26</a:t>
+              <a:t>3/19/26</a:t>
             </a:fld>
             <a:endParaRPr lang="en-US"/>
           </a:p>
@@ -9529,7 +9530,7 @@
           <a:noFill/>
           <a:extLst>
             <a:ext uri="{909E8E84-426E-40dd-AFC4-6F175D3DCCD1}">
-              <a14:hiddenFill xmlns="" xmlns:a14="http://schemas.microsoft.com/office/drawing/2010/main">
+              <a14:hiddenFill xmlns:a14="http://schemas.microsoft.com/office/drawing/2010/main" xmlns="">
                 <a:solidFill>
                   <a:srgbClr val="FFFFFF"/>
                 </a:solidFill>
@@ -9603,7 +9604,7 @@
               </a:ln>
               <a:extLst>
                 <a:ext uri="{91240B29-F687-4f45-9708-019B960494DF}">
-                  <a14:hiddenLine xmlns="" xmlns:a14="http://schemas.microsoft.com/office/drawing/2010/main" w="9525">
+                  <a14:hiddenLine xmlns:a14="http://schemas.microsoft.com/office/drawing/2010/main" xmlns="" w="9525">
                     <a:solidFill>
                       <a:srgbClr val="000000"/>
                     </a:solidFill>
@@ -9693,7 +9694,7 @@
               </a:ln>
               <a:extLst>
                 <a:ext uri="{91240B29-F687-4f45-9708-019B960494DF}">
-                  <a14:hiddenLine xmlns="" xmlns:a14="http://schemas.microsoft.com/office/drawing/2010/main" w="9525">
+                  <a14:hiddenLine xmlns:a14="http://schemas.microsoft.com/office/drawing/2010/main" xmlns="" w="9525">
                     <a:solidFill>
                       <a:srgbClr val="000000"/>
                     </a:solidFill>
@@ -9783,7 +9784,7 @@
               </a:ln>
               <a:extLst>
                 <a:ext uri="{91240B29-F687-4f45-9708-019B960494DF}">
-                  <a14:hiddenLine xmlns="" xmlns:a14="http://schemas.microsoft.com/office/drawing/2010/main" w="9525">
+                  <a14:hiddenLine xmlns:a14="http://schemas.microsoft.com/office/drawing/2010/main" xmlns="" w="9525">
                     <a:solidFill>
                       <a:srgbClr val="000000"/>
                     </a:solidFill>
@@ -9845,7 +9846,7 @@
               </a:ln>
               <a:extLst>
                 <a:ext uri="{91240B29-F687-4f45-9708-019B960494DF}">
-                  <a14:hiddenLine xmlns="" xmlns:a14="http://schemas.microsoft.com/office/drawing/2010/main" w="9525">
+                  <a14:hiddenLine xmlns:a14="http://schemas.microsoft.com/office/drawing/2010/main" xmlns="" w="9525">
                     <a:solidFill>
                       <a:srgbClr val="000000"/>
                     </a:solidFill>
@@ -9935,7 +9936,7 @@
               </a:ln>
               <a:extLst>
                 <a:ext uri="{91240B29-F687-4f45-9708-019B960494DF}">
-                  <a14:hiddenLine xmlns="" xmlns:a14="http://schemas.microsoft.com/office/drawing/2010/main" w="9525">
+                  <a14:hiddenLine xmlns:a14="http://schemas.microsoft.com/office/drawing/2010/main" xmlns="" w="9525">
                     <a:solidFill>
                       <a:srgbClr val="000000"/>
                     </a:solidFill>
@@ -9997,7 +9998,7 @@
               </a:ln>
               <a:extLst>
                 <a:ext uri="{91240B29-F687-4f45-9708-019B960494DF}">
-                  <a14:hiddenLine xmlns="" xmlns:a14="http://schemas.microsoft.com/office/drawing/2010/main" w="9525">
+                  <a14:hiddenLine xmlns:a14="http://schemas.microsoft.com/office/drawing/2010/main" xmlns="" w="9525">
                     <a:solidFill>
                       <a:srgbClr val="000000"/>
                     </a:solidFill>
@@ -10059,7 +10060,7 @@
               </a:ln>
               <a:extLst>
                 <a:ext uri="{91240B29-F687-4f45-9708-019B960494DF}">
-                  <a14:hiddenLine xmlns="" xmlns:a14="http://schemas.microsoft.com/office/drawing/2010/main" w="9525">
+                  <a14:hiddenLine xmlns:a14="http://schemas.microsoft.com/office/drawing/2010/main" xmlns="" w="9525">
                     <a:solidFill>
                       <a:srgbClr val="000000"/>
                     </a:solidFill>
@@ -10149,7 +10150,7 @@
               </a:ln>
               <a:extLst>
                 <a:ext uri="{91240B29-F687-4f45-9708-019B960494DF}">
-                  <a14:hiddenLine xmlns="" xmlns:a14="http://schemas.microsoft.com/office/drawing/2010/main" w="9525">
+                  <a14:hiddenLine xmlns:a14="http://schemas.microsoft.com/office/drawing/2010/main" xmlns="" w="9525">
                     <a:solidFill>
                       <a:srgbClr val="000000"/>
                     </a:solidFill>
@@ -10239,7 +10240,7 @@
               </a:ln>
               <a:extLst>
                 <a:ext uri="{91240B29-F687-4f45-9708-019B960494DF}">
-                  <a14:hiddenLine xmlns="" xmlns:a14="http://schemas.microsoft.com/office/drawing/2010/main" w="9525">
+                  <a14:hiddenLine xmlns:a14="http://schemas.microsoft.com/office/drawing/2010/main" xmlns="" w="9525">
                     <a:solidFill>
                       <a:srgbClr val="000000"/>
                     </a:solidFill>
@@ -10301,7 +10302,7 @@
               </a:ln>
               <a:extLst>
                 <a:ext uri="{91240B29-F687-4f45-9708-019B960494DF}">
-                  <a14:hiddenLine xmlns="" xmlns:a14="http://schemas.microsoft.com/office/drawing/2010/main" w="9525">
+                  <a14:hiddenLine xmlns:a14="http://schemas.microsoft.com/office/drawing/2010/main" xmlns="" w="9525">
                     <a:solidFill>
                       <a:srgbClr val="000000"/>
                     </a:solidFill>
@@ -10411,7 +10412,7 @@
               </a:ln>
               <a:extLst>
                 <a:ext uri="{91240B29-F687-4f45-9708-019B960494DF}">
-                  <a14:hiddenLine xmlns="" xmlns:a14="http://schemas.microsoft.com/office/drawing/2010/main" w="9525">
+                  <a14:hiddenLine xmlns:a14="http://schemas.microsoft.com/office/drawing/2010/main" xmlns="" w="9525">
                     <a:solidFill>
                       <a:srgbClr val="000000"/>
                     </a:solidFill>
@@ -10495,7 +10496,7 @@
               </a:ln>
               <a:extLst>
                 <a:ext uri="{91240B29-F687-4f45-9708-019B960494DF}">
-                  <a14:hiddenLine xmlns="" xmlns:a14="http://schemas.microsoft.com/office/drawing/2010/main" w="9525">
+                  <a14:hiddenLine xmlns:a14="http://schemas.microsoft.com/office/drawing/2010/main" xmlns="" w="9525">
                     <a:solidFill>
                       <a:srgbClr val="000000"/>
                     </a:solidFill>
@@ -10557,7 +10558,7 @@
               </a:ln>
               <a:extLst>
                 <a:ext uri="{91240B29-F687-4f45-9708-019B960494DF}">
-                  <a14:hiddenLine xmlns="" xmlns:a14="http://schemas.microsoft.com/office/drawing/2010/main" w="9525">
+                  <a14:hiddenLine xmlns:a14="http://schemas.microsoft.com/office/drawing/2010/main" xmlns="" w="9525">
                     <a:solidFill>
                       <a:srgbClr val="000000"/>
                     </a:solidFill>
@@ -10619,7 +10620,7 @@
               </a:ln>
               <a:extLst>
                 <a:ext uri="{91240B29-F687-4f45-9708-019B960494DF}">
-                  <a14:hiddenLine xmlns="" xmlns:a14="http://schemas.microsoft.com/office/drawing/2010/main" w="9525">
+                  <a14:hiddenLine xmlns:a14="http://schemas.microsoft.com/office/drawing/2010/main" xmlns="" w="9525">
                     <a:solidFill>
                       <a:srgbClr val="000000"/>
                     </a:solidFill>
@@ -10709,7 +10710,7 @@
               </a:ln>
               <a:extLst>
                 <a:ext uri="{91240B29-F687-4f45-9708-019B960494DF}">
-                  <a14:hiddenLine xmlns="" xmlns:a14="http://schemas.microsoft.com/office/drawing/2010/main" w="9525">
+                  <a14:hiddenLine xmlns:a14="http://schemas.microsoft.com/office/drawing/2010/main" xmlns="" w="9525">
                     <a:solidFill>
                       <a:srgbClr val="000000"/>
                     </a:solidFill>
@@ -10743,7 +10744,7 @@
               </a:ln>
               <a:extLst>
                 <a:ext uri="{91240B29-F687-4f45-9708-019B960494DF}">
-                  <a14:hiddenLine xmlns="" xmlns:a14="http://schemas.microsoft.com/office/drawing/2010/main" w="9525">
+                  <a14:hiddenLine xmlns:a14="http://schemas.microsoft.com/office/drawing/2010/main" xmlns="" w="9525">
                     <a:solidFill>
                       <a:srgbClr val="000000"/>
                     </a:solidFill>
@@ -10808,7 +10809,7 @@
               </a:ln>
               <a:extLst>
                 <a:ext uri="{91240B29-F687-4f45-9708-019B960494DF}">
-                  <a14:hiddenLine xmlns="" xmlns:a14="http://schemas.microsoft.com/office/drawing/2010/main" w="9525">
+                  <a14:hiddenLine xmlns:a14="http://schemas.microsoft.com/office/drawing/2010/main" xmlns="" w="9525">
                     <a:solidFill>
                       <a:srgbClr val="000000"/>
                     </a:solidFill>
@@ -10898,7 +10899,7 @@
               </a:ln>
               <a:extLst>
                 <a:ext uri="{91240B29-F687-4f45-9708-019B960494DF}">
-                  <a14:hiddenLine xmlns="" xmlns:a14="http://schemas.microsoft.com/office/drawing/2010/main" w="9525">
+                  <a14:hiddenLine xmlns:a14="http://schemas.microsoft.com/office/drawing/2010/main" xmlns="" w="9525">
                     <a:solidFill>
                       <a:srgbClr val="000000"/>
                     </a:solidFill>
@@ -10960,7 +10961,7 @@
               </a:ln>
               <a:extLst>
                 <a:ext uri="{91240B29-F687-4f45-9708-019B960494DF}">
-                  <a14:hiddenLine xmlns="" xmlns:a14="http://schemas.microsoft.com/office/drawing/2010/main" w="9525">
+                  <a14:hiddenLine xmlns:a14="http://schemas.microsoft.com/office/drawing/2010/main" xmlns="" w="9525">
                     <a:solidFill>
                       <a:srgbClr val="000000"/>
                     </a:solidFill>
@@ -11050,7 +11051,7 @@
               </a:ln>
               <a:extLst>
                 <a:ext uri="{91240B29-F687-4f45-9708-019B960494DF}">
-                  <a14:hiddenLine xmlns="" xmlns:a14="http://schemas.microsoft.com/office/drawing/2010/main" w="9525">
+                  <a14:hiddenLine xmlns:a14="http://schemas.microsoft.com/office/drawing/2010/main" xmlns="" w="9525">
                     <a:solidFill>
                       <a:srgbClr val="000000"/>
                     </a:solidFill>
@@ -11115,7 +11116,7 @@
               </a:ln>
               <a:extLst>
                 <a:ext uri="{91240B29-F687-4f45-9708-019B960494DF}">
-                  <a14:hiddenLine xmlns="" xmlns:a14="http://schemas.microsoft.com/office/drawing/2010/main" w="9525">
+                  <a14:hiddenLine xmlns:a14="http://schemas.microsoft.com/office/drawing/2010/main" xmlns="" w="9525">
                     <a:solidFill>
                       <a:srgbClr val="000000"/>
                     </a:solidFill>
@@ -11177,7 +11178,7 @@
               </a:ln>
               <a:extLst>
                 <a:ext uri="{91240B29-F687-4f45-9708-019B960494DF}">
-                  <a14:hiddenLine xmlns="" xmlns:a14="http://schemas.microsoft.com/office/drawing/2010/main" w="9525">
+                  <a14:hiddenLine xmlns:a14="http://schemas.microsoft.com/office/drawing/2010/main" xmlns="" w="9525">
                     <a:solidFill>
                       <a:srgbClr val="000000"/>
                     </a:solidFill>
@@ -11267,7 +11268,7 @@
               </a:ln>
               <a:extLst>
                 <a:ext uri="{91240B29-F687-4f45-9708-019B960494DF}">
-                  <a14:hiddenLine xmlns="" xmlns:a14="http://schemas.microsoft.com/office/drawing/2010/main" w="9525">
+                  <a14:hiddenLine xmlns:a14="http://schemas.microsoft.com/office/drawing/2010/main" xmlns="" w="9525">
                     <a:solidFill>
                       <a:srgbClr val="000000"/>
                     </a:solidFill>
@@ -11357,7 +11358,7 @@
               </a:ln>
               <a:extLst>
                 <a:ext uri="{91240B29-F687-4f45-9708-019B960494DF}">
-                  <a14:hiddenLine xmlns="" xmlns:a14="http://schemas.microsoft.com/office/drawing/2010/main" w="9525">
+                  <a14:hiddenLine xmlns:a14="http://schemas.microsoft.com/office/drawing/2010/main" xmlns="" w="9525">
                     <a:solidFill>
                       <a:srgbClr val="000000"/>
                     </a:solidFill>
@@ -11422,7 +11423,7 @@
               </a:ln>
               <a:extLst>
                 <a:ext uri="{91240B29-F687-4f45-9708-019B960494DF}">
-                  <a14:hiddenLine xmlns="" xmlns:a14="http://schemas.microsoft.com/office/drawing/2010/main" w="9525">
+                  <a14:hiddenLine xmlns:a14="http://schemas.microsoft.com/office/drawing/2010/main" xmlns="" w="9525">
                     <a:solidFill>
                       <a:srgbClr val="000000"/>
                     </a:solidFill>
@@ -11542,7 +11543,7 @@
               </a:ln>
               <a:extLst>
                 <a:ext uri="{91240B29-F687-4f45-9708-019B960494DF}">
-                  <a14:hiddenLine xmlns="" xmlns:a14="http://schemas.microsoft.com/office/drawing/2010/main" w="9525">
+                  <a14:hiddenLine xmlns:a14="http://schemas.microsoft.com/office/drawing/2010/main" xmlns="" w="9525">
                     <a:solidFill>
                       <a:srgbClr val="000000"/>
                     </a:solidFill>
@@ -11623,7 +11624,7 @@
               </a:ln>
               <a:extLst>
                 <a:ext uri="{91240B29-F687-4f45-9708-019B960494DF}">
-                  <a14:hiddenLine xmlns="" xmlns:a14="http://schemas.microsoft.com/office/drawing/2010/main" w="9525">
+                  <a14:hiddenLine xmlns:a14="http://schemas.microsoft.com/office/drawing/2010/main" xmlns="" w="9525">
                     <a:solidFill>
                       <a:srgbClr val="000000"/>
                     </a:solidFill>
@@ -11738,7 +11739,7 @@
               </a:ln>
               <a:extLst>
                 <a:ext uri="{91240B29-F687-4f45-9708-019B960494DF}">
-                  <a14:hiddenLine xmlns="" xmlns:a14="http://schemas.microsoft.com/office/drawing/2010/main" w="9525">
+                  <a14:hiddenLine xmlns:a14="http://schemas.microsoft.com/office/drawing/2010/main" xmlns="" w="9525">
                     <a:solidFill>
                       <a:srgbClr val="000000"/>
                     </a:solidFill>
@@ -11828,7 +11829,7 @@
               </a:ln>
               <a:extLst>
                 <a:ext uri="{91240B29-F687-4f45-9708-019B960494DF}">
-                  <a14:hiddenLine xmlns="" xmlns:a14="http://schemas.microsoft.com/office/drawing/2010/main" w="9525">
+                  <a14:hiddenLine xmlns:a14="http://schemas.microsoft.com/office/drawing/2010/main" xmlns="" w="9525">
                     <a:solidFill>
                       <a:srgbClr val="000000"/>
                     </a:solidFill>
@@ -11893,7 +11894,7 @@
               </a:ln>
               <a:extLst>
                 <a:ext uri="{91240B29-F687-4f45-9708-019B960494DF}">
-                  <a14:hiddenLine xmlns="" xmlns:a14="http://schemas.microsoft.com/office/drawing/2010/main" w="9525">
+                  <a14:hiddenLine xmlns:a14="http://schemas.microsoft.com/office/drawing/2010/main" xmlns="" w="9525">
                     <a:solidFill>
                       <a:srgbClr val="000000"/>
                     </a:solidFill>
@@ -11983,7 +11984,7 @@
               </a:ln>
               <a:extLst>
                 <a:ext uri="{91240B29-F687-4f45-9708-019B960494DF}">
-                  <a14:hiddenLine xmlns="" xmlns:a14="http://schemas.microsoft.com/office/drawing/2010/main" w="9525">
+                  <a14:hiddenLine xmlns:a14="http://schemas.microsoft.com/office/drawing/2010/main" xmlns="" w="9525">
                     <a:solidFill>
                       <a:srgbClr val="000000"/>
                     </a:solidFill>
@@ -12051,7 +12052,7 @@
               </a:ln>
               <a:extLst>
                 <a:ext uri="{91240B29-F687-4f45-9708-019B960494DF}">
-                  <a14:hiddenLine xmlns="" xmlns:a14="http://schemas.microsoft.com/office/drawing/2010/main" w="9525">
+                  <a14:hiddenLine xmlns:a14="http://schemas.microsoft.com/office/drawing/2010/main" xmlns="" w="9525">
                     <a:solidFill>
                       <a:srgbClr val="000000"/>
                     </a:solidFill>
@@ -12141,7 +12142,7 @@
               </a:ln>
               <a:extLst>
                 <a:ext uri="{91240B29-F687-4f45-9708-019B960494DF}">
-                  <a14:hiddenLine xmlns="" xmlns:a14="http://schemas.microsoft.com/office/drawing/2010/main" w="9525">
+                  <a14:hiddenLine xmlns:a14="http://schemas.microsoft.com/office/drawing/2010/main" xmlns="" w="9525">
                     <a:solidFill>
                       <a:srgbClr val="000000"/>
                     </a:solidFill>
@@ -12209,7 +12210,7 @@
               </a:ln>
               <a:extLst>
                 <a:ext uri="{91240B29-F687-4f45-9708-019B960494DF}">
-                  <a14:hiddenLine xmlns="" xmlns:a14="http://schemas.microsoft.com/office/drawing/2010/main" w="9525">
+                  <a14:hiddenLine xmlns:a14="http://schemas.microsoft.com/office/drawing/2010/main" xmlns="" w="9525">
                     <a:solidFill>
                       <a:srgbClr val="000000"/>
                     </a:solidFill>
@@ -12299,7 +12300,7 @@
               </a:ln>
               <a:extLst>
                 <a:ext uri="{91240B29-F687-4f45-9708-019B960494DF}">
-                  <a14:hiddenLine xmlns="" xmlns:a14="http://schemas.microsoft.com/office/drawing/2010/main" w="9525">
+                  <a14:hiddenLine xmlns:a14="http://schemas.microsoft.com/office/drawing/2010/main" xmlns="" w="9525">
                     <a:solidFill>
                       <a:srgbClr val="000000"/>
                     </a:solidFill>
@@ -12333,7 +12334,7 @@
               </a:ln>
               <a:extLst>
                 <a:ext uri="{91240B29-F687-4f45-9708-019B960494DF}">
-                  <a14:hiddenLine xmlns="" xmlns:a14="http://schemas.microsoft.com/office/drawing/2010/main" w="9525">
+                  <a14:hiddenLine xmlns:a14="http://schemas.microsoft.com/office/drawing/2010/main" xmlns="" w="9525">
                     <a:solidFill>
                       <a:srgbClr val="000000"/>
                     </a:solidFill>
@@ -12473,7 +12474,7 @@
           <a:p>
             <a:fld id="{EC4347D3-4C9A-C240-8F14-750059DFEEB0}" type="datetimeFigureOut">
               <a:rPr lang="en-US" smtClean="0"/>
-              <a:t>3/17/26</a:t>
+              <a:t>3/19/26</a:t>
             </a:fld>
             <a:endParaRPr lang="en-US"/>
           </a:p>
@@ -13333,6 +13334,178 @@
 </p:sld>
 </file>
 
+<file path=ppt/slides/slide12.xml><?xml version="1.0" encoding="utf-8"?>
+<p:sld xmlns:a="http://schemas.openxmlformats.org/drawingml/2006/main" xmlns:r="http://schemas.openxmlformats.org/officeDocument/2006/relationships" xmlns:p="http://schemas.openxmlformats.org/presentationml/2006/main">
+  <p:cSld>
+    <p:spTree>
+      <p:nvGrpSpPr>
+        <p:cNvPr id="1" name="">
+          <a:extLst>
+            <a:ext uri="{FF2B5EF4-FFF2-40B4-BE49-F238E27FC236}">
+              <a16:creationId xmlns:a16="http://schemas.microsoft.com/office/drawing/2014/main" id="{E09FE42E-0010-9260-3D8A-DD75BCAAA434}"/>
+            </a:ext>
+          </a:extLst>
+        </p:cNvPr>
+        <p:cNvGrpSpPr/>
+        <p:nvPr/>
+      </p:nvGrpSpPr>
+      <p:grpSpPr>
+        <a:xfrm>
+          <a:off x="0" y="0"/>
+          <a:ext cx="0" cy="0"/>
+          <a:chOff x="0" y="0"/>
+          <a:chExt cx="0" cy="0"/>
+        </a:xfrm>
+      </p:grpSpPr>
+      <p:sp>
+        <p:nvSpPr>
+          <p:cNvPr id="6146" name="Rectangle 2">
+            <a:extLst>
+              <a:ext uri="{FF2B5EF4-FFF2-40B4-BE49-F238E27FC236}">
+                <a16:creationId xmlns:a16="http://schemas.microsoft.com/office/drawing/2014/main" id="{E5BD79ED-52AF-FC46-3897-EE8315B86AC9}"/>
+              </a:ext>
+            </a:extLst>
+          </p:cNvPr>
+          <p:cNvSpPr>
+            <a:spLocks noGrp="1" noChangeArrowheads="1"/>
+          </p:cNvSpPr>
+          <p:nvPr>
+            <p:ph type="title"/>
+            <p:custDataLst>
+              <p:tags r:id="rId1"/>
+            </p:custDataLst>
+          </p:nvPr>
+        </p:nvSpPr>
+        <p:spPr>
+          <a:xfrm>
+            <a:off x="1141413" y="284084"/>
+            <a:ext cx="9905998" cy="620791"/>
+          </a:xfrm>
+        </p:spPr>
+        <p:txBody>
+          <a:bodyPr/>
+          <a:lstStyle/>
+          <a:p>
+            <a:pPr algn="ctr"/>
+            <a:r>
+              <a:rPr lang="en-US" dirty="0"/>
+              <a:t>Lecture 12: 3/19/26</a:t>
+            </a:r>
+          </a:p>
+        </p:txBody>
+      </p:sp>
+      <p:sp>
+        <p:nvSpPr>
+          <p:cNvPr id="6147" name="Rectangle 3">
+            <a:extLst>
+              <a:ext uri="{FF2B5EF4-FFF2-40B4-BE49-F238E27FC236}">
+                <a16:creationId xmlns:a16="http://schemas.microsoft.com/office/drawing/2014/main" id="{AE3BD3CF-9CD7-E1F1-6AEB-4D69D5E31B64}"/>
+              </a:ext>
+            </a:extLst>
+          </p:cNvPr>
+          <p:cNvSpPr>
+            <a:spLocks noGrp="1" noChangeArrowheads="1"/>
+          </p:cNvSpPr>
+          <p:nvPr>
+            <p:ph idx="1"/>
+            <p:custDataLst>
+              <p:tags r:id="rId2"/>
+            </p:custDataLst>
+          </p:nvPr>
+        </p:nvSpPr>
+        <p:spPr>
+          <a:xfrm>
+            <a:off x="1021404" y="1123950"/>
+            <a:ext cx="10204315" cy="5149850"/>
+          </a:xfrm>
+        </p:spPr>
+        <p:txBody>
+          <a:bodyPr>
+            <a:normAutofit/>
+          </a:bodyPr>
+          <a:lstStyle/>
+          <a:p>
+            <a:r>
+              <a:rPr lang="en-US" dirty="0"/>
+              <a:t>Happy March!</a:t>
+            </a:r>
+          </a:p>
+          <a:p>
+            <a:r>
+              <a:rPr lang="en-US" dirty="0"/>
+              <a:t>Attendance checks are back in full force today…</a:t>
+            </a:r>
+          </a:p>
+          <a:p>
+            <a:r>
+              <a:rPr lang="en-US" dirty="0"/>
+              <a:t>This week will be a normal week of full lectures (yay!)</a:t>
+            </a:r>
+          </a:p>
+          <a:p>
+            <a:r>
+              <a:rPr lang="en-US" dirty="0"/>
+              <a:t>You should have a project group now. If you don’t sign up immediately</a:t>
+            </a:r>
+          </a:p>
+          <a:p>
+            <a:pPr lvl="1"/>
+            <a:r>
+              <a:rPr lang="en-US" dirty="0"/>
+              <a:t>Start learning your algorithm and implementing in the three languages</a:t>
+            </a:r>
+          </a:p>
+          <a:p>
+            <a:pPr lvl="1"/>
+            <a:r>
+              <a:rPr lang="en-US" dirty="0"/>
+              <a:t>Three implementations are due early (4/7/26)</a:t>
+            </a:r>
+          </a:p>
+          <a:p>
+            <a:r>
+              <a:rPr lang="en-US" dirty="0"/>
+              <a:t>Quiz is graded!</a:t>
+            </a:r>
+          </a:p>
+          <a:p>
+            <a:pPr lvl="1"/>
+            <a:r>
+              <a:rPr lang="en-US" dirty="0"/>
+              <a:t>You all did great…nice job</a:t>
+            </a:r>
+          </a:p>
+          <a:p>
+            <a:pPr lvl="1"/>
+            <a:r>
+              <a:rPr lang="en-US" dirty="0"/>
+              <a:t>Regrades will open eventually. I will go over it briefly today</a:t>
+            </a:r>
+          </a:p>
+          <a:p>
+            <a:r>
+              <a:rPr lang="en-US" dirty="0"/>
+              <a:t>Today we will finish comp. geo. and probably start approximations</a:t>
+            </a:r>
+          </a:p>
+          <a:p>
+            <a:endParaRPr lang="en-US" dirty="0"/>
+          </a:p>
+        </p:txBody>
+      </p:sp>
+    </p:spTree>
+    <p:extLst>
+      <p:ext uri="{BB962C8B-B14F-4D97-AF65-F5344CB8AC3E}">
+        <p14:creationId xmlns:p14="http://schemas.microsoft.com/office/powerpoint/2010/main" val="3671826252"/>
+      </p:ext>
+    </p:extLst>
+  </p:cSld>
+  <p:clrMapOvr>
+    <a:masterClrMapping/>
+  </p:clrMapOvr>
+</p:sld>
+</file>
+
 <file path=ppt/slides/slide2.xml><?xml version="1.0" encoding="utf-8"?>
 <p:sld xmlns:a="http://schemas.openxmlformats.org/drawingml/2006/main" xmlns:r="http://schemas.openxmlformats.org/officeDocument/2006/relationships" xmlns:p="http://schemas.openxmlformats.org/presentationml/2006/main">
   <p:cSld>
@@ -14752,6 +14925,18 @@
 </file>
 
 <file path=ppt/tags/tag20.xml><?xml version="1.0" encoding="utf-8"?>
+<p:tagLst xmlns:a="http://schemas.openxmlformats.org/drawingml/2006/main" xmlns:r="http://schemas.openxmlformats.org/officeDocument/2006/relationships" xmlns:p="http://schemas.openxmlformats.org/presentationml/2006/main">
+  <p:tag name="_INSTRUCTOR VIEW19C14C36-AC8E-43BC-9DB6-C2AAF774C7DC|PANE__TAG" val="_"/>
+</p:tagLst>
+</file>
+
+<file path=ppt/tags/tag21.xml><?xml version="1.0" encoding="utf-8"?>
+<p:tagLst xmlns:a="http://schemas.openxmlformats.org/drawingml/2006/main" xmlns:r="http://schemas.openxmlformats.org/officeDocument/2006/relationships" xmlns:p="http://schemas.openxmlformats.org/presentationml/2006/main">
+  <p:tag name="_INSTRUCTOR VIEW19C14C36-AC8E-43BC-9DB6-C2AAF774C7DC|PANE__TAG" val="_"/>
+</p:tagLst>
+</file>
+
+<file path=ppt/tags/tag22.xml><?xml version="1.0" encoding="utf-8"?>
 <p:tagLst xmlns:a="http://schemas.openxmlformats.org/drawingml/2006/main" xmlns:r="http://schemas.openxmlformats.org/officeDocument/2006/relationships" xmlns:p="http://schemas.openxmlformats.org/presentationml/2006/main">
   <p:tag name="_INSTRUCTOR VIEW19C14C36-AC8E-43BC-9DB6-C2AAF774C7DC|PANE__TAG" val="_"/>
 </p:tagLst>

--- a/slides/00-DailyAnnouncements.pptx
+++ b/slides/00-DailyAnnouncements.pptx
@@ -5,7 +5,7 @@
     <p:sldMasterId id="2147484006" r:id="rId1"/>
   </p:sldMasterIdLst>
   <p:notesMasterIdLst>
-    <p:notesMasterId r:id="rId14"/>
+    <p:notesMasterId r:id="rId15"/>
   </p:notesMasterIdLst>
   <p:sldIdLst>
     <p:sldId id="256" r:id="rId2"/>
@@ -20,6 +20,7 @@
     <p:sldId id="513" r:id="rId11"/>
     <p:sldId id="514" r:id="rId12"/>
     <p:sldId id="515" r:id="rId13"/>
+    <p:sldId id="516" r:id="rId14"/>
   </p:sldIdLst>
   <p:sldSz cx="12192000" cy="6858000"/>
   <p:notesSz cx="6858000" cy="9144000"/>
@@ -208,7 +209,7 @@
           <a:p>
             <a:fld id="{C5B45307-6ED4-B142-BD64-10F739779302}" type="datetimeFigureOut">
               <a:rPr lang="en-US" smtClean="0"/>
-              <a:t>3/19/26</a:t>
+              <a:t>3/24/26</a:t>
             </a:fld>
             <a:endParaRPr lang="en-US"/>
           </a:p>
@@ -616,7 +617,7 @@
           <a:noFill/>
           <a:extLst>
             <a:ext uri="{909E8E84-426E-40dd-AFC4-6F175D3DCCD1}">
-              <a14:hiddenFill xmlns:a14="http://schemas.microsoft.com/office/drawing/2010/main" xmlns="">
+              <a14:hiddenFill xmlns="" xmlns:a14="http://schemas.microsoft.com/office/drawing/2010/main">
                 <a:solidFill>
                   <a:srgbClr val="FFFFFF"/>
                 </a:solidFill>
@@ -675,7 +676,7 @@
             </a:ln>
             <a:extLst>
               <a:ext uri="{91240B29-F687-4f45-9708-019B960494DF}">
-                <a14:hiddenLine xmlns:a14="http://schemas.microsoft.com/office/drawing/2010/main" xmlns="" w="9525">
+                <a14:hiddenLine xmlns="" xmlns:a14="http://schemas.microsoft.com/office/drawing/2010/main" w="9525">
                   <a:solidFill>
                     <a:srgbClr val="000000"/>
                   </a:solidFill>
@@ -765,7 +766,7 @@
             </a:ln>
             <a:extLst>
               <a:ext uri="{91240B29-F687-4f45-9708-019B960494DF}">
-                <a14:hiddenLine xmlns:a14="http://schemas.microsoft.com/office/drawing/2010/main" xmlns="" w="9525">
+                <a14:hiddenLine xmlns="" xmlns:a14="http://schemas.microsoft.com/office/drawing/2010/main" w="9525">
                   <a:solidFill>
                     <a:srgbClr val="000000"/>
                   </a:solidFill>
@@ -855,7 +856,7 @@
             </a:ln>
             <a:extLst>
               <a:ext uri="{91240B29-F687-4f45-9708-019B960494DF}">
-                <a14:hiddenLine xmlns:a14="http://schemas.microsoft.com/office/drawing/2010/main" xmlns="" w="9525">
+                <a14:hiddenLine xmlns="" xmlns:a14="http://schemas.microsoft.com/office/drawing/2010/main" w="9525">
                   <a:solidFill>
                     <a:srgbClr val="000000"/>
                   </a:solidFill>
@@ -889,7 +890,7 @@
             </a:ln>
             <a:extLst>
               <a:ext uri="{91240B29-F687-4f45-9708-019B960494DF}">
-                <a14:hiddenLine xmlns:a14="http://schemas.microsoft.com/office/drawing/2010/main" xmlns="" w="9525">
+                <a14:hiddenLine xmlns="" xmlns:a14="http://schemas.microsoft.com/office/drawing/2010/main" w="9525">
                   <a:solidFill>
                     <a:srgbClr val="000000"/>
                   </a:solidFill>
@@ -979,7 +980,7 @@
             </a:ln>
             <a:extLst>
               <a:ext uri="{91240B29-F687-4f45-9708-019B960494DF}">
-                <a14:hiddenLine xmlns:a14="http://schemas.microsoft.com/office/drawing/2010/main" xmlns="" w="9525">
+                <a14:hiddenLine xmlns="" xmlns:a14="http://schemas.microsoft.com/office/drawing/2010/main" w="9525">
                   <a:solidFill>
                     <a:srgbClr val="000000"/>
                   </a:solidFill>
@@ -1041,7 +1042,7 @@
             </a:ln>
             <a:extLst>
               <a:ext uri="{91240B29-F687-4f45-9708-019B960494DF}">
-                <a14:hiddenLine xmlns:a14="http://schemas.microsoft.com/office/drawing/2010/main" xmlns="" w="9525">
+                <a14:hiddenLine xmlns="" xmlns:a14="http://schemas.microsoft.com/office/drawing/2010/main" w="9525">
                   <a:solidFill>
                     <a:srgbClr val="000000"/>
                   </a:solidFill>
@@ -1103,7 +1104,7 @@
             </a:ln>
             <a:extLst>
               <a:ext uri="{91240B29-F687-4f45-9708-019B960494DF}">
-                <a14:hiddenLine xmlns:a14="http://schemas.microsoft.com/office/drawing/2010/main" xmlns="" w="9525">
+                <a14:hiddenLine xmlns="" xmlns:a14="http://schemas.microsoft.com/office/drawing/2010/main" w="9525">
                   <a:solidFill>
                     <a:srgbClr val="000000"/>
                   </a:solidFill>
@@ -1193,7 +1194,7 @@
             </a:ln>
             <a:extLst>
               <a:ext uri="{91240B29-F687-4f45-9708-019B960494DF}">
-                <a14:hiddenLine xmlns:a14="http://schemas.microsoft.com/office/drawing/2010/main" xmlns="" w="9525">
+                <a14:hiddenLine xmlns="" xmlns:a14="http://schemas.microsoft.com/office/drawing/2010/main" w="9525">
                   <a:solidFill>
                     <a:srgbClr val="000000"/>
                   </a:solidFill>
@@ -1255,7 +1256,7 @@
             </a:ln>
             <a:extLst>
               <a:ext uri="{91240B29-F687-4f45-9708-019B960494DF}">
-                <a14:hiddenLine xmlns:a14="http://schemas.microsoft.com/office/drawing/2010/main" xmlns="" w="9525">
+                <a14:hiddenLine xmlns="" xmlns:a14="http://schemas.microsoft.com/office/drawing/2010/main" w="9525">
                   <a:solidFill>
                     <a:srgbClr val="000000"/>
                   </a:solidFill>
@@ -1317,7 +1318,7 @@
             </a:ln>
             <a:extLst>
               <a:ext uri="{91240B29-F687-4f45-9708-019B960494DF}">
-                <a14:hiddenLine xmlns:a14="http://schemas.microsoft.com/office/drawing/2010/main" xmlns="" w="9525">
+                <a14:hiddenLine xmlns="" xmlns:a14="http://schemas.microsoft.com/office/drawing/2010/main" w="9525">
                   <a:solidFill>
                     <a:srgbClr val="000000"/>
                   </a:solidFill>
@@ -1407,7 +1408,7 @@
             </a:ln>
             <a:extLst>
               <a:ext uri="{91240B29-F687-4f45-9708-019B960494DF}">
-                <a14:hiddenLine xmlns:a14="http://schemas.microsoft.com/office/drawing/2010/main" xmlns="" w="9525">
+                <a14:hiddenLine xmlns="" xmlns:a14="http://schemas.microsoft.com/office/drawing/2010/main" w="9525">
                   <a:solidFill>
                     <a:srgbClr val="000000"/>
                   </a:solidFill>
@@ -1497,7 +1498,7 @@
             </a:ln>
             <a:extLst>
               <a:ext uri="{91240B29-F687-4f45-9708-019B960494DF}">
-                <a14:hiddenLine xmlns:a14="http://schemas.microsoft.com/office/drawing/2010/main" xmlns="" w="9525">
+                <a14:hiddenLine xmlns="" xmlns:a14="http://schemas.microsoft.com/office/drawing/2010/main" w="9525">
                   <a:solidFill>
                     <a:srgbClr val="000000"/>
                   </a:solidFill>
@@ -1559,7 +1560,7 @@
             </a:ln>
             <a:extLst>
               <a:ext uri="{91240B29-F687-4f45-9708-019B960494DF}">
-                <a14:hiddenLine xmlns:a14="http://schemas.microsoft.com/office/drawing/2010/main" xmlns="" w="9525">
+                <a14:hiddenLine xmlns="" xmlns:a14="http://schemas.microsoft.com/office/drawing/2010/main" w="9525">
                   <a:solidFill>
                     <a:srgbClr val="000000"/>
                   </a:solidFill>
@@ -1669,7 +1670,7 @@
             </a:ln>
             <a:extLst>
               <a:ext uri="{91240B29-F687-4f45-9708-019B960494DF}">
-                <a14:hiddenLine xmlns:a14="http://schemas.microsoft.com/office/drawing/2010/main" xmlns="" w="9525">
+                <a14:hiddenLine xmlns="" xmlns:a14="http://schemas.microsoft.com/office/drawing/2010/main" w="9525">
                   <a:solidFill>
                     <a:srgbClr val="000000"/>
                   </a:solidFill>
@@ -1731,7 +1732,7 @@
             </a:ln>
             <a:extLst>
               <a:ext uri="{91240B29-F687-4f45-9708-019B960494DF}">
-                <a14:hiddenLine xmlns:a14="http://schemas.microsoft.com/office/drawing/2010/main" xmlns="" w="9525">
+                <a14:hiddenLine xmlns="" xmlns:a14="http://schemas.microsoft.com/office/drawing/2010/main" w="9525">
                   <a:solidFill>
                     <a:srgbClr val="000000"/>
                   </a:solidFill>
@@ -1821,7 +1822,7 @@
             </a:ln>
             <a:extLst>
               <a:ext uri="{91240B29-F687-4f45-9708-019B960494DF}">
-                <a14:hiddenLine xmlns:a14="http://schemas.microsoft.com/office/drawing/2010/main" xmlns="" w="9525">
+                <a14:hiddenLine xmlns="" xmlns:a14="http://schemas.microsoft.com/office/drawing/2010/main" w="9525">
                   <a:solidFill>
                     <a:srgbClr val="000000"/>
                   </a:solidFill>
@@ -1911,7 +1912,7 @@
             </a:ln>
             <a:extLst>
               <a:ext uri="{91240B29-F687-4f45-9708-019B960494DF}">
-                <a14:hiddenLine xmlns:a14="http://schemas.microsoft.com/office/drawing/2010/main" xmlns="" w="9525">
+                <a14:hiddenLine xmlns="" xmlns:a14="http://schemas.microsoft.com/office/drawing/2010/main" w="9525">
                   <a:solidFill>
                     <a:srgbClr val="000000"/>
                   </a:solidFill>
@@ -1973,7 +1974,7 @@
             </a:ln>
             <a:extLst>
               <a:ext uri="{91240B29-F687-4f45-9708-019B960494DF}">
-                <a14:hiddenLine xmlns:a14="http://schemas.microsoft.com/office/drawing/2010/main" xmlns="" w="9525">
+                <a14:hiddenLine xmlns="" xmlns:a14="http://schemas.microsoft.com/office/drawing/2010/main" w="9525">
                   <a:solidFill>
                     <a:srgbClr val="000000"/>
                   </a:solidFill>
@@ -2063,7 +2064,7 @@
             </a:ln>
             <a:extLst>
               <a:ext uri="{91240B29-F687-4f45-9708-019B960494DF}">
-                <a14:hiddenLine xmlns:a14="http://schemas.microsoft.com/office/drawing/2010/main" xmlns="" w="9525">
+                <a14:hiddenLine xmlns="" xmlns:a14="http://schemas.microsoft.com/office/drawing/2010/main" w="9525">
                   <a:solidFill>
                     <a:srgbClr val="000000"/>
                   </a:solidFill>
@@ -2153,7 +2154,7 @@
             </a:ln>
             <a:extLst>
               <a:ext uri="{91240B29-F687-4f45-9708-019B960494DF}">
-                <a14:hiddenLine xmlns:a14="http://schemas.microsoft.com/office/drawing/2010/main" xmlns="" w="9525">
+                <a14:hiddenLine xmlns="" xmlns:a14="http://schemas.microsoft.com/office/drawing/2010/main" w="9525">
                   <a:solidFill>
                     <a:srgbClr val="000000"/>
                   </a:solidFill>
@@ -2209,7 +2210,7 @@
             </a:ln>
             <a:extLst>
               <a:ext uri="{91240B29-F687-4f45-9708-019B960494DF}">
-                <a14:hiddenLine xmlns:a14="http://schemas.microsoft.com/office/drawing/2010/main" xmlns="" w="9525">
+                <a14:hiddenLine xmlns="" xmlns:a14="http://schemas.microsoft.com/office/drawing/2010/main" w="9525">
                   <a:solidFill>
                     <a:srgbClr val="000000"/>
                   </a:solidFill>
@@ -2299,7 +2300,7 @@
             </a:ln>
             <a:extLst>
               <a:ext uri="{91240B29-F687-4f45-9708-019B960494DF}">
-                <a14:hiddenLine xmlns:a14="http://schemas.microsoft.com/office/drawing/2010/main" xmlns="" w="9525">
+                <a14:hiddenLine xmlns="" xmlns:a14="http://schemas.microsoft.com/office/drawing/2010/main" w="9525">
                   <a:solidFill>
                     <a:srgbClr val="000000"/>
                   </a:solidFill>
@@ -2355,7 +2356,7 @@
             </a:ln>
             <a:extLst>
               <a:ext uri="{91240B29-F687-4f45-9708-019B960494DF}">
-                <a14:hiddenLine xmlns:a14="http://schemas.microsoft.com/office/drawing/2010/main" xmlns="" w="9525">
+                <a14:hiddenLine xmlns="" xmlns:a14="http://schemas.microsoft.com/office/drawing/2010/main" w="9525">
                   <a:solidFill>
                     <a:srgbClr val="000000"/>
                   </a:solidFill>
@@ -2445,7 +2446,7 @@
             </a:ln>
             <a:extLst>
               <a:ext uri="{91240B29-F687-4f45-9708-019B960494DF}">
-                <a14:hiddenLine xmlns:a14="http://schemas.microsoft.com/office/drawing/2010/main" xmlns="" w="9525">
+                <a14:hiddenLine xmlns="" xmlns:a14="http://schemas.microsoft.com/office/drawing/2010/main" w="9525">
                   <a:solidFill>
                     <a:srgbClr val="000000"/>
                   </a:solidFill>
@@ -2513,7 +2514,7 @@
             </a:ln>
             <a:extLst>
               <a:ext uri="{91240B29-F687-4f45-9708-019B960494DF}">
-                <a14:hiddenLine xmlns:a14="http://schemas.microsoft.com/office/drawing/2010/main" xmlns="" w="9525">
+                <a14:hiddenLine xmlns="" xmlns:a14="http://schemas.microsoft.com/office/drawing/2010/main" w="9525">
                   <a:solidFill>
                     <a:srgbClr val="000000"/>
                   </a:solidFill>
@@ -2603,7 +2604,7 @@
             </a:ln>
             <a:extLst>
               <a:ext uri="{91240B29-F687-4f45-9708-019B960494DF}">
-                <a14:hiddenLine xmlns:a14="http://schemas.microsoft.com/office/drawing/2010/main" xmlns="" w="9525">
+                <a14:hiddenLine xmlns="" xmlns:a14="http://schemas.microsoft.com/office/drawing/2010/main" w="9525">
                   <a:solidFill>
                     <a:srgbClr val="000000"/>
                   </a:solidFill>
@@ -2671,7 +2672,7 @@
             </a:ln>
             <a:extLst>
               <a:ext uri="{91240B29-F687-4f45-9708-019B960494DF}">
-                <a14:hiddenLine xmlns:a14="http://schemas.microsoft.com/office/drawing/2010/main" xmlns="" w="9525">
+                <a14:hiddenLine xmlns="" xmlns:a14="http://schemas.microsoft.com/office/drawing/2010/main" w="9525">
                   <a:solidFill>
                     <a:srgbClr val="000000"/>
                   </a:solidFill>
@@ -2761,7 +2762,7 @@
             </a:ln>
             <a:extLst>
               <a:ext uri="{91240B29-F687-4f45-9708-019B960494DF}">
-                <a14:hiddenLine xmlns:a14="http://schemas.microsoft.com/office/drawing/2010/main" xmlns="" w="9525">
+                <a14:hiddenLine xmlns="" xmlns:a14="http://schemas.microsoft.com/office/drawing/2010/main" w="9525">
                   <a:solidFill>
                     <a:srgbClr val="000000"/>
                   </a:solidFill>
@@ -2795,7 +2796,7 @@
             </a:ln>
             <a:extLst>
               <a:ext uri="{91240B29-F687-4f45-9708-019B960494DF}">
-                <a14:hiddenLine xmlns:a14="http://schemas.microsoft.com/office/drawing/2010/main" xmlns="" w="9525">
+                <a14:hiddenLine xmlns="" xmlns:a14="http://schemas.microsoft.com/office/drawing/2010/main" w="9525">
                   <a:solidFill>
                     <a:srgbClr val="000000"/>
                   </a:solidFill>
@@ -2885,7 +2886,7 @@
             </a:ln>
             <a:extLst>
               <a:ext uri="{91240B29-F687-4f45-9708-019B960494DF}">
-                <a14:hiddenLine xmlns:a14="http://schemas.microsoft.com/office/drawing/2010/main" xmlns="" w="9525">
+                <a14:hiddenLine xmlns="" xmlns:a14="http://schemas.microsoft.com/office/drawing/2010/main" w="9525">
                   <a:solidFill>
                     <a:srgbClr val="000000"/>
                   </a:solidFill>
@@ -2947,7 +2948,7 @@
             </a:ln>
             <a:extLst>
               <a:ext uri="{91240B29-F687-4f45-9708-019B960494DF}">
-                <a14:hiddenLine xmlns:a14="http://schemas.microsoft.com/office/drawing/2010/main" xmlns="" w="9525">
+                <a14:hiddenLine xmlns="" xmlns:a14="http://schemas.microsoft.com/office/drawing/2010/main" w="9525">
                   <a:solidFill>
                     <a:srgbClr val="000000"/>
                   </a:solidFill>
@@ -3009,7 +3010,7 @@
             </a:ln>
             <a:extLst>
               <a:ext uri="{91240B29-F687-4f45-9708-019B960494DF}">
-                <a14:hiddenLine xmlns:a14="http://schemas.microsoft.com/office/drawing/2010/main" xmlns="" w="9525">
+                <a14:hiddenLine xmlns="" xmlns:a14="http://schemas.microsoft.com/office/drawing/2010/main" w="9525">
                   <a:solidFill>
                     <a:srgbClr val="000000"/>
                   </a:solidFill>
@@ -3099,7 +3100,7 @@
             </a:ln>
             <a:extLst>
               <a:ext uri="{91240B29-F687-4f45-9708-019B960494DF}">
-                <a14:hiddenLine xmlns:a14="http://schemas.microsoft.com/office/drawing/2010/main" xmlns="" w="9525">
+                <a14:hiddenLine xmlns="" xmlns:a14="http://schemas.microsoft.com/office/drawing/2010/main" w="9525">
                   <a:solidFill>
                     <a:srgbClr val="000000"/>
                   </a:solidFill>
@@ -3167,7 +3168,7 @@
             </a:ln>
             <a:extLst>
               <a:ext uri="{91240B29-F687-4f45-9708-019B960494DF}">
-                <a14:hiddenLine xmlns:a14="http://schemas.microsoft.com/office/drawing/2010/main" xmlns="" w="9525">
+                <a14:hiddenLine xmlns="" xmlns:a14="http://schemas.microsoft.com/office/drawing/2010/main" w="9525">
                   <a:solidFill>
                     <a:srgbClr val="000000"/>
                   </a:solidFill>
@@ -3229,7 +3230,7 @@
             </a:ln>
             <a:extLst>
               <a:ext uri="{91240B29-F687-4f45-9708-019B960494DF}">
-                <a14:hiddenLine xmlns:a14="http://schemas.microsoft.com/office/drawing/2010/main" xmlns="" w="9525">
+                <a14:hiddenLine xmlns="" xmlns:a14="http://schemas.microsoft.com/office/drawing/2010/main" w="9525">
                   <a:solidFill>
                     <a:srgbClr val="000000"/>
                   </a:solidFill>
@@ -3319,7 +3320,7 @@
             </a:ln>
             <a:extLst>
               <a:ext uri="{91240B29-F687-4f45-9708-019B960494DF}">
-                <a14:hiddenLine xmlns:a14="http://schemas.microsoft.com/office/drawing/2010/main" xmlns="" w="9525">
+                <a14:hiddenLine xmlns="" xmlns:a14="http://schemas.microsoft.com/office/drawing/2010/main" w="9525">
                   <a:solidFill>
                     <a:srgbClr val="000000"/>
                   </a:solidFill>
@@ -3381,7 +3382,7 @@
             </a:ln>
             <a:extLst>
               <a:ext uri="{91240B29-F687-4f45-9708-019B960494DF}">
-                <a14:hiddenLine xmlns:a14="http://schemas.microsoft.com/office/drawing/2010/main" xmlns="" w="9525">
+                <a14:hiddenLine xmlns="" xmlns:a14="http://schemas.microsoft.com/office/drawing/2010/main" w="9525">
                   <a:solidFill>
                     <a:srgbClr val="000000"/>
                   </a:solidFill>
@@ -3471,7 +3472,7 @@
             </a:ln>
             <a:extLst>
               <a:ext uri="{91240B29-F687-4f45-9708-019B960494DF}">
-                <a14:hiddenLine xmlns:a14="http://schemas.microsoft.com/office/drawing/2010/main" xmlns="" w="9525">
+                <a14:hiddenLine xmlns="" xmlns:a14="http://schemas.microsoft.com/office/drawing/2010/main" w="9525">
                   <a:solidFill>
                     <a:srgbClr val="000000"/>
                   </a:solidFill>
@@ -3533,7 +3534,7 @@
             </a:ln>
             <a:extLst>
               <a:ext uri="{91240B29-F687-4f45-9708-019B960494DF}">
-                <a14:hiddenLine xmlns:a14="http://schemas.microsoft.com/office/drawing/2010/main" xmlns="" w="9525">
+                <a14:hiddenLine xmlns="" xmlns:a14="http://schemas.microsoft.com/office/drawing/2010/main" w="9525">
                   <a:solidFill>
                     <a:srgbClr val="000000"/>
                   </a:solidFill>
@@ -3623,7 +3624,7 @@
             </a:ln>
             <a:extLst>
               <a:ext uri="{91240B29-F687-4f45-9708-019B960494DF}">
-                <a14:hiddenLine xmlns:a14="http://schemas.microsoft.com/office/drawing/2010/main" xmlns="" w="9525">
+                <a14:hiddenLine xmlns="" xmlns:a14="http://schemas.microsoft.com/office/drawing/2010/main" w="9525">
                   <a:solidFill>
                     <a:srgbClr val="000000"/>
                   </a:solidFill>
@@ -3657,7 +3658,7 @@
             </a:ln>
             <a:extLst>
               <a:ext uri="{91240B29-F687-4f45-9708-019B960494DF}">
-                <a14:hiddenLine xmlns:a14="http://schemas.microsoft.com/office/drawing/2010/main" xmlns="" w="9525">
+                <a14:hiddenLine xmlns="" xmlns:a14="http://schemas.microsoft.com/office/drawing/2010/main" w="9525">
                   <a:solidFill>
                     <a:srgbClr val="000000"/>
                   </a:solidFill>
@@ -3722,7 +3723,7 @@
             </a:ln>
             <a:extLst>
               <a:ext uri="{91240B29-F687-4f45-9708-019B960494DF}">
-                <a14:hiddenLine xmlns:a14="http://schemas.microsoft.com/office/drawing/2010/main" xmlns="" w="9525">
+                <a14:hiddenLine xmlns="" xmlns:a14="http://schemas.microsoft.com/office/drawing/2010/main" w="9525">
                   <a:solidFill>
                     <a:srgbClr val="000000"/>
                   </a:solidFill>
@@ -3812,7 +3813,7 @@
             </a:ln>
             <a:extLst>
               <a:ext uri="{91240B29-F687-4f45-9708-019B960494DF}">
-                <a14:hiddenLine xmlns:a14="http://schemas.microsoft.com/office/drawing/2010/main" xmlns="" w="9525">
+                <a14:hiddenLine xmlns="" xmlns:a14="http://schemas.microsoft.com/office/drawing/2010/main" w="9525">
                   <a:solidFill>
                     <a:srgbClr val="000000"/>
                   </a:solidFill>
@@ -3874,7 +3875,7 @@
             </a:ln>
             <a:extLst>
               <a:ext uri="{91240B29-F687-4f45-9708-019B960494DF}">
-                <a14:hiddenLine xmlns:a14="http://schemas.microsoft.com/office/drawing/2010/main" xmlns="" w="9525">
+                <a14:hiddenLine xmlns="" xmlns:a14="http://schemas.microsoft.com/office/drawing/2010/main" w="9525">
                   <a:solidFill>
                     <a:srgbClr val="000000"/>
                   </a:solidFill>
@@ -3964,7 +3965,7 @@
             </a:ln>
             <a:extLst>
               <a:ext uri="{91240B29-F687-4f45-9708-019B960494DF}">
-                <a14:hiddenLine xmlns:a14="http://schemas.microsoft.com/office/drawing/2010/main" xmlns="" w="9525">
+                <a14:hiddenLine xmlns="" xmlns:a14="http://schemas.microsoft.com/office/drawing/2010/main" w="9525">
                   <a:solidFill>
                     <a:srgbClr val="000000"/>
                   </a:solidFill>
@@ -4054,7 +4055,7 @@
             </a:ln>
             <a:extLst>
               <a:ext uri="{91240B29-F687-4f45-9708-019B960494DF}">
-                <a14:hiddenLine xmlns:a14="http://schemas.microsoft.com/office/drawing/2010/main" xmlns="" w="9525">
+                <a14:hiddenLine xmlns="" xmlns:a14="http://schemas.microsoft.com/office/drawing/2010/main" w="9525">
                   <a:solidFill>
                     <a:srgbClr val="000000"/>
                   </a:solidFill>
@@ -4119,7 +4120,7 @@
             </a:ln>
             <a:extLst>
               <a:ext uri="{91240B29-F687-4f45-9708-019B960494DF}">
-                <a14:hiddenLine xmlns:a14="http://schemas.microsoft.com/office/drawing/2010/main" xmlns="" w="9525">
+                <a14:hiddenLine xmlns="" xmlns:a14="http://schemas.microsoft.com/office/drawing/2010/main" w="9525">
                   <a:solidFill>
                     <a:srgbClr val="000000"/>
                   </a:solidFill>
@@ -4181,7 +4182,7 @@
             </a:ln>
             <a:extLst>
               <a:ext uri="{91240B29-F687-4f45-9708-019B960494DF}">
-                <a14:hiddenLine xmlns:a14="http://schemas.microsoft.com/office/drawing/2010/main" xmlns="" w="9525">
+                <a14:hiddenLine xmlns="" xmlns:a14="http://schemas.microsoft.com/office/drawing/2010/main" w="9525">
                   <a:solidFill>
                     <a:srgbClr val="000000"/>
                   </a:solidFill>
@@ -4271,7 +4272,7 @@
             </a:ln>
             <a:extLst>
               <a:ext uri="{91240B29-F687-4f45-9708-019B960494DF}">
-                <a14:hiddenLine xmlns:a14="http://schemas.microsoft.com/office/drawing/2010/main" xmlns="" w="9525">
+                <a14:hiddenLine xmlns="" xmlns:a14="http://schemas.microsoft.com/office/drawing/2010/main" w="9525">
                   <a:solidFill>
                     <a:srgbClr val="000000"/>
                   </a:solidFill>
@@ -4361,7 +4362,7 @@
             </a:ln>
             <a:extLst>
               <a:ext uri="{91240B29-F687-4f45-9708-019B960494DF}">
-                <a14:hiddenLine xmlns:a14="http://schemas.microsoft.com/office/drawing/2010/main" xmlns="" w="9525">
+                <a14:hiddenLine xmlns="" xmlns:a14="http://schemas.microsoft.com/office/drawing/2010/main" w="9525">
                   <a:solidFill>
                     <a:srgbClr val="000000"/>
                   </a:solidFill>
@@ -4423,7 +4424,7 @@
             </a:ln>
             <a:extLst>
               <a:ext uri="{91240B29-F687-4f45-9708-019B960494DF}">
-                <a14:hiddenLine xmlns:a14="http://schemas.microsoft.com/office/drawing/2010/main" xmlns="" w="9525">
+                <a14:hiddenLine xmlns="" xmlns:a14="http://schemas.microsoft.com/office/drawing/2010/main" w="9525">
                   <a:solidFill>
                     <a:srgbClr val="000000"/>
                   </a:solidFill>
@@ -4543,7 +4544,7 @@
             </a:ln>
             <a:extLst>
               <a:ext uri="{91240B29-F687-4f45-9708-019B960494DF}">
-                <a14:hiddenLine xmlns:a14="http://schemas.microsoft.com/office/drawing/2010/main" xmlns="" w="9525">
+                <a14:hiddenLine xmlns="" xmlns:a14="http://schemas.microsoft.com/office/drawing/2010/main" w="9525">
                   <a:solidFill>
                     <a:srgbClr val="000000"/>
                   </a:solidFill>
@@ -4611,7 +4612,7 @@
             </a:ln>
             <a:extLst>
               <a:ext uri="{91240B29-F687-4f45-9708-019B960494DF}">
-                <a14:hiddenLine xmlns:a14="http://schemas.microsoft.com/office/drawing/2010/main" xmlns="" w="9525">
+                <a14:hiddenLine xmlns="" xmlns:a14="http://schemas.microsoft.com/office/drawing/2010/main" w="9525">
                   <a:solidFill>
                     <a:srgbClr val="000000"/>
                   </a:solidFill>
@@ -4701,7 +4702,7 @@
             </a:ln>
             <a:extLst>
               <a:ext uri="{91240B29-F687-4f45-9708-019B960494DF}">
-                <a14:hiddenLine xmlns:a14="http://schemas.microsoft.com/office/drawing/2010/main" xmlns="" w="9525">
+                <a14:hiddenLine xmlns="" xmlns:a14="http://schemas.microsoft.com/office/drawing/2010/main" w="9525">
                   <a:solidFill>
                     <a:srgbClr val="000000"/>
                   </a:solidFill>
@@ -4841,7 +4842,7 @@
           <a:p>
             <a:fld id="{EC4347D3-4C9A-C240-8F14-750059DFEEB0}" type="datetimeFigureOut">
               <a:rPr lang="en-US" smtClean="0"/>
-              <a:t>3/19/26</a:t>
+              <a:t>3/24/26</a:t>
             </a:fld>
             <a:endParaRPr lang="en-US"/>
           </a:p>
@@ -5108,7 +5109,7 @@
           <a:p>
             <a:fld id="{EC4347D3-4C9A-C240-8F14-750059DFEEB0}" type="datetimeFigureOut">
               <a:rPr lang="en-US" smtClean="0"/>
-              <a:t>3/19/26</a:t>
+              <a:t>3/24/26</a:t>
             </a:fld>
             <a:endParaRPr lang="en-US"/>
           </a:p>
@@ -5304,7 +5305,7 @@
           <a:p>
             <a:fld id="{EC4347D3-4C9A-C240-8F14-750059DFEEB0}" type="datetimeFigureOut">
               <a:rPr lang="en-US" smtClean="0"/>
-              <a:t>3/19/26</a:t>
+              <a:t>3/24/26</a:t>
             </a:fld>
             <a:endParaRPr lang="en-US"/>
           </a:p>
@@ -5567,7 +5568,7 @@
           <a:p>
             <a:fld id="{EC4347D3-4C9A-C240-8F14-750059DFEEB0}" type="datetimeFigureOut">
               <a:rPr lang="en-US" smtClean="0"/>
-              <a:t>3/19/26</a:t>
+              <a:t>3/24/26</a:t>
             </a:fld>
             <a:endParaRPr lang="en-US"/>
           </a:p>
@@ -6001,7 +6002,7 @@
           <a:p>
             <a:fld id="{EC4347D3-4C9A-C240-8F14-750059DFEEB0}" type="datetimeFigureOut">
               <a:rPr lang="en-US" smtClean="0"/>
-              <a:t>3/19/26</a:t>
+              <a:t>3/24/26</a:t>
             </a:fld>
             <a:endParaRPr lang="en-US"/>
           </a:p>
@@ -6547,7 +6548,7 @@
           <a:p>
             <a:fld id="{EC4347D3-4C9A-C240-8F14-750059DFEEB0}" type="datetimeFigureOut">
               <a:rPr lang="en-US" smtClean="0"/>
-              <a:t>3/19/26</a:t>
+              <a:t>3/24/26</a:t>
             </a:fld>
             <a:endParaRPr lang="en-US"/>
           </a:p>
@@ -7267,7 +7268,7 @@
           <a:p>
             <a:fld id="{EC4347D3-4C9A-C240-8F14-750059DFEEB0}" type="datetimeFigureOut">
               <a:rPr lang="en-US" smtClean="0"/>
-              <a:t>3/19/26</a:t>
+              <a:t>3/24/26</a:t>
             </a:fld>
             <a:endParaRPr lang="en-US"/>
           </a:p>
@@ -7437,7 +7438,7 @@
           <a:p>
             <a:fld id="{EC4347D3-4C9A-C240-8F14-750059DFEEB0}" type="datetimeFigureOut">
               <a:rPr lang="en-US" smtClean="0"/>
-              <a:t>3/19/26</a:t>
+              <a:t>3/24/26</a:t>
             </a:fld>
             <a:endParaRPr lang="en-US"/>
           </a:p>
@@ -7617,7 +7618,7 @@
           <a:p>
             <a:fld id="{EC4347D3-4C9A-C240-8F14-750059DFEEB0}" type="datetimeFigureOut">
               <a:rPr lang="en-US" smtClean="0"/>
-              <a:t>3/19/26</a:t>
+              <a:t>3/24/26</a:t>
             </a:fld>
             <a:endParaRPr lang="en-US"/>
           </a:p>
@@ -7787,7 +7788,7 @@
           <a:p>
             <a:fld id="{EC4347D3-4C9A-C240-8F14-750059DFEEB0}" type="datetimeFigureOut">
               <a:rPr lang="en-US" smtClean="0"/>
-              <a:t>3/19/26</a:t>
+              <a:t>3/24/26</a:t>
             </a:fld>
             <a:endParaRPr lang="en-US"/>
           </a:p>
@@ -8037,7 +8038,7 @@
           <a:p>
             <a:fld id="{EC4347D3-4C9A-C240-8F14-750059DFEEB0}" type="datetimeFigureOut">
               <a:rPr lang="en-US" smtClean="0"/>
-              <a:t>3/19/26</a:t>
+              <a:t>3/24/26</a:t>
             </a:fld>
             <a:endParaRPr lang="en-US"/>
           </a:p>
@@ -8269,7 +8270,7 @@
           <a:p>
             <a:fld id="{EC4347D3-4C9A-C240-8F14-750059DFEEB0}" type="datetimeFigureOut">
               <a:rPr lang="en-US" smtClean="0"/>
-              <a:t>3/19/26</a:t>
+              <a:t>3/24/26</a:t>
             </a:fld>
             <a:endParaRPr lang="en-US"/>
           </a:p>
@@ -8655,7 +8656,7 @@
           <a:p>
             <a:fld id="{EC4347D3-4C9A-C240-8F14-750059DFEEB0}" type="datetimeFigureOut">
               <a:rPr lang="en-US" smtClean="0"/>
-              <a:t>3/19/26</a:t>
+              <a:t>3/24/26</a:t>
             </a:fld>
             <a:endParaRPr lang="en-US"/>
           </a:p>
@@ -8778,7 +8779,7 @@
           <a:p>
             <a:fld id="{EC4347D3-4C9A-C240-8F14-750059DFEEB0}" type="datetimeFigureOut">
               <a:rPr lang="en-US" smtClean="0"/>
-              <a:t>3/19/26</a:t>
+              <a:t>3/24/26</a:t>
             </a:fld>
             <a:endParaRPr lang="en-US"/>
           </a:p>
@@ -8873,7 +8874,7 @@
           <a:p>
             <a:fld id="{EC4347D3-4C9A-C240-8F14-750059DFEEB0}" type="datetimeFigureOut">
               <a:rPr lang="en-US" smtClean="0"/>
-              <a:t>3/19/26</a:t>
+              <a:t>3/24/26</a:t>
             </a:fld>
             <a:endParaRPr lang="en-US"/>
           </a:p>
@@ -9122,7 +9123,7 @@
           <a:p>
             <a:fld id="{EC4347D3-4C9A-C240-8F14-750059DFEEB0}" type="datetimeFigureOut">
               <a:rPr lang="en-US" smtClean="0"/>
-              <a:t>3/19/26</a:t>
+              <a:t>3/24/26</a:t>
             </a:fld>
             <a:endParaRPr lang="en-US"/>
           </a:p>
@@ -9407,7 +9408,7 @@
           <a:p>
             <a:fld id="{EC4347D3-4C9A-C240-8F14-750059DFEEB0}" type="datetimeFigureOut">
               <a:rPr lang="en-US" smtClean="0"/>
-              <a:t>3/19/26</a:t>
+              <a:t>3/24/26</a:t>
             </a:fld>
             <a:endParaRPr lang="en-US"/>
           </a:p>
@@ -9530,7 +9531,7 @@
           <a:noFill/>
           <a:extLst>
             <a:ext uri="{909E8E84-426E-40dd-AFC4-6F175D3DCCD1}">
-              <a14:hiddenFill xmlns:a14="http://schemas.microsoft.com/office/drawing/2010/main" xmlns="">
+              <a14:hiddenFill xmlns="" xmlns:a14="http://schemas.microsoft.com/office/drawing/2010/main">
                 <a:solidFill>
                   <a:srgbClr val="FFFFFF"/>
                 </a:solidFill>
@@ -9604,7 +9605,7 @@
               </a:ln>
               <a:extLst>
                 <a:ext uri="{91240B29-F687-4f45-9708-019B960494DF}">
-                  <a14:hiddenLine xmlns:a14="http://schemas.microsoft.com/office/drawing/2010/main" xmlns="" w="9525">
+                  <a14:hiddenLine xmlns="" xmlns:a14="http://schemas.microsoft.com/office/drawing/2010/main" w="9525">
                     <a:solidFill>
                       <a:srgbClr val="000000"/>
                     </a:solidFill>
@@ -9694,7 +9695,7 @@
               </a:ln>
               <a:extLst>
                 <a:ext uri="{91240B29-F687-4f45-9708-019B960494DF}">
-                  <a14:hiddenLine xmlns:a14="http://schemas.microsoft.com/office/drawing/2010/main" xmlns="" w="9525">
+                  <a14:hiddenLine xmlns="" xmlns:a14="http://schemas.microsoft.com/office/drawing/2010/main" w="9525">
                     <a:solidFill>
                       <a:srgbClr val="000000"/>
                     </a:solidFill>
@@ -9784,7 +9785,7 @@
               </a:ln>
               <a:extLst>
                 <a:ext uri="{91240B29-F687-4f45-9708-019B960494DF}">
-                  <a14:hiddenLine xmlns:a14="http://schemas.microsoft.com/office/drawing/2010/main" xmlns="" w="9525">
+                  <a14:hiddenLine xmlns="" xmlns:a14="http://schemas.microsoft.com/office/drawing/2010/main" w="9525">
                     <a:solidFill>
                       <a:srgbClr val="000000"/>
                     </a:solidFill>
@@ -9846,7 +9847,7 @@
               </a:ln>
               <a:extLst>
                 <a:ext uri="{91240B29-F687-4f45-9708-019B960494DF}">
-                  <a14:hiddenLine xmlns:a14="http://schemas.microsoft.com/office/drawing/2010/main" xmlns="" w="9525">
+                  <a14:hiddenLine xmlns="" xmlns:a14="http://schemas.microsoft.com/office/drawing/2010/main" w="9525">
                     <a:solidFill>
                       <a:srgbClr val="000000"/>
                     </a:solidFill>
@@ -9936,7 +9937,7 @@
               </a:ln>
               <a:extLst>
                 <a:ext uri="{91240B29-F687-4f45-9708-019B960494DF}">
-                  <a14:hiddenLine xmlns:a14="http://schemas.microsoft.com/office/drawing/2010/main" xmlns="" w="9525">
+                  <a14:hiddenLine xmlns="" xmlns:a14="http://schemas.microsoft.com/office/drawing/2010/main" w="9525">
                     <a:solidFill>
                       <a:srgbClr val="000000"/>
                     </a:solidFill>
@@ -9998,7 +9999,7 @@
               </a:ln>
               <a:extLst>
                 <a:ext uri="{91240B29-F687-4f45-9708-019B960494DF}">
-                  <a14:hiddenLine xmlns:a14="http://schemas.microsoft.com/office/drawing/2010/main" xmlns="" w="9525">
+                  <a14:hiddenLine xmlns="" xmlns:a14="http://schemas.microsoft.com/office/drawing/2010/main" w="9525">
                     <a:solidFill>
                       <a:srgbClr val="000000"/>
                     </a:solidFill>
@@ -10060,7 +10061,7 @@
               </a:ln>
               <a:extLst>
                 <a:ext uri="{91240B29-F687-4f45-9708-019B960494DF}">
-                  <a14:hiddenLine xmlns:a14="http://schemas.microsoft.com/office/drawing/2010/main" xmlns="" w="9525">
+                  <a14:hiddenLine xmlns="" xmlns:a14="http://schemas.microsoft.com/office/drawing/2010/main" w="9525">
                     <a:solidFill>
                       <a:srgbClr val="000000"/>
                     </a:solidFill>
@@ -10150,7 +10151,7 @@
               </a:ln>
               <a:extLst>
                 <a:ext uri="{91240B29-F687-4f45-9708-019B960494DF}">
-                  <a14:hiddenLine xmlns:a14="http://schemas.microsoft.com/office/drawing/2010/main" xmlns="" w="9525">
+                  <a14:hiddenLine xmlns="" xmlns:a14="http://schemas.microsoft.com/office/drawing/2010/main" w="9525">
                     <a:solidFill>
                       <a:srgbClr val="000000"/>
                     </a:solidFill>
@@ -10240,7 +10241,7 @@
               </a:ln>
               <a:extLst>
                 <a:ext uri="{91240B29-F687-4f45-9708-019B960494DF}">
-                  <a14:hiddenLine xmlns:a14="http://schemas.microsoft.com/office/drawing/2010/main" xmlns="" w="9525">
+                  <a14:hiddenLine xmlns="" xmlns:a14="http://schemas.microsoft.com/office/drawing/2010/main" w="9525">
                     <a:solidFill>
                       <a:srgbClr val="000000"/>
                     </a:solidFill>
@@ -10302,7 +10303,7 @@
               </a:ln>
               <a:extLst>
                 <a:ext uri="{91240B29-F687-4f45-9708-019B960494DF}">
-                  <a14:hiddenLine xmlns:a14="http://schemas.microsoft.com/office/drawing/2010/main" xmlns="" w="9525">
+                  <a14:hiddenLine xmlns="" xmlns:a14="http://schemas.microsoft.com/office/drawing/2010/main" w="9525">
                     <a:solidFill>
                       <a:srgbClr val="000000"/>
                     </a:solidFill>
@@ -10412,7 +10413,7 @@
               </a:ln>
               <a:extLst>
                 <a:ext uri="{91240B29-F687-4f45-9708-019B960494DF}">
-                  <a14:hiddenLine xmlns:a14="http://schemas.microsoft.com/office/drawing/2010/main" xmlns="" w="9525">
+                  <a14:hiddenLine xmlns="" xmlns:a14="http://schemas.microsoft.com/office/drawing/2010/main" w="9525">
                     <a:solidFill>
                       <a:srgbClr val="000000"/>
                     </a:solidFill>
@@ -10496,7 +10497,7 @@
               </a:ln>
               <a:extLst>
                 <a:ext uri="{91240B29-F687-4f45-9708-019B960494DF}">
-                  <a14:hiddenLine xmlns:a14="http://schemas.microsoft.com/office/drawing/2010/main" xmlns="" w="9525">
+                  <a14:hiddenLine xmlns="" xmlns:a14="http://schemas.microsoft.com/office/drawing/2010/main" w="9525">
                     <a:solidFill>
                       <a:srgbClr val="000000"/>
                     </a:solidFill>
@@ -10558,7 +10559,7 @@
               </a:ln>
               <a:extLst>
                 <a:ext uri="{91240B29-F687-4f45-9708-019B960494DF}">
-                  <a14:hiddenLine xmlns:a14="http://schemas.microsoft.com/office/drawing/2010/main" xmlns="" w="9525">
+                  <a14:hiddenLine xmlns="" xmlns:a14="http://schemas.microsoft.com/office/drawing/2010/main" w="9525">
                     <a:solidFill>
                       <a:srgbClr val="000000"/>
                     </a:solidFill>
@@ -10620,7 +10621,7 @@
               </a:ln>
               <a:extLst>
                 <a:ext uri="{91240B29-F687-4f45-9708-019B960494DF}">
-                  <a14:hiddenLine xmlns:a14="http://schemas.microsoft.com/office/drawing/2010/main" xmlns="" w="9525">
+                  <a14:hiddenLine xmlns="" xmlns:a14="http://schemas.microsoft.com/office/drawing/2010/main" w="9525">
                     <a:solidFill>
                       <a:srgbClr val="000000"/>
                     </a:solidFill>
@@ -10710,7 +10711,7 @@
               </a:ln>
               <a:extLst>
                 <a:ext uri="{91240B29-F687-4f45-9708-019B960494DF}">
-                  <a14:hiddenLine xmlns:a14="http://schemas.microsoft.com/office/drawing/2010/main" xmlns="" w="9525">
+                  <a14:hiddenLine xmlns="" xmlns:a14="http://schemas.microsoft.com/office/drawing/2010/main" w="9525">
                     <a:solidFill>
                       <a:srgbClr val="000000"/>
                     </a:solidFill>
@@ -10744,7 +10745,7 @@
               </a:ln>
               <a:extLst>
                 <a:ext uri="{91240B29-F687-4f45-9708-019B960494DF}">
-                  <a14:hiddenLine xmlns:a14="http://schemas.microsoft.com/office/drawing/2010/main" xmlns="" w="9525">
+                  <a14:hiddenLine xmlns="" xmlns:a14="http://schemas.microsoft.com/office/drawing/2010/main" w="9525">
                     <a:solidFill>
                       <a:srgbClr val="000000"/>
                     </a:solidFill>
@@ -10809,7 +10810,7 @@
               </a:ln>
               <a:extLst>
                 <a:ext uri="{91240B29-F687-4f45-9708-019B960494DF}">
-                  <a14:hiddenLine xmlns:a14="http://schemas.microsoft.com/office/drawing/2010/main" xmlns="" w="9525">
+                  <a14:hiddenLine xmlns="" xmlns:a14="http://schemas.microsoft.com/office/drawing/2010/main" w="9525">
                     <a:solidFill>
                       <a:srgbClr val="000000"/>
                     </a:solidFill>
@@ -10899,7 +10900,7 @@
               </a:ln>
               <a:extLst>
                 <a:ext uri="{91240B29-F687-4f45-9708-019B960494DF}">
-                  <a14:hiddenLine xmlns:a14="http://schemas.microsoft.com/office/drawing/2010/main" xmlns="" w="9525">
+                  <a14:hiddenLine xmlns="" xmlns:a14="http://schemas.microsoft.com/office/drawing/2010/main" w="9525">
                     <a:solidFill>
                       <a:srgbClr val="000000"/>
                     </a:solidFill>
@@ -10961,7 +10962,7 @@
               </a:ln>
               <a:extLst>
                 <a:ext uri="{91240B29-F687-4f45-9708-019B960494DF}">
-                  <a14:hiddenLine xmlns:a14="http://schemas.microsoft.com/office/drawing/2010/main" xmlns="" w="9525">
+                  <a14:hiddenLine xmlns="" xmlns:a14="http://schemas.microsoft.com/office/drawing/2010/main" w="9525">
                     <a:solidFill>
                       <a:srgbClr val="000000"/>
                     </a:solidFill>
@@ -11051,7 +11052,7 @@
               </a:ln>
               <a:extLst>
                 <a:ext uri="{91240B29-F687-4f45-9708-019B960494DF}">
-                  <a14:hiddenLine xmlns:a14="http://schemas.microsoft.com/office/drawing/2010/main" xmlns="" w="9525">
+                  <a14:hiddenLine xmlns="" xmlns:a14="http://schemas.microsoft.com/office/drawing/2010/main" w="9525">
                     <a:solidFill>
                       <a:srgbClr val="000000"/>
                     </a:solidFill>
@@ -11116,7 +11117,7 @@
               </a:ln>
               <a:extLst>
                 <a:ext uri="{91240B29-F687-4f45-9708-019B960494DF}">
-                  <a14:hiddenLine xmlns:a14="http://schemas.microsoft.com/office/drawing/2010/main" xmlns="" w="9525">
+                  <a14:hiddenLine xmlns="" xmlns:a14="http://schemas.microsoft.com/office/drawing/2010/main" w="9525">
                     <a:solidFill>
                       <a:srgbClr val="000000"/>
                     </a:solidFill>
@@ -11178,7 +11179,7 @@
               </a:ln>
               <a:extLst>
                 <a:ext uri="{91240B29-F687-4f45-9708-019B960494DF}">
-                  <a14:hiddenLine xmlns:a14="http://schemas.microsoft.com/office/drawing/2010/main" xmlns="" w="9525">
+                  <a14:hiddenLine xmlns="" xmlns:a14="http://schemas.microsoft.com/office/drawing/2010/main" w="9525">
                     <a:solidFill>
                       <a:srgbClr val="000000"/>
                     </a:solidFill>
@@ -11268,7 +11269,7 @@
               </a:ln>
               <a:extLst>
                 <a:ext uri="{91240B29-F687-4f45-9708-019B960494DF}">
-                  <a14:hiddenLine xmlns:a14="http://schemas.microsoft.com/office/drawing/2010/main" xmlns="" w="9525">
+                  <a14:hiddenLine xmlns="" xmlns:a14="http://schemas.microsoft.com/office/drawing/2010/main" w="9525">
                     <a:solidFill>
                       <a:srgbClr val="000000"/>
                     </a:solidFill>
@@ -11358,7 +11359,7 @@
               </a:ln>
               <a:extLst>
                 <a:ext uri="{91240B29-F687-4f45-9708-019B960494DF}">
-                  <a14:hiddenLine xmlns:a14="http://schemas.microsoft.com/office/drawing/2010/main" xmlns="" w="9525">
+                  <a14:hiddenLine xmlns="" xmlns:a14="http://schemas.microsoft.com/office/drawing/2010/main" w="9525">
                     <a:solidFill>
                       <a:srgbClr val="000000"/>
                     </a:solidFill>
@@ -11423,7 +11424,7 @@
               </a:ln>
               <a:extLst>
                 <a:ext uri="{91240B29-F687-4f45-9708-019B960494DF}">
-                  <a14:hiddenLine xmlns:a14="http://schemas.microsoft.com/office/drawing/2010/main" xmlns="" w="9525">
+                  <a14:hiddenLine xmlns="" xmlns:a14="http://schemas.microsoft.com/office/drawing/2010/main" w="9525">
                     <a:solidFill>
                       <a:srgbClr val="000000"/>
                     </a:solidFill>
@@ -11543,7 +11544,7 @@
               </a:ln>
               <a:extLst>
                 <a:ext uri="{91240B29-F687-4f45-9708-019B960494DF}">
-                  <a14:hiddenLine xmlns:a14="http://schemas.microsoft.com/office/drawing/2010/main" xmlns="" w="9525">
+                  <a14:hiddenLine xmlns="" xmlns:a14="http://schemas.microsoft.com/office/drawing/2010/main" w="9525">
                     <a:solidFill>
                       <a:srgbClr val="000000"/>
                     </a:solidFill>
@@ -11624,7 +11625,7 @@
               </a:ln>
               <a:extLst>
                 <a:ext uri="{91240B29-F687-4f45-9708-019B960494DF}">
-                  <a14:hiddenLine xmlns:a14="http://schemas.microsoft.com/office/drawing/2010/main" xmlns="" w="9525">
+                  <a14:hiddenLine xmlns="" xmlns:a14="http://schemas.microsoft.com/office/drawing/2010/main" w="9525">
                     <a:solidFill>
                       <a:srgbClr val="000000"/>
                     </a:solidFill>
@@ -11739,7 +11740,7 @@
               </a:ln>
               <a:extLst>
                 <a:ext uri="{91240B29-F687-4f45-9708-019B960494DF}">
-                  <a14:hiddenLine xmlns:a14="http://schemas.microsoft.com/office/drawing/2010/main" xmlns="" w="9525">
+                  <a14:hiddenLine xmlns="" xmlns:a14="http://schemas.microsoft.com/office/drawing/2010/main" w="9525">
                     <a:solidFill>
                       <a:srgbClr val="000000"/>
                     </a:solidFill>
@@ -11829,7 +11830,7 @@
               </a:ln>
               <a:extLst>
                 <a:ext uri="{91240B29-F687-4f45-9708-019B960494DF}">
-                  <a14:hiddenLine xmlns:a14="http://schemas.microsoft.com/office/drawing/2010/main" xmlns="" w="9525">
+                  <a14:hiddenLine xmlns="" xmlns:a14="http://schemas.microsoft.com/office/drawing/2010/main" w="9525">
                     <a:solidFill>
                       <a:srgbClr val="000000"/>
                     </a:solidFill>
@@ -11894,7 +11895,7 @@
               </a:ln>
               <a:extLst>
                 <a:ext uri="{91240B29-F687-4f45-9708-019B960494DF}">
-                  <a14:hiddenLine xmlns:a14="http://schemas.microsoft.com/office/drawing/2010/main" xmlns="" w="9525">
+                  <a14:hiddenLine xmlns="" xmlns:a14="http://schemas.microsoft.com/office/drawing/2010/main" w="9525">
                     <a:solidFill>
                       <a:srgbClr val="000000"/>
                     </a:solidFill>
@@ -11984,7 +11985,7 @@
               </a:ln>
               <a:extLst>
                 <a:ext uri="{91240B29-F687-4f45-9708-019B960494DF}">
-                  <a14:hiddenLine xmlns:a14="http://schemas.microsoft.com/office/drawing/2010/main" xmlns="" w="9525">
+                  <a14:hiddenLine xmlns="" xmlns:a14="http://schemas.microsoft.com/office/drawing/2010/main" w="9525">
                     <a:solidFill>
                       <a:srgbClr val="000000"/>
                     </a:solidFill>
@@ -12052,7 +12053,7 @@
               </a:ln>
               <a:extLst>
                 <a:ext uri="{91240B29-F687-4f45-9708-019B960494DF}">
-                  <a14:hiddenLine xmlns:a14="http://schemas.microsoft.com/office/drawing/2010/main" xmlns="" w="9525">
+                  <a14:hiddenLine xmlns="" xmlns:a14="http://schemas.microsoft.com/office/drawing/2010/main" w="9525">
                     <a:solidFill>
                       <a:srgbClr val="000000"/>
                     </a:solidFill>
@@ -12142,7 +12143,7 @@
               </a:ln>
               <a:extLst>
                 <a:ext uri="{91240B29-F687-4f45-9708-019B960494DF}">
-                  <a14:hiddenLine xmlns:a14="http://schemas.microsoft.com/office/drawing/2010/main" xmlns="" w="9525">
+                  <a14:hiddenLine xmlns="" xmlns:a14="http://schemas.microsoft.com/office/drawing/2010/main" w="9525">
                     <a:solidFill>
                       <a:srgbClr val="000000"/>
                     </a:solidFill>
@@ -12210,7 +12211,7 @@
               </a:ln>
               <a:extLst>
                 <a:ext uri="{91240B29-F687-4f45-9708-019B960494DF}">
-                  <a14:hiddenLine xmlns:a14="http://schemas.microsoft.com/office/drawing/2010/main" xmlns="" w="9525">
+                  <a14:hiddenLine xmlns="" xmlns:a14="http://schemas.microsoft.com/office/drawing/2010/main" w="9525">
                     <a:solidFill>
                       <a:srgbClr val="000000"/>
                     </a:solidFill>
@@ -12300,7 +12301,7 @@
               </a:ln>
               <a:extLst>
                 <a:ext uri="{91240B29-F687-4f45-9708-019B960494DF}">
-                  <a14:hiddenLine xmlns:a14="http://schemas.microsoft.com/office/drawing/2010/main" xmlns="" w="9525">
+                  <a14:hiddenLine xmlns="" xmlns:a14="http://schemas.microsoft.com/office/drawing/2010/main" w="9525">
                     <a:solidFill>
                       <a:srgbClr val="000000"/>
                     </a:solidFill>
@@ -12334,7 +12335,7 @@
               </a:ln>
               <a:extLst>
                 <a:ext uri="{91240B29-F687-4f45-9708-019B960494DF}">
-                  <a14:hiddenLine xmlns:a14="http://schemas.microsoft.com/office/drawing/2010/main" xmlns="" w="9525">
+                  <a14:hiddenLine xmlns="" xmlns:a14="http://schemas.microsoft.com/office/drawing/2010/main" w="9525">
                     <a:solidFill>
                       <a:srgbClr val="000000"/>
                     </a:solidFill>
@@ -12474,7 +12475,7 @@
           <a:p>
             <a:fld id="{EC4347D3-4C9A-C240-8F14-750059DFEEB0}" type="datetimeFigureOut">
               <a:rPr lang="en-US" smtClean="0"/>
-              <a:t>3/19/26</a:t>
+              <a:t>3/24/26</a:t>
             </a:fld>
             <a:endParaRPr lang="en-US"/>
           </a:p>
@@ -13249,7 +13250,7 @@
         </p:spPr>
         <p:txBody>
           <a:bodyPr>
-            <a:normAutofit lnSpcReduction="10000"/>
+            <a:normAutofit/>
           </a:bodyPr>
           <a:lstStyle/>
           <a:p>
@@ -13267,7 +13268,7 @@
           <a:p>
             <a:r>
               <a:rPr lang="en-US" dirty="0"/>
-              <a:t>This week will be a normal week of full lectures (yay!)</a:t>
+              <a:t>This week we will have lecture on Tuesday and homework lab thingy on Thursday</a:t>
             </a:r>
           </a:p>
           <a:p>
@@ -13293,27 +13294,27 @@
           <a:p>
             <a:r>
               <a:rPr lang="en-US" dirty="0"/>
-              <a:t>You took your quiz on Thursday!</a:t>
+              <a:t>Computational Geometry homework is releasing on Thursday</a:t>
             </a:r>
           </a:p>
           <a:p>
             <a:pPr lvl="1"/>
             <a:r>
               <a:rPr lang="en-US" dirty="0"/>
-              <a:t>We were going to grade it yesterday but…</a:t>
+              <a:t>You know the drill, bring a laptop to class</a:t>
             </a:r>
           </a:p>
           <a:p>
             <a:pPr lvl="1"/>
             <a:r>
               <a:rPr lang="en-US" dirty="0"/>
-              <a:t>Should be graded Wednesday evening</a:t>
+              <a:t>Be prepared to discuss an approach to problem with your neighbors</a:t>
             </a:r>
           </a:p>
           <a:p>
             <a:r>
               <a:rPr lang="en-US" dirty="0"/>
-              <a:t>Today we will continue discussing Computational Geometry (small chance we finish)</a:t>
+              <a:t>Today we will begin the next section, approximation algorithms.</a:t>
             </a:r>
           </a:p>
           <a:p>
@@ -13497,6 +13498,178 @@
     <p:extLst>
       <p:ext uri="{BB962C8B-B14F-4D97-AF65-F5344CB8AC3E}">
         <p14:creationId xmlns:p14="http://schemas.microsoft.com/office/powerpoint/2010/main" val="3671826252"/>
+      </p:ext>
+    </p:extLst>
+  </p:cSld>
+  <p:clrMapOvr>
+    <a:masterClrMapping/>
+  </p:clrMapOvr>
+</p:sld>
+</file>
+
+<file path=ppt/slides/slide13.xml><?xml version="1.0" encoding="utf-8"?>
+<p:sld xmlns:a="http://schemas.openxmlformats.org/drawingml/2006/main" xmlns:r="http://schemas.openxmlformats.org/officeDocument/2006/relationships" xmlns:p="http://schemas.openxmlformats.org/presentationml/2006/main">
+  <p:cSld>
+    <p:spTree>
+      <p:nvGrpSpPr>
+        <p:cNvPr id="1" name="">
+          <a:extLst>
+            <a:ext uri="{FF2B5EF4-FFF2-40B4-BE49-F238E27FC236}">
+              <a16:creationId xmlns:a16="http://schemas.microsoft.com/office/drawing/2014/main" id="{B18A127D-7150-CC6D-D92D-8C0921B0D7B4}"/>
+            </a:ext>
+          </a:extLst>
+        </p:cNvPr>
+        <p:cNvGrpSpPr/>
+        <p:nvPr/>
+      </p:nvGrpSpPr>
+      <p:grpSpPr>
+        <a:xfrm>
+          <a:off x="0" y="0"/>
+          <a:ext cx="0" cy="0"/>
+          <a:chOff x="0" y="0"/>
+          <a:chExt cx="0" cy="0"/>
+        </a:xfrm>
+      </p:grpSpPr>
+      <p:sp>
+        <p:nvSpPr>
+          <p:cNvPr id="6146" name="Rectangle 2">
+            <a:extLst>
+              <a:ext uri="{FF2B5EF4-FFF2-40B4-BE49-F238E27FC236}">
+                <a16:creationId xmlns:a16="http://schemas.microsoft.com/office/drawing/2014/main" id="{17563D56-11B8-9E38-2F13-2A5D64016C83}"/>
+              </a:ext>
+            </a:extLst>
+          </p:cNvPr>
+          <p:cNvSpPr>
+            <a:spLocks noGrp="1" noChangeArrowheads="1"/>
+          </p:cNvSpPr>
+          <p:nvPr>
+            <p:ph type="title"/>
+            <p:custDataLst>
+              <p:tags r:id="rId1"/>
+            </p:custDataLst>
+          </p:nvPr>
+        </p:nvSpPr>
+        <p:spPr>
+          <a:xfrm>
+            <a:off x="1141413" y="284084"/>
+            <a:ext cx="9905998" cy="620791"/>
+          </a:xfrm>
+        </p:spPr>
+        <p:txBody>
+          <a:bodyPr/>
+          <a:lstStyle/>
+          <a:p>
+            <a:pPr algn="ctr"/>
+            <a:r>
+              <a:rPr lang="en-US" dirty="0"/>
+              <a:t>Lecture 13: 3/24/26</a:t>
+            </a:r>
+          </a:p>
+        </p:txBody>
+      </p:sp>
+      <p:sp>
+        <p:nvSpPr>
+          <p:cNvPr id="6147" name="Rectangle 3">
+            <a:extLst>
+              <a:ext uri="{FF2B5EF4-FFF2-40B4-BE49-F238E27FC236}">
+                <a16:creationId xmlns:a16="http://schemas.microsoft.com/office/drawing/2014/main" id="{811ECC79-499B-A141-5714-0BF952F1C7B6}"/>
+              </a:ext>
+            </a:extLst>
+          </p:cNvPr>
+          <p:cNvSpPr>
+            <a:spLocks noGrp="1" noChangeArrowheads="1"/>
+          </p:cNvSpPr>
+          <p:nvPr>
+            <p:ph idx="1"/>
+            <p:custDataLst>
+              <p:tags r:id="rId2"/>
+            </p:custDataLst>
+          </p:nvPr>
+        </p:nvSpPr>
+        <p:spPr>
+          <a:xfrm>
+            <a:off x="1021404" y="1123950"/>
+            <a:ext cx="10204315" cy="5149850"/>
+          </a:xfrm>
+        </p:spPr>
+        <p:txBody>
+          <a:bodyPr>
+            <a:normAutofit/>
+          </a:bodyPr>
+          <a:lstStyle/>
+          <a:p>
+            <a:r>
+              <a:rPr lang="en-US" dirty="0"/>
+              <a:t>Happy March!</a:t>
+            </a:r>
+          </a:p>
+          <a:p>
+            <a:r>
+              <a:rPr lang="en-US" dirty="0"/>
+              <a:t>Attendance checks are back in full force today…</a:t>
+            </a:r>
+          </a:p>
+          <a:p>
+            <a:r>
+              <a:rPr lang="en-US" dirty="0"/>
+              <a:t>This week will be a normal week of full lectures (yay!)</a:t>
+            </a:r>
+          </a:p>
+          <a:p>
+            <a:r>
+              <a:rPr lang="en-US" dirty="0"/>
+              <a:t>You should have a project group now. If you don’t sign up immediately</a:t>
+            </a:r>
+          </a:p>
+          <a:p>
+            <a:pPr lvl="1"/>
+            <a:r>
+              <a:rPr lang="en-US" dirty="0"/>
+              <a:t>Start learning your algorithm and implementing in the three languages</a:t>
+            </a:r>
+          </a:p>
+          <a:p>
+            <a:pPr lvl="1"/>
+            <a:r>
+              <a:rPr lang="en-US" dirty="0"/>
+              <a:t>Three implementations are due early (4/7/26)</a:t>
+            </a:r>
+          </a:p>
+          <a:p>
+            <a:r>
+              <a:rPr lang="en-US" dirty="0"/>
+              <a:t>Quiz is graded!</a:t>
+            </a:r>
+          </a:p>
+          <a:p>
+            <a:pPr lvl="1"/>
+            <a:r>
+              <a:rPr lang="en-US" dirty="0"/>
+              <a:t>You all did great…nice job</a:t>
+            </a:r>
+          </a:p>
+          <a:p>
+            <a:pPr lvl="1"/>
+            <a:r>
+              <a:rPr lang="en-US" dirty="0"/>
+              <a:t>Regrades will open eventually. I will go over it briefly today</a:t>
+            </a:r>
+          </a:p>
+          <a:p>
+            <a:r>
+              <a:rPr lang="en-US" dirty="0"/>
+              <a:t>Today we will finish comp. geo. and probably start approximations</a:t>
+            </a:r>
+          </a:p>
+          <a:p>
+            <a:endParaRPr lang="en-US" dirty="0"/>
+          </a:p>
+        </p:txBody>
+      </p:sp>
+    </p:spTree>
+    <p:extLst>
+      <p:ext uri="{BB962C8B-B14F-4D97-AF65-F5344CB8AC3E}">
+        <p14:creationId xmlns:p14="http://schemas.microsoft.com/office/powerpoint/2010/main" val="608647407"/>
       </p:ext>
     </p:extLst>
   </p:cSld>
@@ -14937,6 +15110,18 @@
 </file>
 
 <file path=ppt/tags/tag22.xml><?xml version="1.0" encoding="utf-8"?>
+<p:tagLst xmlns:a="http://schemas.openxmlformats.org/drawingml/2006/main" xmlns:r="http://schemas.openxmlformats.org/officeDocument/2006/relationships" xmlns:p="http://schemas.openxmlformats.org/presentationml/2006/main">
+  <p:tag name="_INSTRUCTOR VIEW19C14C36-AC8E-43BC-9DB6-C2AAF774C7DC|PANE__TAG" val="_"/>
+</p:tagLst>
+</file>
+
+<file path=ppt/tags/tag23.xml><?xml version="1.0" encoding="utf-8"?>
+<p:tagLst xmlns:a="http://schemas.openxmlformats.org/drawingml/2006/main" xmlns:r="http://schemas.openxmlformats.org/officeDocument/2006/relationships" xmlns:p="http://schemas.openxmlformats.org/presentationml/2006/main">
+  <p:tag name="_INSTRUCTOR VIEW19C14C36-AC8E-43BC-9DB6-C2AAF774C7DC|PANE__TAG" val="_"/>
+</p:tagLst>
+</file>
+
+<file path=ppt/tags/tag24.xml><?xml version="1.0" encoding="utf-8"?>
 <p:tagLst xmlns:a="http://schemas.openxmlformats.org/drawingml/2006/main" xmlns:r="http://schemas.openxmlformats.org/officeDocument/2006/relationships" xmlns:p="http://schemas.openxmlformats.org/presentationml/2006/main">
   <p:tag name="_INSTRUCTOR VIEW19C14C36-AC8E-43BC-9DB6-C2AAF774C7DC|PANE__TAG" val="_"/>
 </p:tagLst>

--- a/slides/00-DailyAnnouncements.pptx
+++ b/slides/00-DailyAnnouncements.pptx
@@ -5,7 +5,7 @@
     <p:sldMasterId id="2147484006" r:id="rId1"/>
   </p:sldMasterIdLst>
   <p:notesMasterIdLst>
-    <p:notesMasterId r:id="rId15"/>
+    <p:notesMasterId r:id="rId16"/>
   </p:notesMasterIdLst>
   <p:sldIdLst>
     <p:sldId id="256" r:id="rId2"/>
@@ -21,6 +21,7 @@
     <p:sldId id="514" r:id="rId12"/>
     <p:sldId id="515" r:id="rId13"/>
     <p:sldId id="516" r:id="rId14"/>
+    <p:sldId id="517" r:id="rId15"/>
   </p:sldIdLst>
   <p:sldSz cx="12192000" cy="6858000"/>
   <p:notesSz cx="6858000" cy="9144000"/>
@@ -209,7 +210,7 @@
           <a:p>
             <a:fld id="{C5B45307-6ED4-B142-BD64-10F739779302}" type="datetimeFigureOut">
               <a:rPr lang="en-US" smtClean="0"/>
-              <a:t>3/24/26</a:t>
+              <a:t>3/31/26</a:t>
             </a:fld>
             <a:endParaRPr lang="en-US"/>
           </a:p>
@@ -617,7 +618,7 @@
           <a:noFill/>
           <a:extLst>
             <a:ext uri="{909E8E84-426E-40dd-AFC4-6F175D3DCCD1}">
-              <a14:hiddenFill xmlns="" xmlns:a14="http://schemas.microsoft.com/office/drawing/2010/main">
+              <a14:hiddenFill xmlns:a14="http://schemas.microsoft.com/office/drawing/2010/main" xmlns="">
                 <a:solidFill>
                   <a:srgbClr val="FFFFFF"/>
                 </a:solidFill>
@@ -676,7 +677,7 @@
             </a:ln>
             <a:extLst>
               <a:ext uri="{91240B29-F687-4f45-9708-019B960494DF}">
-                <a14:hiddenLine xmlns="" xmlns:a14="http://schemas.microsoft.com/office/drawing/2010/main" w="9525">
+                <a14:hiddenLine xmlns:a14="http://schemas.microsoft.com/office/drawing/2010/main" xmlns="" w="9525">
                   <a:solidFill>
                     <a:srgbClr val="000000"/>
                   </a:solidFill>
@@ -766,7 +767,7 @@
             </a:ln>
             <a:extLst>
               <a:ext uri="{91240B29-F687-4f45-9708-019B960494DF}">
-                <a14:hiddenLine xmlns="" xmlns:a14="http://schemas.microsoft.com/office/drawing/2010/main" w="9525">
+                <a14:hiddenLine xmlns:a14="http://schemas.microsoft.com/office/drawing/2010/main" xmlns="" w="9525">
                   <a:solidFill>
                     <a:srgbClr val="000000"/>
                   </a:solidFill>
@@ -856,7 +857,7 @@
             </a:ln>
             <a:extLst>
               <a:ext uri="{91240B29-F687-4f45-9708-019B960494DF}">
-                <a14:hiddenLine xmlns="" xmlns:a14="http://schemas.microsoft.com/office/drawing/2010/main" w="9525">
+                <a14:hiddenLine xmlns:a14="http://schemas.microsoft.com/office/drawing/2010/main" xmlns="" w="9525">
                   <a:solidFill>
                     <a:srgbClr val="000000"/>
                   </a:solidFill>
@@ -890,7 +891,7 @@
             </a:ln>
             <a:extLst>
               <a:ext uri="{91240B29-F687-4f45-9708-019B960494DF}">
-                <a14:hiddenLine xmlns="" xmlns:a14="http://schemas.microsoft.com/office/drawing/2010/main" w="9525">
+                <a14:hiddenLine xmlns:a14="http://schemas.microsoft.com/office/drawing/2010/main" xmlns="" w="9525">
                   <a:solidFill>
                     <a:srgbClr val="000000"/>
                   </a:solidFill>
@@ -980,7 +981,7 @@
             </a:ln>
             <a:extLst>
               <a:ext uri="{91240B29-F687-4f45-9708-019B960494DF}">
-                <a14:hiddenLine xmlns="" xmlns:a14="http://schemas.microsoft.com/office/drawing/2010/main" w="9525">
+                <a14:hiddenLine xmlns:a14="http://schemas.microsoft.com/office/drawing/2010/main" xmlns="" w="9525">
                   <a:solidFill>
                     <a:srgbClr val="000000"/>
                   </a:solidFill>
@@ -1042,7 +1043,7 @@
             </a:ln>
             <a:extLst>
               <a:ext uri="{91240B29-F687-4f45-9708-019B960494DF}">
-                <a14:hiddenLine xmlns="" xmlns:a14="http://schemas.microsoft.com/office/drawing/2010/main" w="9525">
+                <a14:hiddenLine xmlns:a14="http://schemas.microsoft.com/office/drawing/2010/main" xmlns="" w="9525">
                   <a:solidFill>
                     <a:srgbClr val="000000"/>
                   </a:solidFill>
@@ -1104,7 +1105,7 @@
             </a:ln>
             <a:extLst>
               <a:ext uri="{91240B29-F687-4f45-9708-019B960494DF}">
-                <a14:hiddenLine xmlns="" xmlns:a14="http://schemas.microsoft.com/office/drawing/2010/main" w="9525">
+                <a14:hiddenLine xmlns:a14="http://schemas.microsoft.com/office/drawing/2010/main" xmlns="" w="9525">
                   <a:solidFill>
                     <a:srgbClr val="000000"/>
                   </a:solidFill>
@@ -1194,7 +1195,7 @@
             </a:ln>
             <a:extLst>
               <a:ext uri="{91240B29-F687-4f45-9708-019B960494DF}">
-                <a14:hiddenLine xmlns="" xmlns:a14="http://schemas.microsoft.com/office/drawing/2010/main" w="9525">
+                <a14:hiddenLine xmlns:a14="http://schemas.microsoft.com/office/drawing/2010/main" xmlns="" w="9525">
                   <a:solidFill>
                     <a:srgbClr val="000000"/>
                   </a:solidFill>
@@ -1256,7 +1257,7 @@
             </a:ln>
             <a:extLst>
               <a:ext uri="{91240B29-F687-4f45-9708-019B960494DF}">
-                <a14:hiddenLine xmlns="" xmlns:a14="http://schemas.microsoft.com/office/drawing/2010/main" w="9525">
+                <a14:hiddenLine xmlns:a14="http://schemas.microsoft.com/office/drawing/2010/main" xmlns="" w="9525">
                   <a:solidFill>
                     <a:srgbClr val="000000"/>
                   </a:solidFill>
@@ -1318,7 +1319,7 @@
             </a:ln>
             <a:extLst>
               <a:ext uri="{91240B29-F687-4f45-9708-019B960494DF}">
-                <a14:hiddenLine xmlns="" xmlns:a14="http://schemas.microsoft.com/office/drawing/2010/main" w="9525">
+                <a14:hiddenLine xmlns:a14="http://schemas.microsoft.com/office/drawing/2010/main" xmlns="" w="9525">
                   <a:solidFill>
                     <a:srgbClr val="000000"/>
                   </a:solidFill>
@@ -1408,7 +1409,7 @@
             </a:ln>
             <a:extLst>
               <a:ext uri="{91240B29-F687-4f45-9708-019B960494DF}">
-                <a14:hiddenLine xmlns="" xmlns:a14="http://schemas.microsoft.com/office/drawing/2010/main" w="9525">
+                <a14:hiddenLine xmlns:a14="http://schemas.microsoft.com/office/drawing/2010/main" xmlns="" w="9525">
                   <a:solidFill>
                     <a:srgbClr val="000000"/>
                   </a:solidFill>
@@ -1498,7 +1499,7 @@
             </a:ln>
             <a:extLst>
               <a:ext uri="{91240B29-F687-4f45-9708-019B960494DF}">
-                <a14:hiddenLine xmlns="" xmlns:a14="http://schemas.microsoft.com/office/drawing/2010/main" w="9525">
+                <a14:hiddenLine xmlns:a14="http://schemas.microsoft.com/office/drawing/2010/main" xmlns="" w="9525">
                   <a:solidFill>
                     <a:srgbClr val="000000"/>
                   </a:solidFill>
@@ -1560,7 +1561,7 @@
             </a:ln>
             <a:extLst>
               <a:ext uri="{91240B29-F687-4f45-9708-019B960494DF}">
-                <a14:hiddenLine xmlns="" xmlns:a14="http://schemas.microsoft.com/office/drawing/2010/main" w="9525">
+                <a14:hiddenLine xmlns:a14="http://schemas.microsoft.com/office/drawing/2010/main" xmlns="" w="9525">
                   <a:solidFill>
                     <a:srgbClr val="000000"/>
                   </a:solidFill>
@@ -1670,7 +1671,7 @@
             </a:ln>
             <a:extLst>
               <a:ext uri="{91240B29-F687-4f45-9708-019B960494DF}">
-                <a14:hiddenLine xmlns="" xmlns:a14="http://schemas.microsoft.com/office/drawing/2010/main" w="9525">
+                <a14:hiddenLine xmlns:a14="http://schemas.microsoft.com/office/drawing/2010/main" xmlns="" w="9525">
                   <a:solidFill>
                     <a:srgbClr val="000000"/>
                   </a:solidFill>
@@ -1732,7 +1733,7 @@
             </a:ln>
             <a:extLst>
               <a:ext uri="{91240B29-F687-4f45-9708-019B960494DF}">
-                <a14:hiddenLine xmlns="" xmlns:a14="http://schemas.microsoft.com/office/drawing/2010/main" w="9525">
+                <a14:hiddenLine xmlns:a14="http://schemas.microsoft.com/office/drawing/2010/main" xmlns="" w="9525">
                   <a:solidFill>
                     <a:srgbClr val="000000"/>
                   </a:solidFill>
@@ -1822,7 +1823,7 @@
             </a:ln>
             <a:extLst>
               <a:ext uri="{91240B29-F687-4f45-9708-019B960494DF}">
-                <a14:hiddenLine xmlns="" xmlns:a14="http://schemas.microsoft.com/office/drawing/2010/main" w="9525">
+                <a14:hiddenLine xmlns:a14="http://schemas.microsoft.com/office/drawing/2010/main" xmlns="" w="9525">
                   <a:solidFill>
                     <a:srgbClr val="000000"/>
                   </a:solidFill>
@@ -1912,7 +1913,7 @@
             </a:ln>
             <a:extLst>
               <a:ext uri="{91240B29-F687-4f45-9708-019B960494DF}">
-                <a14:hiddenLine xmlns="" xmlns:a14="http://schemas.microsoft.com/office/drawing/2010/main" w="9525">
+                <a14:hiddenLine xmlns:a14="http://schemas.microsoft.com/office/drawing/2010/main" xmlns="" w="9525">
                   <a:solidFill>
                     <a:srgbClr val="000000"/>
                   </a:solidFill>
@@ -1974,7 +1975,7 @@
             </a:ln>
             <a:extLst>
               <a:ext uri="{91240B29-F687-4f45-9708-019B960494DF}">
-                <a14:hiddenLine xmlns="" xmlns:a14="http://schemas.microsoft.com/office/drawing/2010/main" w="9525">
+                <a14:hiddenLine xmlns:a14="http://schemas.microsoft.com/office/drawing/2010/main" xmlns="" w="9525">
                   <a:solidFill>
                     <a:srgbClr val="000000"/>
                   </a:solidFill>
@@ -2064,7 +2065,7 @@
             </a:ln>
             <a:extLst>
               <a:ext uri="{91240B29-F687-4f45-9708-019B960494DF}">
-                <a14:hiddenLine xmlns="" xmlns:a14="http://schemas.microsoft.com/office/drawing/2010/main" w="9525">
+                <a14:hiddenLine xmlns:a14="http://schemas.microsoft.com/office/drawing/2010/main" xmlns="" w="9525">
                   <a:solidFill>
                     <a:srgbClr val="000000"/>
                   </a:solidFill>
@@ -2154,7 +2155,7 @@
             </a:ln>
             <a:extLst>
               <a:ext uri="{91240B29-F687-4f45-9708-019B960494DF}">
-                <a14:hiddenLine xmlns="" xmlns:a14="http://schemas.microsoft.com/office/drawing/2010/main" w="9525">
+                <a14:hiddenLine xmlns:a14="http://schemas.microsoft.com/office/drawing/2010/main" xmlns="" w="9525">
                   <a:solidFill>
                     <a:srgbClr val="000000"/>
                   </a:solidFill>
@@ -2210,7 +2211,7 @@
             </a:ln>
             <a:extLst>
               <a:ext uri="{91240B29-F687-4f45-9708-019B960494DF}">
-                <a14:hiddenLine xmlns="" xmlns:a14="http://schemas.microsoft.com/office/drawing/2010/main" w="9525">
+                <a14:hiddenLine xmlns:a14="http://schemas.microsoft.com/office/drawing/2010/main" xmlns="" w="9525">
                   <a:solidFill>
                     <a:srgbClr val="000000"/>
                   </a:solidFill>
@@ -2300,7 +2301,7 @@
             </a:ln>
             <a:extLst>
               <a:ext uri="{91240B29-F687-4f45-9708-019B960494DF}">
-                <a14:hiddenLine xmlns="" xmlns:a14="http://schemas.microsoft.com/office/drawing/2010/main" w="9525">
+                <a14:hiddenLine xmlns:a14="http://schemas.microsoft.com/office/drawing/2010/main" xmlns="" w="9525">
                   <a:solidFill>
                     <a:srgbClr val="000000"/>
                   </a:solidFill>
@@ -2356,7 +2357,7 @@
             </a:ln>
             <a:extLst>
               <a:ext uri="{91240B29-F687-4f45-9708-019B960494DF}">
-                <a14:hiddenLine xmlns="" xmlns:a14="http://schemas.microsoft.com/office/drawing/2010/main" w="9525">
+                <a14:hiddenLine xmlns:a14="http://schemas.microsoft.com/office/drawing/2010/main" xmlns="" w="9525">
                   <a:solidFill>
                     <a:srgbClr val="000000"/>
                   </a:solidFill>
@@ -2446,7 +2447,7 @@
             </a:ln>
             <a:extLst>
               <a:ext uri="{91240B29-F687-4f45-9708-019B960494DF}">
-                <a14:hiddenLine xmlns="" xmlns:a14="http://schemas.microsoft.com/office/drawing/2010/main" w="9525">
+                <a14:hiddenLine xmlns:a14="http://schemas.microsoft.com/office/drawing/2010/main" xmlns="" w="9525">
                   <a:solidFill>
                     <a:srgbClr val="000000"/>
                   </a:solidFill>
@@ -2514,7 +2515,7 @@
             </a:ln>
             <a:extLst>
               <a:ext uri="{91240B29-F687-4f45-9708-019B960494DF}">
-                <a14:hiddenLine xmlns="" xmlns:a14="http://schemas.microsoft.com/office/drawing/2010/main" w="9525">
+                <a14:hiddenLine xmlns:a14="http://schemas.microsoft.com/office/drawing/2010/main" xmlns="" w="9525">
                   <a:solidFill>
                     <a:srgbClr val="000000"/>
                   </a:solidFill>
@@ -2604,7 +2605,7 @@
             </a:ln>
             <a:extLst>
               <a:ext uri="{91240B29-F687-4f45-9708-019B960494DF}">
-                <a14:hiddenLine xmlns="" xmlns:a14="http://schemas.microsoft.com/office/drawing/2010/main" w="9525">
+                <a14:hiddenLine xmlns:a14="http://schemas.microsoft.com/office/drawing/2010/main" xmlns="" w="9525">
                   <a:solidFill>
                     <a:srgbClr val="000000"/>
                   </a:solidFill>
@@ -2672,7 +2673,7 @@
             </a:ln>
             <a:extLst>
               <a:ext uri="{91240B29-F687-4f45-9708-019B960494DF}">
-                <a14:hiddenLine xmlns="" xmlns:a14="http://schemas.microsoft.com/office/drawing/2010/main" w="9525">
+                <a14:hiddenLine xmlns:a14="http://schemas.microsoft.com/office/drawing/2010/main" xmlns="" w="9525">
                   <a:solidFill>
                     <a:srgbClr val="000000"/>
                   </a:solidFill>
@@ -2762,7 +2763,7 @@
             </a:ln>
             <a:extLst>
               <a:ext uri="{91240B29-F687-4f45-9708-019B960494DF}">
-                <a14:hiddenLine xmlns="" xmlns:a14="http://schemas.microsoft.com/office/drawing/2010/main" w="9525">
+                <a14:hiddenLine xmlns:a14="http://schemas.microsoft.com/office/drawing/2010/main" xmlns="" w="9525">
                   <a:solidFill>
                     <a:srgbClr val="000000"/>
                   </a:solidFill>
@@ -2796,7 +2797,7 @@
             </a:ln>
             <a:extLst>
               <a:ext uri="{91240B29-F687-4f45-9708-019B960494DF}">
-                <a14:hiddenLine xmlns="" xmlns:a14="http://schemas.microsoft.com/office/drawing/2010/main" w="9525">
+                <a14:hiddenLine xmlns:a14="http://schemas.microsoft.com/office/drawing/2010/main" xmlns="" w="9525">
                   <a:solidFill>
                     <a:srgbClr val="000000"/>
                   </a:solidFill>
@@ -2886,7 +2887,7 @@
             </a:ln>
             <a:extLst>
               <a:ext uri="{91240B29-F687-4f45-9708-019B960494DF}">
-                <a14:hiddenLine xmlns="" xmlns:a14="http://schemas.microsoft.com/office/drawing/2010/main" w="9525">
+                <a14:hiddenLine xmlns:a14="http://schemas.microsoft.com/office/drawing/2010/main" xmlns="" w="9525">
                   <a:solidFill>
                     <a:srgbClr val="000000"/>
                   </a:solidFill>
@@ -2948,7 +2949,7 @@
             </a:ln>
             <a:extLst>
               <a:ext uri="{91240B29-F687-4f45-9708-019B960494DF}">
-                <a14:hiddenLine xmlns="" xmlns:a14="http://schemas.microsoft.com/office/drawing/2010/main" w="9525">
+                <a14:hiddenLine xmlns:a14="http://schemas.microsoft.com/office/drawing/2010/main" xmlns="" w="9525">
                   <a:solidFill>
                     <a:srgbClr val="000000"/>
                   </a:solidFill>
@@ -3010,7 +3011,7 @@
             </a:ln>
             <a:extLst>
               <a:ext uri="{91240B29-F687-4f45-9708-019B960494DF}">
-                <a14:hiddenLine xmlns="" xmlns:a14="http://schemas.microsoft.com/office/drawing/2010/main" w="9525">
+                <a14:hiddenLine xmlns:a14="http://schemas.microsoft.com/office/drawing/2010/main" xmlns="" w="9525">
                   <a:solidFill>
                     <a:srgbClr val="000000"/>
                   </a:solidFill>
@@ -3100,7 +3101,7 @@
             </a:ln>
             <a:extLst>
               <a:ext uri="{91240B29-F687-4f45-9708-019B960494DF}">
-                <a14:hiddenLine xmlns="" xmlns:a14="http://schemas.microsoft.com/office/drawing/2010/main" w="9525">
+                <a14:hiddenLine xmlns:a14="http://schemas.microsoft.com/office/drawing/2010/main" xmlns="" w="9525">
                   <a:solidFill>
                     <a:srgbClr val="000000"/>
                   </a:solidFill>
@@ -3168,7 +3169,7 @@
             </a:ln>
             <a:extLst>
               <a:ext uri="{91240B29-F687-4f45-9708-019B960494DF}">
-                <a14:hiddenLine xmlns="" xmlns:a14="http://schemas.microsoft.com/office/drawing/2010/main" w="9525">
+                <a14:hiddenLine xmlns:a14="http://schemas.microsoft.com/office/drawing/2010/main" xmlns="" w="9525">
                   <a:solidFill>
                     <a:srgbClr val="000000"/>
                   </a:solidFill>
@@ -3230,7 +3231,7 @@
             </a:ln>
             <a:extLst>
               <a:ext uri="{91240B29-F687-4f45-9708-019B960494DF}">
-                <a14:hiddenLine xmlns="" xmlns:a14="http://schemas.microsoft.com/office/drawing/2010/main" w="9525">
+                <a14:hiddenLine xmlns:a14="http://schemas.microsoft.com/office/drawing/2010/main" xmlns="" w="9525">
                   <a:solidFill>
                     <a:srgbClr val="000000"/>
                   </a:solidFill>
@@ -3320,7 +3321,7 @@
             </a:ln>
             <a:extLst>
               <a:ext uri="{91240B29-F687-4f45-9708-019B960494DF}">
-                <a14:hiddenLine xmlns="" xmlns:a14="http://schemas.microsoft.com/office/drawing/2010/main" w="9525">
+                <a14:hiddenLine xmlns:a14="http://schemas.microsoft.com/office/drawing/2010/main" xmlns="" w="9525">
                   <a:solidFill>
                     <a:srgbClr val="000000"/>
                   </a:solidFill>
@@ -3382,7 +3383,7 @@
             </a:ln>
             <a:extLst>
               <a:ext uri="{91240B29-F687-4f45-9708-019B960494DF}">
-                <a14:hiddenLine xmlns="" xmlns:a14="http://schemas.microsoft.com/office/drawing/2010/main" w="9525">
+                <a14:hiddenLine xmlns:a14="http://schemas.microsoft.com/office/drawing/2010/main" xmlns="" w="9525">
                   <a:solidFill>
                     <a:srgbClr val="000000"/>
                   </a:solidFill>
@@ -3472,7 +3473,7 @@
             </a:ln>
             <a:extLst>
               <a:ext uri="{91240B29-F687-4f45-9708-019B960494DF}">
-                <a14:hiddenLine xmlns="" xmlns:a14="http://schemas.microsoft.com/office/drawing/2010/main" w="9525">
+                <a14:hiddenLine xmlns:a14="http://schemas.microsoft.com/office/drawing/2010/main" xmlns="" w="9525">
                   <a:solidFill>
                     <a:srgbClr val="000000"/>
                   </a:solidFill>
@@ -3534,7 +3535,7 @@
             </a:ln>
             <a:extLst>
               <a:ext uri="{91240B29-F687-4f45-9708-019B960494DF}">
-                <a14:hiddenLine xmlns="" xmlns:a14="http://schemas.microsoft.com/office/drawing/2010/main" w="9525">
+                <a14:hiddenLine xmlns:a14="http://schemas.microsoft.com/office/drawing/2010/main" xmlns="" w="9525">
                   <a:solidFill>
                     <a:srgbClr val="000000"/>
                   </a:solidFill>
@@ -3624,7 +3625,7 @@
             </a:ln>
             <a:extLst>
               <a:ext uri="{91240B29-F687-4f45-9708-019B960494DF}">
-                <a14:hiddenLine xmlns="" xmlns:a14="http://schemas.microsoft.com/office/drawing/2010/main" w="9525">
+                <a14:hiddenLine xmlns:a14="http://schemas.microsoft.com/office/drawing/2010/main" xmlns="" w="9525">
                   <a:solidFill>
                     <a:srgbClr val="000000"/>
                   </a:solidFill>
@@ -3658,7 +3659,7 @@
             </a:ln>
             <a:extLst>
               <a:ext uri="{91240B29-F687-4f45-9708-019B960494DF}">
-                <a14:hiddenLine xmlns="" xmlns:a14="http://schemas.microsoft.com/office/drawing/2010/main" w="9525">
+                <a14:hiddenLine xmlns:a14="http://schemas.microsoft.com/office/drawing/2010/main" xmlns="" w="9525">
                   <a:solidFill>
                     <a:srgbClr val="000000"/>
                   </a:solidFill>
@@ -3723,7 +3724,7 @@
             </a:ln>
             <a:extLst>
               <a:ext uri="{91240B29-F687-4f45-9708-019B960494DF}">
-                <a14:hiddenLine xmlns="" xmlns:a14="http://schemas.microsoft.com/office/drawing/2010/main" w="9525">
+                <a14:hiddenLine xmlns:a14="http://schemas.microsoft.com/office/drawing/2010/main" xmlns="" w="9525">
                   <a:solidFill>
                     <a:srgbClr val="000000"/>
                   </a:solidFill>
@@ -3813,7 +3814,7 @@
             </a:ln>
             <a:extLst>
               <a:ext uri="{91240B29-F687-4f45-9708-019B960494DF}">
-                <a14:hiddenLine xmlns="" xmlns:a14="http://schemas.microsoft.com/office/drawing/2010/main" w="9525">
+                <a14:hiddenLine xmlns:a14="http://schemas.microsoft.com/office/drawing/2010/main" xmlns="" w="9525">
                   <a:solidFill>
                     <a:srgbClr val="000000"/>
                   </a:solidFill>
@@ -3875,7 +3876,7 @@
             </a:ln>
             <a:extLst>
               <a:ext uri="{91240B29-F687-4f45-9708-019B960494DF}">
-                <a14:hiddenLine xmlns="" xmlns:a14="http://schemas.microsoft.com/office/drawing/2010/main" w="9525">
+                <a14:hiddenLine xmlns:a14="http://schemas.microsoft.com/office/drawing/2010/main" xmlns="" w="9525">
                   <a:solidFill>
                     <a:srgbClr val="000000"/>
                   </a:solidFill>
@@ -3965,7 +3966,7 @@
             </a:ln>
             <a:extLst>
               <a:ext uri="{91240B29-F687-4f45-9708-019B960494DF}">
-                <a14:hiddenLine xmlns="" xmlns:a14="http://schemas.microsoft.com/office/drawing/2010/main" w="9525">
+                <a14:hiddenLine xmlns:a14="http://schemas.microsoft.com/office/drawing/2010/main" xmlns="" w="9525">
                   <a:solidFill>
                     <a:srgbClr val="000000"/>
                   </a:solidFill>
@@ -4055,7 +4056,7 @@
             </a:ln>
             <a:extLst>
               <a:ext uri="{91240B29-F687-4f45-9708-019B960494DF}">
-                <a14:hiddenLine xmlns="" xmlns:a14="http://schemas.microsoft.com/office/drawing/2010/main" w="9525">
+                <a14:hiddenLine xmlns:a14="http://schemas.microsoft.com/office/drawing/2010/main" xmlns="" w="9525">
                   <a:solidFill>
                     <a:srgbClr val="000000"/>
                   </a:solidFill>
@@ -4120,7 +4121,7 @@
             </a:ln>
             <a:extLst>
               <a:ext uri="{91240B29-F687-4f45-9708-019B960494DF}">
-                <a14:hiddenLine xmlns="" xmlns:a14="http://schemas.microsoft.com/office/drawing/2010/main" w="9525">
+                <a14:hiddenLine xmlns:a14="http://schemas.microsoft.com/office/drawing/2010/main" xmlns="" w="9525">
                   <a:solidFill>
                     <a:srgbClr val="000000"/>
                   </a:solidFill>
@@ -4182,7 +4183,7 @@
             </a:ln>
             <a:extLst>
               <a:ext uri="{91240B29-F687-4f45-9708-019B960494DF}">
-                <a14:hiddenLine xmlns="" xmlns:a14="http://schemas.microsoft.com/office/drawing/2010/main" w="9525">
+                <a14:hiddenLine xmlns:a14="http://schemas.microsoft.com/office/drawing/2010/main" xmlns="" w="9525">
                   <a:solidFill>
                     <a:srgbClr val="000000"/>
                   </a:solidFill>
@@ -4272,7 +4273,7 @@
             </a:ln>
             <a:extLst>
               <a:ext uri="{91240B29-F687-4f45-9708-019B960494DF}">
-                <a14:hiddenLine xmlns="" xmlns:a14="http://schemas.microsoft.com/office/drawing/2010/main" w="9525">
+                <a14:hiddenLine xmlns:a14="http://schemas.microsoft.com/office/drawing/2010/main" xmlns="" w="9525">
                   <a:solidFill>
                     <a:srgbClr val="000000"/>
                   </a:solidFill>
@@ -4362,7 +4363,7 @@
             </a:ln>
             <a:extLst>
               <a:ext uri="{91240B29-F687-4f45-9708-019B960494DF}">
-                <a14:hiddenLine xmlns="" xmlns:a14="http://schemas.microsoft.com/office/drawing/2010/main" w="9525">
+                <a14:hiddenLine xmlns:a14="http://schemas.microsoft.com/office/drawing/2010/main" xmlns="" w="9525">
                   <a:solidFill>
                     <a:srgbClr val="000000"/>
                   </a:solidFill>
@@ -4424,7 +4425,7 @@
             </a:ln>
             <a:extLst>
               <a:ext uri="{91240B29-F687-4f45-9708-019B960494DF}">
-                <a14:hiddenLine xmlns="" xmlns:a14="http://schemas.microsoft.com/office/drawing/2010/main" w="9525">
+                <a14:hiddenLine xmlns:a14="http://schemas.microsoft.com/office/drawing/2010/main" xmlns="" w="9525">
                   <a:solidFill>
                     <a:srgbClr val="000000"/>
                   </a:solidFill>
@@ -4544,7 +4545,7 @@
             </a:ln>
             <a:extLst>
               <a:ext uri="{91240B29-F687-4f45-9708-019B960494DF}">
-                <a14:hiddenLine xmlns="" xmlns:a14="http://schemas.microsoft.com/office/drawing/2010/main" w="9525">
+                <a14:hiddenLine xmlns:a14="http://schemas.microsoft.com/office/drawing/2010/main" xmlns="" w="9525">
                   <a:solidFill>
                     <a:srgbClr val="000000"/>
                   </a:solidFill>
@@ -4612,7 +4613,7 @@
             </a:ln>
             <a:extLst>
               <a:ext uri="{91240B29-F687-4f45-9708-019B960494DF}">
-                <a14:hiddenLine xmlns="" xmlns:a14="http://schemas.microsoft.com/office/drawing/2010/main" w="9525">
+                <a14:hiddenLine xmlns:a14="http://schemas.microsoft.com/office/drawing/2010/main" xmlns="" w="9525">
                   <a:solidFill>
                     <a:srgbClr val="000000"/>
                   </a:solidFill>
@@ -4702,7 +4703,7 @@
             </a:ln>
             <a:extLst>
               <a:ext uri="{91240B29-F687-4f45-9708-019B960494DF}">
-                <a14:hiddenLine xmlns="" xmlns:a14="http://schemas.microsoft.com/office/drawing/2010/main" w="9525">
+                <a14:hiddenLine xmlns:a14="http://schemas.microsoft.com/office/drawing/2010/main" xmlns="" w="9525">
                   <a:solidFill>
                     <a:srgbClr val="000000"/>
                   </a:solidFill>
@@ -4842,7 +4843,7 @@
           <a:p>
             <a:fld id="{EC4347D3-4C9A-C240-8F14-750059DFEEB0}" type="datetimeFigureOut">
               <a:rPr lang="en-US" smtClean="0"/>
-              <a:t>3/24/26</a:t>
+              <a:t>3/31/26</a:t>
             </a:fld>
             <a:endParaRPr lang="en-US"/>
           </a:p>
@@ -5109,7 +5110,7 @@
           <a:p>
             <a:fld id="{EC4347D3-4C9A-C240-8F14-750059DFEEB0}" type="datetimeFigureOut">
               <a:rPr lang="en-US" smtClean="0"/>
-              <a:t>3/24/26</a:t>
+              <a:t>3/31/26</a:t>
             </a:fld>
             <a:endParaRPr lang="en-US"/>
           </a:p>
@@ -5305,7 +5306,7 @@
           <a:p>
             <a:fld id="{EC4347D3-4C9A-C240-8F14-750059DFEEB0}" type="datetimeFigureOut">
               <a:rPr lang="en-US" smtClean="0"/>
-              <a:t>3/24/26</a:t>
+              <a:t>3/31/26</a:t>
             </a:fld>
             <a:endParaRPr lang="en-US"/>
           </a:p>
@@ -5568,7 +5569,7 @@
           <a:p>
             <a:fld id="{EC4347D3-4C9A-C240-8F14-750059DFEEB0}" type="datetimeFigureOut">
               <a:rPr lang="en-US" smtClean="0"/>
-              <a:t>3/24/26</a:t>
+              <a:t>3/31/26</a:t>
             </a:fld>
             <a:endParaRPr lang="en-US"/>
           </a:p>
@@ -6002,7 +6003,7 @@
           <a:p>
             <a:fld id="{EC4347D3-4C9A-C240-8F14-750059DFEEB0}" type="datetimeFigureOut">
               <a:rPr lang="en-US" smtClean="0"/>
-              <a:t>3/24/26</a:t>
+              <a:t>3/31/26</a:t>
             </a:fld>
             <a:endParaRPr lang="en-US"/>
           </a:p>
@@ -6548,7 +6549,7 @@
           <a:p>
             <a:fld id="{EC4347D3-4C9A-C240-8F14-750059DFEEB0}" type="datetimeFigureOut">
               <a:rPr lang="en-US" smtClean="0"/>
-              <a:t>3/24/26</a:t>
+              <a:t>3/31/26</a:t>
             </a:fld>
             <a:endParaRPr lang="en-US"/>
           </a:p>
@@ -7268,7 +7269,7 @@
           <a:p>
             <a:fld id="{EC4347D3-4C9A-C240-8F14-750059DFEEB0}" type="datetimeFigureOut">
               <a:rPr lang="en-US" smtClean="0"/>
-              <a:t>3/24/26</a:t>
+              <a:t>3/31/26</a:t>
             </a:fld>
             <a:endParaRPr lang="en-US"/>
           </a:p>
@@ -7438,7 +7439,7 @@
           <a:p>
             <a:fld id="{EC4347D3-4C9A-C240-8F14-750059DFEEB0}" type="datetimeFigureOut">
               <a:rPr lang="en-US" smtClean="0"/>
-              <a:t>3/24/26</a:t>
+              <a:t>3/31/26</a:t>
             </a:fld>
             <a:endParaRPr lang="en-US"/>
           </a:p>
@@ -7618,7 +7619,7 @@
           <a:p>
             <a:fld id="{EC4347D3-4C9A-C240-8F14-750059DFEEB0}" type="datetimeFigureOut">
               <a:rPr lang="en-US" smtClean="0"/>
-              <a:t>3/24/26</a:t>
+              <a:t>3/31/26</a:t>
             </a:fld>
             <a:endParaRPr lang="en-US"/>
           </a:p>
@@ -7788,7 +7789,7 @@
           <a:p>
             <a:fld id="{EC4347D3-4C9A-C240-8F14-750059DFEEB0}" type="datetimeFigureOut">
               <a:rPr lang="en-US" smtClean="0"/>
-              <a:t>3/24/26</a:t>
+              <a:t>3/31/26</a:t>
             </a:fld>
             <a:endParaRPr lang="en-US"/>
           </a:p>
@@ -8038,7 +8039,7 @@
           <a:p>
             <a:fld id="{EC4347D3-4C9A-C240-8F14-750059DFEEB0}" type="datetimeFigureOut">
               <a:rPr lang="en-US" smtClean="0"/>
-              <a:t>3/24/26</a:t>
+              <a:t>3/31/26</a:t>
             </a:fld>
             <a:endParaRPr lang="en-US"/>
           </a:p>
@@ -8270,7 +8271,7 @@
           <a:p>
             <a:fld id="{EC4347D3-4C9A-C240-8F14-750059DFEEB0}" type="datetimeFigureOut">
               <a:rPr lang="en-US" smtClean="0"/>
-              <a:t>3/24/26</a:t>
+              <a:t>3/31/26</a:t>
             </a:fld>
             <a:endParaRPr lang="en-US"/>
           </a:p>
@@ -8656,7 +8657,7 @@
           <a:p>
             <a:fld id="{EC4347D3-4C9A-C240-8F14-750059DFEEB0}" type="datetimeFigureOut">
               <a:rPr lang="en-US" smtClean="0"/>
-              <a:t>3/24/26</a:t>
+              <a:t>3/31/26</a:t>
             </a:fld>
             <a:endParaRPr lang="en-US"/>
           </a:p>
@@ -8779,7 +8780,7 @@
           <a:p>
             <a:fld id="{EC4347D3-4C9A-C240-8F14-750059DFEEB0}" type="datetimeFigureOut">
               <a:rPr lang="en-US" smtClean="0"/>
-              <a:t>3/24/26</a:t>
+              <a:t>3/31/26</a:t>
             </a:fld>
             <a:endParaRPr lang="en-US"/>
           </a:p>
@@ -8874,7 +8875,7 @@
           <a:p>
             <a:fld id="{EC4347D3-4C9A-C240-8F14-750059DFEEB0}" type="datetimeFigureOut">
               <a:rPr lang="en-US" smtClean="0"/>
-              <a:t>3/24/26</a:t>
+              <a:t>3/31/26</a:t>
             </a:fld>
             <a:endParaRPr lang="en-US"/>
           </a:p>
@@ -9123,7 +9124,7 @@
           <a:p>
             <a:fld id="{EC4347D3-4C9A-C240-8F14-750059DFEEB0}" type="datetimeFigureOut">
               <a:rPr lang="en-US" smtClean="0"/>
-              <a:t>3/24/26</a:t>
+              <a:t>3/31/26</a:t>
             </a:fld>
             <a:endParaRPr lang="en-US"/>
           </a:p>
@@ -9408,7 +9409,7 @@
           <a:p>
             <a:fld id="{EC4347D3-4C9A-C240-8F14-750059DFEEB0}" type="datetimeFigureOut">
               <a:rPr lang="en-US" smtClean="0"/>
-              <a:t>3/24/26</a:t>
+              <a:t>3/31/26</a:t>
             </a:fld>
             <a:endParaRPr lang="en-US"/>
           </a:p>
@@ -9531,7 +9532,7 @@
           <a:noFill/>
           <a:extLst>
             <a:ext uri="{909E8E84-426E-40dd-AFC4-6F175D3DCCD1}">
-              <a14:hiddenFill xmlns="" xmlns:a14="http://schemas.microsoft.com/office/drawing/2010/main">
+              <a14:hiddenFill xmlns:a14="http://schemas.microsoft.com/office/drawing/2010/main" xmlns="">
                 <a:solidFill>
                   <a:srgbClr val="FFFFFF"/>
                 </a:solidFill>
@@ -9605,7 +9606,7 @@
               </a:ln>
               <a:extLst>
                 <a:ext uri="{91240B29-F687-4f45-9708-019B960494DF}">
-                  <a14:hiddenLine xmlns="" xmlns:a14="http://schemas.microsoft.com/office/drawing/2010/main" w="9525">
+                  <a14:hiddenLine xmlns:a14="http://schemas.microsoft.com/office/drawing/2010/main" xmlns="" w="9525">
                     <a:solidFill>
                       <a:srgbClr val="000000"/>
                     </a:solidFill>
@@ -9695,7 +9696,7 @@
               </a:ln>
               <a:extLst>
                 <a:ext uri="{91240B29-F687-4f45-9708-019B960494DF}">
-                  <a14:hiddenLine xmlns="" xmlns:a14="http://schemas.microsoft.com/office/drawing/2010/main" w="9525">
+                  <a14:hiddenLine xmlns:a14="http://schemas.microsoft.com/office/drawing/2010/main" xmlns="" w="9525">
                     <a:solidFill>
                       <a:srgbClr val="000000"/>
                     </a:solidFill>
@@ -9785,7 +9786,7 @@
               </a:ln>
               <a:extLst>
                 <a:ext uri="{91240B29-F687-4f45-9708-019B960494DF}">
-                  <a14:hiddenLine xmlns="" xmlns:a14="http://schemas.microsoft.com/office/drawing/2010/main" w="9525">
+                  <a14:hiddenLine xmlns:a14="http://schemas.microsoft.com/office/drawing/2010/main" xmlns="" w="9525">
                     <a:solidFill>
                       <a:srgbClr val="000000"/>
                     </a:solidFill>
@@ -9847,7 +9848,7 @@
               </a:ln>
               <a:extLst>
                 <a:ext uri="{91240B29-F687-4f45-9708-019B960494DF}">
-                  <a14:hiddenLine xmlns="" xmlns:a14="http://schemas.microsoft.com/office/drawing/2010/main" w="9525">
+                  <a14:hiddenLine xmlns:a14="http://schemas.microsoft.com/office/drawing/2010/main" xmlns="" w="9525">
                     <a:solidFill>
                       <a:srgbClr val="000000"/>
                     </a:solidFill>
@@ -9937,7 +9938,7 @@
               </a:ln>
               <a:extLst>
                 <a:ext uri="{91240B29-F687-4f45-9708-019B960494DF}">
-                  <a14:hiddenLine xmlns="" xmlns:a14="http://schemas.microsoft.com/office/drawing/2010/main" w="9525">
+                  <a14:hiddenLine xmlns:a14="http://schemas.microsoft.com/office/drawing/2010/main" xmlns="" w="9525">
                     <a:solidFill>
                       <a:srgbClr val="000000"/>
                     </a:solidFill>
@@ -9999,7 +10000,7 @@
               </a:ln>
               <a:extLst>
                 <a:ext uri="{91240B29-F687-4f45-9708-019B960494DF}">
-                  <a14:hiddenLine xmlns="" xmlns:a14="http://schemas.microsoft.com/office/drawing/2010/main" w="9525">
+                  <a14:hiddenLine xmlns:a14="http://schemas.microsoft.com/office/drawing/2010/main" xmlns="" w="9525">
                     <a:solidFill>
                       <a:srgbClr val="000000"/>
                     </a:solidFill>
@@ -10061,7 +10062,7 @@
               </a:ln>
               <a:extLst>
                 <a:ext uri="{91240B29-F687-4f45-9708-019B960494DF}">
-                  <a14:hiddenLine xmlns="" xmlns:a14="http://schemas.microsoft.com/office/drawing/2010/main" w="9525">
+                  <a14:hiddenLine xmlns:a14="http://schemas.microsoft.com/office/drawing/2010/main" xmlns="" w="9525">
                     <a:solidFill>
                       <a:srgbClr val="000000"/>
                     </a:solidFill>
@@ -10151,7 +10152,7 @@
               </a:ln>
               <a:extLst>
                 <a:ext uri="{91240B29-F687-4f45-9708-019B960494DF}">
-                  <a14:hiddenLine xmlns="" xmlns:a14="http://schemas.microsoft.com/office/drawing/2010/main" w="9525">
+                  <a14:hiddenLine xmlns:a14="http://schemas.microsoft.com/office/drawing/2010/main" xmlns="" w="9525">
                     <a:solidFill>
                       <a:srgbClr val="000000"/>
                     </a:solidFill>
@@ -10241,7 +10242,7 @@
               </a:ln>
               <a:extLst>
                 <a:ext uri="{91240B29-F687-4f45-9708-019B960494DF}">
-                  <a14:hiddenLine xmlns="" xmlns:a14="http://schemas.microsoft.com/office/drawing/2010/main" w="9525">
+                  <a14:hiddenLine xmlns:a14="http://schemas.microsoft.com/office/drawing/2010/main" xmlns="" w="9525">
                     <a:solidFill>
                       <a:srgbClr val="000000"/>
                     </a:solidFill>
@@ -10303,7 +10304,7 @@
               </a:ln>
               <a:extLst>
                 <a:ext uri="{91240B29-F687-4f45-9708-019B960494DF}">
-                  <a14:hiddenLine xmlns="" xmlns:a14="http://schemas.microsoft.com/office/drawing/2010/main" w="9525">
+                  <a14:hiddenLine xmlns:a14="http://schemas.microsoft.com/office/drawing/2010/main" xmlns="" w="9525">
                     <a:solidFill>
                       <a:srgbClr val="000000"/>
                     </a:solidFill>
@@ -10413,7 +10414,7 @@
               </a:ln>
               <a:extLst>
                 <a:ext uri="{91240B29-F687-4f45-9708-019B960494DF}">
-                  <a14:hiddenLine xmlns="" xmlns:a14="http://schemas.microsoft.com/office/drawing/2010/main" w="9525">
+                  <a14:hiddenLine xmlns:a14="http://schemas.microsoft.com/office/drawing/2010/main" xmlns="" w="9525">
                     <a:solidFill>
                       <a:srgbClr val="000000"/>
                     </a:solidFill>
@@ -10497,7 +10498,7 @@
               </a:ln>
               <a:extLst>
                 <a:ext uri="{91240B29-F687-4f45-9708-019B960494DF}">
-                  <a14:hiddenLine xmlns="" xmlns:a14="http://schemas.microsoft.com/office/drawing/2010/main" w="9525">
+                  <a14:hiddenLine xmlns:a14="http://schemas.microsoft.com/office/drawing/2010/main" xmlns="" w="9525">
                     <a:solidFill>
                       <a:srgbClr val="000000"/>
                     </a:solidFill>
@@ -10559,7 +10560,7 @@
               </a:ln>
               <a:extLst>
                 <a:ext uri="{91240B29-F687-4f45-9708-019B960494DF}">
-                  <a14:hiddenLine xmlns="" xmlns:a14="http://schemas.microsoft.com/office/drawing/2010/main" w="9525">
+                  <a14:hiddenLine xmlns:a14="http://schemas.microsoft.com/office/drawing/2010/main" xmlns="" w="9525">
                     <a:solidFill>
                       <a:srgbClr val="000000"/>
                     </a:solidFill>
@@ -10621,7 +10622,7 @@
               </a:ln>
               <a:extLst>
                 <a:ext uri="{91240B29-F687-4f45-9708-019B960494DF}">
-                  <a14:hiddenLine xmlns="" xmlns:a14="http://schemas.microsoft.com/office/drawing/2010/main" w="9525">
+                  <a14:hiddenLine xmlns:a14="http://schemas.microsoft.com/office/drawing/2010/main" xmlns="" w="9525">
                     <a:solidFill>
                       <a:srgbClr val="000000"/>
                     </a:solidFill>
@@ -10711,7 +10712,7 @@
               </a:ln>
               <a:extLst>
                 <a:ext uri="{91240B29-F687-4f45-9708-019B960494DF}">
-                  <a14:hiddenLine xmlns="" xmlns:a14="http://schemas.microsoft.com/office/drawing/2010/main" w="9525">
+                  <a14:hiddenLine xmlns:a14="http://schemas.microsoft.com/office/drawing/2010/main" xmlns="" w="9525">
                     <a:solidFill>
                       <a:srgbClr val="000000"/>
                     </a:solidFill>
@@ -10745,7 +10746,7 @@
               </a:ln>
               <a:extLst>
                 <a:ext uri="{91240B29-F687-4f45-9708-019B960494DF}">
-                  <a14:hiddenLine xmlns="" xmlns:a14="http://schemas.microsoft.com/office/drawing/2010/main" w="9525">
+                  <a14:hiddenLine xmlns:a14="http://schemas.microsoft.com/office/drawing/2010/main" xmlns="" w="9525">
                     <a:solidFill>
                       <a:srgbClr val="000000"/>
                     </a:solidFill>
@@ -10810,7 +10811,7 @@
               </a:ln>
               <a:extLst>
                 <a:ext uri="{91240B29-F687-4f45-9708-019B960494DF}">
-                  <a14:hiddenLine xmlns="" xmlns:a14="http://schemas.microsoft.com/office/drawing/2010/main" w="9525">
+                  <a14:hiddenLine xmlns:a14="http://schemas.microsoft.com/office/drawing/2010/main" xmlns="" w="9525">
                     <a:solidFill>
                       <a:srgbClr val="000000"/>
                     </a:solidFill>
@@ -10900,7 +10901,7 @@
               </a:ln>
               <a:extLst>
                 <a:ext uri="{91240B29-F687-4f45-9708-019B960494DF}">
-                  <a14:hiddenLine xmlns="" xmlns:a14="http://schemas.microsoft.com/office/drawing/2010/main" w="9525">
+                  <a14:hiddenLine xmlns:a14="http://schemas.microsoft.com/office/drawing/2010/main" xmlns="" w="9525">
                     <a:solidFill>
                       <a:srgbClr val="000000"/>
                     </a:solidFill>
@@ -10962,7 +10963,7 @@
               </a:ln>
               <a:extLst>
                 <a:ext uri="{91240B29-F687-4f45-9708-019B960494DF}">
-                  <a14:hiddenLine xmlns="" xmlns:a14="http://schemas.microsoft.com/office/drawing/2010/main" w="9525">
+                  <a14:hiddenLine xmlns:a14="http://schemas.microsoft.com/office/drawing/2010/main" xmlns="" w="9525">
                     <a:solidFill>
                       <a:srgbClr val="000000"/>
                     </a:solidFill>
@@ -11052,7 +11053,7 @@
               </a:ln>
               <a:extLst>
                 <a:ext uri="{91240B29-F687-4f45-9708-019B960494DF}">
-                  <a14:hiddenLine xmlns="" xmlns:a14="http://schemas.microsoft.com/office/drawing/2010/main" w="9525">
+                  <a14:hiddenLine xmlns:a14="http://schemas.microsoft.com/office/drawing/2010/main" xmlns="" w="9525">
                     <a:solidFill>
                       <a:srgbClr val="000000"/>
                     </a:solidFill>
@@ -11117,7 +11118,7 @@
               </a:ln>
               <a:extLst>
                 <a:ext uri="{91240B29-F687-4f45-9708-019B960494DF}">
-                  <a14:hiddenLine xmlns="" xmlns:a14="http://schemas.microsoft.com/office/drawing/2010/main" w="9525">
+                  <a14:hiddenLine xmlns:a14="http://schemas.microsoft.com/office/drawing/2010/main" xmlns="" w="9525">
                     <a:solidFill>
                       <a:srgbClr val="000000"/>
                     </a:solidFill>
@@ -11179,7 +11180,7 @@
               </a:ln>
               <a:extLst>
                 <a:ext uri="{91240B29-F687-4f45-9708-019B960494DF}">
-                  <a14:hiddenLine xmlns="" xmlns:a14="http://schemas.microsoft.com/office/drawing/2010/main" w="9525">
+                  <a14:hiddenLine xmlns:a14="http://schemas.microsoft.com/office/drawing/2010/main" xmlns="" w="9525">
                     <a:solidFill>
                       <a:srgbClr val="000000"/>
                     </a:solidFill>
@@ -11269,7 +11270,7 @@
               </a:ln>
               <a:extLst>
                 <a:ext uri="{91240B29-F687-4f45-9708-019B960494DF}">
-                  <a14:hiddenLine xmlns="" xmlns:a14="http://schemas.microsoft.com/office/drawing/2010/main" w="9525">
+                  <a14:hiddenLine xmlns:a14="http://schemas.microsoft.com/office/drawing/2010/main" xmlns="" w="9525">
                     <a:solidFill>
                       <a:srgbClr val="000000"/>
                     </a:solidFill>
@@ -11359,7 +11360,7 @@
               </a:ln>
               <a:extLst>
                 <a:ext uri="{91240B29-F687-4f45-9708-019B960494DF}">
-                  <a14:hiddenLine xmlns="" xmlns:a14="http://schemas.microsoft.com/office/drawing/2010/main" w="9525">
+                  <a14:hiddenLine xmlns:a14="http://schemas.microsoft.com/office/drawing/2010/main" xmlns="" w="9525">
                     <a:solidFill>
                       <a:srgbClr val="000000"/>
                     </a:solidFill>
@@ -11424,7 +11425,7 @@
               </a:ln>
               <a:extLst>
                 <a:ext uri="{91240B29-F687-4f45-9708-019B960494DF}">
-                  <a14:hiddenLine xmlns="" xmlns:a14="http://schemas.microsoft.com/office/drawing/2010/main" w="9525">
+                  <a14:hiddenLine xmlns:a14="http://schemas.microsoft.com/office/drawing/2010/main" xmlns="" w="9525">
                     <a:solidFill>
                       <a:srgbClr val="000000"/>
                     </a:solidFill>
@@ -11544,7 +11545,7 @@
               </a:ln>
               <a:extLst>
                 <a:ext uri="{91240B29-F687-4f45-9708-019B960494DF}">
-                  <a14:hiddenLine xmlns="" xmlns:a14="http://schemas.microsoft.com/office/drawing/2010/main" w="9525">
+                  <a14:hiddenLine xmlns:a14="http://schemas.microsoft.com/office/drawing/2010/main" xmlns="" w="9525">
                     <a:solidFill>
                       <a:srgbClr val="000000"/>
                     </a:solidFill>
@@ -11625,7 +11626,7 @@
               </a:ln>
               <a:extLst>
                 <a:ext uri="{91240B29-F687-4f45-9708-019B960494DF}">
-                  <a14:hiddenLine xmlns="" xmlns:a14="http://schemas.microsoft.com/office/drawing/2010/main" w="9525">
+                  <a14:hiddenLine xmlns:a14="http://schemas.microsoft.com/office/drawing/2010/main" xmlns="" w="9525">
                     <a:solidFill>
                       <a:srgbClr val="000000"/>
                     </a:solidFill>
@@ -11740,7 +11741,7 @@
               </a:ln>
               <a:extLst>
                 <a:ext uri="{91240B29-F687-4f45-9708-019B960494DF}">
-                  <a14:hiddenLine xmlns="" xmlns:a14="http://schemas.microsoft.com/office/drawing/2010/main" w="9525">
+                  <a14:hiddenLine xmlns:a14="http://schemas.microsoft.com/office/drawing/2010/main" xmlns="" w="9525">
                     <a:solidFill>
                       <a:srgbClr val="000000"/>
                     </a:solidFill>
@@ -11830,7 +11831,7 @@
               </a:ln>
               <a:extLst>
                 <a:ext uri="{91240B29-F687-4f45-9708-019B960494DF}">
-                  <a14:hiddenLine xmlns="" xmlns:a14="http://schemas.microsoft.com/office/drawing/2010/main" w="9525">
+                  <a14:hiddenLine xmlns:a14="http://schemas.microsoft.com/office/drawing/2010/main" xmlns="" w="9525">
                     <a:solidFill>
                       <a:srgbClr val="000000"/>
                     </a:solidFill>
@@ -11895,7 +11896,7 @@
               </a:ln>
               <a:extLst>
                 <a:ext uri="{91240B29-F687-4f45-9708-019B960494DF}">
-                  <a14:hiddenLine xmlns="" xmlns:a14="http://schemas.microsoft.com/office/drawing/2010/main" w="9525">
+                  <a14:hiddenLine xmlns:a14="http://schemas.microsoft.com/office/drawing/2010/main" xmlns="" w="9525">
                     <a:solidFill>
                       <a:srgbClr val="000000"/>
                     </a:solidFill>
@@ -11985,7 +11986,7 @@
               </a:ln>
               <a:extLst>
                 <a:ext uri="{91240B29-F687-4f45-9708-019B960494DF}">
-                  <a14:hiddenLine xmlns="" xmlns:a14="http://schemas.microsoft.com/office/drawing/2010/main" w="9525">
+                  <a14:hiddenLine xmlns:a14="http://schemas.microsoft.com/office/drawing/2010/main" xmlns="" w="9525">
                     <a:solidFill>
                       <a:srgbClr val="000000"/>
                     </a:solidFill>
@@ -12053,7 +12054,7 @@
               </a:ln>
               <a:extLst>
                 <a:ext uri="{91240B29-F687-4f45-9708-019B960494DF}">
-                  <a14:hiddenLine xmlns="" xmlns:a14="http://schemas.microsoft.com/office/drawing/2010/main" w="9525">
+                  <a14:hiddenLine xmlns:a14="http://schemas.microsoft.com/office/drawing/2010/main" xmlns="" w="9525">
                     <a:solidFill>
                       <a:srgbClr val="000000"/>
                     </a:solidFill>
@@ -12143,7 +12144,7 @@
               </a:ln>
               <a:extLst>
                 <a:ext uri="{91240B29-F687-4f45-9708-019B960494DF}">
-                  <a14:hiddenLine xmlns="" xmlns:a14="http://schemas.microsoft.com/office/drawing/2010/main" w="9525">
+                  <a14:hiddenLine xmlns:a14="http://schemas.microsoft.com/office/drawing/2010/main" xmlns="" w="9525">
                     <a:solidFill>
                       <a:srgbClr val="000000"/>
                     </a:solidFill>
@@ -12211,7 +12212,7 @@
               </a:ln>
               <a:extLst>
                 <a:ext uri="{91240B29-F687-4f45-9708-019B960494DF}">
-                  <a14:hiddenLine xmlns="" xmlns:a14="http://schemas.microsoft.com/office/drawing/2010/main" w="9525">
+                  <a14:hiddenLine xmlns:a14="http://schemas.microsoft.com/office/drawing/2010/main" xmlns="" w="9525">
                     <a:solidFill>
                       <a:srgbClr val="000000"/>
                     </a:solidFill>
@@ -12301,7 +12302,7 @@
               </a:ln>
               <a:extLst>
                 <a:ext uri="{91240B29-F687-4f45-9708-019B960494DF}">
-                  <a14:hiddenLine xmlns="" xmlns:a14="http://schemas.microsoft.com/office/drawing/2010/main" w="9525">
+                  <a14:hiddenLine xmlns:a14="http://schemas.microsoft.com/office/drawing/2010/main" xmlns="" w="9525">
                     <a:solidFill>
                       <a:srgbClr val="000000"/>
                     </a:solidFill>
@@ -12335,7 +12336,7 @@
               </a:ln>
               <a:extLst>
                 <a:ext uri="{91240B29-F687-4f45-9708-019B960494DF}">
-                  <a14:hiddenLine xmlns="" xmlns:a14="http://schemas.microsoft.com/office/drawing/2010/main" w="9525">
+                  <a14:hiddenLine xmlns:a14="http://schemas.microsoft.com/office/drawing/2010/main" xmlns="" w="9525">
                     <a:solidFill>
                       <a:srgbClr val="000000"/>
                     </a:solidFill>
@@ -12475,7 +12476,7 @@
           <a:p>
             <a:fld id="{EC4347D3-4C9A-C240-8F14-750059DFEEB0}" type="datetimeFigureOut">
               <a:rPr lang="en-US" smtClean="0"/>
-              <a:t>3/24/26</a:t>
+              <a:t>3/31/26</a:t>
             </a:fld>
             <a:endParaRPr lang="en-US"/>
           </a:p>
@@ -13679,6 +13680,221 @@
 </p:sld>
 </file>
 
+<file path=ppt/slides/slide14.xml><?xml version="1.0" encoding="utf-8"?>
+<p:sld xmlns:a="http://schemas.openxmlformats.org/drawingml/2006/main" xmlns:r="http://schemas.openxmlformats.org/officeDocument/2006/relationships" xmlns:p="http://schemas.openxmlformats.org/presentationml/2006/main">
+  <p:cSld>
+    <p:spTree>
+      <p:nvGrpSpPr>
+        <p:cNvPr id="1" name="">
+          <a:extLst>
+            <a:ext uri="{FF2B5EF4-FFF2-40B4-BE49-F238E27FC236}">
+              <a16:creationId xmlns:a16="http://schemas.microsoft.com/office/drawing/2014/main" id="{D460BF77-24F9-F61C-4149-67F355AE55AE}"/>
+            </a:ext>
+          </a:extLst>
+        </p:cNvPr>
+        <p:cNvGrpSpPr/>
+        <p:nvPr/>
+      </p:nvGrpSpPr>
+      <p:grpSpPr>
+        <a:xfrm>
+          <a:off x="0" y="0"/>
+          <a:ext cx="0" cy="0"/>
+          <a:chOff x="0" y="0"/>
+          <a:chExt cx="0" cy="0"/>
+        </a:xfrm>
+      </p:grpSpPr>
+      <p:sp>
+        <p:nvSpPr>
+          <p:cNvPr id="6146" name="Rectangle 2">
+            <a:extLst>
+              <a:ext uri="{FF2B5EF4-FFF2-40B4-BE49-F238E27FC236}">
+                <a16:creationId xmlns:a16="http://schemas.microsoft.com/office/drawing/2014/main" id="{BA71AD9A-D932-E6EE-3732-5824852E45EB}"/>
+              </a:ext>
+            </a:extLst>
+          </p:cNvPr>
+          <p:cNvSpPr>
+            <a:spLocks noGrp="1" noChangeArrowheads="1"/>
+          </p:cNvSpPr>
+          <p:nvPr>
+            <p:ph type="title"/>
+            <p:custDataLst>
+              <p:tags r:id="rId1"/>
+            </p:custDataLst>
+          </p:nvPr>
+        </p:nvSpPr>
+        <p:spPr>
+          <a:xfrm>
+            <a:off x="1141413" y="284084"/>
+            <a:ext cx="9905998" cy="620791"/>
+          </a:xfrm>
+        </p:spPr>
+        <p:txBody>
+          <a:bodyPr/>
+          <a:lstStyle/>
+          <a:p>
+            <a:pPr algn="ctr"/>
+            <a:r>
+              <a:rPr lang="en-US" dirty="0"/>
+              <a:t>Lecture 14: 3/31/26</a:t>
+            </a:r>
+          </a:p>
+        </p:txBody>
+      </p:sp>
+      <p:sp>
+        <p:nvSpPr>
+          <p:cNvPr id="6147" name="Rectangle 3">
+            <a:extLst>
+              <a:ext uri="{FF2B5EF4-FFF2-40B4-BE49-F238E27FC236}">
+                <a16:creationId xmlns:a16="http://schemas.microsoft.com/office/drawing/2014/main" id="{BED3C14D-E7D5-00F2-B29E-2CEE035499F3}"/>
+              </a:ext>
+            </a:extLst>
+          </p:cNvPr>
+          <p:cNvSpPr>
+            <a:spLocks noGrp="1" noChangeArrowheads="1"/>
+          </p:cNvSpPr>
+          <p:nvPr>
+            <p:ph idx="1"/>
+            <p:custDataLst>
+              <p:tags r:id="rId2"/>
+            </p:custDataLst>
+          </p:nvPr>
+        </p:nvSpPr>
+        <p:spPr>
+          <a:xfrm>
+            <a:off x="3431357" y="1123950"/>
+            <a:ext cx="7794362" cy="5149850"/>
+          </a:xfrm>
+        </p:spPr>
+        <p:txBody>
+          <a:bodyPr>
+            <a:normAutofit fontScale="70000" lnSpcReduction="20000"/>
+          </a:bodyPr>
+          <a:lstStyle/>
+          <a:p>
+            <a:r>
+              <a:rPr lang="en-US" dirty="0"/>
+              <a:t>Attendance checks are back in full force today…</a:t>
+            </a:r>
+          </a:p>
+          <a:p>
+            <a:r>
+              <a:rPr lang="en-US" dirty="0"/>
+              <a:t>This week will be a normal week of full lectures (yay!)</a:t>
+            </a:r>
+          </a:p>
+          <a:p>
+            <a:r>
+              <a:rPr lang="en-US" dirty="0"/>
+              <a:t>You should have a project group now.</a:t>
+            </a:r>
+          </a:p>
+          <a:p>
+            <a:pPr lvl="1"/>
+            <a:r>
+              <a:rPr lang="en-US" dirty="0"/>
+              <a:t>Start learning your algorithm and implementing in the three languages</a:t>
+            </a:r>
+          </a:p>
+          <a:p>
+            <a:pPr lvl="1"/>
+            <a:r>
+              <a:rPr lang="en-US" dirty="0"/>
+              <a:t>Three implementations are due early (4/7/26)</a:t>
+            </a:r>
+          </a:p>
+          <a:p>
+            <a:pPr lvl="2"/>
+            <a:r>
+              <a:rPr lang="en-US" dirty="0"/>
+              <a:t>You will push these to </a:t>
+            </a:r>
+            <a:r>
+              <a:rPr lang="en-US" dirty="0" err="1"/>
+              <a:t>github</a:t>
+            </a:r>
+            <a:r>
+              <a:rPr lang="en-US" dirty="0"/>
+              <a:t> repo in the folder as specified on website</a:t>
+            </a:r>
+          </a:p>
+          <a:p>
+            <a:r>
+              <a:rPr lang="en-US" dirty="0"/>
+              <a:t>You should be working on your Cows assignment</a:t>
+            </a:r>
+          </a:p>
+          <a:p>
+            <a:pPr lvl="1"/>
+            <a:r>
+              <a:rPr lang="en-US" dirty="0"/>
+              <a:t>How’s it going? Last year’s class thought this one was pretty tough</a:t>
+            </a:r>
+          </a:p>
+          <a:p>
+            <a:r>
+              <a:rPr lang="en-US" dirty="0"/>
+              <a:t>Coming up</a:t>
+            </a:r>
+          </a:p>
+          <a:p>
+            <a:pPr lvl="1"/>
+            <a:r>
+              <a:rPr lang="en-US" dirty="0"/>
+              <a:t>Cows (this week)</a:t>
+            </a:r>
+          </a:p>
+          <a:p>
+            <a:pPr lvl="1"/>
+            <a:r>
+              <a:rPr lang="en-US" dirty="0"/>
+              <a:t>Project implementations (due next week)</a:t>
+            </a:r>
+          </a:p>
+          <a:p>
+            <a:pPr lvl="1"/>
+            <a:r>
+              <a:rPr lang="en-US" dirty="0"/>
+              <a:t>Approximations assignment (Due week after that)</a:t>
+            </a:r>
+          </a:p>
+          <a:p>
+            <a:pPr lvl="1"/>
+            <a:r>
+              <a:rPr lang="en-US" dirty="0"/>
+              <a:t>Quiz (week after that)</a:t>
+            </a:r>
+          </a:p>
+          <a:p>
+            <a:pPr lvl="1"/>
+            <a:r>
+              <a:rPr lang="en-US" dirty="0"/>
+              <a:t>Project presentations</a:t>
+            </a:r>
+          </a:p>
+          <a:p>
+            <a:r>
+              <a:rPr lang="en-US" dirty="0"/>
+              <a:t>Today we will continue with more approximation algorithms</a:t>
+            </a:r>
+          </a:p>
+          <a:p>
+            <a:endParaRPr lang="en-US" dirty="0"/>
+          </a:p>
+        </p:txBody>
+      </p:sp>
+    </p:spTree>
+    <p:extLst>
+      <p:ext uri="{BB962C8B-B14F-4D97-AF65-F5344CB8AC3E}">
+        <p14:creationId xmlns:p14="http://schemas.microsoft.com/office/powerpoint/2010/main" val="3421579178"/>
+      </p:ext>
+    </p:extLst>
+  </p:cSld>
+  <p:clrMapOvr>
+    <a:masterClrMapping/>
+  </p:clrMapOvr>
+</p:sld>
+</file>
+
 <file path=ppt/slides/slide2.xml><?xml version="1.0" encoding="utf-8"?>
 <p:sld xmlns:a="http://schemas.openxmlformats.org/drawingml/2006/main" xmlns:r="http://schemas.openxmlformats.org/officeDocument/2006/relationships" xmlns:p="http://schemas.openxmlformats.org/presentationml/2006/main">
   <p:cSld>
@@ -15122,6 +15338,18 @@
 </file>
 
 <file path=ppt/tags/tag24.xml><?xml version="1.0" encoding="utf-8"?>
+<p:tagLst xmlns:a="http://schemas.openxmlformats.org/drawingml/2006/main" xmlns:r="http://schemas.openxmlformats.org/officeDocument/2006/relationships" xmlns:p="http://schemas.openxmlformats.org/presentationml/2006/main">
+  <p:tag name="_INSTRUCTOR VIEW19C14C36-AC8E-43BC-9DB6-C2AAF774C7DC|PANE__TAG" val="_"/>
+</p:tagLst>
+</file>
+
+<file path=ppt/tags/tag25.xml><?xml version="1.0" encoding="utf-8"?>
+<p:tagLst xmlns:a="http://schemas.openxmlformats.org/drawingml/2006/main" xmlns:r="http://schemas.openxmlformats.org/officeDocument/2006/relationships" xmlns:p="http://schemas.openxmlformats.org/presentationml/2006/main">
+  <p:tag name="_INSTRUCTOR VIEW19C14C36-AC8E-43BC-9DB6-C2AAF774C7DC|PANE__TAG" val="_"/>
+</p:tagLst>
+</file>
+
+<file path=ppt/tags/tag26.xml><?xml version="1.0" encoding="utf-8"?>
 <p:tagLst xmlns:a="http://schemas.openxmlformats.org/drawingml/2006/main" xmlns:r="http://schemas.openxmlformats.org/officeDocument/2006/relationships" xmlns:p="http://schemas.openxmlformats.org/presentationml/2006/main">
   <p:tag name="_INSTRUCTOR VIEW19C14C36-AC8E-43BC-9DB6-C2AAF774C7DC|PANE__TAG" val="_"/>
 </p:tagLst>

--- a/slides/00-DailyAnnouncements.pptx
+++ b/slides/00-DailyAnnouncements.pptx
@@ -5,7 +5,7 @@
     <p:sldMasterId id="2147484006" r:id="rId1"/>
   </p:sldMasterIdLst>
   <p:notesMasterIdLst>
-    <p:notesMasterId r:id="rId16"/>
+    <p:notesMasterId r:id="rId17"/>
   </p:notesMasterIdLst>
   <p:sldIdLst>
     <p:sldId id="256" r:id="rId2"/>
@@ -22,6 +22,7 @@
     <p:sldId id="515" r:id="rId13"/>
     <p:sldId id="516" r:id="rId14"/>
     <p:sldId id="517" r:id="rId15"/>
+    <p:sldId id="518" r:id="rId16"/>
   </p:sldIdLst>
   <p:sldSz cx="12192000" cy="6858000"/>
   <p:notesSz cx="6858000" cy="9144000"/>
@@ -210,7 +211,7 @@
           <a:p>
             <a:fld id="{C5B45307-6ED4-B142-BD64-10F739779302}" type="datetimeFigureOut">
               <a:rPr lang="en-US" smtClean="0"/>
-              <a:t>3/31/26</a:t>
+              <a:t>4/7/26</a:t>
             </a:fld>
             <a:endParaRPr lang="en-US"/>
           </a:p>
@@ -618,7 +619,7 @@
           <a:noFill/>
           <a:extLst>
             <a:ext uri="{909E8E84-426E-40dd-AFC4-6F175D3DCCD1}">
-              <a14:hiddenFill xmlns:a14="http://schemas.microsoft.com/office/drawing/2010/main" xmlns="">
+              <a14:hiddenFill xmlns="" xmlns:a14="http://schemas.microsoft.com/office/drawing/2010/main">
                 <a:solidFill>
                   <a:srgbClr val="FFFFFF"/>
                 </a:solidFill>
@@ -677,7 +678,7 @@
             </a:ln>
             <a:extLst>
               <a:ext uri="{91240B29-F687-4f45-9708-019B960494DF}">
-                <a14:hiddenLine xmlns:a14="http://schemas.microsoft.com/office/drawing/2010/main" xmlns="" w="9525">
+                <a14:hiddenLine xmlns="" xmlns:a14="http://schemas.microsoft.com/office/drawing/2010/main" w="9525">
                   <a:solidFill>
                     <a:srgbClr val="000000"/>
                   </a:solidFill>
@@ -767,7 +768,7 @@
             </a:ln>
             <a:extLst>
               <a:ext uri="{91240B29-F687-4f45-9708-019B960494DF}">
-                <a14:hiddenLine xmlns:a14="http://schemas.microsoft.com/office/drawing/2010/main" xmlns="" w="9525">
+                <a14:hiddenLine xmlns="" xmlns:a14="http://schemas.microsoft.com/office/drawing/2010/main" w="9525">
                   <a:solidFill>
                     <a:srgbClr val="000000"/>
                   </a:solidFill>
@@ -857,7 +858,7 @@
             </a:ln>
             <a:extLst>
               <a:ext uri="{91240B29-F687-4f45-9708-019B960494DF}">
-                <a14:hiddenLine xmlns:a14="http://schemas.microsoft.com/office/drawing/2010/main" xmlns="" w="9525">
+                <a14:hiddenLine xmlns="" xmlns:a14="http://schemas.microsoft.com/office/drawing/2010/main" w="9525">
                   <a:solidFill>
                     <a:srgbClr val="000000"/>
                   </a:solidFill>
@@ -891,7 +892,7 @@
             </a:ln>
             <a:extLst>
               <a:ext uri="{91240B29-F687-4f45-9708-019B960494DF}">
-                <a14:hiddenLine xmlns:a14="http://schemas.microsoft.com/office/drawing/2010/main" xmlns="" w="9525">
+                <a14:hiddenLine xmlns="" xmlns:a14="http://schemas.microsoft.com/office/drawing/2010/main" w="9525">
                   <a:solidFill>
                     <a:srgbClr val="000000"/>
                   </a:solidFill>
@@ -981,7 +982,7 @@
             </a:ln>
             <a:extLst>
               <a:ext uri="{91240B29-F687-4f45-9708-019B960494DF}">
-                <a14:hiddenLine xmlns:a14="http://schemas.microsoft.com/office/drawing/2010/main" xmlns="" w="9525">
+                <a14:hiddenLine xmlns="" xmlns:a14="http://schemas.microsoft.com/office/drawing/2010/main" w="9525">
                   <a:solidFill>
                     <a:srgbClr val="000000"/>
                   </a:solidFill>
@@ -1043,7 +1044,7 @@
             </a:ln>
             <a:extLst>
               <a:ext uri="{91240B29-F687-4f45-9708-019B960494DF}">
-                <a14:hiddenLine xmlns:a14="http://schemas.microsoft.com/office/drawing/2010/main" xmlns="" w="9525">
+                <a14:hiddenLine xmlns="" xmlns:a14="http://schemas.microsoft.com/office/drawing/2010/main" w="9525">
                   <a:solidFill>
                     <a:srgbClr val="000000"/>
                   </a:solidFill>
@@ -1105,7 +1106,7 @@
             </a:ln>
             <a:extLst>
               <a:ext uri="{91240B29-F687-4f45-9708-019B960494DF}">
-                <a14:hiddenLine xmlns:a14="http://schemas.microsoft.com/office/drawing/2010/main" xmlns="" w="9525">
+                <a14:hiddenLine xmlns="" xmlns:a14="http://schemas.microsoft.com/office/drawing/2010/main" w="9525">
                   <a:solidFill>
                     <a:srgbClr val="000000"/>
                   </a:solidFill>
@@ -1195,7 +1196,7 @@
             </a:ln>
             <a:extLst>
               <a:ext uri="{91240B29-F687-4f45-9708-019B960494DF}">
-                <a14:hiddenLine xmlns:a14="http://schemas.microsoft.com/office/drawing/2010/main" xmlns="" w="9525">
+                <a14:hiddenLine xmlns="" xmlns:a14="http://schemas.microsoft.com/office/drawing/2010/main" w="9525">
                   <a:solidFill>
                     <a:srgbClr val="000000"/>
                   </a:solidFill>
@@ -1257,7 +1258,7 @@
             </a:ln>
             <a:extLst>
               <a:ext uri="{91240B29-F687-4f45-9708-019B960494DF}">
-                <a14:hiddenLine xmlns:a14="http://schemas.microsoft.com/office/drawing/2010/main" xmlns="" w="9525">
+                <a14:hiddenLine xmlns="" xmlns:a14="http://schemas.microsoft.com/office/drawing/2010/main" w="9525">
                   <a:solidFill>
                     <a:srgbClr val="000000"/>
                   </a:solidFill>
@@ -1319,7 +1320,7 @@
             </a:ln>
             <a:extLst>
               <a:ext uri="{91240B29-F687-4f45-9708-019B960494DF}">
-                <a14:hiddenLine xmlns:a14="http://schemas.microsoft.com/office/drawing/2010/main" xmlns="" w="9525">
+                <a14:hiddenLine xmlns="" xmlns:a14="http://schemas.microsoft.com/office/drawing/2010/main" w="9525">
                   <a:solidFill>
                     <a:srgbClr val="000000"/>
                   </a:solidFill>
@@ -1409,7 +1410,7 @@
             </a:ln>
             <a:extLst>
               <a:ext uri="{91240B29-F687-4f45-9708-019B960494DF}">
-                <a14:hiddenLine xmlns:a14="http://schemas.microsoft.com/office/drawing/2010/main" xmlns="" w="9525">
+                <a14:hiddenLine xmlns="" xmlns:a14="http://schemas.microsoft.com/office/drawing/2010/main" w="9525">
                   <a:solidFill>
                     <a:srgbClr val="000000"/>
                   </a:solidFill>
@@ -1499,7 +1500,7 @@
             </a:ln>
             <a:extLst>
               <a:ext uri="{91240B29-F687-4f45-9708-019B960494DF}">
-                <a14:hiddenLine xmlns:a14="http://schemas.microsoft.com/office/drawing/2010/main" xmlns="" w="9525">
+                <a14:hiddenLine xmlns="" xmlns:a14="http://schemas.microsoft.com/office/drawing/2010/main" w="9525">
                   <a:solidFill>
                     <a:srgbClr val="000000"/>
                   </a:solidFill>
@@ -1561,7 +1562,7 @@
             </a:ln>
             <a:extLst>
               <a:ext uri="{91240B29-F687-4f45-9708-019B960494DF}">
-                <a14:hiddenLine xmlns:a14="http://schemas.microsoft.com/office/drawing/2010/main" xmlns="" w="9525">
+                <a14:hiddenLine xmlns="" xmlns:a14="http://schemas.microsoft.com/office/drawing/2010/main" w="9525">
                   <a:solidFill>
                     <a:srgbClr val="000000"/>
                   </a:solidFill>
@@ -1671,7 +1672,7 @@
             </a:ln>
             <a:extLst>
               <a:ext uri="{91240B29-F687-4f45-9708-019B960494DF}">
-                <a14:hiddenLine xmlns:a14="http://schemas.microsoft.com/office/drawing/2010/main" xmlns="" w="9525">
+                <a14:hiddenLine xmlns="" xmlns:a14="http://schemas.microsoft.com/office/drawing/2010/main" w="9525">
                   <a:solidFill>
                     <a:srgbClr val="000000"/>
                   </a:solidFill>
@@ -1733,7 +1734,7 @@
             </a:ln>
             <a:extLst>
               <a:ext uri="{91240B29-F687-4f45-9708-019B960494DF}">
-                <a14:hiddenLine xmlns:a14="http://schemas.microsoft.com/office/drawing/2010/main" xmlns="" w="9525">
+                <a14:hiddenLine xmlns="" xmlns:a14="http://schemas.microsoft.com/office/drawing/2010/main" w="9525">
                   <a:solidFill>
                     <a:srgbClr val="000000"/>
                   </a:solidFill>
@@ -1823,7 +1824,7 @@
             </a:ln>
             <a:extLst>
               <a:ext uri="{91240B29-F687-4f45-9708-019B960494DF}">
-                <a14:hiddenLine xmlns:a14="http://schemas.microsoft.com/office/drawing/2010/main" xmlns="" w="9525">
+                <a14:hiddenLine xmlns="" xmlns:a14="http://schemas.microsoft.com/office/drawing/2010/main" w="9525">
                   <a:solidFill>
                     <a:srgbClr val="000000"/>
                   </a:solidFill>
@@ -1913,7 +1914,7 @@
             </a:ln>
             <a:extLst>
               <a:ext uri="{91240B29-F687-4f45-9708-019B960494DF}">
-                <a14:hiddenLine xmlns:a14="http://schemas.microsoft.com/office/drawing/2010/main" xmlns="" w="9525">
+                <a14:hiddenLine xmlns="" xmlns:a14="http://schemas.microsoft.com/office/drawing/2010/main" w="9525">
                   <a:solidFill>
                     <a:srgbClr val="000000"/>
                   </a:solidFill>
@@ -1975,7 +1976,7 @@
             </a:ln>
             <a:extLst>
               <a:ext uri="{91240B29-F687-4f45-9708-019B960494DF}">
-                <a14:hiddenLine xmlns:a14="http://schemas.microsoft.com/office/drawing/2010/main" xmlns="" w="9525">
+                <a14:hiddenLine xmlns="" xmlns:a14="http://schemas.microsoft.com/office/drawing/2010/main" w="9525">
                   <a:solidFill>
                     <a:srgbClr val="000000"/>
                   </a:solidFill>
@@ -2065,7 +2066,7 @@
             </a:ln>
             <a:extLst>
               <a:ext uri="{91240B29-F687-4f45-9708-019B960494DF}">
-                <a14:hiddenLine xmlns:a14="http://schemas.microsoft.com/office/drawing/2010/main" xmlns="" w="9525">
+                <a14:hiddenLine xmlns="" xmlns:a14="http://schemas.microsoft.com/office/drawing/2010/main" w="9525">
                   <a:solidFill>
                     <a:srgbClr val="000000"/>
                   </a:solidFill>
@@ -2155,7 +2156,7 @@
             </a:ln>
             <a:extLst>
               <a:ext uri="{91240B29-F687-4f45-9708-019B960494DF}">
-                <a14:hiddenLine xmlns:a14="http://schemas.microsoft.com/office/drawing/2010/main" xmlns="" w="9525">
+                <a14:hiddenLine xmlns="" xmlns:a14="http://schemas.microsoft.com/office/drawing/2010/main" w="9525">
                   <a:solidFill>
                     <a:srgbClr val="000000"/>
                   </a:solidFill>
@@ -2211,7 +2212,7 @@
             </a:ln>
             <a:extLst>
               <a:ext uri="{91240B29-F687-4f45-9708-019B960494DF}">
-                <a14:hiddenLine xmlns:a14="http://schemas.microsoft.com/office/drawing/2010/main" xmlns="" w="9525">
+                <a14:hiddenLine xmlns="" xmlns:a14="http://schemas.microsoft.com/office/drawing/2010/main" w="9525">
                   <a:solidFill>
                     <a:srgbClr val="000000"/>
                   </a:solidFill>
@@ -2301,7 +2302,7 @@
             </a:ln>
             <a:extLst>
               <a:ext uri="{91240B29-F687-4f45-9708-019B960494DF}">
-                <a14:hiddenLine xmlns:a14="http://schemas.microsoft.com/office/drawing/2010/main" xmlns="" w="9525">
+                <a14:hiddenLine xmlns="" xmlns:a14="http://schemas.microsoft.com/office/drawing/2010/main" w="9525">
                   <a:solidFill>
                     <a:srgbClr val="000000"/>
                   </a:solidFill>
@@ -2357,7 +2358,7 @@
             </a:ln>
             <a:extLst>
               <a:ext uri="{91240B29-F687-4f45-9708-019B960494DF}">
-                <a14:hiddenLine xmlns:a14="http://schemas.microsoft.com/office/drawing/2010/main" xmlns="" w="9525">
+                <a14:hiddenLine xmlns="" xmlns:a14="http://schemas.microsoft.com/office/drawing/2010/main" w="9525">
                   <a:solidFill>
                     <a:srgbClr val="000000"/>
                   </a:solidFill>
@@ -2447,7 +2448,7 @@
             </a:ln>
             <a:extLst>
               <a:ext uri="{91240B29-F687-4f45-9708-019B960494DF}">
-                <a14:hiddenLine xmlns:a14="http://schemas.microsoft.com/office/drawing/2010/main" xmlns="" w="9525">
+                <a14:hiddenLine xmlns="" xmlns:a14="http://schemas.microsoft.com/office/drawing/2010/main" w="9525">
                   <a:solidFill>
                     <a:srgbClr val="000000"/>
                   </a:solidFill>
@@ -2515,7 +2516,7 @@
             </a:ln>
             <a:extLst>
               <a:ext uri="{91240B29-F687-4f45-9708-019B960494DF}">
-                <a14:hiddenLine xmlns:a14="http://schemas.microsoft.com/office/drawing/2010/main" xmlns="" w="9525">
+                <a14:hiddenLine xmlns="" xmlns:a14="http://schemas.microsoft.com/office/drawing/2010/main" w="9525">
                   <a:solidFill>
                     <a:srgbClr val="000000"/>
                   </a:solidFill>
@@ -2605,7 +2606,7 @@
             </a:ln>
             <a:extLst>
               <a:ext uri="{91240B29-F687-4f45-9708-019B960494DF}">
-                <a14:hiddenLine xmlns:a14="http://schemas.microsoft.com/office/drawing/2010/main" xmlns="" w="9525">
+                <a14:hiddenLine xmlns="" xmlns:a14="http://schemas.microsoft.com/office/drawing/2010/main" w="9525">
                   <a:solidFill>
                     <a:srgbClr val="000000"/>
                   </a:solidFill>
@@ -2673,7 +2674,7 @@
             </a:ln>
             <a:extLst>
               <a:ext uri="{91240B29-F687-4f45-9708-019B960494DF}">
-                <a14:hiddenLine xmlns:a14="http://schemas.microsoft.com/office/drawing/2010/main" xmlns="" w="9525">
+                <a14:hiddenLine xmlns="" xmlns:a14="http://schemas.microsoft.com/office/drawing/2010/main" w="9525">
                   <a:solidFill>
                     <a:srgbClr val="000000"/>
                   </a:solidFill>
@@ -2763,7 +2764,7 @@
             </a:ln>
             <a:extLst>
               <a:ext uri="{91240B29-F687-4f45-9708-019B960494DF}">
-                <a14:hiddenLine xmlns:a14="http://schemas.microsoft.com/office/drawing/2010/main" xmlns="" w="9525">
+                <a14:hiddenLine xmlns="" xmlns:a14="http://schemas.microsoft.com/office/drawing/2010/main" w="9525">
                   <a:solidFill>
                     <a:srgbClr val="000000"/>
                   </a:solidFill>
@@ -2797,7 +2798,7 @@
             </a:ln>
             <a:extLst>
               <a:ext uri="{91240B29-F687-4f45-9708-019B960494DF}">
-                <a14:hiddenLine xmlns:a14="http://schemas.microsoft.com/office/drawing/2010/main" xmlns="" w="9525">
+                <a14:hiddenLine xmlns="" xmlns:a14="http://schemas.microsoft.com/office/drawing/2010/main" w="9525">
                   <a:solidFill>
                     <a:srgbClr val="000000"/>
                   </a:solidFill>
@@ -2887,7 +2888,7 @@
             </a:ln>
             <a:extLst>
               <a:ext uri="{91240B29-F687-4f45-9708-019B960494DF}">
-                <a14:hiddenLine xmlns:a14="http://schemas.microsoft.com/office/drawing/2010/main" xmlns="" w="9525">
+                <a14:hiddenLine xmlns="" xmlns:a14="http://schemas.microsoft.com/office/drawing/2010/main" w="9525">
                   <a:solidFill>
                     <a:srgbClr val="000000"/>
                   </a:solidFill>
@@ -2949,7 +2950,7 @@
             </a:ln>
             <a:extLst>
               <a:ext uri="{91240B29-F687-4f45-9708-019B960494DF}">
-                <a14:hiddenLine xmlns:a14="http://schemas.microsoft.com/office/drawing/2010/main" xmlns="" w="9525">
+                <a14:hiddenLine xmlns="" xmlns:a14="http://schemas.microsoft.com/office/drawing/2010/main" w="9525">
                   <a:solidFill>
                     <a:srgbClr val="000000"/>
                   </a:solidFill>
@@ -3011,7 +3012,7 @@
             </a:ln>
             <a:extLst>
               <a:ext uri="{91240B29-F687-4f45-9708-019B960494DF}">
-                <a14:hiddenLine xmlns:a14="http://schemas.microsoft.com/office/drawing/2010/main" xmlns="" w="9525">
+                <a14:hiddenLine xmlns="" xmlns:a14="http://schemas.microsoft.com/office/drawing/2010/main" w="9525">
                   <a:solidFill>
                     <a:srgbClr val="000000"/>
                   </a:solidFill>
@@ -3101,7 +3102,7 @@
             </a:ln>
             <a:extLst>
               <a:ext uri="{91240B29-F687-4f45-9708-019B960494DF}">
-                <a14:hiddenLine xmlns:a14="http://schemas.microsoft.com/office/drawing/2010/main" xmlns="" w="9525">
+                <a14:hiddenLine xmlns="" xmlns:a14="http://schemas.microsoft.com/office/drawing/2010/main" w="9525">
                   <a:solidFill>
                     <a:srgbClr val="000000"/>
                   </a:solidFill>
@@ -3169,7 +3170,7 @@
             </a:ln>
             <a:extLst>
               <a:ext uri="{91240B29-F687-4f45-9708-019B960494DF}">
-                <a14:hiddenLine xmlns:a14="http://schemas.microsoft.com/office/drawing/2010/main" xmlns="" w="9525">
+                <a14:hiddenLine xmlns="" xmlns:a14="http://schemas.microsoft.com/office/drawing/2010/main" w="9525">
                   <a:solidFill>
                     <a:srgbClr val="000000"/>
                   </a:solidFill>
@@ -3231,7 +3232,7 @@
             </a:ln>
             <a:extLst>
               <a:ext uri="{91240B29-F687-4f45-9708-019B960494DF}">
-                <a14:hiddenLine xmlns:a14="http://schemas.microsoft.com/office/drawing/2010/main" xmlns="" w="9525">
+                <a14:hiddenLine xmlns="" xmlns:a14="http://schemas.microsoft.com/office/drawing/2010/main" w="9525">
                   <a:solidFill>
                     <a:srgbClr val="000000"/>
                   </a:solidFill>
@@ -3321,7 +3322,7 @@
             </a:ln>
             <a:extLst>
               <a:ext uri="{91240B29-F687-4f45-9708-019B960494DF}">
-                <a14:hiddenLine xmlns:a14="http://schemas.microsoft.com/office/drawing/2010/main" xmlns="" w="9525">
+                <a14:hiddenLine xmlns="" xmlns:a14="http://schemas.microsoft.com/office/drawing/2010/main" w="9525">
                   <a:solidFill>
                     <a:srgbClr val="000000"/>
                   </a:solidFill>
@@ -3383,7 +3384,7 @@
             </a:ln>
             <a:extLst>
               <a:ext uri="{91240B29-F687-4f45-9708-019B960494DF}">
-                <a14:hiddenLine xmlns:a14="http://schemas.microsoft.com/office/drawing/2010/main" xmlns="" w="9525">
+                <a14:hiddenLine xmlns="" xmlns:a14="http://schemas.microsoft.com/office/drawing/2010/main" w="9525">
                   <a:solidFill>
                     <a:srgbClr val="000000"/>
                   </a:solidFill>
@@ -3473,7 +3474,7 @@
             </a:ln>
             <a:extLst>
               <a:ext uri="{91240B29-F687-4f45-9708-019B960494DF}">
-                <a14:hiddenLine xmlns:a14="http://schemas.microsoft.com/office/drawing/2010/main" xmlns="" w="9525">
+                <a14:hiddenLine xmlns="" xmlns:a14="http://schemas.microsoft.com/office/drawing/2010/main" w="9525">
                   <a:solidFill>
                     <a:srgbClr val="000000"/>
                   </a:solidFill>
@@ -3535,7 +3536,7 @@
             </a:ln>
             <a:extLst>
               <a:ext uri="{91240B29-F687-4f45-9708-019B960494DF}">
-                <a14:hiddenLine xmlns:a14="http://schemas.microsoft.com/office/drawing/2010/main" xmlns="" w="9525">
+                <a14:hiddenLine xmlns="" xmlns:a14="http://schemas.microsoft.com/office/drawing/2010/main" w="9525">
                   <a:solidFill>
                     <a:srgbClr val="000000"/>
                   </a:solidFill>
@@ -3625,7 +3626,7 @@
             </a:ln>
             <a:extLst>
               <a:ext uri="{91240B29-F687-4f45-9708-019B960494DF}">
-                <a14:hiddenLine xmlns:a14="http://schemas.microsoft.com/office/drawing/2010/main" xmlns="" w="9525">
+                <a14:hiddenLine xmlns="" xmlns:a14="http://schemas.microsoft.com/office/drawing/2010/main" w="9525">
                   <a:solidFill>
                     <a:srgbClr val="000000"/>
                   </a:solidFill>
@@ -3659,7 +3660,7 @@
             </a:ln>
             <a:extLst>
               <a:ext uri="{91240B29-F687-4f45-9708-019B960494DF}">
-                <a14:hiddenLine xmlns:a14="http://schemas.microsoft.com/office/drawing/2010/main" xmlns="" w="9525">
+                <a14:hiddenLine xmlns="" xmlns:a14="http://schemas.microsoft.com/office/drawing/2010/main" w="9525">
                   <a:solidFill>
                     <a:srgbClr val="000000"/>
                   </a:solidFill>
@@ -3724,7 +3725,7 @@
             </a:ln>
             <a:extLst>
               <a:ext uri="{91240B29-F687-4f45-9708-019B960494DF}">
-                <a14:hiddenLine xmlns:a14="http://schemas.microsoft.com/office/drawing/2010/main" xmlns="" w="9525">
+                <a14:hiddenLine xmlns="" xmlns:a14="http://schemas.microsoft.com/office/drawing/2010/main" w="9525">
                   <a:solidFill>
                     <a:srgbClr val="000000"/>
                   </a:solidFill>
@@ -3814,7 +3815,7 @@
             </a:ln>
             <a:extLst>
               <a:ext uri="{91240B29-F687-4f45-9708-019B960494DF}">
-                <a14:hiddenLine xmlns:a14="http://schemas.microsoft.com/office/drawing/2010/main" xmlns="" w="9525">
+                <a14:hiddenLine xmlns="" xmlns:a14="http://schemas.microsoft.com/office/drawing/2010/main" w="9525">
                   <a:solidFill>
                     <a:srgbClr val="000000"/>
                   </a:solidFill>
@@ -3876,7 +3877,7 @@
             </a:ln>
             <a:extLst>
               <a:ext uri="{91240B29-F687-4f45-9708-019B960494DF}">
-                <a14:hiddenLine xmlns:a14="http://schemas.microsoft.com/office/drawing/2010/main" xmlns="" w="9525">
+                <a14:hiddenLine xmlns="" xmlns:a14="http://schemas.microsoft.com/office/drawing/2010/main" w="9525">
                   <a:solidFill>
                     <a:srgbClr val="000000"/>
                   </a:solidFill>
@@ -3966,7 +3967,7 @@
             </a:ln>
             <a:extLst>
               <a:ext uri="{91240B29-F687-4f45-9708-019B960494DF}">
-                <a14:hiddenLine xmlns:a14="http://schemas.microsoft.com/office/drawing/2010/main" xmlns="" w="9525">
+                <a14:hiddenLine xmlns="" xmlns:a14="http://schemas.microsoft.com/office/drawing/2010/main" w="9525">
                   <a:solidFill>
                     <a:srgbClr val="000000"/>
                   </a:solidFill>
@@ -4056,7 +4057,7 @@
             </a:ln>
             <a:extLst>
               <a:ext uri="{91240B29-F687-4f45-9708-019B960494DF}">
-                <a14:hiddenLine xmlns:a14="http://schemas.microsoft.com/office/drawing/2010/main" xmlns="" w="9525">
+                <a14:hiddenLine xmlns="" xmlns:a14="http://schemas.microsoft.com/office/drawing/2010/main" w="9525">
                   <a:solidFill>
                     <a:srgbClr val="000000"/>
                   </a:solidFill>
@@ -4121,7 +4122,7 @@
             </a:ln>
             <a:extLst>
               <a:ext uri="{91240B29-F687-4f45-9708-019B960494DF}">
-                <a14:hiddenLine xmlns:a14="http://schemas.microsoft.com/office/drawing/2010/main" xmlns="" w="9525">
+                <a14:hiddenLine xmlns="" xmlns:a14="http://schemas.microsoft.com/office/drawing/2010/main" w="9525">
                   <a:solidFill>
                     <a:srgbClr val="000000"/>
                   </a:solidFill>
@@ -4183,7 +4184,7 @@
             </a:ln>
             <a:extLst>
               <a:ext uri="{91240B29-F687-4f45-9708-019B960494DF}">
-                <a14:hiddenLine xmlns:a14="http://schemas.microsoft.com/office/drawing/2010/main" xmlns="" w="9525">
+                <a14:hiddenLine xmlns="" xmlns:a14="http://schemas.microsoft.com/office/drawing/2010/main" w="9525">
                   <a:solidFill>
                     <a:srgbClr val="000000"/>
                   </a:solidFill>
@@ -4273,7 +4274,7 @@
             </a:ln>
             <a:extLst>
               <a:ext uri="{91240B29-F687-4f45-9708-019B960494DF}">
-                <a14:hiddenLine xmlns:a14="http://schemas.microsoft.com/office/drawing/2010/main" xmlns="" w="9525">
+                <a14:hiddenLine xmlns="" xmlns:a14="http://schemas.microsoft.com/office/drawing/2010/main" w="9525">
                   <a:solidFill>
                     <a:srgbClr val="000000"/>
                   </a:solidFill>
@@ -4363,7 +4364,7 @@
             </a:ln>
             <a:extLst>
               <a:ext uri="{91240B29-F687-4f45-9708-019B960494DF}">
-                <a14:hiddenLine xmlns:a14="http://schemas.microsoft.com/office/drawing/2010/main" xmlns="" w="9525">
+                <a14:hiddenLine xmlns="" xmlns:a14="http://schemas.microsoft.com/office/drawing/2010/main" w="9525">
                   <a:solidFill>
                     <a:srgbClr val="000000"/>
                   </a:solidFill>
@@ -4425,7 +4426,7 @@
             </a:ln>
             <a:extLst>
               <a:ext uri="{91240B29-F687-4f45-9708-019B960494DF}">
-                <a14:hiddenLine xmlns:a14="http://schemas.microsoft.com/office/drawing/2010/main" xmlns="" w="9525">
+                <a14:hiddenLine xmlns="" xmlns:a14="http://schemas.microsoft.com/office/drawing/2010/main" w="9525">
                   <a:solidFill>
                     <a:srgbClr val="000000"/>
                   </a:solidFill>
@@ -4545,7 +4546,7 @@
             </a:ln>
             <a:extLst>
               <a:ext uri="{91240B29-F687-4f45-9708-019B960494DF}">
-                <a14:hiddenLine xmlns:a14="http://schemas.microsoft.com/office/drawing/2010/main" xmlns="" w="9525">
+                <a14:hiddenLine xmlns="" xmlns:a14="http://schemas.microsoft.com/office/drawing/2010/main" w="9525">
                   <a:solidFill>
                     <a:srgbClr val="000000"/>
                   </a:solidFill>
@@ -4613,7 +4614,7 @@
             </a:ln>
             <a:extLst>
               <a:ext uri="{91240B29-F687-4f45-9708-019B960494DF}">
-                <a14:hiddenLine xmlns:a14="http://schemas.microsoft.com/office/drawing/2010/main" xmlns="" w="9525">
+                <a14:hiddenLine xmlns="" xmlns:a14="http://schemas.microsoft.com/office/drawing/2010/main" w="9525">
                   <a:solidFill>
                     <a:srgbClr val="000000"/>
                   </a:solidFill>
@@ -4703,7 +4704,7 @@
             </a:ln>
             <a:extLst>
               <a:ext uri="{91240B29-F687-4f45-9708-019B960494DF}">
-                <a14:hiddenLine xmlns:a14="http://schemas.microsoft.com/office/drawing/2010/main" xmlns="" w="9525">
+                <a14:hiddenLine xmlns="" xmlns:a14="http://schemas.microsoft.com/office/drawing/2010/main" w="9525">
                   <a:solidFill>
                     <a:srgbClr val="000000"/>
                   </a:solidFill>
@@ -4843,7 +4844,7 @@
           <a:p>
             <a:fld id="{EC4347D3-4C9A-C240-8F14-750059DFEEB0}" type="datetimeFigureOut">
               <a:rPr lang="en-US" smtClean="0"/>
-              <a:t>3/31/26</a:t>
+              <a:t>4/7/26</a:t>
             </a:fld>
             <a:endParaRPr lang="en-US"/>
           </a:p>
@@ -5110,7 +5111,7 @@
           <a:p>
             <a:fld id="{EC4347D3-4C9A-C240-8F14-750059DFEEB0}" type="datetimeFigureOut">
               <a:rPr lang="en-US" smtClean="0"/>
-              <a:t>3/31/26</a:t>
+              <a:t>4/7/26</a:t>
             </a:fld>
             <a:endParaRPr lang="en-US"/>
           </a:p>
@@ -5306,7 +5307,7 @@
           <a:p>
             <a:fld id="{EC4347D3-4C9A-C240-8F14-750059DFEEB0}" type="datetimeFigureOut">
               <a:rPr lang="en-US" smtClean="0"/>
-              <a:t>3/31/26</a:t>
+              <a:t>4/7/26</a:t>
             </a:fld>
             <a:endParaRPr lang="en-US"/>
           </a:p>
@@ -5569,7 +5570,7 @@
           <a:p>
             <a:fld id="{EC4347D3-4C9A-C240-8F14-750059DFEEB0}" type="datetimeFigureOut">
               <a:rPr lang="en-US" smtClean="0"/>
-              <a:t>3/31/26</a:t>
+              <a:t>4/7/26</a:t>
             </a:fld>
             <a:endParaRPr lang="en-US"/>
           </a:p>
@@ -6003,7 +6004,7 @@
           <a:p>
             <a:fld id="{EC4347D3-4C9A-C240-8F14-750059DFEEB0}" type="datetimeFigureOut">
               <a:rPr lang="en-US" smtClean="0"/>
-              <a:t>3/31/26</a:t>
+              <a:t>4/7/26</a:t>
             </a:fld>
             <a:endParaRPr lang="en-US"/>
           </a:p>
@@ -6549,7 +6550,7 @@
           <a:p>
             <a:fld id="{EC4347D3-4C9A-C240-8F14-750059DFEEB0}" type="datetimeFigureOut">
               <a:rPr lang="en-US" smtClean="0"/>
-              <a:t>3/31/26</a:t>
+              <a:t>4/7/26</a:t>
             </a:fld>
             <a:endParaRPr lang="en-US"/>
           </a:p>
@@ -7269,7 +7270,7 @@
           <a:p>
             <a:fld id="{EC4347D3-4C9A-C240-8F14-750059DFEEB0}" type="datetimeFigureOut">
               <a:rPr lang="en-US" smtClean="0"/>
-              <a:t>3/31/26</a:t>
+              <a:t>4/7/26</a:t>
             </a:fld>
             <a:endParaRPr lang="en-US"/>
           </a:p>
@@ -7439,7 +7440,7 @@
           <a:p>
             <a:fld id="{EC4347D3-4C9A-C240-8F14-750059DFEEB0}" type="datetimeFigureOut">
               <a:rPr lang="en-US" smtClean="0"/>
-              <a:t>3/31/26</a:t>
+              <a:t>4/7/26</a:t>
             </a:fld>
             <a:endParaRPr lang="en-US"/>
           </a:p>
@@ -7619,7 +7620,7 @@
           <a:p>
             <a:fld id="{EC4347D3-4C9A-C240-8F14-750059DFEEB0}" type="datetimeFigureOut">
               <a:rPr lang="en-US" smtClean="0"/>
-              <a:t>3/31/26</a:t>
+              <a:t>4/7/26</a:t>
             </a:fld>
             <a:endParaRPr lang="en-US"/>
           </a:p>
@@ -7789,7 +7790,7 @@
           <a:p>
             <a:fld id="{EC4347D3-4C9A-C240-8F14-750059DFEEB0}" type="datetimeFigureOut">
               <a:rPr lang="en-US" smtClean="0"/>
-              <a:t>3/31/26</a:t>
+              <a:t>4/7/26</a:t>
             </a:fld>
             <a:endParaRPr lang="en-US"/>
           </a:p>
@@ -8039,7 +8040,7 @@
           <a:p>
             <a:fld id="{EC4347D3-4C9A-C240-8F14-750059DFEEB0}" type="datetimeFigureOut">
               <a:rPr lang="en-US" smtClean="0"/>
-              <a:t>3/31/26</a:t>
+              <a:t>4/7/26</a:t>
             </a:fld>
             <a:endParaRPr lang="en-US"/>
           </a:p>
@@ -8271,7 +8272,7 @@
           <a:p>
             <a:fld id="{EC4347D3-4C9A-C240-8F14-750059DFEEB0}" type="datetimeFigureOut">
               <a:rPr lang="en-US" smtClean="0"/>
-              <a:t>3/31/26</a:t>
+              <a:t>4/7/26</a:t>
             </a:fld>
             <a:endParaRPr lang="en-US"/>
           </a:p>
@@ -8657,7 +8658,7 @@
           <a:p>
             <a:fld id="{EC4347D3-4C9A-C240-8F14-750059DFEEB0}" type="datetimeFigureOut">
               <a:rPr lang="en-US" smtClean="0"/>
-              <a:t>3/31/26</a:t>
+              <a:t>4/7/26</a:t>
             </a:fld>
             <a:endParaRPr lang="en-US"/>
           </a:p>
@@ -8780,7 +8781,7 @@
           <a:p>
             <a:fld id="{EC4347D3-4C9A-C240-8F14-750059DFEEB0}" type="datetimeFigureOut">
               <a:rPr lang="en-US" smtClean="0"/>
-              <a:t>3/31/26</a:t>
+              <a:t>4/7/26</a:t>
             </a:fld>
             <a:endParaRPr lang="en-US"/>
           </a:p>
@@ -8875,7 +8876,7 @@
           <a:p>
             <a:fld id="{EC4347D3-4C9A-C240-8F14-750059DFEEB0}" type="datetimeFigureOut">
               <a:rPr lang="en-US" smtClean="0"/>
-              <a:t>3/31/26</a:t>
+              <a:t>4/7/26</a:t>
             </a:fld>
             <a:endParaRPr lang="en-US"/>
           </a:p>
@@ -9124,7 +9125,7 @@
           <a:p>
             <a:fld id="{EC4347D3-4C9A-C240-8F14-750059DFEEB0}" type="datetimeFigureOut">
               <a:rPr lang="en-US" smtClean="0"/>
-              <a:t>3/31/26</a:t>
+              <a:t>4/7/26</a:t>
             </a:fld>
             <a:endParaRPr lang="en-US"/>
           </a:p>
@@ -9409,7 +9410,7 @@
           <a:p>
             <a:fld id="{EC4347D3-4C9A-C240-8F14-750059DFEEB0}" type="datetimeFigureOut">
               <a:rPr lang="en-US" smtClean="0"/>
-              <a:t>3/31/26</a:t>
+              <a:t>4/7/26</a:t>
             </a:fld>
             <a:endParaRPr lang="en-US"/>
           </a:p>
@@ -9532,7 +9533,7 @@
           <a:noFill/>
           <a:extLst>
             <a:ext uri="{909E8E84-426E-40dd-AFC4-6F175D3DCCD1}">
-              <a14:hiddenFill xmlns:a14="http://schemas.microsoft.com/office/drawing/2010/main" xmlns="">
+              <a14:hiddenFill xmlns="" xmlns:a14="http://schemas.microsoft.com/office/drawing/2010/main">
                 <a:solidFill>
                   <a:srgbClr val="FFFFFF"/>
                 </a:solidFill>
@@ -9606,7 +9607,7 @@
               </a:ln>
               <a:extLst>
                 <a:ext uri="{91240B29-F687-4f45-9708-019B960494DF}">
-                  <a14:hiddenLine xmlns:a14="http://schemas.microsoft.com/office/drawing/2010/main" xmlns="" w="9525">
+                  <a14:hiddenLine xmlns="" xmlns:a14="http://schemas.microsoft.com/office/drawing/2010/main" w="9525">
                     <a:solidFill>
                       <a:srgbClr val="000000"/>
                     </a:solidFill>
@@ -9696,7 +9697,7 @@
               </a:ln>
               <a:extLst>
                 <a:ext uri="{91240B29-F687-4f45-9708-019B960494DF}">
-                  <a14:hiddenLine xmlns:a14="http://schemas.microsoft.com/office/drawing/2010/main" xmlns="" w="9525">
+                  <a14:hiddenLine xmlns="" xmlns:a14="http://schemas.microsoft.com/office/drawing/2010/main" w="9525">
                     <a:solidFill>
                       <a:srgbClr val="000000"/>
                     </a:solidFill>
@@ -9786,7 +9787,7 @@
               </a:ln>
               <a:extLst>
                 <a:ext uri="{91240B29-F687-4f45-9708-019B960494DF}">
-                  <a14:hiddenLine xmlns:a14="http://schemas.microsoft.com/office/drawing/2010/main" xmlns="" w="9525">
+                  <a14:hiddenLine xmlns="" xmlns:a14="http://schemas.microsoft.com/office/drawing/2010/main" w="9525">
                     <a:solidFill>
                       <a:srgbClr val="000000"/>
                     </a:solidFill>
@@ -9848,7 +9849,7 @@
               </a:ln>
               <a:extLst>
                 <a:ext uri="{91240B29-F687-4f45-9708-019B960494DF}">
-                  <a14:hiddenLine xmlns:a14="http://schemas.microsoft.com/office/drawing/2010/main" xmlns="" w="9525">
+                  <a14:hiddenLine xmlns="" xmlns:a14="http://schemas.microsoft.com/office/drawing/2010/main" w="9525">
                     <a:solidFill>
                       <a:srgbClr val="000000"/>
                     </a:solidFill>
@@ -9938,7 +9939,7 @@
               </a:ln>
               <a:extLst>
                 <a:ext uri="{91240B29-F687-4f45-9708-019B960494DF}">
-                  <a14:hiddenLine xmlns:a14="http://schemas.microsoft.com/office/drawing/2010/main" xmlns="" w="9525">
+                  <a14:hiddenLine xmlns="" xmlns:a14="http://schemas.microsoft.com/office/drawing/2010/main" w="9525">
                     <a:solidFill>
                       <a:srgbClr val="000000"/>
                     </a:solidFill>
@@ -10000,7 +10001,7 @@
               </a:ln>
               <a:extLst>
                 <a:ext uri="{91240B29-F687-4f45-9708-019B960494DF}">
-                  <a14:hiddenLine xmlns:a14="http://schemas.microsoft.com/office/drawing/2010/main" xmlns="" w="9525">
+                  <a14:hiddenLine xmlns="" xmlns:a14="http://schemas.microsoft.com/office/drawing/2010/main" w="9525">
                     <a:solidFill>
                       <a:srgbClr val="000000"/>
                     </a:solidFill>
@@ -10062,7 +10063,7 @@
               </a:ln>
               <a:extLst>
                 <a:ext uri="{91240B29-F687-4f45-9708-019B960494DF}">
-                  <a14:hiddenLine xmlns:a14="http://schemas.microsoft.com/office/drawing/2010/main" xmlns="" w="9525">
+                  <a14:hiddenLine xmlns="" xmlns:a14="http://schemas.microsoft.com/office/drawing/2010/main" w="9525">
                     <a:solidFill>
                       <a:srgbClr val="000000"/>
                     </a:solidFill>
@@ -10152,7 +10153,7 @@
               </a:ln>
               <a:extLst>
                 <a:ext uri="{91240B29-F687-4f45-9708-019B960494DF}">
-                  <a14:hiddenLine xmlns:a14="http://schemas.microsoft.com/office/drawing/2010/main" xmlns="" w="9525">
+                  <a14:hiddenLine xmlns="" xmlns:a14="http://schemas.microsoft.com/office/drawing/2010/main" w="9525">
                     <a:solidFill>
                       <a:srgbClr val="000000"/>
                     </a:solidFill>
@@ -10242,7 +10243,7 @@
               </a:ln>
               <a:extLst>
                 <a:ext uri="{91240B29-F687-4f45-9708-019B960494DF}">
-                  <a14:hiddenLine xmlns:a14="http://schemas.microsoft.com/office/drawing/2010/main" xmlns="" w="9525">
+                  <a14:hiddenLine xmlns="" xmlns:a14="http://schemas.microsoft.com/office/drawing/2010/main" w="9525">
                     <a:solidFill>
                       <a:srgbClr val="000000"/>
                     </a:solidFill>
@@ -10304,7 +10305,7 @@
               </a:ln>
               <a:extLst>
                 <a:ext uri="{91240B29-F687-4f45-9708-019B960494DF}">
-                  <a14:hiddenLine xmlns:a14="http://schemas.microsoft.com/office/drawing/2010/main" xmlns="" w="9525">
+                  <a14:hiddenLine xmlns="" xmlns:a14="http://schemas.microsoft.com/office/drawing/2010/main" w="9525">
                     <a:solidFill>
                       <a:srgbClr val="000000"/>
                     </a:solidFill>
@@ -10414,7 +10415,7 @@
               </a:ln>
               <a:extLst>
                 <a:ext uri="{91240B29-F687-4f45-9708-019B960494DF}">
-                  <a14:hiddenLine xmlns:a14="http://schemas.microsoft.com/office/drawing/2010/main" xmlns="" w="9525">
+                  <a14:hiddenLine xmlns="" xmlns:a14="http://schemas.microsoft.com/office/drawing/2010/main" w="9525">
                     <a:solidFill>
                       <a:srgbClr val="000000"/>
                     </a:solidFill>
@@ -10498,7 +10499,7 @@
               </a:ln>
               <a:extLst>
                 <a:ext uri="{91240B29-F687-4f45-9708-019B960494DF}">
-                  <a14:hiddenLine xmlns:a14="http://schemas.microsoft.com/office/drawing/2010/main" xmlns="" w="9525">
+                  <a14:hiddenLine xmlns="" xmlns:a14="http://schemas.microsoft.com/office/drawing/2010/main" w="9525">
                     <a:solidFill>
                       <a:srgbClr val="000000"/>
                     </a:solidFill>
@@ -10560,7 +10561,7 @@
               </a:ln>
               <a:extLst>
                 <a:ext uri="{91240B29-F687-4f45-9708-019B960494DF}">
-                  <a14:hiddenLine xmlns:a14="http://schemas.microsoft.com/office/drawing/2010/main" xmlns="" w="9525">
+                  <a14:hiddenLine xmlns="" xmlns:a14="http://schemas.microsoft.com/office/drawing/2010/main" w="9525">
                     <a:solidFill>
                       <a:srgbClr val="000000"/>
                     </a:solidFill>
@@ -10622,7 +10623,7 @@
               </a:ln>
               <a:extLst>
                 <a:ext uri="{91240B29-F687-4f45-9708-019B960494DF}">
-                  <a14:hiddenLine xmlns:a14="http://schemas.microsoft.com/office/drawing/2010/main" xmlns="" w="9525">
+                  <a14:hiddenLine xmlns="" xmlns:a14="http://schemas.microsoft.com/office/drawing/2010/main" w="9525">
                     <a:solidFill>
                       <a:srgbClr val="000000"/>
                     </a:solidFill>
@@ -10712,7 +10713,7 @@
               </a:ln>
               <a:extLst>
                 <a:ext uri="{91240B29-F687-4f45-9708-019B960494DF}">
-                  <a14:hiddenLine xmlns:a14="http://schemas.microsoft.com/office/drawing/2010/main" xmlns="" w="9525">
+                  <a14:hiddenLine xmlns="" xmlns:a14="http://schemas.microsoft.com/office/drawing/2010/main" w="9525">
                     <a:solidFill>
                       <a:srgbClr val="000000"/>
                     </a:solidFill>
@@ -10746,7 +10747,7 @@
               </a:ln>
               <a:extLst>
                 <a:ext uri="{91240B29-F687-4f45-9708-019B960494DF}">
-                  <a14:hiddenLine xmlns:a14="http://schemas.microsoft.com/office/drawing/2010/main" xmlns="" w="9525">
+                  <a14:hiddenLine xmlns="" xmlns:a14="http://schemas.microsoft.com/office/drawing/2010/main" w="9525">
                     <a:solidFill>
                       <a:srgbClr val="000000"/>
                     </a:solidFill>
@@ -10811,7 +10812,7 @@
               </a:ln>
               <a:extLst>
                 <a:ext uri="{91240B29-F687-4f45-9708-019B960494DF}">
-                  <a14:hiddenLine xmlns:a14="http://schemas.microsoft.com/office/drawing/2010/main" xmlns="" w="9525">
+                  <a14:hiddenLine xmlns="" xmlns:a14="http://schemas.microsoft.com/office/drawing/2010/main" w="9525">
                     <a:solidFill>
                       <a:srgbClr val="000000"/>
                     </a:solidFill>
@@ -10901,7 +10902,7 @@
               </a:ln>
               <a:extLst>
                 <a:ext uri="{91240B29-F687-4f45-9708-019B960494DF}">
-                  <a14:hiddenLine xmlns:a14="http://schemas.microsoft.com/office/drawing/2010/main" xmlns="" w="9525">
+                  <a14:hiddenLine xmlns="" xmlns:a14="http://schemas.microsoft.com/office/drawing/2010/main" w="9525">
                     <a:solidFill>
                       <a:srgbClr val="000000"/>
                     </a:solidFill>
@@ -10963,7 +10964,7 @@
               </a:ln>
               <a:extLst>
                 <a:ext uri="{91240B29-F687-4f45-9708-019B960494DF}">
-                  <a14:hiddenLine xmlns:a14="http://schemas.microsoft.com/office/drawing/2010/main" xmlns="" w="9525">
+                  <a14:hiddenLine xmlns="" xmlns:a14="http://schemas.microsoft.com/office/drawing/2010/main" w="9525">
                     <a:solidFill>
                       <a:srgbClr val="000000"/>
                     </a:solidFill>
@@ -11053,7 +11054,7 @@
               </a:ln>
               <a:extLst>
                 <a:ext uri="{91240B29-F687-4f45-9708-019B960494DF}">
-                  <a14:hiddenLine xmlns:a14="http://schemas.microsoft.com/office/drawing/2010/main" xmlns="" w="9525">
+                  <a14:hiddenLine xmlns="" xmlns:a14="http://schemas.microsoft.com/office/drawing/2010/main" w="9525">
                     <a:solidFill>
                       <a:srgbClr val="000000"/>
                     </a:solidFill>
@@ -11118,7 +11119,7 @@
               </a:ln>
               <a:extLst>
                 <a:ext uri="{91240B29-F687-4f45-9708-019B960494DF}">
-                  <a14:hiddenLine xmlns:a14="http://schemas.microsoft.com/office/drawing/2010/main" xmlns="" w="9525">
+                  <a14:hiddenLine xmlns="" xmlns:a14="http://schemas.microsoft.com/office/drawing/2010/main" w="9525">
                     <a:solidFill>
                       <a:srgbClr val="000000"/>
                     </a:solidFill>
@@ -11180,7 +11181,7 @@
               </a:ln>
               <a:extLst>
                 <a:ext uri="{91240B29-F687-4f45-9708-019B960494DF}">
-                  <a14:hiddenLine xmlns:a14="http://schemas.microsoft.com/office/drawing/2010/main" xmlns="" w="9525">
+                  <a14:hiddenLine xmlns="" xmlns:a14="http://schemas.microsoft.com/office/drawing/2010/main" w="9525">
                     <a:solidFill>
                       <a:srgbClr val="000000"/>
                     </a:solidFill>
@@ -11270,7 +11271,7 @@
               </a:ln>
               <a:extLst>
                 <a:ext uri="{91240B29-F687-4f45-9708-019B960494DF}">
-                  <a14:hiddenLine xmlns:a14="http://schemas.microsoft.com/office/drawing/2010/main" xmlns="" w="9525">
+                  <a14:hiddenLine xmlns="" xmlns:a14="http://schemas.microsoft.com/office/drawing/2010/main" w="9525">
                     <a:solidFill>
                       <a:srgbClr val="000000"/>
                     </a:solidFill>
@@ -11360,7 +11361,7 @@
               </a:ln>
               <a:extLst>
                 <a:ext uri="{91240B29-F687-4f45-9708-019B960494DF}">
-                  <a14:hiddenLine xmlns:a14="http://schemas.microsoft.com/office/drawing/2010/main" xmlns="" w="9525">
+                  <a14:hiddenLine xmlns="" xmlns:a14="http://schemas.microsoft.com/office/drawing/2010/main" w="9525">
                     <a:solidFill>
                       <a:srgbClr val="000000"/>
                     </a:solidFill>
@@ -11425,7 +11426,7 @@
               </a:ln>
               <a:extLst>
                 <a:ext uri="{91240B29-F687-4f45-9708-019B960494DF}">
-                  <a14:hiddenLine xmlns:a14="http://schemas.microsoft.com/office/drawing/2010/main" xmlns="" w="9525">
+                  <a14:hiddenLine xmlns="" xmlns:a14="http://schemas.microsoft.com/office/drawing/2010/main" w="9525">
                     <a:solidFill>
                       <a:srgbClr val="000000"/>
                     </a:solidFill>
@@ -11545,7 +11546,7 @@
               </a:ln>
               <a:extLst>
                 <a:ext uri="{91240B29-F687-4f45-9708-019B960494DF}">
-                  <a14:hiddenLine xmlns:a14="http://schemas.microsoft.com/office/drawing/2010/main" xmlns="" w="9525">
+                  <a14:hiddenLine xmlns="" xmlns:a14="http://schemas.microsoft.com/office/drawing/2010/main" w="9525">
                     <a:solidFill>
                       <a:srgbClr val="000000"/>
                     </a:solidFill>
@@ -11626,7 +11627,7 @@
               </a:ln>
               <a:extLst>
                 <a:ext uri="{91240B29-F687-4f45-9708-019B960494DF}">
-                  <a14:hiddenLine xmlns:a14="http://schemas.microsoft.com/office/drawing/2010/main" xmlns="" w="9525">
+                  <a14:hiddenLine xmlns="" xmlns:a14="http://schemas.microsoft.com/office/drawing/2010/main" w="9525">
                     <a:solidFill>
                       <a:srgbClr val="000000"/>
                     </a:solidFill>
@@ -11741,7 +11742,7 @@
               </a:ln>
               <a:extLst>
                 <a:ext uri="{91240B29-F687-4f45-9708-019B960494DF}">
-                  <a14:hiddenLine xmlns:a14="http://schemas.microsoft.com/office/drawing/2010/main" xmlns="" w="9525">
+                  <a14:hiddenLine xmlns="" xmlns:a14="http://schemas.microsoft.com/office/drawing/2010/main" w="9525">
                     <a:solidFill>
                       <a:srgbClr val="000000"/>
                     </a:solidFill>
@@ -11831,7 +11832,7 @@
               </a:ln>
               <a:extLst>
                 <a:ext uri="{91240B29-F687-4f45-9708-019B960494DF}">
-                  <a14:hiddenLine xmlns:a14="http://schemas.microsoft.com/office/drawing/2010/main" xmlns="" w="9525">
+                  <a14:hiddenLine xmlns="" xmlns:a14="http://schemas.microsoft.com/office/drawing/2010/main" w="9525">
                     <a:solidFill>
                       <a:srgbClr val="000000"/>
                     </a:solidFill>
@@ -11896,7 +11897,7 @@
               </a:ln>
               <a:extLst>
                 <a:ext uri="{91240B29-F687-4f45-9708-019B960494DF}">
-                  <a14:hiddenLine xmlns:a14="http://schemas.microsoft.com/office/drawing/2010/main" xmlns="" w="9525">
+                  <a14:hiddenLine xmlns="" xmlns:a14="http://schemas.microsoft.com/office/drawing/2010/main" w="9525">
                     <a:solidFill>
                       <a:srgbClr val="000000"/>
                     </a:solidFill>
@@ -11986,7 +11987,7 @@
               </a:ln>
               <a:extLst>
                 <a:ext uri="{91240B29-F687-4f45-9708-019B960494DF}">
-                  <a14:hiddenLine xmlns:a14="http://schemas.microsoft.com/office/drawing/2010/main" xmlns="" w="9525">
+                  <a14:hiddenLine xmlns="" xmlns:a14="http://schemas.microsoft.com/office/drawing/2010/main" w="9525">
                     <a:solidFill>
                       <a:srgbClr val="000000"/>
                     </a:solidFill>
@@ -12054,7 +12055,7 @@
               </a:ln>
               <a:extLst>
                 <a:ext uri="{91240B29-F687-4f45-9708-019B960494DF}">
-                  <a14:hiddenLine xmlns:a14="http://schemas.microsoft.com/office/drawing/2010/main" xmlns="" w="9525">
+                  <a14:hiddenLine xmlns="" xmlns:a14="http://schemas.microsoft.com/office/drawing/2010/main" w="9525">
                     <a:solidFill>
                       <a:srgbClr val="000000"/>
                     </a:solidFill>
@@ -12144,7 +12145,7 @@
               </a:ln>
               <a:extLst>
                 <a:ext uri="{91240B29-F687-4f45-9708-019B960494DF}">
-                  <a14:hiddenLine xmlns:a14="http://schemas.microsoft.com/office/drawing/2010/main" xmlns="" w="9525">
+                  <a14:hiddenLine xmlns="" xmlns:a14="http://schemas.microsoft.com/office/drawing/2010/main" w="9525">
                     <a:solidFill>
                       <a:srgbClr val="000000"/>
                     </a:solidFill>
@@ -12212,7 +12213,7 @@
               </a:ln>
               <a:extLst>
                 <a:ext uri="{91240B29-F687-4f45-9708-019B960494DF}">
-                  <a14:hiddenLine xmlns:a14="http://schemas.microsoft.com/office/drawing/2010/main" xmlns="" w="9525">
+                  <a14:hiddenLine xmlns="" xmlns:a14="http://schemas.microsoft.com/office/drawing/2010/main" w="9525">
                     <a:solidFill>
                       <a:srgbClr val="000000"/>
                     </a:solidFill>
@@ -12302,7 +12303,7 @@
               </a:ln>
               <a:extLst>
                 <a:ext uri="{91240B29-F687-4f45-9708-019B960494DF}">
-                  <a14:hiddenLine xmlns:a14="http://schemas.microsoft.com/office/drawing/2010/main" xmlns="" w="9525">
+                  <a14:hiddenLine xmlns="" xmlns:a14="http://schemas.microsoft.com/office/drawing/2010/main" w="9525">
                     <a:solidFill>
                       <a:srgbClr val="000000"/>
                     </a:solidFill>
@@ -12336,7 +12337,7 @@
               </a:ln>
               <a:extLst>
                 <a:ext uri="{91240B29-F687-4f45-9708-019B960494DF}">
-                  <a14:hiddenLine xmlns:a14="http://schemas.microsoft.com/office/drawing/2010/main" xmlns="" w="9525">
+                  <a14:hiddenLine xmlns="" xmlns:a14="http://schemas.microsoft.com/office/drawing/2010/main" w="9525">
                     <a:solidFill>
                       <a:srgbClr val="000000"/>
                     </a:solidFill>
@@ -12476,7 +12477,7 @@
           <a:p>
             <a:fld id="{EC4347D3-4C9A-C240-8F14-750059DFEEB0}" type="datetimeFigureOut">
               <a:rPr lang="en-US" smtClean="0"/>
-              <a:t>3/31/26</a:t>
+              <a:t>4/7/26</a:t>
             </a:fld>
             <a:endParaRPr lang="en-US"/>
           </a:p>
@@ -13895,6 +13896,220 @@
 </p:sld>
 </file>
 
+<file path=ppt/slides/slide15.xml><?xml version="1.0" encoding="utf-8"?>
+<p:sld xmlns:a="http://schemas.openxmlformats.org/drawingml/2006/main" xmlns:r="http://schemas.openxmlformats.org/officeDocument/2006/relationships" xmlns:p="http://schemas.openxmlformats.org/presentationml/2006/main">
+  <p:cSld>
+    <p:spTree>
+      <p:nvGrpSpPr>
+        <p:cNvPr id="1" name="">
+          <a:extLst>
+            <a:ext uri="{FF2B5EF4-FFF2-40B4-BE49-F238E27FC236}">
+              <a16:creationId xmlns:a16="http://schemas.microsoft.com/office/drawing/2014/main" id="{79DAB0AB-902C-AC52-F1F9-3247B4282734}"/>
+            </a:ext>
+          </a:extLst>
+        </p:cNvPr>
+        <p:cNvGrpSpPr/>
+        <p:nvPr/>
+      </p:nvGrpSpPr>
+      <p:grpSpPr>
+        <a:xfrm>
+          <a:off x="0" y="0"/>
+          <a:ext cx="0" cy="0"/>
+          <a:chOff x="0" y="0"/>
+          <a:chExt cx="0" cy="0"/>
+        </a:xfrm>
+      </p:grpSpPr>
+      <p:sp>
+        <p:nvSpPr>
+          <p:cNvPr id="6146" name="Rectangle 2">
+            <a:extLst>
+              <a:ext uri="{FF2B5EF4-FFF2-40B4-BE49-F238E27FC236}">
+                <a16:creationId xmlns:a16="http://schemas.microsoft.com/office/drawing/2014/main" id="{75EB46BB-EF77-9F47-B904-7651EB8E5A35}"/>
+              </a:ext>
+            </a:extLst>
+          </p:cNvPr>
+          <p:cNvSpPr>
+            <a:spLocks noGrp="1" noChangeArrowheads="1"/>
+          </p:cNvSpPr>
+          <p:nvPr>
+            <p:ph type="title"/>
+            <p:custDataLst>
+              <p:tags r:id="rId1"/>
+            </p:custDataLst>
+          </p:nvPr>
+        </p:nvSpPr>
+        <p:spPr>
+          <a:xfrm>
+            <a:off x="1141413" y="284084"/>
+            <a:ext cx="9905998" cy="620791"/>
+          </a:xfrm>
+        </p:spPr>
+        <p:txBody>
+          <a:bodyPr/>
+          <a:lstStyle/>
+          <a:p>
+            <a:pPr algn="ctr"/>
+            <a:r>
+              <a:rPr lang="en-US" dirty="0"/>
+              <a:t>Lecture 15: 4/7/26</a:t>
+            </a:r>
+          </a:p>
+        </p:txBody>
+      </p:sp>
+      <p:sp>
+        <p:nvSpPr>
+          <p:cNvPr id="6147" name="Rectangle 3">
+            <a:extLst>
+              <a:ext uri="{FF2B5EF4-FFF2-40B4-BE49-F238E27FC236}">
+                <a16:creationId xmlns:a16="http://schemas.microsoft.com/office/drawing/2014/main" id="{3A2E06CB-5BE3-91E1-A17A-811879E9AD09}"/>
+              </a:ext>
+            </a:extLst>
+          </p:cNvPr>
+          <p:cNvSpPr>
+            <a:spLocks noGrp="1" noChangeArrowheads="1"/>
+          </p:cNvSpPr>
+          <p:nvPr>
+            <p:ph idx="1"/>
+            <p:custDataLst>
+              <p:tags r:id="rId2"/>
+            </p:custDataLst>
+          </p:nvPr>
+        </p:nvSpPr>
+        <p:spPr>
+          <a:xfrm>
+            <a:off x="2229422" y="1133378"/>
+            <a:ext cx="7729979" cy="5149850"/>
+          </a:xfrm>
+        </p:spPr>
+        <p:txBody>
+          <a:bodyPr>
+            <a:normAutofit fontScale="70000" lnSpcReduction="20000"/>
+          </a:bodyPr>
+          <a:lstStyle/>
+          <a:p>
+            <a:r>
+              <a:rPr lang="en-US" dirty="0"/>
+              <a:t>Attendance checks are back in full force today…</a:t>
+            </a:r>
+          </a:p>
+          <a:p>
+            <a:r>
+              <a:rPr lang="en-US" dirty="0"/>
+              <a:t>This week will be lecture on Tuesday and HW on Thursday</a:t>
+            </a:r>
+          </a:p>
+          <a:p>
+            <a:r>
+              <a:rPr lang="en-US" dirty="0"/>
+              <a:t>Thursday is HW ”Lab” Day</a:t>
+            </a:r>
+          </a:p>
+          <a:p>
+            <a:pPr lvl="1"/>
+            <a:r>
+              <a:rPr lang="en-US" dirty="0"/>
+              <a:t>Last one</a:t>
+            </a:r>
+          </a:p>
+          <a:p>
+            <a:pPr lvl="1"/>
+            <a:r>
+              <a:rPr lang="en-US" dirty="0"/>
+              <a:t>You will start the approximations homework</a:t>
+            </a:r>
+          </a:p>
+          <a:p>
+            <a:r>
+              <a:rPr lang="en-US" dirty="0"/>
+              <a:t>Project </a:t>
+            </a:r>
+          </a:p>
+          <a:p>
+            <a:pPr lvl="1"/>
+            <a:r>
+              <a:rPr lang="en-US" dirty="0"/>
+              <a:t>Implementation is due TONIGHT!</a:t>
+            </a:r>
+          </a:p>
+          <a:p>
+            <a:pPr lvl="1"/>
+            <a:r>
+              <a:rPr lang="en-US" dirty="0"/>
+              <a:t>Make a </a:t>
+            </a:r>
+            <a:r>
+              <a:rPr lang="en-US" dirty="0" err="1"/>
+              <a:t>github</a:t>
+            </a:r>
+            <a:r>
+              <a:rPr lang="en-US" dirty="0"/>
+              <a:t> pull request as per site instructions to submit.</a:t>
+            </a:r>
+          </a:p>
+          <a:p>
+            <a:r>
+              <a:rPr lang="en-US" dirty="0"/>
+              <a:t>Cows assignment is done. You all did pretty well, but I could tell it was a bit harder</a:t>
+            </a:r>
+          </a:p>
+          <a:p>
+            <a:r>
+              <a:rPr lang="en-US" dirty="0"/>
+              <a:t>Coming up</a:t>
+            </a:r>
+          </a:p>
+          <a:p>
+            <a:pPr lvl="1"/>
+            <a:r>
+              <a:rPr lang="en-US" dirty="0"/>
+              <a:t>Project implementations (due next week)</a:t>
+            </a:r>
+          </a:p>
+          <a:p>
+            <a:pPr lvl="1"/>
+            <a:r>
+              <a:rPr lang="en-US" dirty="0"/>
+              <a:t>Approximations assignment (Due week after that)</a:t>
+            </a:r>
+          </a:p>
+          <a:p>
+            <a:pPr lvl="1"/>
+            <a:r>
+              <a:rPr lang="en-US" dirty="0"/>
+              <a:t>Quiz (week after that)</a:t>
+            </a:r>
+          </a:p>
+          <a:p>
+            <a:pPr lvl="1"/>
+            <a:r>
+              <a:rPr lang="en-US" dirty="0"/>
+              <a:t>Project presentations (Last three lectures)</a:t>
+            </a:r>
+          </a:p>
+          <a:p>
+            <a:r>
+              <a:rPr lang="en-US" dirty="0"/>
+              <a:t>Today we start the final topic, Van-Emde Boas Trees</a:t>
+            </a:r>
+          </a:p>
+          <a:p>
+            <a:endParaRPr lang="en-US" dirty="0"/>
+          </a:p>
+        </p:txBody>
+      </p:sp>
+    </p:spTree>
+    <p:extLst>
+      <p:ext uri="{BB962C8B-B14F-4D97-AF65-F5344CB8AC3E}">
+        <p14:creationId xmlns:p14="http://schemas.microsoft.com/office/powerpoint/2010/main" val="311292176"/>
+      </p:ext>
+    </p:extLst>
+  </p:cSld>
+  <p:clrMapOvr>
+    <a:masterClrMapping/>
+  </p:clrMapOvr>
+</p:sld>
+</file>
+
 <file path=ppt/slides/slide2.xml><?xml version="1.0" encoding="utf-8"?>
 <p:sld xmlns:a="http://schemas.openxmlformats.org/drawingml/2006/main" xmlns:r="http://schemas.openxmlformats.org/officeDocument/2006/relationships" xmlns:p="http://schemas.openxmlformats.org/presentationml/2006/main">
   <p:cSld>
@@ -15350,6 +15565,18 @@
 </file>
 
 <file path=ppt/tags/tag26.xml><?xml version="1.0" encoding="utf-8"?>
+<p:tagLst xmlns:a="http://schemas.openxmlformats.org/drawingml/2006/main" xmlns:r="http://schemas.openxmlformats.org/officeDocument/2006/relationships" xmlns:p="http://schemas.openxmlformats.org/presentationml/2006/main">
+  <p:tag name="_INSTRUCTOR VIEW19C14C36-AC8E-43BC-9DB6-C2AAF774C7DC|PANE__TAG" val="_"/>
+</p:tagLst>
+</file>
+
+<file path=ppt/tags/tag27.xml><?xml version="1.0" encoding="utf-8"?>
+<p:tagLst xmlns:a="http://schemas.openxmlformats.org/drawingml/2006/main" xmlns:r="http://schemas.openxmlformats.org/officeDocument/2006/relationships" xmlns:p="http://schemas.openxmlformats.org/presentationml/2006/main">
+  <p:tag name="_INSTRUCTOR VIEW19C14C36-AC8E-43BC-9DB6-C2AAF774C7DC|PANE__TAG" val="_"/>
+</p:tagLst>
+</file>
+
+<file path=ppt/tags/tag28.xml><?xml version="1.0" encoding="utf-8"?>
 <p:tagLst xmlns:a="http://schemas.openxmlformats.org/drawingml/2006/main" xmlns:r="http://schemas.openxmlformats.org/officeDocument/2006/relationships" xmlns:p="http://schemas.openxmlformats.org/presentationml/2006/main">
   <p:tag name="_INSTRUCTOR VIEW19C14C36-AC8E-43BC-9DB6-C2AAF774C7DC|PANE__TAG" val="_"/>
 </p:tagLst>

--- a/slides/00-DailyAnnouncements.pptx
+++ b/slides/00-DailyAnnouncements.pptx
@@ -5,7 +5,7 @@
     <p:sldMasterId id="2147484006" r:id="rId1"/>
   </p:sldMasterIdLst>
   <p:notesMasterIdLst>
-    <p:notesMasterId r:id="rId17"/>
+    <p:notesMasterId r:id="rId18"/>
   </p:notesMasterIdLst>
   <p:sldIdLst>
     <p:sldId id="256" r:id="rId2"/>
@@ -23,6 +23,7 @@
     <p:sldId id="516" r:id="rId14"/>
     <p:sldId id="517" r:id="rId15"/>
     <p:sldId id="518" r:id="rId16"/>
+    <p:sldId id="519" r:id="rId17"/>
   </p:sldIdLst>
   <p:sldSz cx="12192000" cy="6858000"/>
   <p:notesSz cx="6858000" cy="9144000"/>
@@ -211,7 +212,7 @@
           <a:p>
             <a:fld id="{C5B45307-6ED4-B142-BD64-10F739779302}" type="datetimeFigureOut">
               <a:rPr lang="en-US" smtClean="0"/>
-              <a:t>4/7/26</a:t>
+              <a:t>4/14/26</a:t>
             </a:fld>
             <a:endParaRPr lang="en-US"/>
           </a:p>
@@ -619,7 +620,7 @@
           <a:noFill/>
           <a:extLst>
             <a:ext uri="{909E8E84-426E-40dd-AFC4-6F175D3DCCD1}">
-              <a14:hiddenFill xmlns="" xmlns:a14="http://schemas.microsoft.com/office/drawing/2010/main">
+              <a14:hiddenFill xmlns:a14="http://schemas.microsoft.com/office/drawing/2010/main" xmlns="">
                 <a:solidFill>
                   <a:srgbClr val="FFFFFF"/>
                 </a:solidFill>
@@ -678,7 +679,7 @@
             </a:ln>
             <a:extLst>
               <a:ext uri="{91240B29-F687-4f45-9708-019B960494DF}">
-                <a14:hiddenLine xmlns="" xmlns:a14="http://schemas.microsoft.com/office/drawing/2010/main" w="9525">
+                <a14:hiddenLine xmlns:a14="http://schemas.microsoft.com/office/drawing/2010/main" xmlns="" w="9525">
                   <a:solidFill>
                     <a:srgbClr val="000000"/>
                   </a:solidFill>
@@ -768,7 +769,7 @@
             </a:ln>
             <a:extLst>
               <a:ext uri="{91240B29-F687-4f45-9708-019B960494DF}">
-                <a14:hiddenLine xmlns="" xmlns:a14="http://schemas.microsoft.com/office/drawing/2010/main" w="9525">
+                <a14:hiddenLine xmlns:a14="http://schemas.microsoft.com/office/drawing/2010/main" xmlns="" w="9525">
                   <a:solidFill>
                     <a:srgbClr val="000000"/>
                   </a:solidFill>
@@ -858,7 +859,7 @@
             </a:ln>
             <a:extLst>
               <a:ext uri="{91240B29-F687-4f45-9708-019B960494DF}">
-                <a14:hiddenLine xmlns="" xmlns:a14="http://schemas.microsoft.com/office/drawing/2010/main" w="9525">
+                <a14:hiddenLine xmlns:a14="http://schemas.microsoft.com/office/drawing/2010/main" xmlns="" w="9525">
                   <a:solidFill>
                     <a:srgbClr val="000000"/>
                   </a:solidFill>
@@ -892,7 +893,7 @@
             </a:ln>
             <a:extLst>
               <a:ext uri="{91240B29-F687-4f45-9708-019B960494DF}">
-                <a14:hiddenLine xmlns="" xmlns:a14="http://schemas.microsoft.com/office/drawing/2010/main" w="9525">
+                <a14:hiddenLine xmlns:a14="http://schemas.microsoft.com/office/drawing/2010/main" xmlns="" w="9525">
                   <a:solidFill>
                     <a:srgbClr val="000000"/>
                   </a:solidFill>
@@ -982,7 +983,7 @@
             </a:ln>
             <a:extLst>
               <a:ext uri="{91240B29-F687-4f45-9708-019B960494DF}">
-                <a14:hiddenLine xmlns="" xmlns:a14="http://schemas.microsoft.com/office/drawing/2010/main" w="9525">
+                <a14:hiddenLine xmlns:a14="http://schemas.microsoft.com/office/drawing/2010/main" xmlns="" w="9525">
                   <a:solidFill>
                     <a:srgbClr val="000000"/>
                   </a:solidFill>
@@ -1044,7 +1045,7 @@
             </a:ln>
             <a:extLst>
               <a:ext uri="{91240B29-F687-4f45-9708-019B960494DF}">
-                <a14:hiddenLine xmlns="" xmlns:a14="http://schemas.microsoft.com/office/drawing/2010/main" w="9525">
+                <a14:hiddenLine xmlns:a14="http://schemas.microsoft.com/office/drawing/2010/main" xmlns="" w="9525">
                   <a:solidFill>
                     <a:srgbClr val="000000"/>
                   </a:solidFill>
@@ -1106,7 +1107,7 @@
             </a:ln>
             <a:extLst>
               <a:ext uri="{91240B29-F687-4f45-9708-019B960494DF}">
-                <a14:hiddenLine xmlns="" xmlns:a14="http://schemas.microsoft.com/office/drawing/2010/main" w="9525">
+                <a14:hiddenLine xmlns:a14="http://schemas.microsoft.com/office/drawing/2010/main" xmlns="" w="9525">
                   <a:solidFill>
                     <a:srgbClr val="000000"/>
                   </a:solidFill>
@@ -1196,7 +1197,7 @@
             </a:ln>
             <a:extLst>
               <a:ext uri="{91240B29-F687-4f45-9708-019B960494DF}">
-                <a14:hiddenLine xmlns="" xmlns:a14="http://schemas.microsoft.com/office/drawing/2010/main" w="9525">
+                <a14:hiddenLine xmlns:a14="http://schemas.microsoft.com/office/drawing/2010/main" xmlns="" w="9525">
                   <a:solidFill>
                     <a:srgbClr val="000000"/>
                   </a:solidFill>
@@ -1258,7 +1259,7 @@
             </a:ln>
             <a:extLst>
               <a:ext uri="{91240B29-F687-4f45-9708-019B960494DF}">
-                <a14:hiddenLine xmlns="" xmlns:a14="http://schemas.microsoft.com/office/drawing/2010/main" w="9525">
+                <a14:hiddenLine xmlns:a14="http://schemas.microsoft.com/office/drawing/2010/main" xmlns="" w="9525">
                   <a:solidFill>
                     <a:srgbClr val="000000"/>
                   </a:solidFill>
@@ -1320,7 +1321,7 @@
             </a:ln>
             <a:extLst>
               <a:ext uri="{91240B29-F687-4f45-9708-019B960494DF}">
-                <a14:hiddenLine xmlns="" xmlns:a14="http://schemas.microsoft.com/office/drawing/2010/main" w="9525">
+                <a14:hiddenLine xmlns:a14="http://schemas.microsoft.com/office/drawing/2010/main" xmlns="" w="9525">
                   <a:solidFill>
                     <a:srgbClr val="000000"/>
                   </a:solidFill>
@@ -1410,7 +1411,7 @@
             </a:ln>
             <a:extLst>
               <a:ext uri="{91240B29-F687-4f45-9708-019B960494DF}">
-                <a14:hiddenLine xmlns="" xmlns:a14="http://schemas.microsoft.com/office/drawing/2010/main" w="9525">
+                <a14:hiddenLine xmlns:a14="http://schemas.microsoft.com/office/drawing/2010/main" xmlns="" w="9525">
                   <a:solidFill>
                     <a:srgbClr val="000000"/>
                   </a:solidFill>
@@ -1500,7 +1501,7 @@
             </a:ln>
             <a:extLst>
               <a:ext uri="{91240B29-F687-4f45-9708-019B960494DF}">
-                <a14:hiddenLine xmlns="" xmlns:a14="http://schemas.microsoft.com/office/drawing/2010/main" w="9525">
+                <a14:hiddenLine xmlns:a14="http://schemas.microsoft.com/office/drawing/2010/main" xmlns="" w="9525">
                   <a:solidFill>
                     <a:srgbClr val="000000"/>
                   </a:solidFill>
@@ -1562,7 +1563,7 @@
             </a:ln>
             <a:extLst>
               <a:ext uri="{91240B29-F687-4f45-9708-019B960494DF}">
-                <a14:hiddenLine xmlns="" xmlns:a14="http://schemas.microsoft.com/office/drawing/2010/main" w="9525">
+                <a14:hiddenLine xmlns:a14="http://schemas.microsoft.com/office/drawing/2010/main" xmlns="" w="9525">
                   <a:solidFill>
                     <a:srgbClr val="000000"/>
                   </a:solidFill>
@@ -1672,7 +1673,7 @@
             </a:ln>
             <a:extLst>
               <a:ext uri="{91240B29-F687-4f45-9708-019B960494DF}">
-                <a14:hiddenLine xmlns="" xmlns:a14="http://schemas.microsoft.com/office/drawing/2010/main" w="9525">
+                <a14:hiddenLine xmlns:a14="http://schemas.microsoft.com/office/drawing/2010/main" xmlns="" w="9525">
                   <a:solidFill>
                     <a:srgbClr val="000000"/>
                   </a:solidFill>
@@ -1734,7 +1735,7 @@
             </a:ln>
             <a:extLst>
               <a:ext uri="{91240B29-F687-4f45-9708-019B960494DF}">
-                <a14:hiddenLine xmlns="" xmlns:a14="http://schemas.microsoft.com/office/drawing/2010/main" w="9525">
+                <a14:hiddenLine xmlns:a14="http://schemas.microsoft.com/office/drawing/2010/main" xmlns="" w="9525">
                   <a:solidFill>
                     <a:srgbClr val="000000"/>
                   </a:solidFill>
@@ -1824,7 +1825,7 @@
             </a:ln>
             <a:extLst>
               <a:ext uri="{91240B29-F687-4f45-9708-019B960494DF}">
-                <a14:hiddenLine xmlns="" xmlns:a14="http://schemas.microsoft.com/office/drawing/2010/main" w="9525">
+                <a14:hiddenLine xmlns:a14="http://schemas.microsoft.com/office/drawing/2010/main" xmlns="" w="9525">
                   <a:solidFill>
                     <a:srgbClr val="000000"/>
                   </a:solidFill>
@@ -1914,7 +1915,7 @@
             </a:ln>
             <a:extLst>
               <a:ext uri="{91240B29-F687-4f45-9708-019B960494DF}">
-                <a14:hiddenLine xmlns="" xmlns:a14="http://schemas.microsoft.com/office/drawing/2010/main" w="9525">
+                <a14:hiddenLine xmlns:a14="http://schemas.microsoft.com/office/drawing/2010/main" xmlns="" w="9525">
                   <a:solidFill>
                     <a:srgbClr val="000000"/>
                   </a:solidFill>
@@ -1976,7 +1977,7 @@
             </a:ln>
             <a:extLst>
               <a:ext uri="{91240B29-F687-4f45-9708-019B960494DF}">
-                <a14:hiddenLine xmlns="" xmlns:a14="http://schemas.microsoft.com/office/drawing/2010/main" w="9525">
+                <a14:hiddenLine xmlns:a14="http://schemas.microsoft.com/office/drawing/2010/main" xmlns="" w="9525">
                   <a:solidFill>
                     <a:srgbClr val="000000"/>
                   </a:solidFill>
@@ -2066,7 +2067,7 @@
             </a:ln>
             <a:extLst>
               <a:ext uri="{91240B29-F687-4f45-9708-019B960494DF}">
-                <a14:hiddenLine xmlns="" xmlns:a14="http://schemas.microsoft.com/office/drawing/2010/main" w="9525">
+                <a14:hiddenLine xmlns:a14="http://schemas.microsoft.com/office/drawing/2010/main" xmlns="" w="9525">
                   <a:solidFill>
                     <a:srgbClr val="000000"/>
                   </a:solidFill>
@@ -2156,7 +2157,7 @@
             </a:ln>
             <a:extLst>
               <a:ext uri="{91240B29-F687-4f45-9708-019B960494DF}">
-                <a14:hiddenLine xmlns="" xmlns:a14="http://schemas.microsoft.com/office/drawing/2010/main" w="9525">
+                <a14:hiddenLine xmlns:a14="http://schemas.microsoft.com/office/drawing/2010/main" xmlns="" w="9525">
                   <a:solidFill>
                     <a:srgbClr val="000000"/>
                   </a:solidFill>
@@ -2212,7 +2213,7 @@
             </a:ln>
             <a:extLst>
               <a:ext uri="{91240B29-F687-4f45-9708-019B960494DF}">
-                <a14:hiddenLine xmlns="" xmlns:a14="http://schemas.microsoft.com/office/drawing/2010/main" w="9525">
+                <a14:hiddenLine xmlns:a14="http://schemas.microsoft.com/office/drawing/2010/main" xmlns="" w="9525">
                   <a:solidFill>
                     <a:srgbClr val="000000"/>
                   </a:solidFill>
@@ -2302,7 +2303,7 @@
             </a:ln>
             <a:extLst>
               <a:ext uri="{91240B29-F687-4f45-9708-019B960494DF}">
-                <a14:hiddenLine xmlns="" xmlns:a14="http://schemas.microsoft.com/office/drawing/2010/main" w="9525">
+                <a14:hiddenLine xmlns:a14="http://schemas.microsoft.com/office/drawing/2010/main" xmlns="" w="9525">
                   <a:solidFill>
                     <a:srgbClr val="000000"/>
                   </a:solidFill>
@@ -2358,7 +2359,7 @@
             </a:ln>
             <a:extLst>
               <a:ext uri="{91240B29-F687-4f45-9708-019B960494DF}">
-                <a14:hiddenLine xmlns="" xmlns:a14="http://schemas.microsoft.com/office/drawing/2010/main" w="9525">
+                <a14:hiddenLine xmlns:a14="http://schemas.microsoft.com/office/drawing/2010/main" xmlns="" w="9525">
                   <a:solidFill>
                     <a:srgbClr val="000000"/>
                   </a:solidFill>
@@ -2448,7 +2449,7 @@
             </a:ln>
             <a:extLst>
               <a:ext uri="{91240B29-F687-4f45-9708-019B960494DF}">
-                <a14:hiddenLine xmlns="" xmlns:a14="http://schemas.microsoft.com/office/drawing/2010/main" w="9525">
+                <a14:hiddenLine xmlns:a14="http://schemas.microsoft.com/office/drawing/2010/main" xmlns="" w="9525">
                   <a:solidFill>
                     <a:srgbClr val="000000"/>
                   </a:solidFill>
@@ -2516,7 +2517,7 @@
             </a:ln>
             <a:extLst>
               <a:ext uri="{91240B29-F687-4f45-9708-019B960494DF}">
-                <a14:hiddenLine xmlns="" xmlns:a14="http://schemas.microsoft.com/office/drawing/2010/main" w="9525">
+                <a14:hiddenLine xmlns:a14="http://schemas.microsoft.com/office/drawing/2010/main" xmlns="" w="9525">
                   <a:solidFill>
                     <a:srgbClr val="000000"/>
                   </a:solidFill>
@@ -2606,7 +2607,7 @@
             </a:ln>
             <a:extLst>
               <a:ext uri="{91240B29-F687-4f45-9708-019B960494DF}">
-                <a14:hiddenLine xmlns="" xmlns:a14="http://schemas.microsoft.com/office/drawing/2010/main" w="9525">
+                <a14:hiddenLine xmlns:a14="http://schemas.microsoft.com/office/drawing/2010/main" xmlns="" w="9525">
                   <a:solidFill>
                     <a:srgbClr val="000000"/>
                   </a:solidFill>
@@ -2674,7 +2675,7 @@
             </a:ln>
             <a:extLst>
               <a:ext uri="{91240B29-F687-4f45-9708-019B960494DF}">
-                <a14:hiddenLine xmlns="" xmlns:a14="http://schemas.microsoft.com/office/drawing/2010/main" w="9525">
+                <a14:hiddenLine xmlns:a14="http://schemas.microsoft.com/office/drawing/2010/main" xmlns="" w="9525">
                   <a:solidFill>
                     <a:srgbClr val="000000"/>
                   </a:solidFill>
@@ -2764,7 +2765,7 @@
             </a:ln>
             <a:extLst>
               <a:ext uri="{91240B29-F687-4f45-9708-019B960494DF}">
-                <a14:hiddenLine xmlns="" xmlns:a14="http://schemas.microsoft.com/office/drawing/2010/main" w="9525">
+                <a14:hiddenLine xmlns:a14="http://schemas.microsoft.com/office/drawing/2010/main" xmlns="" w="9525">
                   <a:solidFill>
                     <a:srgbClr val="000000"/>
                   </a:solidFill>
@@ -2798,7 +2799,7 @@
             </a:ln>
             <a:extLst>
               <a:ext uri="{91240B29-F687-4f45-9708-019B960494DF}">
-                <a14:hiddenLine xmlns="" xmlns:a14="http://schemas.microsoft.com/office/drawing/2010/main" w="9525">
+                <a14:hiddenLine xmlns:a14="http://schemas.microsoft.com/office/drawing/2010/main" xmlns="" w="9525">
                   <a:solidFill>
                     <a:srgbClr val="000000"/>
                   </a:solidFill>
@@ -2888,7 +2889,7 @@
             </a:ln>
             <a:extLst>
               <a:ext uri="{91240B29-F687-4f45-9708-019B960494DF}">
-                <a14:hiddenLine xmlns="" xmlns:a14="http://schemas.microsoft.com/office/drawing/2010/main" w="9525">
+                <a14:hiddenLine xmlns:a14="http://schemas.microsoft.com/office/drawing/2010/main" xmlns="" w="9525">
                   <a:solidFill>
                     <a:srgbClr val="000000"/>
                   </a:solidFill>
@@ -2950,7 +2951,7 @@
             </a:ln>
             <a:extLst>
               <a:ext uri="{91240B29-F687-4f45-9708-019B960494DF}">
-                <a14:hiddenLine xmlns="" xmlns:a14="http://schemas.microsoft.com/office/drawing/2010/main" w="9525">
+                <a14:hiddenLine xmlns:a14="http://schemas.microsoft.com/office/drawing/2010/main" xmlns="" w="9525">
                   <a:solidFill>
                     <a:srgbClr val="000000"/>
                   </a:solidFill>
@@ -3012,7 +3013,7 @@
             </a:ln>
             <a:extLst>
               <a:ext uri="{91240B29-F687-4f45-9708-019B960494DF}">
-                <a14:hiddenLine xmlns="" xmlns:a14="http://schemas.microsoft.com/office/drawing/2010/main" w="9525">
+                <a14:hiddenLine xmlns:a14="http://schemas.microsoft.com/office/drawing/2010/main" xmlns="" w="9525">
                   <a:solidFill>
                     <a:srgbClr val="000000"/>
                   </a:solidFill>
@@ -3102,7 +3103,7 @@
             </a:ln>
             <a:extLst>
               <a:ext uri="{91240B29-F687-4f45-9708-019B960494DF}">
-                <a14:hiddenLine xmlns="" xmlns:a14="http://schemas.microsoft.com/office/drawing/2010/main" w="9525">
+                <a14:hiddenLine xmlns:a14="http://schemas.microsoft.com/office/drawing/2010/main" xmlns="" w="9525">
                   <a:solidFill>
                     <a:srgbClr val="000000"/>
                   </a:solidFill>
@@ -3170,7 +3171,7 @@
             </a:ln>
             <a:extLst>
               <a:ext uri="{91240B29-F687-4f45-9708-019B960494DF}">
-                <a14:hiddenLine xmlns="" xmlns:a14="http://schemas.microsoft.com/office/drawing/2010/main" w="9525">
+                <a14:hiddenLine xmlns:a14="http://schemas.microsoft.com/office/drawing/2010/main" xmlns="" w="9525">
                   <a:solidFill>
                     <a:srgbClr val="000000"/>
                   </a:solidFill>
@@ -3232,7 +3233,7 @@
             </a:ln>
             <a:extLst>
               <a:ext uri="{91240B29-F687-4f45-9708-019B960494DF}">
-                <a14:hiddenLine xmlns="" xmlns:a14="http://schemas.microsoft.com/office/drawing/2010/main" w="9525">
+                <a14:hiddenLine xmlns:a14="http://schemas.microsoft.com/office/drawing/2010/main" xmlns="" w="9525">
                   <a:solidFill>
                     <a:srgbClr val="000000"/>
                   </a:solidFill>
@@ -3322,7 +3323,7 @@
             </a:ln>
             <a:extLst>
               <a:ext uri="{91240B29-F687-4f45-9708-019B960494DF}">
-                <a14:hiddenLine xmlns="" xmlns:a14="http://schemas.microsoft.com/office/drawing/2010/main" w="9525">
+                <a14:hiddenLine xmlns:a14="http://schemas.microsoft.com/office/drawing/2010/main" xmlns="" w="9525">
                   <a:solidFill>
                     <a:srgbClr val="000000"/>
                   </a:solidFill>
@@ -3384,7 +3385,7 @@
             </a:ln>
             <a:extLst>
               <a:ext uri="{91240B29-F687-4f45-9708-019B960494DF}">
-                <a14:hiddenLine xmlns="" xmlns:a14="http://schemas.microsoft.com/office/drawing/2010/main" w="9525">
+                <a14:hiddenLine xmlns:a14="http://schemas.microsoft.com/office/drawing/2010/main" xmlns="" w="9525">
                   <a:solidFill>
                     <a:srgbClr val="000000"/>
                   </a:solidFill>
@@ -3474,7 +3475,7 @@
             </a:ln>
             <a:extLst>
               <a:ext uri="{91240B29-F687-4f45-9708-019B960494DF}">
-                <a14:hiddenLine xmlns="" xmlns:a14="http://schemas.microsoft.com/office/drawing/2010/main" w="9525">
+                <a14:hiddenLine xmlns:a14="http://schemas.microsoft.com/office/drawing/2010/main" xmlns="" w="9525">
                   <a:solidFill>
                     <a:srgbClr val="000000"/>
                   </a:solidFill>
@@ -3536,7 +3537,7 @@
             </a:ln>
             <a:extLst>
               <a:ext uri="{91240B29-F687-4f45-9708-019B960494DF}">
-                <a14:hiddenLine xmlns="" xmlns:a14="http://schemas.microsoft.com/office/drawing/2010/main" w="9525">
+                <a14:hiddenLine xmlns:a14="http://schemas.microsoft.com/office/drawing/2010/main" xmlns="" w="9525">
                   <a:solidFill>
                     <a:srgbClr val="000000"/>
                   </a:solidFill>
@@ -3626,7 +3627,7 @@
             </a:ln>
             <a:extLst>
               <a:ext uri="{91240B29-F687-4f45-9708-019B960494DF}">
-                <a14:hiddenLine xmlns="" xmlns:a14="http://schemas.microsoft.com/office/drawing/2010/main" w="9525">
+                <a14:hiddenLine xmlns:a14="http://schemas.microsoft.com/office/drawing/2010/main" xmlns="" w="9525">
                   <a:solidFill>
                     <a:srgbClr val="000000"/>
                   </a:solidFill>
@@ -3660,7 +3661,7 @@
             </a:ln>
             <a:extLst>
               <a:ext uri="{91240B29-F687-4f45-9708-019B960494DF}">
-                <a14:hiddenLine xmlns="" xmlns:a14="http://schemas.microsoft.com/office/drawing/2010/main" w="9525">
+                <a14:hiddenLine xmlns:a14="http://schemas.microsoft.com/office/drawing/2010/main" xmlns="" w="9525">
                   <a:solidFill>
                     <a:srgbClr val="000000"/>
                   </a:solidFill>
@@ -3725,7 +3726,7 @@
             </a:ln>
             <a:extLst>
               <a:ext uri="{91240B29-F687-4f45-9708-019B960494DF}">
-                <a14:hiddenLine xmlns="" xmlns:a14="http://schemas.microsoft.com/office/drawing/2010/main" w="9525">
+                <a14:hiddenLine xmlns:a14="http://schemas.microsoft.com/office/drawing/2010/main" xmlns="" w="9525">
                   <a:solidFill>
                     <a:srgbClr val="000000"/>
                   </a:solidFill>
@@ -3815,7 +3816,7 @@
             </a:ln>
             <a:extLst>
               <a:ext uri="{91240B29-F687-4f45-9708-019B960494DF}">
-                <a14:hiddenLine xmlns="" xmlns:a14="http://schemas.microsoft.com/office/drawing/2010/main" w="9525">
+                <a14:hiddenLine xmlns:a14="http://schemas.microsoft.com/office/drawing/2010/main" xmlns="" w="9525">
                   <a:solidFill>
                     <a:srgbClr val="000000"/>
                   </a:solidFill>
@@ -3877,7 +3878,7 @@
             </a:ln>
             <a:extLst>
               <a:ext uri="{91240B29-F687-4f45-9708-019B960494DF}">
-                <a14:hiddenLine xmlns="" xmlns:a14="http://schemas.microsoft.com/office/drawing/2010/main" w="9525">
+                <a14:hiddenLine xmlns:a14="http://schemas.microsoft.com/office/drawing/2010/main" xmlns="" w="9525">
                   <a:solidFill>
                     <a:srgbClr val="000000"/>
                   </a:solidFill>
@@ -3967,7 +3968,7 @@
             </a:ln>
             <a:extLst>
               <a:ext uri="{91240B29-F687-4f45-9708-019B960494DF}">
-                <a14:hiddenLine xmlns="" xmlns:a14="http://schemas.microsoft.com/office/drawing/2010/main" w="9525">
+                <a14:hiddenLine xmlns:a14="http://schemas.microsoft.com/office/drawing/2010/main" xmlns="" w="9525">
                   <a:solidFill>
                     <a:srgbClr val="000000"/>
                   </a:solidFill>
@@ -4057,7 +4058,7 @@
             </a:ln>
             <a:extLst>
               <a:ext uri="{91240B29-F687-4f45-9708-019B960494DF}">
-                <a14:hiddenLine xmlns="" xmlns:a14="http://schemas.microsoft.com/office/drawing/2010/main" w="9525">
+                <a14:hiddenLine xmlns:a14="http://schemas.microsoft.com/office/drawing/2010/main" xmlns="" w="9525">
                   <a:solidFill>
                     <a:srgbClr val="000000"/>
                   </a:solidFill>
@@ -4122,7 +4123,7 @@
             </a:ln>
             <a:extLst>
               <a:ext uri="{91240B29-F687-4f45-9708-019B960494DF}">
-                <a14:hiddenLine xmlns="" xmlns:a14="http://schemas.microsoft.com/office/drawing/2010/main" w="9525">
+                <a14:hiddenLine xmlns:a14="http://schemas.microsoft.com/office/drawing/2010/main" xmlns="" w="9525">
                   <a:solidFill>
                     <a:srgbClr val="000000"/>
                   </a:solidFill>
@@ -4184,7 +4185,7 @@
             </a:ln>
             <a:extLst>
               <a:ext uri="{91240B29-F687-4f45-9708-019B960494DF}">
-                <a14:hiddenLine xmlns="" xmlns:a14="http://schemas.microsoft.com/office/drawing/2010/main" w="9525">
+                <a14:hiddenLine xmlns:a14="http://schemas.microsoft.com/office/drawing/2010/main" xmlns="" w="9525">
                   <a:solidFill>
                     <a:srgbClr val="000000"/>
                   </a:solidFill>
@@ -4274,7 +4275,7 @@
             </a:ln>
             <a:extLst>
               <a:ext uri="{91240B29-F687-4f45-9708-019B960494DF}">
-                <a14:hiddenLine xmlns="" xmlns:a14="http://schemas.microsoft.com/office/drawing/2010/main" w="9525">
+                <a14:hiddenLine xmlns:a14="http://schemas.microsoft.com/office/drawing/2010/main" xmlns="" w="9525">
                   <a:solidFill>
                     <a:srgbClr val="000000"/>
                   </a:solidFill>
@@ -4364,7 +4365,7 @@
             </a:ln>
             <a:extLst>
               <a:ext uri="{91240B29-F687-4f45-9708-019B960494DF}">
-                <a14:hiddenLine xmlns="" xmlns:a14="http://schemas.microsoft.com/office/drawing/2010/main" w="9525">
+                <a14:hiddenLine xmlns:a14="http://schemas.microsoft.com/office/drawing/2010/main" xmlns="" w="9525">
                   <a:solidFill>
                     <a:srgbClr val="000000"/>
                   </a:solidFill>
@@ -4426,7 +4427,7 @@
             </a:ln>
             <a:extLst>
               <a:ext uri="{91240B29-F687-4f45-9708-019B960494DF}">
-                <a14:hiddenLine xmlns="" xmlns:a14="http://schemas.microsoft.com/office/drawing/2010/main" w="9525">
+                <a14:hiddenLine xmlns:a14="http://schemas.microsoft.com/office/drawing/2010/main" xmlns="" w="9525">
                   <a:solidFill>
                     <a:srgbClr val="000000"/>
                   </a:solidFill>
@@ -4546,7 +4547,7 @@
             </a:ln>
             <a:extLst>
               <a:ext uri="{91240B29-F687-4f45-9708-019B960494DF}">
-                <a14:hiddenLine xmlns="" xmlns:a14="http://schemas.microsoft.com/office/drawing/2010/main" w="9525">
+                <a14:hiddenLine xmlns:a14="http://schemas.microsoft.com/office/drawing/2010/main" xmlns="" w="9525">
                   <a:solidFill>
                     <a:srgbClr val="000000"/>
                   </a:solidFill>
@@ -4614,7 +4615,7 @@
             </a:ln>
             <a:extLst>
               <a:ext uri="{91240B29-F687-4f45-9708-019B960494DF}">
-                <a14:hiddenLine xmlns="" xmlns:a14="http://schemas.microsoft.com/office/drawing/2010/main" w="9525">
+                <a14:hiddenLine xmlns:a14="http://schemas.microsoft.com/office/drawing/2010/main" xmlns="" w="9525">
                   <a:solidFill>
                     <a:srgbClr val="000000"/>
                   </a:solidFill>
@@ -4704,7 +4705,7 @@
             </a:ln>
             <a:extLst>
               <a:ext uri="{91240B29-F687-4f45-9708-019B960494DF}">
-                <a14:hiddenLine xmlns="" xmlns:a14="http://schemas.microsoft.com/office/drawing/2010/main" w="9525">
+                <a14:hiddenLine xmlns:a14="http://schemas.microsoft.com/office/drawing/2010/main" xmlns="" w="9525">
                   <a:solidFill>
                     <a:srgbClr val="000000"/>
                   </a:solidFill>
@@ -4844,7 +4845,7 @@
           <a:p>
             <a:fld id="{EC4347D3-4C9A-C240-8F14-750059DFEEB0}" type="datetimeFigureOut">
               <a:rPr lang="en-US" smtClean="0"/>
-              <a:t>4/7/26</a:t>
+              <a:t>4/14/26</a:t>
             </a:fld>
             <a:endParaRPr lang="en-US"/>
           </a:p>
@@ -5111,7 +5112,7 @@
           <a:p>
             <a:fld id="{EC4347D3-4C9A-C240-8F14-750059DFEEB0}" type="datetimeFigureOut">
               <a:rPr lang="en-US" smtClean="0"/>
-              <a:t>4/7/26</a:t>
+              <a:t>4/14/26</a:t>
             </a:fld>
             <a:endParaRPr lang="en-US"/>
           </a:p>
@@ -5307,7 +5308,7 @@
           <a:p>
             <a:fld id="{EC4347D3-4C9A-C240-8F14-750059DFEEB0}" type="datetimeFigureOut">
               <a:rPr lang="en-US" smtClean="0"/>
-              <a:t>4/7/26</a:t>
+              <a:t>4/14/26</a:t>
             </a:fld>
             <a:endParaRPr lang="en-US"/>
           </a:p>
@@ -5570,7 +5571,7 @@
           <a:p>
             <a:fld id="{EC4347D3-4C9A-C240-8F14-750059DFEEB0}" type="datetimeFigureOut">
               <a:rPr lang="en-US" smtClean="0"/>
-              <a:t>4/7/26</a:t>
+              <a:t>4/14/26</a:t>
             </a:fld>
             <a:endParaRPr lang="en-US"/>
           </a:p>
@@ -6004,7 +6005,7 @@
           <a:p>
             <a:fld id="{EC4347D3-4C9A-C240-8F14-750059DFEEB0}" type="datetimeFigureOut">
               <a:rPr lang="en-US" smtClean="0"/>
-              <a:t>4/7/26</a:t>
+              <a:t>4/14/26</a:t>
             </a:fld>
             <a:endParaRPr lang="en-US"/>
           </a:p>
@@ -6550,7 +6551,7 @@
           <a:p>
             <a:fld id="{EC4347D3-4C9A-C240-8F14-750059DFEEB0}" type="datetimeFigureOut">
               <a:rPr lang="en-US" smtClean="0"/>
-              <a:t>4/7/26</a:t>
+              <a:t>4/14/26</a:t>
             </a:fld>
             <a:endParaRPr lang="en-US"/>
           </a:p>
@@ -7270,7 +7271,7 @@
           <a:p>
             <a:fld id="{EC4347D3-4C9A-C240-8F14-750059DFEEB0}" type="datetimeFigureOut">
               <a:rPr lang="en-US" smtClean="0"/>
-              <a:t>4/7/26</a:t>
+              <a:t>4/14/26</a:t>
             </a:fld>
             <a:endParaRPr lang="en-US"/>
           </a:p>
@@ -7440,7 +7441,7 @@
           <a:p>
             <a:fld id="{EC4347D3-4C9A-C240-8F14-750059DFEEB0}" type="datetimeFigureOut">
               <a:rPr lang="en-US" smtClean="0"/>
-              <a:t>4/7/26</a:t>
+              <a:t>4/14/26</a:t>
             </a:fld>
             <a:endParaRPr lang="en-US"/>
           </a:p>
@@ -7620,7 +7621,7 @@
           <a:p>
             <a:fld id="{EC4347D3-4C9A-C240-8F14-750059DFEEB0}" type="datetimeFigureOut">
               <a:rPr lang="en-US" smtClean="0"/>
-              <a:t>4/7/26</a:t>
+              <a:t>4/14/26</a:t>
             </a:fld>
             <a:endParaRPr lang="en-US"/>
           </a:p>
@@ -7790,7 +7791,7 @@
           <a:p>
             <a:fld id="{EC4347D3-4C9A-C240-8F14-750059DFEEB0}" type="datetimeFigureOut">
               <a:rPr lang="en-US" smtClean="0"/>
-              <a:t>4/7/26</a:t>
+              <a:t>4/14/26</a:t>
             </a:fld>
             <a:endParaRPr lang="en-US"/>
           </a:p>
@@ -8040,7 +8041,7 @@
           <a:p>
             <a:fld id="{EC4347D3-4C9A-C240-8F14-750059DFEEB0}" type="datetimeFigureOut">
               <a:rPr lang="en-US" smtClean="0"/>
-              <a:t>4/7/26</a:t>
+              <a:t>4/14/26</a:t>
             </a:fld>
             <a:endParaRPr lang="en-US"/>
           </a:p>
@@ -8272,7 +8273,7 @@
           <a:p>
             <a:fld id="{EC4347D3-4C9A-C240-8F14-750059DFEEB0}" type="datetimeFigureOut">
               <a:rPr lang="en-US" smtClean="0"/>
-              <a:t>4/7/26</a:t>
+              <a:t>4/14/26</a:t>
             </a:fld>
             <a:endParaRPr lang="en-US"/>
           </a:p>
@@ -8658,7 +8659,7 @@
           <a:p>
             <a:fld id="{EC4347D3-4C9A-C240-8F14-750059DFEEB0}" type="datetimeFigureOut">
               <a:rPr lang="en-US" smtClean="0"/>
-              <a:t>4/7/26</a:t>
+              <a:t>4/14/26</a:t>
             </a:fld>
             <a:endParaRPr lang="en-US"/>
           </a:p>
@@ -8781,7 +8782,7 @@
           <a:p>
             <a:fld id="{EC4347D3-4C9A-C240-8F14-750059DFEEB0}" type="datetimeFigureOut">
               <a:rPr lang="en-US" smtClean="0"/>
-              <a:t>4/7/26</a:t>
+              <a:t>4/14/26</a:t>
             </a:fld>
             <a:endParaRPr lang="en-US"/>
           </a:p>
@@ -8876,7 +8877,7 @@
           <a:p>
             <a:fld id="{EC4347D3-4C9A-C240-8F14-750059DFEEB0}" type="datetimeFigureOut">
               <a:rPr lang="en-US" smtClean="0"/>
-              <a:t>4/7/26</a:t>
+              <a:t>4/14/26</a:t>
             </a:fld>
             <a:endParaRPr lang="en-US"/>
           </a:p>
@@ -9125,7 +9126,7 @@
           <a:p>
             <a:fld id="{EC4347D3-4C9A-C240-8F14-750059DFEEB0}" type="datetimeFigureOut">
               <a:rPr lang="en-US" smtClean="0"/>
-              <a:t>4/7/26</a:t>
+              <a:t>4/14/26</a:t>
             </a:fld>
             <a:endParaRPr lang="en-US"/>
           </a:p>
@@ -9410,7 +9411,7 @@
           <a:p>
             <a:fld id="{EC4347D3-4C9A-C240-8F14-750059DFEEB0}" type="datetimeFigureOut">
               <a:rPr lang="en-US" smtClean="0"/>
-              <a:t>4/7/26</a:t>
+              <a:t>4/14/26</a:t>
             </a:fld>
             <a:endParaRPr lang="en-US"/>
           </a:p>
@@ -9533,7 +9534,7 @@
           <a:noFill/>
           <a:extLst>
             <a:ext uri="{909E8E84-426E-40dd-AFC4-6F175D3DCCD1}">
-              <a14:hiddenFill xmlns="" xmlns:a14="http://schemas.microsoft.com/office/drawing/2010/main">
+              <a14:hiddenFill xmlns:a14="http://schemas.microsoft.com/office/drawing/2010/main" xmlns="">
                 <a:solidFill>
                   <a:srgbClr val="FFFFFF"/>
                 </a:solidFill>
@@ -9607,7 +9608,7 @@
               </a:ln>
               <a:extLst>
                 <a:ext uri="{91240B29-F687-4f45-9708-019B960494DF}">
-                  <a14:hiddenLine xmlns="" xmlns:a14="http://schemas.microsoft.com/office/drawing/2010/main" w="9525">
+                  <a14:hiddenLine xmlns:a14="http://schemas.microsoft.com/office/drawing/2010/main" xmlns="" w="9525">
                     <a:solidFill>
                       <a:srgbClr val="000000"/>
                     </a:solidFill>
@@ -9697,7 +9698,7 @@
               </a:ln>
               <a:extLst>
                 <a:ext uri="{91240B29-F687-4f45-9708-019B960494DF}">
-                  <a14:hiddenLine xmlns="" xmlns:a14="http://schemas.microsoft.com/office/drawing/2010/main" w="9525">
+                  <a14:hiddenLine xmlns:a14="http://schemas.microsoft.com/office/drawing/2010/main" xmlns="" w="9525">
                     <a:solidFill>
                       <a:srgbClr val="000000"/>
                     </a:solidFill>
@@ -9787,7 +9788,7 @@
               </a:ln>
               <a:extLst>
                 <a:ext uri="{91240B29-F687-4f45-9708-019B960494DF}">
-                  <a14:hiddenLine xmlns="" xmlns:a14="http://schemas.microsoft.com/office/drawing/2010/main" w="9525">
+                  <a14:hiddenLine xmlns:a14="http://schemas.microsoft.com/office/drawing/2010/main" xmlns="" w="9525">
                     <a:solidFill>
                       <a:srgbClr val="000000"/>
                     </a:solidFill>
@@ -9849,7 +9850,7 @@
               </a:ln>
               <a:extLst>
                 <a:ext uri="{91240B29-F687-4f45-9708-019B960494DF}">
-                  <a14:hiddenLine xmlns="" xmlns:a14="http://schemas.microsoft.com/office/drawing/2010/main" w="9525">
+                  <a14:hiddenLine xmlns:a14="http://schemas.microsoft.com/office/drawing/2010/main" xmlns="" w="9525">
                     <a:solidFill>
                       <a:srgbClr val="000000"/>
                     </a:solidFill>
@@ -9939,7 +9940,7 @@
               </a:ln>
               <a:extLst>
                 <a:ext uri="{91240B29-F687-4f45-9708-019B960494DF}">
-                  <a14:hiddenLine xmlns="" xmlns:a14="http://schemas.microsoft.com/office/drawing/2010/main" w="9525">
+                  <a14:hiddenLine xmlns:a14="http://schemas.microsoft.com/office/drawing/2010/main" xmlns="" w="9525">
                     <a:solidFill>
                       <a:srgbClr val="000000"/>
                     </a:solidFill>
@@ -10001,7 +10002,7 @@
               </a:ln>
               <a:extLst>
                 <a:ext uri="{91240B29-F687-4f45-9708-019B960494DF}">
-                  <a14:hiddenLine xmlns="" xmlns:a14="http://schemas.microsoft.com/office/drawing/2010/main" w="9525">
+                  <a14:hiddenLine xmlns:a14="http://schemas.microsoft.com/office/drawing/2010/main" xmlns="" w="9525">
                     <a:solidFill>
                       <a:srgbClr val="000000"/>
                     </a:solidFill>
@@ -10063,7 +10064,7 @@
               </a:ln>
               <a:extLst>
                 <a:ext uri="{91240B29-F687-4f45-9708-019B960494DF}">
-                  <a14:hiddenLine xmlns="" xmlns:a14="http://schemas.microsoft.com/office/drawing/2010/main" w="9525">
+                  <a14:hiddenLine xmlns:a14="http://schemas.microsoft.com/office/drawing/2010/main" xmlns="" w="9525">
                     <a:solidFill>
                       <a:srgbClr val="000000"/>
                     </a:solidFill>
@@ -10153,7 +10154,7 @@
               </a:ln>
               <a:extLst>
                 <a:ext uri="{91240B29-F687-4f45-9708-019B960494DF}">
-                  <a14:hiddenLine xmlns="" xmlns:a14="http://schemas.microsoft.com/office/drawing/2010/main" w="9525">
+                  <a14:hiddenLine xmlns:a14="http://schemas.microsoft.com/office/drawing/2010/main" xmlns="" w="9525">
                     <a:solidFill>
                       <a:srgbClr val="000000"/>
                     </a:solidFill>
@@ -10243,7 +10244,7 @@
               </a:ln>
               <a:extLst>
                 <a:ext uri="{91240B29-F687-4f45-9708-019B960494DF}">
-                  <a14:hiddenLine xmlns="" xmlns:a14="http://schemas.microsoft.com/office/drawing/2010/main" w="9525">
+                  <a14:hiddenLine xmlns:a14="http://schemas.microsoft.com/office/drawing/2010/main" xmlns="" w="9525">
                     <a:solidFill>
                       <a:srgbClr val="000000"/>
                     </a:solidFill>
@@ -10305,7 +10306,7 @@
               </a:ln>
               <a:extLst>
                 <a:ext uri="{91240B29-F687-4f45-9708-019B960494DF}">
-                  <a14:hiddenLine xmlns="" xmlns:a14="http://schemas.microsoft.com/office/drawing/2010/main" w="9525">
+                  <a14:hiddenLine xmlns:a14="http://schemas.microsoft.com/office/drawing/2010/main" xmlns="" w="9525">
                     <a:solidFill>
                       <a:srgbClr val="000000"/>
                     </a:solidFill>
@@ -10415,7 +10416,7 @@
               </a:ln>
               <a:extLst>
                 <a:ext uri="{91240B29-F687-4f45-9708-019B960494DF}">
-                  <a14:hiddenLine xmlns="" xmlns:a14="http://schemas.microsoft.com/office/drawing/2010/main" w="9525">
+                  <a14:hiddenLine xmlns:a14="http://schemas.microsoft.com/office/drawing/2010/main" xmlns="" w="9525">
                     <a:solidFill>
                       <a:srgbClr val="000000"/>
                     </a:solidFill>
@@ -10499,7 +10500,7 @@
               </a:ln>
               <a:extLst>
                 <a:ext uri="{91240B29-F687-4f45-9708-019B960494DF}">
-                  <a14:hiddenLine xmlns="" xmlns:a14="http://schemas.microsoft.com/office/drawing/2010/main" w="9525">
+                  <a14:hiddenLine xmlns:a14="http://schemas.microsoft.com/office/drawing/2010/main" xmlns="" w="9525">
                     <a:solidFill>
                       <a:srgbClr val="000000"/>
                     </a:solidFill>
@@ -10561,7 +10562,7 @@
               </a:ln>
               <a:extLst>
                 <a:ext uri="{91240B29-F687-4f45-9708-019B960494DF}">
-                  <a14:hiddenLine xmlns="" xmlns:a14="http://schemas.microsoft.com/office/drawing/2010/main" w="9525">
+                  <a14:hiddenLine xmlns:a14="http://schemas.microsoft.com/office/drawing/2010/main" xmlns="" w="9525">
                     <a:solidFill>
                       <a:srgbClr val="000000"/>
                     </a:solidFill>
@@ -10623,7 +10624,7 @@
               </a:ln>
               <a:extLst>
                 <a:ext uri="{91240B29-F687-4f45-9708-019B960494DF}">
-                  <a14:hiddenLine xmlns="" xmlns:a14="http://schemas.microsoft.com/office/drawing/2010/main" w="9525">
+                  <a14:hiddenLine xmlns:a14="http://schemas.microsoft.com/office/drawing/2010/main" xmlns="" w="9525">
                     <a:solidFill>
                       <a:srgbClr val="000000"/>
                     </a:solidFill>
@@ -10713,7 +10714,7 @@
               </a:ln>
               <a:extLst>
                 <a:ext uri="{91240B29-F687-4f45-9708-019B960494DF}">
-                  <a14:hiddenLine xmlns="" xmlns:a14="http://schemas.microsoft.com/office/drawing/2010/main" w="9525">
+                  <a14:hiddenLine xmlns:a14="http://schemas.microsoft.com/office/drawing/2010/main" xmlns="" w="9525">
                     <a:solidFill>
                       <a:srgbClr val="000000"/>
                     </a:solidFill>
@@ -10747,7 +10748,7 @@
               </a:ln>
               <a:extLst>
                 <a:ext uri="{91240B29-F687-4f45-9708-019B960494DF}">
-                  <a14:hiddenLine xmlns="" xmlns:a14="http://schemas.microsoft.com/office/drawing/2010/main" w="9525">
+                  <a14:hiddenLine xmlns:a14="http://schemas.microsoft.com/office/drawing/2010/main" xmlns="" w="9525">
                     <a:solidFill>
                       <a:srgbClr val="000000"/>
                     </a:solidFill>
@@ -10812,7 +10813,7 @@
               </a:ln>
               <a:extLst>
                 <a:ext uri="{91240B29-F687-4f45-9708-019B960494DF}">
-                  <a14:hiddenLine xmlns="" xmlns:a14="http://schemas.microsoft.com/office/drawing/2010/main" w="9525">
+                  <a14:hiddenLine xmlns:a14="http://schemas.microsoft.com/office/drawing/2010/main" xmlns="" w="9525">
                     <a:solidFill>
                       <a:srgbClr val="000000"/>
                     </a:solidFill>
@@ -10902,7 +10903,7 @@
               </a:ln>
               <a:extLst>
                 <a:ext uri="{91240B29-F687-4f45-9708-019B960494DF}">
-                  <a14:hiddenLine xmlns="" xmlns:a14="http://schemas.microsoft.com/office/drawing/2010/main" w="9525">
+                  <a14:hiddenLine xmlns:a14="http://schemas.microsoft.com/office/drawing/2010/main" xmlns="" w="9525">
                     <a:solidFill>
                       <a:srgbClr val="000000"/>
                     </a:solidFill>
@@ -10964,7 +10965,7 @@
               </a:ln>
               <a:extLst>
                 <a:ext uri="{91240B29-F687-4f45-9708-019B960494DF}">
-                  <a14:hiddenLine xmlns="" xmlns:a14="http://schemas.microsoft.com/office/drawing/2010/main" w="9525">
+                  <a14:hiddenLine xmlns:a14="http://schemas.microsoft.com/office/drawing/2010/main" xmlns="" w="9525">
                     <a:solidFill>
                       <a:srgbClr val="000000"/>
                     </a:solidFill>
@@ -11054,7 +11055,7 @@
               </a:ln>
               <a:extLst>
                 <a:ext uri="{91240B29-F687-4f45-9708-019B960494DF}">
-                  <a14:hiddenLine xmlns="" xmlns:a14="http://schemas.microsoft.com/office/drawing/2010/main" w="9525">
+                  <a14:hiddenLine xmlns:a14="http://schemas.microsoft.com/office/drawing/2010/main" xmlns="" w="9525">
                     <a:solidFill>
                       <a:srgbClr val="000000"/>
                     </a:solidFill>
@@ -11119,7 +11120,7 @@
               </a:ln>
               <a:extLst>
                 <a:ext uri="{91240B29-F687-4f45-9708-019B960494DF}">
-                  <a14:hiddenLine xmlns="" xmlns:a14="http://schemas.microsoft.com/office/drawing/2010/main" w="9525">
+                  <a14:hiddenLine xmlns:a14="http://schemas.microsoft.com/office/drawing/2010/main" xmlns="" w="9525">
                     <a:solidFill>
                       <a:srgbClr val="000000"/>
                     </a:solidFill>
@@ -11181,7 +11182,7 @@
               </a:ln>
               <a:extLst>
                 <a:ext uri="{91240B29-F687-4f45-9708-019B960494DF}">
-                  <a14:hiddenLine xmlns="" xmlns:a14="http://schemas.microsoft.com/office/drawing/2010/main" w="9525">
+                  <a14:hiddenLine xmlns:a14="http://schemas.microsoft.com/office/drawing/2010/main" xmlns="" w="9525">
                     <a:solidFill>
                       <a:srgbClr val="000000"/>
                     </a:solidFill>
@@ -11271,7 +11272,7 @@
               </a:ln>
               <a:extLst>
                 <a:ext uri="{91240B29-F687-4f45-9708-019B960494DF}">
-                  <a14:hiddenLine xmlns="" xmlns:a14="http://schemas.microsoft.com/office/drawing/2010/main" w="9525">
+                  <a14:hiddenLine xmlns:a14="http://schemas.microsoft.com/office/drawing/2010/main" xmlns="" w="9525">
                     <a:solidFill>
                       <a:srgbClr val="000000"/>
                     </a:solidFill>
@@ -11361,7 +11362,7 @@
               </a:ln>
               <a:extLst>
                 <a:ext uri="{91240B29-F687-4f45-9708-019B960494DF}">
-                  <a14:hiddenLine xmlns="" xmlns:a14="http://schemas.microsoft.com/office/drawing/2010/main" w="9525">
+                  <a14:hiddenLine xmlns:a14="http://schemas.microsoft.com/office/drawing/2010/main" xmlns="" w="9525">
                     <a:solidFill>
                       <a:srgbClr val="000000"/>
                     </a:solidFill>
@@ -11426,7 +11427,7 @@
               </a:ln>
               <a:extLst>
                 <a:ext uri="{91240B29-F687-4f45-9708-019B960494DF}">
-                  <a14:hiddenLine xmlns="" xmlns:a14="http://schemas.microsoft.com/office/drawing/2010/main" w="9525">
+                  <a14:hiddenLine xmlns:a14="http://schemas.microsoft.com/office/drawing/2010/main" xmlns="" w="9525">
                     <a:solidFill>
                       <a:srgbClr val="000000"/>
                     </a:solidFill>
@@ -11546,7 +11547,7 @@
               </a:ln>
               <a:extLst>
                 <a:ext uri="{91240B29-F687-4f45-9708-019B960494DF}">
-                  <a14:hiddenLine xmlns="" xmlns:a14="http://schemas.microsoft.com/office/drawing/2010/main" w="9525">
+                  <a14:hiddenLine xmlns:a14="http://schemas.microsoft.com/office/drawing/2010/main" xmlns="" w="9525">
                     <a:solidFill>
                       <a:srgbClr val="000000"/>
                     </a:solidFill>
@@ -11627,7 +11628,7 @@
               </a:ln>
               <a:extLst>
                 <a:ext uri="{91240B29-F687-4f45-9708-019B960494DF}">
-                  <a14:hiddenLine xmlns="" xmlns:a14="http://schemas.microsoft.com/office/drawing/2010/main" w="9525">
+                  <a14:hiddenLine xmlns:a14="http://schemas.microsoft.com/office/drawing/2010/main" xmlns="" w="9525">
                     <a:solidFill>
                       <a:srgbClr val="000000"/>
                     </a:solidFill>
@@ -11742,7 +11743,7 @@
               </a:ln>
               <a:extLst>
                 <a:ext uri="{91240B29-F687-4f45-9708-019B960494DF}">
-                  <a14:hiddenLine xmlns="" xmlns:a14="http://schemas.microsoft.com/office/drawing/2010/main" w="9525">
+                  <a14:hiddenLine xmlns:a14="http://schemas.microsoft.com/office/drawing/2010/main" xmlns="" w="9525">
                     <a:solidFill>
                       <a:srgbClr val="000000"/>
                     </a:solidFill>
@@ -11832,7 +11833,7 @@
               </a:ln>
               <a:extLst>
                 <a:ext uri="{91240B29-F687-4f45-9708-019B960494DF}">
-                  <a14:hiddenLine xmlns="" xmlns:a14="http://schemas.microsoft.com/office/drawing/2010/main" w="9525">
+                  <a14:hiddenLine xmlns:a14="http://schemas.microsoft.com/office/drawing/2010/main" xmlns="" w="9525">
                     <a:solidFill>
                       <a:srgbClr val="000000"/>
                     </a:solidFill>
@@ -11897,7 +11898,7 @@
               </a:ln>
               <a:extLst>
                 <a:ext uri="{91240B29-F687-4f45-9708-019B960494DF}">
-                  <a14:hiddenLine xmlns="" xmlns:a14="http://schemas.microsoft.com/office/drawing/2010/main" w="9525">
+                  <a14:hiddenLine xmlns:a14="http://schemas.microsoft.com/office/drawing/2010/main" xmlns="" w="9525">
                     <a:solidFill>
                       <a:srgbClr val="000000"/>
                     </a:solidFill>
@@ -11987,7 +11988,7 @@
               </a:ln>
               <a:extLst>
                 <a:ext uri="{91240B29-F687-4f45-9708-019B960494DF}">
-                  <a14:hiddenLine xmlns="" xmlns:a14="http://schemas.microsoft.com/office/drawing/2010/main" w="9525">
+                  <a14:hiddenLine xmlns:a14="http://schemas.microsoft.com/office/drawing/2010/main" xmlns="" w="9525">
                     <a:solidFill>
                       <a:srgbClr val="000000"/>
                     </a:solidFill>
@@ -12055,7 +12056,7 @@
               </a:ln>
               <a:extLst>
                 <a:ext uri="{91240B29-F687-4f45-9708-019B960494DF}">
-                  <a14:hiddenLine xmlns="" xmlns:a14="http://schemas.microsoft.com/office/drawing/2010/main" w="9525">
+                  <a14:hiddenLine xmlns:a14="http://schemas.microsoft.com/office/drawing/2010/main" xmlns="" w="9525">
                     <a:solidFill>
                       <a:srgbClr val="000000"/>
                     </a:solidFill>
@@ -12145,7 +12146,7 @@
               </a:ln>
               <a:extLst>
                 <a:ext uri="{91240B29-F687-4f45-9708-019B960494DF}">
-                  <a14:hiddenLine xmlns="" xmlns:a14="http://schemas.microsoft.com/office/drawing/2010/main" w="9525">
+                  <a14:hiddenLine xmlns:a14="http://schemas.microsoft.com/office/drawing/2010/main" xmlns="" w="9525">
                     <a:solidFill>
                       <a:srgbClr val="000000"/>
                     </a:solidFill>
@@ -12213,7 +12214,7 @@
               </a:ln>
               <a:extLst>
                 <a:ext uri="{91240B29-F687-4f45-9708-019B960494DF}">
-                  <a14:hiddenLine xmlns="" xmlns:a14="http://schemas.microsoft.com/office/drawing/2010/main" w="9525">
+                  <a14:hiddenLine xmlns:a14="http://schemas.microsoft.com/office/drawing/2010/main" xmlns="" w="9525">
                     <a:solidFill>
                       <a:srgbClr val="000000"/>
                     </a:solidFill>
@@ -12303,7 +12304,7 @@
               </a:ln>
               <a:extLst>
                 <a:ext uri="{91240B29-F687-4f45-9708-019B960494DF}">
-                  <a14:hiddenLine xmlns="" xmlns:a14="http://schemas.microsoft.com/office/drawing/2010/main" w="9525">
+                  <a14:hiddenLine xmlns:a14="http://schemas.microsoft.com/office/drawing/2010/main" xmlns="" w="9525">
                     <a:solidFill>
                       <a:srgbClr val="000000"/>
                     </a:solidFill>
@@ -12337,7 +12338,7 @@
               </a:ln>
               <a:extLst>
                 <a:ext uri="{91240B29-F687-4f45-9708-019B960494DF}">
-                  <a14:hiddenLine xmlns="" xmlns:a14="http://schemas.microsoft.com/office/drawing/2010/main" w="9525">
+                  <a14:hiddenLine xmlns:a14="http://schemas.microsoft.com/office/drawing/2010/main" xmlns="" w="9525">
                     <a:solidFill>
                       <a:srgbClr val="000000"/>
                     </a:solidFill>
@@ -12477,7 +12478,7 @@
           <a:p>
             <a:fld id="{EC4347D3-4C9A-C240-8F14-750059DFEEB0}" type="datetimeFigureOut">
               <a:rPr lang="en-US" smtClean="0"/>
-              <a:t>4/7/26</a:t>
+              <a:t>4/14/26</a:t>
             </a:fld>
             <a:endParaRPr lang="en-US"/>
           </a:p>
@@ -14110,6 +14111,199 @@
 </p:sld>
 </file>
 
+<file path=ppt/slides/slide16.xml><?xml version="1.0" encoding="utf-8"?>
+<p:sld xmlns:a="http://schemas.openxmlformats.org/drawingml/2006/main" xmlns:r="http://schemas.openxmlformats.org/officeDocument/2006/relationships" xmlns:p="http://schemas.openxmlformats.org/presentationml/2006/main">
+  <p:cSld>
+    <p:spTree>
+      <p:nvGrpSpPr>
+        <p:cNvPr id="1" name="">
+          <a:extLst>
+            <a:ext uri="{FF2B5EF4-FFF2-40B4-BE49-F238E27FC236}">
+              <a16:creationId xmlns:a16="http://schemas.microsoft.com/office/drawing/2014/main" id="{36CC8914-E87D-B619-9E50-9724E132373B}"/>
+            </a:ext>
+          </a:extLst>
+        </p:cNvPr>
+        <p:cNvGrpSpPr/>
+        <p:nvPr/>
+      </p:nvGrpSpPr>
+      <p:grpSpPr>
+        <a:xfrm>
+          <a:off x="0" y="0"/>
+          <a:ext cx="0" cy="0"/>
+          <a:chOff x="0" y="0"/>
+          <a:chExt cx="0" cy="0"/>
+        </a:xfrm>
+      </p:grpSpPr>
+      <p:sp>
+        <p:nvSpPr>
+          <p:cNvPr id="6146" name="Rectangle 2">
+            <a:extLst>
+              <a:ext uri="{FF2B5EF4-FFF2-40B4-BE49-F238E27FC236}">
+                <a16:creationId xmlns:a16="http://schemas.microsoft.com/office/drawing/2014/main" id="{F6C588A7-FCC2-F0FB-0F6E-0AAA55234432}"/>
+              </a:ext>
+            </a:extLst>
+          </p:cNvPr>
+          <p:cNvSpPr>
+            <a:spLocks noGrp="1" noChangeArrowheads="1"/>
+          </p:cNvSpPr>
+          <p:nvPr>
+            <p:ph type="title"/>
+            <p:custDataLst>
+              <p:tags r:id="rId1"/>
+            </p:custDataLst>
+          </p:nvPr>
+        </p:nvSpPr>
+        <p:spPr>
+          <a:xfrm>
+            <a:off x="1141413" y="284084"/>
+            <a:ext cx="9905998" cy="620791"/>
+          </a:xfrm>
+        </p:spPr>
+        <p:txBody>
+          <a:bodyPr/>
+          <a:lstStyle/>
+          <a:p>
+            <a:pPr algn="ctr"/>
+            <a:r>
+              <a:rPr lang="en-US" dirty="0"/>
+              <a:t>Lecture 16: 4/14/26</a:t>
+            </a:r>
+          </a:p>
+        </p:txBody>
+      </p:sp>
+      <p:sp>
+        <p:nvSpPr>
+          <p:cNvPr id="6147" name="Rectangle 3">
+            <a:extLst>
+              <a:ext uri="{FF2B5EF4-FFF2-40B4-BE49-F238E27FC236}">
+                <a16:creationId xmlns:a16="http://schemas.microsoft.com/office/drawing/2014/main" id="{7D6EC332-C63E-4C9F-A22A-B8E0326C0748}"/>
+              </a:ext>
+            </a:extLst>
+          </p:cNvPr>
+          <p:cNvSpPr>
+            <a:spLocks noGrp="1" noChangeArrowheads="1"/>
+          </p:cNvSpPr>
+          <p:nvPr>
+            <p:ph idx="1"/>
+            <p:custDataLst>
+              <p:tags r:id="rId2"/>
+            </p:custDataLst>
+          </p:nvPr>
+        </p:nvSpPr>
+        <p:spPr>
+          <a:xfrm>
+            <a:off x="2229422" y="1133378"/>
+            <a:ext cx="7729979" cy="5149850"/>
+          </a:xfrm>
+        </p:spPr>
+        <p:txBody>
+          <a:bodyPr>
+            <a:normAutofit fontScale="85000" lnSpcReduction="20000"/>
+          </a:bodyPr>
+          <a:lstStyle/>
+          <a:p>
+            <a:r>
+              <a:rPr lang="en-US" dirty="0"/>
+              <a:t>Attendance checks are back in full force today…</a:t>
+            </a:r>
+          </a:p>
+          <a:p>
+            <a:r>
+              <a:rPr lang="en-US" dirty="0"/>
+              <a:t>Today is the last traditional lecture</a:t>
+            </a:r>
+          </a:p>
+          <a:p>
+            <a:r>
+              <a:rPr lang="en-US" dirty="0"/>
+              <a:t>Approximations homework is out</a:t>
+            </a:r>
+          </a:p>
+          <a:p>
+            <a:pPr lvl="1"/>
+            <a:r>
+              <a:rPr lang="en-US" dirty="0"/>
+              <a:t>How is it going?</a:t>
+            </a:r>
+          </a:p>
+          <a:p>
+            <a:pPr lvl="1"/>
+            <a:r>
+              <a:rPr lang="en-US" dirty="0"/>
+              <a:t>It is due tonight, but extension possible if needed.</a:t>
+            </a:r>
+          </a:p>
+          <a:p>
+            <a:r>
+              <a:rPr lang="en-US" dirty="0"/>
+              <a:t>Project </a:t>
+            </a:r>
+          </a:p>
+          <a:p>
+            <a:pPr lvl="1"/>
+            <a:r>
+              <a:rPr lang="en-US" dirty="0"/>
+              <a:t>Implementation has been submitted</a:t>
+            </a:r>
+          </a:p>
+          <a:p>
+            <a:pPr lvl="1"/>
+            <a:r>
+              <a:rPr lang="en-US" dirty="0"/>
+              <a:t>The rest of the project is due on the day of your presentation.</a:t>
+            </a:r>
+          </a:p>
+          <a:p>
+            <a:r>
+              <a:rPr lang="en-US" dirty="0"/>
+              <a:t>Coming up</a:t>
+            </a:r>
+          </a:p>
+          <a:p>
+            <a:pPr lvl="1"/>
+            <a:r>
+              <a:rPr lang="en-US" dirty="0"/>
+              <a:t>Approximations assignment (last week, due this week)</a:t>
+            </a:r>
+          </a:p>
+          <a:p>
+            <a:pPr lvl="1"/>
+            <a:r>
+              <a:rPr lang="en-US" dirty="0"/>
+              <a:t>Quiz (THIS Thursday, similar structure to last one)</a:t>
+            </a:r>
+          </a:p>
+          <a:p>
+            <a:pPr lvl="1"/>
+            <a:r>
+              <a:rPr lang="en-US" dirty="0"/>
+              <a:t>Project presentations (Start next week)</a:t>
+            </a:r>
+          </a:p>
+          <a:p>
+            <a:r>
+              <a:rPr lang="en-US" dirty="0"/>
+              <a:t>Today we finish the final topic, Van-Emde Boas Trees</a:t>
+            </a:r>
+          </a:p>
+          <a:p>
+            <a:endParaRPr lang="en-US" dirty="0"/>
+          </a:p>
+        </p:txBody>
+      </p:sp>
+    </p:spTree>
+    <p:extLst>
+      <p:ext uri="{BB962C8B-B14F-4D97-AF65-F5344CB8AC3E}">
+        <p14:creationId xmlns:p14="http://schemas.microsoft.com/office/powerpoint/2010/main" val="3077763925"/>
+      </p:ext>
+    </p:extLst>
+  </p:cSld>
+  <p:clrMapOvr>
+    <a:masterClrMapping/>
+  </p:clrMapOvr>
+</p:sld>
+</file>
+
 <file path=ppt/slides/slide2.xml><?xml version="1.0" encoding="utf-8"?>
 <p:sld xmlns:a="http://schemas.openxmlformats.org/drawingml/2006/main" xmlns:r="http://schemas.openxmlformats.org/officeDocument/2006/relationships" xmlns:p="http://schemas.openxmlformats.org/presentationml/2006/main">
   <p:cSld>
@@ -15582,7 +15776,19 @@
 </p:tagLst>
 </file>
 
+<file path=ppt/tags/tag29.xml><?xml version="1.0" encoding="utf-8"?>
+<p:tagLst xmlns:a="http://schemas.openxmlformats.org/drawingml/2006/main" xmlns:r="http://schemas.openxmlformats.org/officeDocument/2006/relationships" xmlns:p="http://schemas.openxmlformats.org/presentationml/2006/main">
+  <p:tag name="_INSTRUCTOR VIEW19C14C36-AC8E-43BC-9DB6-C2AAF774C7DC|PANE__TAG" val="_"/>
+</p:tagLst>
+</file>
+
 <file path=ppt/tags/tag3.xml><?xml version="1.0" encoding="utf-8"?>
+<p:tagLst xmlns:a="http://schemas.openxmlformats.org/drawingml/2006/main" xmlns:r="http://schemas.openxmlformats.org/officeDocument/2006/relationships" xmlns:p="http://schemas.openxmlformats.org/presentationml/2006/main">
+  <p:tag name="_INSTRUCTOR VIEW19C14C36-AC8E-43BC-9DB6-C2AAF774C7DC|PANE__TAG" val="_"/>
+</p:tagLst>
+</file>
+
+<file path=ppt/tags/tag30.xml><?xml version="1.0" encoding="utf-8"?>
 <p:tagLst xmlns:a="http://schemas.openxmlformats.org/drawingml/2006/main" xmlns:r="http://schemas.openxmlformats.org/officeDocument/2006/relationships" xmlns:p="http://schemas.openxmlformats.org/presentationml/2006/main">
   <p:tag name="_INSTRUCTOR VIEW19C14C36-AC8E-43BC-9DB6-C2AAF774C7DC|PANE__TAG" val="_"/>
 </p:tagLst>
